--- a/docs/pptx/whole/jx-linsubhr-ratio-hosp10.pptx
+++ b/docs/pptx/whole/jx-linsubhr-ratio-hosp10.pptx
@@ -2271,7 +2271,7 @@
           </p:nvSpPr>
           <p:spPr>
             <a:xfrm>
-              <a:off x="817517" y="5114368"/>
+              <a:off x="817517" y="5142518"/>
               <a:ext cx="7799693" cy="0"/>
             </a:xfrm>
             <a:custGeom>
@@ -2314,7 +2314,7 @@
           </p:nvSpPr>
           <p:spPr>
             <a:xfrm>
-              <a:off x="817517" y="4244691"/>
+              <a:off x="817517" y="4313054"/>
               <a:ext cx="7799693" cy="0"/>
             </a:xfrm>
             <a:custGeom>
@@ -2357,7 +2357,7 @@
           </p:nvSpPr>
           <p:spPr>
             <a:xfrm>
-              <a:off x="817517" y="3375014"/>
+              <a:off x="817517" y="3483591"/>
               <a:ext cx="7799693" cy="0"/>
             </a:xfrm>
             <a:custGeom>
@@ -2400,7 +2400,7 @@
           </p:nvSpPr>
           <p:spPr>
             <a:xfrm>
-              <a:off x="817517" y="2505337"/>
+              <a:off x="817517" y="2654127"/>
               <a:ext cx="7799693" cy="0"/>
             </a:xfrm>
             <a:custGeom>
@@ -2443,15 +2443,15 @@
           </p:nvSpPr>
           <p:spPr>
             <a:xfrm>
-              <a:off x="1615213" y="1896563"/>
-              <a:ext cx="0" cy="3826579"/>
+              <a:off x="1615213" y="2073503"/>
+              <a:ext cx="0" cy="3649639"/>
             </a:xfrm>
             <a:custGeom>
               <a:avLst/>
               <a:pathLst>
-                <a:path w="0" h="3826579">
+                <a:path w="0" h="3649639">
                   <a:moveTo>
-                    <a:pt x="0" y="3826579"/>
+                    <a:pt x="0" y="3649639"/>
                   </a:moveTo>
                   <a:lnTo>
                     <a:pt x="0" y="0"/>
@@ -2486,15 +2486,15 @@
           </p:nvSpPr>
           <p:spPr>
             <a:xfrm>
-              <a:off x="3387871" y="1896563"/>
-              <a:ext cx="0" cy="3826579"/>
+              <a:off x="3387871" y="2073503"/>
+              <a:ext cx="0" cy="3649639"/>
             </a:xfrm>
             <a:custGeom>
               <a:avLst/>
               <a:pathLst>
-                <a:path w="0" h="3826579">
+                <a:path w="0" h="3649639">
                   <a:moveTo>
-                    <a:pt x="0" y="3826579"/>
+                    <a:pt x="0" y="3649639"/>
                   </a:moveTo>
                   <a:lnTo>
                     <a:pt x="0" y="0"/>
@@ -2529,15 +2529,15 @@
           </p:nvSpPr>
           <p:spPr>
             <a:xfrm>
-              <a:off x="5160528" y="1896563"/>
-              <a:ext cx="0" cy="3826579"/>
+              <a:off x="5160528" y="2073503"/>
+              <a:ext cx="0" cy="3649639"/>
             </a:xfrm>
             <a:custGeom>
               <a:avLst/>
               <a:pathLst>
-                <a:path w="0" h="3826579">
+                <a:path w="0" h="3649639">
                   <a:moveTo>
-                    <a:pt x="0" y="3826579"/>
+                    <a:pt x="0" y="3649639"/>
                   </a:moveTo>
                   <a:lnTo>
                     <a:pt x="0" y="0"/>
@@ -2572,15 +2572,15 @@
           </p:nvSpPr>
           <p:spPr>
             <a:xfrm>
-              <a:off x="6933186" y="1896563"/>
-              <a:ext cx="0" cy="3826579"/>
+              <a:off x="6933186" y="2073503"/>
+              <a:ext cx="0" cy="3649639"/>
             </a:xfrm>
             <a:custGeom>
               <a:avLst/>
               <a:pathLst>
-                <a:path w="0" h="3826579">
+                <a:path w="0" h="3649639">
                   <a:moveTo>
-                    <a:pt x="0" y="3826579"/>
+                    <a:pt x="0" y="3649639"/>
                   </a:moveTo>
                   <a:lnTo>
                     <a:pt x="0" y="0"/>
@@ -2615,7 +2615,7 @@
           </p:nvSpPr>
           <p:spPr>
             <a:xfrm>
-              <a:off x="817517" y="5549207"/>
+              <a:off x="817517" y="5557249"/>
               <a:ext cx="7799693" cy="0"/>
             </a:xfrm>
             <a:custGeom>
@@ -2658,7 +2658,7 @@
           </p:nvSpPr>
           <p:spPr>
             <a:xfrm>
-              <a:off x="817517" y="4679530"/>
+              <a:off x="817517" y="4727786"/>
               <a:ext cx="7799693" cy="0"/>
             </a:xfrm>
             <a:custGeom>
@@ -2701,7 +2701,7 @@
           </p:nvSpPr>
           <p:spPr>
             <a:xfrm>
-              <a:off x="817517" y="3809853"/>
+              <a:off x="817517" y="3898322"/>
               <a:ext cx="7799693" cy="0"/>
             </a:xfrm>
             <a:custGeom>
@@ -2744,7 +2744,7 @@
           </p:nvSpPr>
           <p:spPr>
             <a:xfrm>
-              <a:off x="817517" y="2940175"/>
+              <a:off x="817517" y="3068859"/>
               <a:ext cx="7799693" cy="0"/>
             </a:xfrm>
             <a:custGeom>
@@ -2787,7 +2787,7 @@
           </p:nvSpPr>
           <p:spPr>
             <a:xfrm>
-              <a:off x="817517" y="2070498"/>
+              <a:off x="817517" y="2239395"/>
               <a:ext cx="7799693" cy="0"/>
             </a:xfrm>
             <a:custGeom>
@@ -2830,15 +2830,15 @@
           </p:nvSpPr>
           <p:spPr>
             <a:xfrm>
-              <a:off x="2501542" y="1896563"/>
-              <a:ext cx="0" cy="3826579"/>
+              <a:off x="2501542" y="2073503"/>
+              <a:ext cx="0" cy="3649639"/>
             </a:xfrm>
             <a:custGeom>
               <a:avLst/>
               <a:pathLst>
-                <a:path w="0" h="3826579">
+                <a:path w="0" h="3649639">
                   <a:moveTo>
-                    <a:pt x="0" y="3826579"/>
+                    <a:pt x="0" y="3649639"/>
                   </a:moveTo>
                   <a:lnTo>
                     <a:pt x="0" y="0"/>
@@ -2873,15 +2873,15 @@
           </p:nvSpPr>
           <p:spPr>
             <a:xfrm>
-              <a:off x="4274200" y="1896563"/>
-              <a:ext cx="0" cy="3826579"/>
+              <a:off x="4274200" y="2073503"/>
+              <a:ext cx="0" cy="3649639"/>
             </a:xfrm>
             <a:custGeom>
               <a:avLst/>
               <a:pathLst>
-                <a:path w="0" h="3826579">
+                <a:path w="0" h="3649639">
                   <a:moveTo>
-                    <a:pt x="0" y="3826579"/>
+                    <a:pt x="0" y="3649639"/>
                   </a:moveTo>
                   <a:lnTo>
                     <a:pt x="0" y="0"/>
@@ -2916,15 +2916,15 @@
           </p:nvSpPr>
           <p:spPr>
             <a:xfrm>
-              <a:off x="6046857" y="1896563"/>
-              <a:ext cx="0" cy="3826579"/>
+              <a:off x="6046857" y="2073503"/>
+              <a:ext cx="0" cy="3649639"/>
             </a:xfrm>
             <a:custGeom>
               <a:avLst/>
               <a:pathLst>
-                <a:path w="0" h="3826579">
+                <a:path w="0" h="3649639">
                   <a:moveTo>
-                    <a:pt x="0" y="3826579"/>
+                    <a:pt x="0" y="3649639"/>
                   </a:moveTo>
                   <a:lnTo>
                     <a:pt x="0" y="0"/>
@@ -2959,15 +2959,15 @@
           </p:nvSpPr>
           <p:spPr>
             <a:xfrm>
-              <a:off x="7819515" y="1896563"/>
-              <a:ext cx="0" cy="3826579"/>
+              <a:off x="7819515" y="2073503"/>
+              <a:ext cx="0" cy="3649639"/>
             </a:xfrm>
             <a:custGeom>
               <a:avLst/>
               <a:pathLst>
-                <a:path w="0" h="3826579">
+                <a:path w="0" h="3649639">
                   <a:moveTo>
-                    <a:pt x="0" y="3826579"/>
+                    <a:pt x="0" y="3649639"/>
                   </a:moveTo>
                   <a:lnTo>
                     <a:pt x="0" y="0"/>
@@ -3002,612 +3002,612 @@
           </p:nvSpPr>
           <p:spPr>
             <a:xfrm>
-              <a:off x="817517" y="3078762"/>
-              <a:ext cx="7235830" cy="2134865"/>
+              <a:off x="817517" y="3201037"/>
+              <a:ext cx="7235830" cy="2036150"/>
             </a:xfrm>
             <a:custGeom>
               <a:avLst/>
               <a:pathLst>
-                <a:path w="7235830" h="2134865">
+                <a:path w="7235830" h="2036150">
                   <a:moveTo>
-                    <a:pt x="0" y="1293395"/>
+                    <a:pt x="0" y="1233589"/>
                   </a:moveTo>
                   <a:lnTo>
-                    <a:pt x="7347" y="1294155"/>
-                  </a:lnTo>
-                  <a:lnTo>
-                    <a:pt x="81107" y="1301738"/>
-                  </a:lnTo>
-                  <a:lnTo>
-                    <a:pt x="154867" y="1309272"/>
-                  </a:lnTo>
-                  <a:lnTo>
-                    <a:pt x="228627" y="1316757"/>
-                  </a:lnTo>
-                  <a:lnTo>
-                    <a:pt x="302387" y="1324195"/>
-                  </a:lnTo>
-                  <a:lnTo>
-                    <a:pt x="376147" y="1331584"/>
-                  </a:lnTo>
-                  <a:lnTo>
-                    <a:pt x="449907" y="1338925"/>
-                  </a:lnTo>
-                  <a:lnTo>
-                    <a:pt x="523667" y="1346220"/>
-                  </a:lnTo>
-                  <a:lnTo>
-                    <a:pt x="597427" y="1353467"/>
-                  </a:lnTo>
-                  <a:lnTo>
-                    <a:pt x="671187" y="1360668"/>
-                  </a:lnTo>
-                  <a:lnTo>
-                    <a:pt x="744947" y="1367822"/>
-                  </a:lnTo>
-                  <a:lnTo>
-                    <a:pt x="818707" y="1374930"/>
-                  </a:lnTo>
-                  <a:lnTo>
-                    <a:pt x="892467" y="1381992"/>
-                  </a:lnTo>
-                  <a:lnTo>
-                    <a:pt x="966227" y="1389009"/>
-                  </a:lnTo>
-                  <a:lnTo>
-                    <a:pt x="1039987" y="1395980"/>
-                  </a:lnTo>
-                  <a:lnTo>
-                    <a:pt x="1113747" y="1402907"/>
-                  </a:lnTo>
-                  <a:lnTo>
-                    <a:pt x="1187508" y="1409788"/>
-                  </a:lnTo>
-                  <a:lnTo>
-                    <a:pt x="1261268" y="1416626"/>
-                  </a:lnTo>
-                  <a:lnTo>
-                    <a:pt x="1335028" y="1423419"/>
-                  </a:lnTo>
-                  <a:lnTo>
-                    <a:pt x="1408788" y="1430169"/>
-                  </a:lnTo>
-                  <a:lnTo>
-                    <a:pt x="1482548" y="1436875"/>
-                  </a:lnTo>
-                  <a:lnTo>
-                    <a:pt x="1556308" y="1443538"/>
-                  </a:lnTo>
-                  <a:lnTo>
-                    <a:pt x="1630068" y="1450158"/>
-                  </a:lnTo>
-                  <a:lnTo>
-                    <a:pt x="1703828" y="1456735"/>
-                  </a:lnTo>
-                  <a:lnTo>
-                    <a:pt x="1777588" y="1463270"/>
-                  </a:lnTo>
-                  <a:lnTo>
-                    <a:pt x="1851348" y="1469762"/>
-                  </a:lnTo>
-                  <a:lnTo>
-                    <a:pt x="1925108" y="1476213"/>
-                  </a:lnTo>
-                  <a:lnTo>
-                    <a:pt x="1998868" y="1482623"/>
-                  </a:lnTo>
-                  <a:lnTo>
-                    <a:pt x="2072628" y="1488991"/>
-                  </a:lnTo>
-                  <a:lnTo>
-                    <a:pt x="2146388" y="1495317"/>
-                  </a:lnTo>
-                  <a:lnTo>
-                    <a:pt x="2220148" y="1501604"/>
-                  </a:lnTo>
-                  <a:lnTo>
-                    <a:pt x="2293908" y="1507849"/>
-                  </a:lnTo>
-                  <a:lnTo>
-                    <a:pt x="2367668" y="1514055"/>
-                  </a:lnTo>
-                  <a:lnTo>
-                    <a:pt x="2441428" y="1520220"/>
-                  </a:lnTo>
-                  <a:lnTo>
-                    <a:pt x="2515188" y="1526345"/>
-                  </a:lnTo>
-                  <a:lnTo>
-                    <a:pt x="2588948" y="1532432"/>
-                  </a:lnTo>
-                  <a:lnTo>
-                    <a:pt x="2662708" y="1538478"/>
-                  </a:lnTo>
-                  <a:lnTo>
-                    <a:pt x="2736468" y="1544486"/>
-                  </a:lnTo>
-                  <a:lnTo>
-                    <a:pt x="2810228" y="1550455"/>
-                  </a:lnTo>
-                  <a:lnTo>
-                    <a:pt x="2883988" y="1556386"/>
-                  </a:lnTo>
-                  <a:lnTo>
-                    <a:pt x="2957748" y="1562279"/>
-                  </a:lnTo>
-                  <a:lnTo>
-                    <a:pt x="3031508" y="1568133"/>
-                  </a:lnTo>
-                  <a:lnTo>
-                    <a:pt x="3105268" y="1573950"/>
-                  </a:lnTo>
-                  <a:lnTo>
-                    <a:pt x="3179028" y="1579729"/>
-                  </a:lnTo>
-                  <a:lnTo>
-                    <a:pt x="3252788" y="1585471"/>
-                  </a:lnTo>
-                  <a:lnTo>
-                    <a:pt x="3326548" y="1591176"/>
-                  </a:lnTo>
-                  <a:lnTo>
-                    <a:pt x="3400308" y="1596844"/>
-                  </a:lnTo>
-                  <a:lnTo>
-                    <a:pt x="3474068" y="1595369"/>
-                  </a:lnTo>
-                  <a:lnTo>
-                    <a:pt x="3547828" y="1577379"/>
-                  </a:lnTo>
-                  <a:lnTo>
-                    <a:pt x="3621588" y="1559019"/>
-                  </a:lnTo>
-                  <a:lnTo>
-                    <a:pt x="3695348" y="1540281"/>
-                  </a:lnTo>
-                  <a:lnTo>
-                    <a:pt x="3769108" y="1521159"/>
-                  </a:lnTo>
-                  <a:lnTo>
-                    <a:pt x="3842868" y="1501643"/>
-                  </a:lnTo>
-                  <a:lnTo>
-                    <a:pt x="3916628" y="1481726"/>
-                  </a:lnTo>
-                  <a:lnTo>
-                    <a:pt x="3990388" y="1461400"/>
-                  </a:lnTo>
-                  <a:lnTo>
-                    <a:pt x="4064149" y="1440655"/>
-                  </a:lnTo>
-                  <a:lnTo>
-                    <a:pt x="4137909" y="1419485"/>
-                  </a:lnTo>
-                  <a:lnTo>
-                    <a:pt x="4211669" y="1397879"/>
-                  </a:lnTo>
-                  <a:lnTo>
-                    <a:pt x="4285429" y="1375828"/>
-                  </a:lnTo>
-                  <a:lnTo>
-                    <a:pt x="4359189" y="1353325"/>
-                  </a:lnTo>
-                  <a:lnTo>
-                    <a:pt x="4432949" y="1330359"/>
-                  </a:lnTo>
-                  <a:lnTo>
-                    <a:pt x="4506709" y="1306921"/>
-                  </a:lnTo>
-                  <a:lnTo>
-                    <a:pt x="4580469" y="1283000"/>
-                  </a:lnTo>
-                  <a:lnTo>
-                    <a:pt x="4654229" y="1258589"/>
-                  </a:lnTo>
-                  <a:lnTo>
-                    <a:pt x="4727989" y="1233675"/>
-                  </a:lnTo>
-                  <a:lnTo>
-                    <a:pt x="4801749" y="1208249"/>
-                  </a:lnTo>
-                  <a:lnTo>
-                    <a:pt x="4875509" y="1182300"/>
-                  </a:lnTo>
-                  <a:lnTo>
-                    <a:pt x="4949269" y="1155818"/>
-                  </a:lnTo>
-                  <a:lnTo>
-                    <a:pt x="5023029" y="1128792"/>
-                  </a:lnTo>
-                  <a:lnTo>
-                    <a:pt x="5096789" y="1101210"/>
-                  </a:lnTo>
-                  <a:lnTo>
-                    <a:pt x="5170549" y="1073060"/>
-                  </a:lnTo>
-                  <a:lnTo>
-                    <a:pt x="5244309" y="1044332"/>
-                  </a:lnTo>
-                  <a:lnTo>
-                    <a:pt x="5318069" y="1015014"/>
-                  </a:lnTo>
-                  <a:lnTo>
-                    <a:pt x="5391829" y="985093"/>
-                  </a:lnTo>
-                  <a:lnTo>
-                    <a:pt x="5465589" y="954556"/>
-                  </a:lnTo>
-                  <a:lnTo>
-                    <a:pt x="5539349" y="923392"/>
-                  </a:lnTo>
-                  <a:lnTo>
-                    <a:pt x="5613109" y="891587"/>
-                  </a:lnTo>
-                  <a:lnTo>
-                    <a:pt x="5686869" y="859129"/>
-                  </a:lnTo>
-                  <a:lnTo>
-                    <a:pt x="5760629" y="826003"/>
-                  </a:lnTo>
-                  <a:lnTo>
-                    <a:pt x="5834389" y="792196"/>
-                  </a:lnTo>
-                  <a:lnTo>
-                    <a:pt x="5908149" y="757694"/>
-                  </a:lnTo>
-                  <a:lnTo>
-                    <a:pt x="5981909" y="722482"/>
-                  </a:lnTo>
-                  <a:lnTo>
-                    <a:pt x="6055669" y="686547"/>
-                  </a:lnTo>
-                  <a:lnTo>
-                    <a:pt x="6129429" y="649873"/>
-                  </a:lnTo>
-                  <a:lnTo>
-                    <a:pt x="6203189" y="612445"/>
-                  </a:lnTo>
-                  <a:lnTo>
-                    <a:pt x="6276949" y="574248"/>
-                  </a:lnTo>
-                  <a:lnTo>
-                    <a:pt x="6350709" y="535265"/>
-                  </a:lnTo>
-                  <a:lnTo>
-                    <a:pt x="6424469" y="495481"/>
-                  </a:lnTo>
-                  <a:lnTo>
-                    <a:pt x="6498229" y="454879"/>
-                  </a:lnTo>
-                  <a:lnTo>
-                    <a:pt x="6571989" y="413443"/>
-                  </a:lnTo>
-                  <a:lnTo>
-                    <a:pt x="6645749" y="371154"/>
-                  </a:lnTo>
-                  <a:lnTo>
-                    <a:pt x="6719509" y="327996"/>
-                  </a:lnTo>
-                  <a:lnTo>
-                    <a:pt x="6793269" y="283951"/>
-                  </a:lnTo>
-                  <a:lnTo>
-                    <a:pt x="6867029" y="239000"/>
-                  </a:lnTo>
-                  <a:lnTo>
-                    <a:pt x="6940789" y="193126"/>
-                  </a:lnTo>
-                  <a:lnTo>
-                    <a:pt x="7014550" y="146308"/>
-                  </a:lnTo>
-                  <a:lnTo>
-                    <a:pt x="7088310" y="98527"/>
-                  </a:lnTo>
-                  <a:lnTo>
-                    <a:pt x="7162070" y="49765"/>
+                    <a:pt x="7347" y="1234314"/>
+                  </a:lnTo>
+                  <a:lnTo>
+                    <a:pt x="81107" y="1241546"/>
+                  </a:lnTo>
+                  <a:lnTo>
+                    <a:pt x="154867" y="1248732"/>
+                  </a:lnTo>
+                  <a:lnTo>
+                    <a:pt x="228627" y="1255871"/>
+                  </a:lnTo>
+                  <a:lnTo>
+                    <a:pt x="302387" y="1262964"/>
+                  </a:lnTo>
+                  <a:lnTo>
+                    <a:pt x="376147" y="1270012"/>
+                  </a:lnTo>
+                  <a:lnTo>
+                    <a:pt x="449907" y="1277014"/>
+                  </a:lnTo>
+                  <a:lnTo>
+                    <a:pt x="523667" y="1283971"/>
+                  </a:lnTo>
+                  <a:lnTo>
+                    <a:pt x="597427" y="1290883"/>
+                  </a:lnTo>
+                  <a:lnTo>
+                    <a:pt x="671187" y="1297751"/>
+                  </a:lnTo>
+                  <a:lnTo>
+                    <a:pt x="744947" y="1304574"/>
+                  </a:lnTo>
+                  <a:lnTo>
+                    <a:pt x="818707" y="1311353"/>
+                  </a:lnTo>
+                  <a:lnTo>
+                    <a:pt x="892467" y="1318089"/>
+                  </a:lnTo>
+                  <a:lnTo>
+                    <a:pt x="966227" y="1324781"/>
+                  </a:lnTo>
+                  <a:lnTo>
+                    <a:pt x="1039987" y="1331430"/>
+                  </a:lnTo>
+                  <a:lnTo>
+                    <a:pt x="1113747" y="1338037"/>
+                  </a:lnTo>
+                  <a:lnTo>
+                    <a:pt x="1187508" y="1344600"/>
+                  </a:lnTo>
+                  <a:lnTo>
+                    <a:pt x="1261268" y="1351122"/>
+                  </a:lnTo>
+                  <a:lnTo>
+                    <a:pt x="1335028" y="1357601"/>
+                  </a:lnTo>
+                  <a:lnTo>
+                    <a:pt x="1408788" y="1364038"/>
+                  </a:lnTo>
+                  <a:lnTo>
+                    <a:pt x="1482548" y="1370434"/>
+                  </a:lnTo>
+                  <a:lnTo>
+                    <a:pt x="1556308" y="1376789"/>
+                  </a:lnTo>
+                  <a:lnTo>
+                    <a:pt x="1630068" y="1383103"/>
+                  </a:lnTo>
+                  <a:lnTo>
+                    <a:pt x="1703828" y="1389376"/>
+                  </a:lnTo>
+                  <a:lnTo>
+                    <a:pt x="1777588" y="1395609"/>
+                  </a:lnTo>
+                  <a:lnTo>
+                    <a:pt x="1851348" y="1401801"/>
+                  </a:lnTo>
+                  <a:lnTo>
+                    <a:pt x="1925108" y="1407954"/>
+                  </a:lnTo>
+                  <a:lnTo>
+                    <a:pt x="1998868" y="1414067"/>
+                  </a:lnTo>
+                  <a:lnTo>
+                    <a:pt x="2072628" y="1420140"/>
+                  </a:lnTo>
+                  <a:lnTo>
+                    <a:pt x="2146388" y="1426175"/>
+                  </a:lnTo>
+                  <a:lnTo>
+                    <a:pt x="2220148" y="1432170"/>
+                  </a:lnTo>
+                  <a:lnTo>
+                    <a:pt x="2293908" y="1438127"/>
+                  </a:lnTo>
+                  <a:lnTo>
+                    <a:pt x="2367668" y="1444045"/>
+                  </a:lnTo>
+                  <a:lnTo>
+                    <a:pt x="2441428" y="1449925"/>
+                  </a:lnTo>
+                  <a:lnTo>
+                    <a:pt x="2515188" y="1455768"/>
+                  </a:lnTo>
+                  <a:lnTo>
+                    <a:pt x="2588948" y="1461572"/>
+                  </a:lnTo>
+                  <a:lnTo>
+                    <a:pt x="2662708" y="1467340"/>
+                  </a:lnTo>
+                  <a:lnTo>
+                    <a:pt x="2736468" y="1473070"/>
+                  </a:lnTo>
+                  <a:lnTo>
+                    <a:pt x="2810228" y="1478763"/>
+                  </a:lnTo>
+                  <a:lnTo>
+                    <a:pt x="2883988" y="1484419"/>
+                  </a:lnTo>
+                  <a:lnTo>
+                    <a:pt x="2957748" y="1490039"/>
+                  </a:lnTo>
+                  <a:lnTo>
+                    <a:pt x="3031508" y="1495623"/>
+                  </a:lnTo>
+                  <a:lnTo>
+                    <a:pt x="3105268" y="1501171"/>
+                  </a:lnTo>
+                  <a:lnTo>
+                    <a:pt x="3179028" y="1506683"/>
+                  </a:lnTo>
+                  <a:lnTo>
+                    <a:pt x="3252788" y="1512159"/>
+                  </a:lnTo>
+                  <a:lnTo>
+                    <a:pt x="3326548" y="1517600"/>
+                  </a:lnTo>
+                  <a:lnTo>
+                    <a:pt x="3400308" y="1523006"/>
+                  </a:lnTo>
+                  <a:lnTo>
+                    <a:pt x="3474068" y="1521599"/>
+                  </a:lnTo>
+                  <a:lnTo>
+                    <a:pt x="3547828" y="1504441"/>
+                  </a:lnTo>
+                  <a:lnTo>
+                    <a:pt x="3621588" y="1486930"/>
+                  </a:lnTo>
+                  <a:lnTo>
+                    <a:pt x="3695348" y="1469059"/>
+                  </a:lnTo>
+                  <a:lnTo>
+                    <a:pt x="3769108" y="1450821"/>
+                  </a:lnTo>
+                  <a:lnTo>
+                    <a:pt x="3842868" y="1432208"/>
+                  </a:lnTo>
+                  <a:lnTo>
+                    <a:pt x="3916628" y="1413212"/>
+                  </a:lnTo>
+                  <a:lnTo>
+                    <a:pt x="3990388" y="1393825"/>
+                  </a:lnTo>
+                  <a:lnTo>
+                    <a:pt x="4064149" y="1374040"/>
+                  </a:lnTo>
+                  <a:lnTo>
+                    <a:pt x="4137909" y="1353848"/>
+                  </a:lnTo>
+                  <a:lnTo>
+                    <a:pt x="4211669" y="1333241"/>
+                  </a:lnTo>
+                  <a:lnTo>
+                    <a:pt x="4285429" y="1312211"/>
+                  </a:lnTo>
+                  <a:lnTo>
+                    <a:pt x="4359189" y="1290748"/>
+                  </a:lnTo>
+                  <a:lnTo>
+                    <a:pt x="4432949" y="1268844"/>
+                  </a:lnTo>
+                  <a:lnTo>
+                    <a:pt x="4506709" y="1246489"/>
+                  </a:lnTo>
+                  <a:lnTo>
+                    <a:pt x="4580469" y="1223675"/>
+                  </a:lnTo>
+                  <a:lnTo>
+                    <a:pt x="4654229" y="1200392"/>
+                  </a:lnTo>
+                  <a:lnTo>
+                    <a:pt x="4727989" y="1176630"/>
+                  </a:lnTo>
+                  <a:lnTo>
+                    <a:pt x="4801749" y="1152380"/>
+                  </a:lnTo>
+                  <a:lnTo>
+                    <a:pt x="4875509" y="1127631"/>
+                  </a:lnTo>
+                  <a:lnTo>
+                    <a:pt x="4949269" y="1102374"/>
+                  </a:lnTo>
+                  <a:lnTo>
+                    <a:pt x="5023029" y="1076597"/>
+                  </a:lnTo>
+                  <a:lnTo>
+                    <a:pt x="5096789" y="1050290"/>
+                  </a:lnTo>
+                  <a:lnTo>
+                    <a:pt x="5170549" y="1023442"/>
+                  </a:lnTo>
+                  <a:lnTo>
+                    <a:pt x="5244309" y="996043"/>
+                  </a:lnTo>
+                  <a:lnTo>
+                    <a:pt x="5318069" y="968080"/>
+                  </a:lnTo>
+                  <a:lnTo>
+                    <a:pt x="5391829" y="939542"/>
+                  </a:lnTo>
+                  <a:lnTo>
+                    <a:pt x="5465589" y="910418"/>
+                  </a:lnTo>
+                  <a:lnTo>
+                    <a:pt x="5539349" y="880695"/>
+                  </a:lnTo>
+                  <a:lnTo>
+                    <a:pt x="5613109" y="850361"/>
+                  </a:lnTo>
+                  <a:lnTo>
+                    <a:pt x="5686869" y="819403"/>
+                  </a:lnTo>
+                  <a:lnTo>
+                    <a:pt x="5760629" y="787809"/>
+                  </a:lnTo>
+                  <a:lnTo>
+                    <a:pt x="5834389" y="755565"/>
+                  </a:lnTo>
+                  <a:lnTo>
+                    <a:pt x="5908149" y="722658"/>
+                  </a:lnTo>
+                  <a:lnTo>
+                    <a:pt x="5981909" y="689075"/>
+                  </a:lnTo>
+                  <a:lnTo>
+                    <a:pt x="6055669" y="654802"/>
+                  </a:lnTo>
+                  <a:lnTo>
+                    <a:pt x="6129429" y="619823"/>
+                  </a:lnTo>
+                  <a:lnTo>
+                    <a:pt x="6203189" y="584126"/>
+                  </a:lnTo>
+                  <a:lnTo>
+                    <a:pt x="6276949" y="547695"/>
+                  </a:lnTo>
+                  <a:lnTo>
+                    <a:pt x="6350709" y="510515"/>
+                  </a:lnTo>
+                  <a:lnTo>
+                    <a:pt x="6424469" y="472570"/>
+                  </a:lnTo>
+                  <a:lnTo>
+                    <a:pt x="6498229" y="433846"/>
+                  </a:lnTo>
+                  <a:lnTo>
+                    <a:pt x="6571989" y="394325"/>
+                  </a:lnTo>
+                  <a:lnTo>
+                    <a:pt x="6645749" y="353992"/>
+                  </a:lnTo>
+                  <a:lnTo>
+                    <a:pt x="6719509" y="312830"/>
+                  </a:lnTo>
+                  <a:lnTo>
+                    <a:pt x="6793269" y="270821"/>
+                  </a:lnTo>
+                  <a:lnTo>
+                    <a:pt x="6867029" y="227949"/>
+                  </a:lnTo>
+                  <a:lnTo>
+                    <a:pt x="6940789" y="184196"/>
+                  </a:lnTo>
+                  <a:lnTo>
+                    <a:pt x="7014550" y="139542"/>
+                  </a:lnTo>
+                  <a:lnTo>
+                    <a:pt x="7088310" y="93971"/>
+                  </a:lnTo>
+                  <a:lnTo>
+                    <a:pt x="7162070" y="47464"/>
                   </a:lnTo>
                   <a:lnTo>
                     <a:pt x="7235830" y="0"/>
                   </a:lnTo>
                   <a:lnTo>
-                    <a:pt x="7235830" y="1846337"/>
-                  </a:lnTo>
-                  <a:lnTo>
-                    <a:pt x="7162070" y="1842288"/>
-                  </a:lnTo>
-                  <a:lnTo>
-                    <a:pt x="7088310" y="1838212"/>
-                  </a:lnTo>
-                  <a:lnTo>
-                    <a:pt x="7014550" y="1834110"/>
-                  </a:lnTo>
-                  <a:lnTo>
-                    <a:pt x="6940789" y="1829981"/>
-                  </a:lnTo>
-                  <a:lnTo>
-                    <a:pt x="6867029" y="1825826"/>
-                  </a:lnTo>
-                  <a:lnTo>
-                    <a:pt x="6793269" y="1821643"/>
-                  </a:lnTo>
-                  <a:lnTo>
-                    <a:pt x="6719509" y="1817434"/>
-                  </a:lnTo>
-                  <a:lnTo>
-                    <a:pt x="6645749" y="1813197"/>
-                  </a:lnTo>
-                  <a:lnTo>
-                    <a:pt x="6571989" y="1808932"/>
-                  </a:lnTo>
-                  <a:lnTo>
-                    <a:pt x="6498229" y="1804640"/>
-                  </a:lnTo>
-                  <a:lnTo>
-                    <a:pt x="6424469" y="1800320"/>
-                  </a:lnTo>
-                  <a:lnTo>
-                    <a:pt x="6350709" y="1795973"/>
-                  </a:lnTo>
-                  <a:lnTo>
-                    <a:pt x="6276949" y="1791596"/>
-                  </a:lnTo>
-                  <a:lnTo>
-                    <a:pt x="6203189" y="1787192"/>
-                  </a:lnTo>
-                  <a:lnTo>
-                    <a:pt x="6129429" y="1782759"/>
-                  </a:lnTo>
-                  <a:lnTo>
-                    <a:pt x="6055669" y="1778297"/>
-                  </a:lnTo>
-                  <a:lnTo>
-                    <a:pt x="5981909" y="1773806"/>
-                  </a:lnTo>
-                  <a:lnTo>
-                    <a:pt x="5908149" y="1769286"/>
-                  </a:lnTo>
-                  <a:lnTo>
-                    <a:pt x="5834389" y="1764737"/>
-                  </a:lnTo>
-                  <a:lnTo>
-                    <a:pt x="5760629" y="1760158"/>
-                  </a:lnTo>
-                  <a:lnTo>
-                    <a:pt x="5686869" y="1755549"/>
-                  </a:lnTo>
-                  <a:lnTo>
-                    <a:pt x="5613109" y="1750911"/>
-                  </a:lnTo>
-                  <a:lnTo>
-                    <a:pt x="5539349" y="1746242"/>
-                  </a:lnTo>
-                  <a:lnTo>
-                    <a:pt x="5465589" y="1741543"/>
-                  </a:lnTo>
-                  <a:lnTo>
-                    <a:pt x="5391829" y="1736814"/>
-                  </a:lnTo>
-                  <a:lnTo>
-                    <a:pt x="5318069" y="1732054"/>
-                  </a:lnTo>
-                  <a:lnTo>
-                    <a:pt x="5244309" y="1727263"/>
-                  </a:lnTo>
-                  <a:lnTo>
-                    <a:pt x="5170549" y="1722441"/>
-                  </a:lnTo>
-                  <a:lnTo>
-                    <a:pt x="5096789" y="1717588"/>
-                  </a:lnTo>
-                  <a:lnTo>
-                    <a:pt x="5023029" y="1712703"/>
-                  </a:lnTo>
-                  <a:lnTo>
-                    <a:pt x="4949269" y="1707787"/>
-                  </a:lnTo>
-                  <a:lnTo>
-                    <a:pt x="4875509" y="1702838"/>
-                  </a:lnTo>
-                  <a:lnTo>
-                    <a:pt x="4801749" y="1697858"/>
-                  </a:lnTo>
-                  <a:lnTo>
-                    <a:pt x="4727989" y="1692845"/>
-                  </a:lnTo>
-                  <a:lnTo>
-                    <a:pt x="4654229" y="1687800"/>
-                  </a:lnTo>
-                  <a:lnTo>
-                    <a:pt x="4580469" y="1682722"/>
-                  </a:lnTo>
-                  <a:lnTo>
-                    <a:pt x="4506709" y="1677611"/>
-                  </a:lnTo>
-                  <a:lnTo>
-                    <a:pt x="4432949" y="1672467"/>
-                  </a:lnTo>
-                  <a:lnTo>
-                    <a:pt x="4359189" y="1667289"/>
-                  </a:lnTo>
-                  <a:lnTo>
-                    <a:pt x="4285429" y="1662078"/>
-                  </a:lnTo>
-                  <a:lnTo>
-                    <a:pt x="4211669" y="1656833"/>
-                  </a:lnTo>
-                  <a:lnTo>
-                    <a:pt x="4137909" y="1651554"/>
-                  </a:lnTo>
-                  <a:lnTo>
-                    <a:pt x="4064149" y="1646241"/>
-                  </a:lnTo>
-                  <a:lnTo>
-                    <a:pt x="3990388" y="1640894"/>
-                  </a:lnTo>
-                  <a:lnTo>
-                    <a:pt x="3916628" y="1635511"/>
-                  </a:lnTo>
-                  <a:lnTo>
-                    <a:pt x="3842868" y="1630094"/>
-                  </a:lnTo>
-                  <a:lnTo>
-                    <a:pt x="3769108" y="1624641"/>
-                  </a:lnTo>
-                  <a:lnTo>
-                    <a:pt x="3695348" y="1619154"/>
-                  </a:lnTo>
-                  <a:lnTo>
-                    <a:pt x="3621588" y="1613630"/>
-                  </a:lnTo>
-                  <a:lnTo>
-                    <a:pt x="3547828" y="1608071"/>
-                  </a:lnTo>
-                  <a:lnTo>
-                    <a:pt x="3474068" y="1602476"/>
-                  </a:lnTo>
-                  <a:lnTo>
-                    <a:pt x="3400308" y="1612996"/>
-                  </a:lnTo>
-                  <a:lnTo>
-                    <a:pt x="3326548" y="1630269"/>
-                  </a:lnTo>
-                  <a:lnTo>
-                    <a:pt x="3252788" y="1647194"/>
-                  </a:lnTo>
-                  <a:lnTo>
-                    <a:pt x="3179028" y="1663777"/>
-                  </a:lnTo>
-                  <a:lnTo>
-                    <a:pt x="3105268" y="1680027"/>
-                  </a:lnTo>
-                  <a:lnTo>
-                    <a:pt x="3031508" y="1695949"/>
-                  </a:lnTo>
-                  <a:lnTo>
-                    <a:pt x="2957748" y="1711551"/>
-                  </a:lnTo>
-                  <a:lnTo>
-                    <a:pt x="2883988" y="1726838"/>
-                  </a:lnTo>
-                  <a:lnTo>
-                    <a:pt x="2810228" y="1741818"/>
-                  </a:lnTo>
-                  <a:lnTo>
-                    <a:pt x="2736468" y="1756495"/>
-                  </a:lnTo>
-                  <a:lnTo>
-                    <a:pt x="2662708" y="1770877"/>
-                  </a:lnTo>
-                  <a:lnTo>
-                    <a:pt x="2588948" y="1784969"/>
-                  </a:lnTo>
-                  <a:lnTo>
-                    <a:pt x="2515188" y="1798778"/>
-                  </a:lnTo>
-                  <a:lnTo>
-                    <a:pt x="2441428" y="1812308"/>
-                  </a:lnTo>
-                  <a:lnTo>
-                    <a:pt x="2367668" y="1825566"/>
-                  </a:lnTo>
-                  <a:lnTo>
-                    <a:pt x="2293908" y="1838556"/>
-                  </a:lnTo>
-                  <a:lnTo>
-                    <a:pt x="2220148" y="1851285"/>
-                  </a:lnTo>
-                  <a:lnTo>
-                    <a:pt x="2146388" y="1863758"/>
-                  </a:lnTo>
-                  <a:lnTo>
-                    <a:pt x="2072628" y="1875979"/>
-                  </a:lnTo>
-                  <a:lnTo>
-                    <a:pt x="1998868" y="1887954"/>
-                  </a:lnTo>
-                  <a:lnTo>
-                    <a:pt x="1925108" y="1899688"/>
-                  </a:lnTo>
-                  <a:lnTo>
-                    <a:pt x="1851348" y="1911185"/>
-                  </a:lnTo>
-                  <a:lnTo>
-                    <a:pt x="1777588" y="1922451"/>
-                  </a:lnTo>
-                  <a:lnTo>
-                    <a:pt x="1703828" y="1933490"/>
-                  </a:lnTo>
-                  <a:lnTo>
-                    <a:pt x="1630068" y="1944306"/>
-                  </a:lnTo>
-                  <a:lnTo>
-                    <a:pt x="1556308" y="1954905"/>
-                  </a:lnTo>
-                  <a:lnTo>
-                    <a:pt x="1482548" y="1965290"/>
-                  </a:lnTo>
-                  <a:lnTo>
-                    <a:pt x="1408788" y="1975466"/>
-                  </a:lnTo>
-                  <a:lnTo>
-                    <a:pt x="1335028" y="1985437"/>
-                  </a:lnTo>
-                  <a:lnTo>
-                    <a:pt x="1261268" y="1995207"/>
-                  </a:lnTo>
-                  <a:lnTo>
-                    <a:pt x="1187508" y="2004780"/>
-                  </a:lnTo>
-                  <a:lnTo>
-                    <a:pt x="1113747" y="2014161"/>
-                  </a:lnTo>
-                  <a:lnTo>
-                    <a:pt x="1039987" y="2023352"/>
-                  </a:lnTo>
-                  <a:lnTo>
-                    <a:pt x="966227" y="2032358"/>
-                  </a:lnTo>
-                  <a:lnTo>
-                    <a:pt x="892467" y="2041183"/>
-                  </a:lnTo>
-                  <a:lnTo>
-                    <a:pt x="818707" y="2049830"/>
-                  </a:lnTo>
-                  <a:lnTo>
-                    <a:pt x="744947" y="2058303"/>
-                  </a:lnTo>
-                  <a:lnTo>
-                    <a:pt x="671187" y="2066606"/>
-                  </a:lnTo>
-                  <a:lnTo>
-                    <a:pt x="597427" y="2074741"/>
-                  </a:lnTo>
-                  <a:lnTo>
-                    <a:pt x="523667" y="2082712"/>
-                  </a:lnTo>
-                  <a:lnTo>
-                    <a:pt x="449907" y="2090522"/>
-                  </a:lnTo>
-                  <a:lnTo>
-                    <a:pt x="376147" y="2098176"/>
-                  </a:lnTo>
-                  <a:lnTo>
-                    <a:pt x="302387" y="2105675"/>
-                  </a:lnTo>
-                  <a:lnTo>
-                    <a:pt x="228627" y="2113023"/>
-                  </a:lnTo>
-                  <a:lnTo>
-                    <a:pt x="154867" y="2120223"/>
-                  </a:lnTo>
-                  <a:lnTo>
-                    <a:pt x="81107" y="2127278"/>
-                  </a:lnTo>
-                  <a:lnTo>
-                    <a:pt x="7347" y="2134190"/>
-                  </a:lnTo>
-                  <a:lnTo>
-                    <a:pt x="0" y="2134865"/>
+                    <a:pt x="7235830" y="1760963"/>
+                  </a:lnTo>
+                  <a:lnTo>
+                    <a:pt x="7162070" y="1757101"/>
+                  </a:lnTo>
+                  <a:lnTo>
+                    <a:pt x="7088310" y="1753214"/>
+                  </a:lnTo>
+                  <a:lnTo>
+                    <a:pt x="7014550" y="1749302"/>
+                  </a:lnTo>
+                  <a:lnTo>
+                    <a:pt x="6940789" y="1745364"/>
+                  </a:lnTo>
+                  <a:lnTo>
+                    <a:pt x="6867029" y="1741400"/>
+                  </a:lnTo>
+                  <a:lnTo>
+                    <a:pt x="6793269" y="1737411"/>
+                  </a:lnTo>
+                  <a:lnTo>
+                    <a:pt x="6719509" y="1733396"/>
+                  </a:lnTo>
+                  <a:lnTo>
+                    <a:pt x="6645749" y="1729355"/>
+                  </a:lnTo>
+                  <a:lnTo>
+                    <a:pt x="6571989" y="1725288"/>
+                  </a:lnTo>
+                  <a:lnTo>
+                    <a:pt x="6498229" y="1721194"/>
+                  </a:lnTo>
+                  <a:lnTo>
+                    <a:pt x="6424469" y="1717074"/>
+                  </a:lnTo>
+                  <a:lnTo>
+                    <a:pt x="6350709" y="1712927"/>
+                  </a:lnTo>
+                  <a:lnTo>
+                    <a:pt x="6276949" y="1708754"/>
+                  </a:lnTo>
+                  <a:lnTo>
+                    <a:pt x="6203189" y="1704553"/>
+                  </a:lnTo>
+                  <a:lnTo>
+                    <a:pt x="6129429" y="1700325"/>
+                  </a:lnTo>
+                  <a:lnTo>
+                    <a:pt x="6055669" y="1696069"/>
+                  </a:lnTo>
+                  <a:lnTo>
+                    <a:pt x="5981909" y="1691786"/>
+                  </a:lnTo>
+                  <a:lnTo>
+                    <a:pt x="5908149" y="1687475"/>
+                  </a:lnTo>
+                  <a:lnTo>
+                    <a:pt x="5834389" y="1683136"/>
+                  </a:lnTo>
+                  <a:lnTo>
+                    <a:pt x="5760629" y="1678769"/>
+                  </a:lnTo>
+                  <a:lnTo>
+                    <a:pt x="5686869" y="1674373"/>
+                  </a:lnTo>
+                  <a:lnTo>
+                    <a:pt x="5613109" y="1669949"/>
+                  </a:lnTo>
+                  <a:lnTo>
+                    <a:pt x="5539349" y="1665497"/>
+                  </a:lnTo>
+                  <a:lnTo>
+                    <a:pt x="5465589" y="1661015"/>
+                  </a:lnTo>
+                  <a:lnTo>
+                    <a:pt x="5391829" y="1656504"/>
+                  </a:lnTo>
+                  <a:lnTo>
+                    <a:pt x="5318069" y="1651965"/>
+                  </a:lnTo>
+                  <a:lnTo>
+                    <a:pt x="5244309" y="1647395"/>
+                  </a:lnTo>
+                  <a:lnTo>
+                    <a:pt x="5170549" y="1642796"/>
+                  </a:lnTo>
+                  <a:lnTo>
+                    <a:pt x="5096789" y="1638167"/>
+                  </a:lnTo>
+                  <a:lnTo>
+                    <a:pt x="5023029" y="1633508"/>
+                  </a:lnTo>
+                  <a:lnTo>
+                    <a:pt x="4949269" y="1628819"/>
+                  </a:lnTo>
+                  <a:lnTo>
+                    <a:pt x="4875509" y="1624100"/>
+                  </a:lnTo>
+                  <a:lnTo>
+                    <a:pt x="4801749" y="1619350"/>
+                  </a:lnTo>
+                  <a:lnTo>
+                    <a:pt x="4727989" y="1614569"/>
+                  </a:lnTo>
+                  <a:lnTo>
+                    <a:pt x="4654229" y="1609757"/>
+                  </a:lnTo>
+                  <a:lnTo>
+                    <a:pt x="4580469" y="1604913"/>
+                  </a:lnTo>
+                  <a:lnTo>
+                    <a:pt x="4506709" y="1600039"/>
+                  </a:lnTo>
+                  <a:lnTo>
+                    <a:pt x="4432949" y="1595133"/>
+                  </a:lnTo>
+                  <a:lnTo>
+                    <a:pt x="4359189" y="1590194"/>
+                  </a:lnTo>
+                  <a:lnTo>
+                    <a:pt x="4285429" y="1585224"/>
+                  </a:lnTo>
+                  <a:lnTo>
+                    <a:pt x="4211669" y="1580222"/>
+                  </a:lnTo>
+                  <a:lnTo>
+                    <a:pt x="4137909" y="1575187"/>
+                  </a:lnTo>
+                  <a:lnTo>
+                    <a:pt x="4064149" y="1570120"/>
+                  </a:lnTo>
+                  <a:lnTo>
+                    <a:pt x="3990388" y="1565019"/>
+                  </a:lnTo>
+                  <a:lnTo>
+                    <a:pt x="3916628" y="1559886"/>
+                  </a:lnTo>
+                  <a:lnTo>
+                    <a:pt x="3842868" y="1554719"/>
+                  </a:lnTo>
+                  <a:lnTo>
+                    <a:pt x="3769108" y="1549519"/>
+                  </a:lnTo>
+                  <a:lnTo>
+                    <a:pt x="3695348" y="1544285"/>
+                  </a:lnTo>
+                  <a:lnTo>
+                    <a:pt x="3621588" y="1539017"/>
+                  </a:lnTo>
+                  <a:lnTo>
+                    <a:pt x="3547828" y="1533714"/>
+                  </a:lnTo>
+                  <a:lnTo>
+                    <a:pt x="3474068" y="1528378"/>
+                  </a:lnTo>
+                  <a:lnTo>
+                    <a:pt x="3400308" y="1538412"/>
+                  </a:lnTo>
+                  <a:lnTo>
+                    <a:pt x="3326548" y="1554886"/>
+                  </a:lnTo>
+                  <a:lnTo>
+                    <a:pt x="3252788" y="1571028"/>
+                  </a:lnTo>
+                  <a:lnTo>
+                    <a:pt x="3179028" y="1586845"/>
+                  </a:lnTo>
+                  <a:lnTo>
+                    <a:pt x="3105268" y="1602343"/>
+                  </a:lnTo>
+                  <a:lnTo>
+                    <a:pt x="3031508" y="1617529"/>
+                  </a:lnTo>
+                  <a:lnTo>
+                    <a:pt x="2957748" y="1632410"/>
+                  </a:lnTo>
+                  <a:lnTo>
+                    <a:pt x="2883988" y="1646990"/>
+                  </a:lnTo>
+                  <a:lnTo>
+                    <a:pt x="2810228" y="1661277"/>
+                  </a:lnTo>
+                  <a:lnTo>
+                    <a:pt x="2736468" y="1675276"/>
+                  </a:lnTo>
+                  <a:lnTo>
+                    <a:pt x="2662708" y="1688992"/>
+                  </a:lnTo>
+                  <a:lnTo>
+                    <a:pt x="2588948" y="1702433"/>
+                  </a:lnTo>
+                  <a:lnTo>
+                    <a:pt x="2515188" y="1715603"/>
+                  </a:lnTo>
+                  <a:lnTo>
+                    <a:pt x="2441428" y="1728508"/>
+                  </a:lnTo>
+                  <a:lnTo>
+                    <a:pt x="2367668" y="1741152"/>
+                  </a:lnTo>
+                  <a:lnTo>
+                    <a:pt x="2293908" y="1753542"/>
+                  </a:lnTo>
+                  <a:lnTo>
+                    <a:pt x="2220148" y="1765682"/>
+                  </a:lnTo>
+                  <a:lnTo>
+                    <a:pt x="2146388" y="1777578"/>
+                  </a:lnTo>
+                  <a:lnTo>
+                    <a:pt x="2072628" y="1789234"/>
+                  </a:lnTo>
+                  <a:lnTo>
+                    <a:pt x="1998868" y="1800655"/>
+                  </a:lnTo>
+                  <a:lnTo>
+                    <a:pt x="1925108" y="1811847"/>
+                  </a:lnTo>
+                  <a:lnTo>
+                    <a:pt x="1851348" y="1822813"/>
+                  </a:lnTo>
+                  <a:lnTo>
+                    <a:pt x="1777588" y="1833557"/>
+                  </a:lnTo>
+                  <a:lnTo>
+                    <a:pt x="1703828" y="1844086"/>
+                  </a:lnTo>
+                  <a:lnTo>
+                    <a:pt x="1630068" y="1854402"/>
+                  </a:lnTo>
+                  <a:lnTo>
+                    <a:pt x="1556308" y="1864511"/>
+                  </a:lnTo>
+                  <a:lnTo>
+                    <a:pt x="1482548" y="1874416"/>
+                  </a:lnTo>
+                  <a:lnTo>
+                    <a:pt x="1408788" y="1884121"/>
+                  </a:lnTo>
+                  <a:lnTo>
+                    <a:pt x="1335028" y="1893631"/>
+                  </a:lnTo>
+                  <a:lnTo>
+                    <a:pt x="1261268" y="1902949"/>
+                  </a:lnTo>
+                  <a:lnTo>
+                    <a:pt x="1187508" y="1912080"/>
+                  </a:lnTo>
+                  <a:lnTo>
+                    <a:pt x="1113747" y="1921027"/>
+                  </a:lnTo>
+                  <a:lnTo>
+                    <a:pt x="1039987" y="1929793"/>
+                  </a:lnTo>
+                  <a:lnTo>
+                    <a:pt x="966227" y="1938383"/>
+                  </a:lnTo>
+                  <a:lnTo>
+                    <a:pt x="892467" y="1946800"/>
+                  </a:lnTo>
+                  <a:lnTo>
+                    <a:pt x="818707" y="1955047"/>
+                  </a:lnTo>
+                  <a:lnTo>
+                    <a:pt x="744947" y="1963128"/>
+                  </a:lnTo>
+                  <a:lnTo>
+                    <a:pt x="671187" y="1971047"/>
+                  </a:lnTo>
+                  <a:lnTo>
+                    <a:pt x="597427" y="1978805"/>
+                  </a:lnTo>
+                  <a:lnTo>
+                    <a:pt x="523667" y="1986408"/>
+                  </a:lnTo>
+                  <a:lnTo>
+                    <a:pt x="449907" y="1993857"/>
+                  </a:lnTo>
+                  <a:lnTo>
+                    <a:pt x="376147" y="2001157"/>
+                  </a:lnTo>
+                  <a:lnTo>
+                    <a:pt x="302387" y="2008309"/>
+                  </a:lnTo>
+                  <a:lnTo>
+                    <a:pt x="228627" y="2015317"/>
+                  </a:lnTo>
+                  <a:lnTo>
+                    <a:pt x="154867" y="2022184"/>
+                  </a:lnTo>
+                  <a:lnTo>
+                    <a:pt x="81107" y="2028913"/>
+                  </a:lnTo>
+                  <a:lnTo>
+                    <a:pt x="7347" y="2035506"/>
+                  </a:lnTo>
+                  <a:lnTo>
+                    <a:pt x="0" y="2036150"/>
                   </a:lnTo>
                   <a:close/>
                 </a:path>
@@ -3633,309 +3633,309 @@
           </p:nvSpPr>
           <p:spPr>
             <a:xfrm>
-              <a:off x="817517" y="3078762"/>
-              <a:ext cx="7235830" cy="1596844"/>
+              <a:off x="817517" y="3201037"/>
+              <a:ext cx="7235830" cy="1523006"/>
             </a:xfrm>
             <a:custGeom>
               <a:avLst/>
               <a:pathLst>
-                <a:path w="7235830" h="1596844">
+                <a:path w="7235830" h="1523006">
                   <a:moveTo>
-                    <a:pt x="0" y="1293395"/>
+                    <a:pt x="0" y="1233589"/>
                   </a:moveTo>
                   <a:lnTo>
-                    <a:pt x="7347" y="1294155"/>
-                  </a:lnTo>
-                  <a:lnTo>
-                    <a:pt x="81107" y="1301738"/>
-                  </a:lnTo>
-                  <a:lnTo>
-                    <a:pt x="154867" y="1309272"/>
-                  </a:lnTo>
-                  <a:lnTo>
-                    <a:pt x="228627" y="1316757"/>
-                  </a:lnTo>
-                  <a:lnTo>
-                    <a:pt x="302387" y="1324195"/>
-                  </a:lnTo>
-                  <a:lnTo>
-                    <a:pt x="376147" y="1331584"/>
-                  </a:lnTo>
-                  <a:lnTo>
-                    <a:pt x="449907" y="1338925"/>
-                  </a:lnTo>
-                  <a:lnTo>
-                    <a:pt x="523667" y="1346220"/>
-                  </a:lnTo>
-                  <a:lnTo>
-                    <a:pt x="597427" y="1353467"/>
-                  </a:lnTo>
-                  <a:lnTo>
-                    <a:pt x="671187" y="1360668"/>
-                  </a:lnTo>
-                  <a:lnTo>
-                    <a:pt x="744947" y="1367822"/>
-                  </a:lnTo>
-                  <a:lnTo>
-                    <a:pt x="818707" y="1374930"/>
-                  </a:lnTo>
-                  <a:lnTo>
-                    <a:pt x="892467" y="1381992"/>
-                  </a:lnTo>
-                  <a:lnTo>
-                    <a:pt x="966227" y="1389009"/>
-                  </a:lnTo>
-                  <a:lnTo>
-                    <a:pt x="1039987" y="1395980"/>
-                  </a:lnTo>
-                  <a:lnTo>
-                    <a:pt x="1113747" y="1402907"/>
-                  </a:lnTo>
-                  <a:lnTo>
-                    <a:pt x="1187508" y="1409788"/>
-                  </a:lnTo>
-                  <a:lnTo>
-                    <a:pt x="1261268" y="1416626"/>
-                  </a:lnTo>
-                  <a:lnTo>
-                    <a:pt x="1335028" y="1423419"/>
-                  </a:lnTo>
-                  <a:lnTo>
-                    <a:pt x="1408788" y="1430169"/>
-                  </a:lnTo>
-                  <a:lnTo>
-                    <a:pt x="1482548" y="1436875"/>
-                  </a:lnTo>
-                  <a:lnTo>
-                    <a:pt x="1556308" y="1443538"/>
-                  </a:lnTo>
-                  <a:lnTo>
-                    <a:pt x="1630068" y="1450158"/>
-                  </a:lnTo>
-                  <a:lnTo>
-                    <a:pt x="1703828" y="1456735"/>
-                  </a:lnTo>
-                  <a:lnTo>
-                    <a:pt x="1777588" y="1463270"/>
-                  </a:lnTo>
-                  <a:lnTo>
-                    <a:pt x="1851348" y="1469762"/>
-                  </a:lnTo>
-                  <a:lnTo>
-                    <a:pt x="1925108" y="1476213"/>
-                  </a:lnTo>
-                  <a:lnTo>
-                    <a:pt x="1998868" y="1482623"/>
-                  </a:lnTo>
-                  <a:lnTo>
-                    <a:pt x="2072628" y="1488991"/>
-                  </a:lnTo>
-                  <a:lnTo>
-                    <a:pt x="2146388" y="1495317"/>
-                  </a:lnTo>
-                  <a:lnTo>
-                    <a:pt x="2220148" y="1501604"/>
-                  </a:lnTo>
-                  <a:lnTo>
-                    <a:pt x="2293908" y="1507849"/>
-                  </a:lnTo>
-                  <a:lnTo>
-                    <a:pt x="2367668" y="1514055"/>
-                  </a:lnTo>
-                  <a:lnTo>
-                    <a:pt x="2441428" y="1520220"/>
-                  </a:lnTo>
-                  <a:lnTo>
-                    <a:pt x="2515188" y="1526345"/>
-                  </a:lnTo>
-                  <a:lnTo>
-                    <a:pt x="2588948" y="1532432"/>
-                  </a:lnTo>
-                  <a:lnTo>
-                    <a:pt x="2662708" y="1538478"/>
-                  </a:lnTo>
-                  <a:lnTo>
-                    <a:pt x="2736468" y="1544486"/>
-                  </a:lnTo>
-                  <a:lnTo>
-                    <a:pt x="2810228" y="1550455"/>
-                  </a:lnTo>
-                  <a:lnTo>
-                    <a:pt x="2883988" y="1556386"/>
-                  </a:lnTo>
-                  <a:lnTo>
-                    <a:pt x="2957748" y="1562279"/>
-                  </a:lnTo>
-                  <a:lnTo>
-                    <a:pt x="3031508" y="1568133"/>
-                  </a:lnTo>
-                  <a:lnTo>
-                    <a:pt x="3105268" y="1573950"/>
-                  </a:lnTo>
-                  <a:lnTo>
-                    <a:pt x="3179028" y="1579729"/>
-                  </a:lnTo>
-                  <a:lnTo>
-                    <a:pt x="3252788" y="1585471"/>
-                  </a:lnTo>
-                  <a:lnTo>
-                    <a:pt x="3326548" y="1591176"/>
-                  </a:lnTo>
-                  <a:lnTo>
-                    <a:pt x="3400308" y="1596844"/>
-                  </a:lnTo>
-                  <a:lnTo>
-                    <a:pt x="3474068" y="1595369"/>
-                  </a:lnTo>
-                  <a:lnTo>
-                    <a:pt x="3547828" y="1577379"/>
-                  </a:lnTo>
-                  <a:lnTo>
-                    <a:pt x="3621588" y="1559019"/>
-                  </a:lnTo>
-                  <a:lnTo>
-                    <a:pt x="3695348" y="1540281"/>
-                  </a:lnTo>
-                  <a:lnTo>
-                    <a:pt x="3769108" y="1521159"/>
-                  </a:lnTo>
-                  <a:lnTo>
-                    <a:pt x="3842868" y="1501643"/>
-                  </a:lnTo>
-                  <a:lnTo>
-                    <a:pt x="3916628" y="1481726"/>
-                  </a:lnTo>
-                  <a:lnTo>
-                    <a:pt x="3990388" y="1461400"/>
-                  </a:lnTo>
-                  <a:lnTo>
-                    <a:pt x="4064149" y="1440655"/>
-                  </a:lnTo>
-                  <a:lnTo>
-                    <a:pt x="4137909" y="1419485"/>
-                  </a:lnTo>
-                  <a:lnTo>
-                    <a:pt x="4211669" y="1397879"/>
-                  </a:lnTo>
-                  <a:lnTo>
-                    <a:pt x="4285429" y="1375828"/>
-                  </a:lnTo>
-                  <a:lnTo>
-                    <a:pt x="4359189" y="1353325"/>
-                  </a:lnTo>
-                  <a:lnTo>
-                    <a:pt x="4432949" y="1330359"/>
-                  </a:lnTo>
-                  <a:lnTo>
-                    <a:pt x="4506709" y="1306921"/>
-                  </a:lnTo>
-                  <a:lnTo>
-                    <a:pt x="4580469" y="1283000"/>
-                  </a:lnTo>
-                  <a:lnTo>
-                    <a:pt x="4654229" y="1258589"/>
-                  </a:lnTo>
-                  <a:lnTo>
-                    <a:pt x="4727989" y="1233675"/>
-                  </a:lnTo>
-                  <a:lnTo>
-                    <a:pt x="4801749" y="1208249"/>
-                  </a:lnTo>
-                  <a:lnTo>
-                    <a:pt x="4875509" y="1182300"/>
-                  </a:lnTo>
-                  <a:lnTo>
-                    <a:pt x="4949269" y="1155818"/>
-                  </a:lnTo>
-                  <a:lnTo>
-                    <a:pt x="5023029" y="1128792"/>
-                  </a:lnTo>
-                  <a:lnTo>
-                    <a:pt x="5096789" y="1101210"/>
-                  </a:lnTo>
-                  <a:lnTo>
-                    <a:pt x="5170549" y="1073060"/>
-                  </a:lnTo>
-                  <a:lnTo>
-                    <a:pt x="5244309" y="1044332"/>
-                  </a:lnTo>
-                  <a:lnTo>
-                    <a:pt x="5318069" y="1015014"/>
-                  </a:lnTo>
-                  <a:lnTo>
-                    <a:pt x="5391829" y="985093"/>
-                  </a:lnTo>
-                  <a:lnTo>
-                    <a:pt x="5465589" y="954556"/>
-                  </a:lnTo>
-                  <a:lnTo>
-                    <a:pt x="5539349" y="923392"/>
-                  </a:lnTo>
-                  <a:lnTo>
-                    <a:pt x="5613109" y="891587"/>
-                  </a:lnTo>
-                  <a:lnTo>
-                    <a:pt x="5686869" y="859129"/>
-                  </a:lnTo>
-                  <a:lnTo>
-                    <a:pt x="5760629" y="826003"/>
-                  </a:lnTo>
-                  <a:lnTo>
-                    <a:pt x="5834389" y="792196"/>
-                  </a:lnTo>
-                  <a:lnTo>
-                    <a:pt x="5908149" y="757694"/>
-                  </a:lnTo>
-                  <a:lnTo>
-                    <a:pt x="5981909" y="722482"/>
-                  </a:lnTo>
-                  <a:lnTo>
-                    <a:pt x="6055669" y="686547"/>
-                  </a:lnTo>
-                  <a:lnTo>
-                    <a:pt x="6129429" y="649873"/>
-                  </a:lnTo>
-                  <a:lnTo>
-                    <a:pt x="6203189" y="612445"/>
-                  </a:lnTo>
-                  <a:lnTo>
-                    <a:pt x="6276949" y="574248"/>
-                  </a:lnTo>
-                  <a:lnTo>
-                    <a:pt x="6350709" y="535265"/>
-                  </a:lnTo>
-                  <a:lnTo>
-                    <a:pt x="6424469" y="495481"/>
-                  </a:lnTo>
-                  <a:lnTo>
-                    <a:pt x="6498229" y="454879"/>
-                  </a:lnTo>
-                  <a:lnTo>
-                    <a:pt x="6571989" y="413443"/>
-                  </a:lnTo>
-                  <a:lnTo>
-                    <a:pt x="6645749" y="371154"/>
-                  </a:lnTo>
-                  <a:lnTo>
-                    <a:pt x="6719509" y="327996"/>
-                  </a:lnTo>
-                  <a:lnTo>
-                    <a:pt x="6793269" y="283951"/>
-                  </a:lnTo>
-                  <a:lnTo>
-                    <a:pt x="6867029" y="239000"/>
-                  </a:lnTo>
-                  <a:lnTo>
-                    <a:pt x="6940789" y="193126"/>
-                  </a:lnTo>
-                  <a:lnTo>
-                    <a:pt x="7014550" y="146308"/>
-                  </a:lnTo>
-                  <a:lnTo>
-                    <a:pt x="7088310" y="98527"/>
-                  </a:lnTo>
-                  <a:lnTo>
-                    <a:pt x="7162070" y="49765"/>
+                    <a:pt x="7347" y="1234314"/>
+                  </a:lnTo>
+                  <a:lnTo>
+                    <a:pt x="81107" y="1241546"/>
+                  </a:lnTo>
+                  <a:lnTo>
+                    <a:pt x="154867" y="1248732"/>
+                  </a:lnTo>
+                  <a:lnTo>
+                    <a:pt x="228627" y="1255871"/>
+                  </a:lnTo>
+                  <a:lnTo>
+                    <a:pt x="302387" y="1262964"/>
+                  </a:lnTo>
+                  <a:lnTo>
+                    <a:pt x="376147" y="1270012"/>
+                  </a:lnTo>
+                  <a:lnTo>
+                    <a:pt x="449907" y="1277014"/>
+                  </a:lnTo>
+                  <a:lnTo>
+                    <a:pt x="523667" y="1283971"/>
+                  </a:lnTo>
+                  <a:lnTo>
+                    <a:pt x="597427" y="1290883"/>
+                  </a:lnTo>
+                  <a:lnTo>
+                    <a:pt x="671187" y="1297751"/>
+                  </a:lnTo>
+                  <a:lnTo>
+                    <a:pt x="744947" y="1304574"/>
+                  </a:lnTo>
+                  <a:lnTo>
+                    <a:pt x="818707" y="1311353"/>
+                  </a:lnTo>
+                  <a:lnTo>
+                    <a:pt x="892467" y="1318089"/>
+                  </a:lnTo>
+                  <a:lnTo>
+                    <a:pt x="966227" y="1324781"/>
+                  </a:lnTo>
+                  <a:lnTo>
+                    <a:pt x="1039987" y="1331430"/>
+                  </a:lnTo>
+                  <a:lnTo>
+                    <a:pt x="1113747" y="1338037"/>
+                  </a:lnTo>
+                  <a:lnTo>
+                    <a:pt x="1187508" y="1344600"/>
+                  </a:lnTo>
+                  <a:lnTo>
+                    <a:pt x="1261268" y="1351122"/>
+                  </a:lnTo>
+                  <a:lnTo>
+                    <a:pt x="1335028" y="1357601"/>
+                  </a:lnTo>
+                  <a:lnTo>
+                    <a:pt x="1408788" y="1364038"/>
+                  </a:lnTo>
+                  <a:lnTo>
+                    <a:pt x="1482548" y="1370434"/>
+                  </a:lnTo>
+                  <a:lnTo>
+                    <a:pt x="1556308" y="1376789"/>
+                  </a:lnTo>
+                  <a:lnTo>
+                    <a:pt x="1630068" y="1383103"/>
+                  </a:lnTo>
+                  <a:lnTo>
+                    <a:pt x="1703828" y="1389376"/>
+                  </a:lnTo>
+                  <a:lnTo>
+                    <a:pt x="1777588" y="1395609"/>
+                  </a:lnTo>
+                  <a:lnTo>
+                    <a:pt x="1851348" y="1401801"/>
+                  </a:lnTo>
+                  <a:lnTo>
+                    <a:pt x="1925108" y="1407954"/>
+                  </a:lnTo>
+                  <a:lnTo>
+                    <a:pt x="1998868" y="1414067"/>
+                  </a:lnTo>
+                  <a:lnTo>
+                    <a:pt x="2072628" y="1420140"/>
+                  </a:lnTo>
+                  <a:lnTo>
+                    <a:pt x="2146388" y="1426175"/>
+                  </a:lnTo>
+                  <a:lnTo>
+                    <a:pt x="2220148" y="1432170"/>
+                  </a:lnTo>
+                  <a:lnTo>
+                    <a:pt x="2293908" y="1438127"/>
+                  </a:lnTo>
+                  <a:lnTo>
+                    <a:pt x="2367668" y="1444045"/>
+                  </a:lnTo>
+                  <a:lnTo>
+                    <a:pt x="2441428" y="1449925"/>
+                  </a:lnTo>
+                  <a:lnTo>
+                    <a:pt x="2515188" y="1455768"/>
+                  </a:lnTo>
+                  <a:lnTo>
+                    <a:pt x="2588948" y="1461572"/>
+                  </a:lnTo>
+                  <a:lnTo>
+                    <a:pt x="2662708" y="1467340"/>
+                  </a:lnTo>
+                  <a:lnTo>
+                    <a:pt x="2736468" y="1473070"/>
+                  </a:lnTo>
+                  <a:lnTo>
+                    <a:pt x="2810228" y="1478763"/>
+                  </a:lnTo>
+                  <a:lnTo>
+                    <a:pt x="2883988" y="1484419"/>
+                  </a:lnTo>
+                  <a:lnTo>
+                    <a:pt x="2957748" y="1490039"/>
+                  </a:lnTo>
+                  <a:lnTo>
+                    <a:pt x="3031508" y="1495623"/>
+                  </a:lnTo>
+                  <a:lnTo>
+                    <a:pt x="3105268" y="1501171"/>
+                  </a:lnTo>
+                  <a:lnTo>
+                    <a:pt x="3179028" y="1506683"/>
+                  </a:lnTo>
+                  <a:lnTo>
+                    <a:pt x="3252788" y="1512159"/>
+                  </a:lnTo>
+                  <a:lnTo>
+                    <a:pt x="3326548" y="1517600"/>
+                  </a:lnTo>
+                  <a:lnTo>
+                    <a:pt x="3400308" y="1523006"/>
+                  </a:lnTo>
+                  <a:lnTo>
+                    <a:pt x="3474068" y="1521599"/>
+                  </a:lnTo>
+                  <a:lnTo>
+                    <a:pt x="3547828" y="1504441"/>
+                  </a:lnTo>
+                  <a:lnTo>
+                    <a:pt x="3621588" y="1486930"/>
+                  </a:lnTo>
+                  <a:lnTo>
+                    <a:pt x="3695348" y="1469059"/>
+                  </a:lnTo>
+                  <a:lnTo>
+                    <a:pt x="3769108" y="1450821"/>
+                  </a:lnTo>
+                  <a:lnTo>
+                    <a:pt x="3842868" y="1432208"/>
+                  </a:lnTo>
+                  <a:lnTo>
+                    <a:pt x="3916628" y="1413212"/>
+                  </a:lnTo>
+                  <a:lnTo>
+                    <a:pt x="3990388" y="1393825"/>
+                  </a:lnTo>
+                  <a:lnTo>
+                    <a:pt x="4064149" y="1374040"/>
+                  </a:lnTo>
+                  <a:lnTo>
+                    <a:pt x="4137909" y="1353848"/>
+                  </a:lnTo>
+                  <a:lnTo>
+                    <a:pt x="4211669" y="1333241"/>
+                  </a:lnTo>
+                  <a:lnTo>
+                    <a:pt x="4285429" y="1312211"/>
+                  </a:lnTo>
+                  <a:lnTo>
+                    <a:pt x="4359189" y="1290748"/>
+                  </a:lnTo>
+                  <a:lnTo>
+                    <a:pt x="4432949" y="1268844"/>
+                  </a:lnTo>
+                  <a:lnTo>
+                    <a:pt x="4506709" y="1246489"/>
+                  </a:lnTo>
+                  <a:lnTo>
+                    <a:pt x="4580469" y="1223675"/>
+                  </a:lnTo>
+                  <a:lnTo>
+                    <a:pt x="4654229" y="1200392"/>
+                  </a:lnTo>
+                  <a:lnTo>
+                    <a:pt x="4727989" y="1176630"/>
+                  </a:lnTo>
+                  <a:lnTo>
+                    <a:pt x="4801749" y="1152380"/>
+                  </a:lnTo>
+                  <a:lnTo>
+                    <a:pt x="4875509" y="1127631"/>
+                  </a:lnTo>
+                  <a:lnTo>
+                    <a:pt x="4949269" y="1102374"/>
+                  </a:lnTo>
+                  <a:lnTo>
+                    <a:pt x="5023029" y="1076597"/>
+                  </a:lnTo>
+                  <a:lnTo>
+                    <a:pt x="5096789" y="1050290"/>
+                  </a:lnTo>
+                  <a:lnTo>
+                    <a:pt x="5170549" y="1023442"/>
+                  </a:lnTo>
+                  <a:lnTo>
+                    <a:pt x="5244309" y="996043"/>
+                  </a:lnTo>
+                  <a:lnTo>
+                    <a:pt x="5318069" y="968080"/>
+                  </a:lnTo>
+                  <a:lnTo>
+                    <a:pt x="5391829" y="939542"/>
+                  </a:lnTo>
+                  <a:lnTo>
+                    <a:pt x="5465589" y="910418"/>
+                  </a:lnTo>
+                  <a:lnTo>
+                    <a:pt x="5539349" y="880695"/>
+                  </a:lnTo>
+                  <a:lnTo>
+                    <a:pt x="5613109" y="850361"/>
+                  </a:lnTo>
+                  <a:lnTo>
+                    <a:pt x="5686869" y="819403"/>
+                  </a:lnTo>
+                  <a:lnTo>
+                    <a:pt x="5760629" y="787809"/>
+                  </a:lnTo>
+                  <a:lnTo>
+                    <a:pt x="5834389" y="755565"/>
+                  </a:lnTo>
+                  <a:lnTo>
+                    <a:pt x="5908149" y="722658"/>
+                  </a:lnTo>
+                  <a:lnTo>
+                    <a:pt x="5981909" y="689075"/>
+                  </a:lnTo>
+                  <a:lnTo>
+                    <a:pt x="6055669" y="654802"/>
+                  </a:lnTo>
+                  <a:lnTo>
+                    <a:pt x="6129429" y="619823"/>
+                  </a:lnTo>
+                  <a:lnTo>
+                    <a:pt x="6203189" y="584126"/>
+                  </a:lnTo>
+                  <a:lnTo>
+                    <a:pt x="6276949" y="547695"/>
+                  </a:lnTo>
+                  <a:lnTo>
+                    <a:pt x="6350709" y="510515"/>
+                  </a:lnTo>
+                  <a:lnTo>
+                    <a:pt x="6424469" y="472570"/>
+                  </a:lnTo>
+                  <a:lnTo>
+                    <a:pt x="6498229" y="433846"/>
+                  </a:lnTo>
+                  <a:lnTo>
+                    <a:pt x="6571989" y="394325"/>
+                  </a:lnTo>
+                  <a:lnTo>
+                    <a:pt x="6645749" y="353992"/>
+                  </a:lnTo>
+                  <a:lnTo>
+                    <a:pt x="6719509" y="312830"/>
+                  </a:lnTo>
+                  <a:lnTo>
+                    <a:pt x="6793269" y="270821"/>
+                  </a:lnTo>
+                  <a:lnTo>
+                    <a:pt x="6867029" y="227949"/>
+                  </a:lnTo>
+                  <a:lnTo>
+                    <a:pt x="6940789" y="184196"/>
+                  </a:lnTo>
+                  <a:lnTo>
+                    <a:pt x="7014550" y="139542"/>
+                  </a:lnTo>
+                  <a:lnTo>
+                    <a:pt x="7088310" y="93971"/>
+                  </a:lnTo>
+                  <a:lnTo>
+                    <a:pt x="7162070" y="47464"/>
                   </a:lnTo>
                   <a:lnTo>
                     <a:pt x="7235830" y="0"/>
@@ -3958,312 +3958,312 @@
           </p:nvSpPr>
           <p:spPr>
             <a:xfrm>
-              <a:off x="817517" y="4681238"/>
-              <a:ext cx="7235830" cy="532389"/>
+              <a:off x="817517" y="4729416"/>
+              <a:ext cx="7235830" cy="507772"/>
             </a:xfrm>
             <a:custGeom>
               <a:avLst/>
               <a:pathLst>
-                <a:path w="7235830" h="532389">
+                <a:path w="7235830" h="507772">
                   <a:moveTo>
-                    <a:pt x="7235830" y="243861"/>
+                    <a:pt x="7235830" y="232585"/>
                   </a:moveTo>
                   <a:lnTo>
-                    <a:pt x="7162070" y="239812"/>
-                  </a:lnTo>
-                  <a:lnTo>
-                    <a:pt x="7088310" y="235736"/>
-                  </a:lnTo>
-                  <a:lnTo>
-                    <a:pt x="7014550" y="231634"/>
-                  </a:lnTo>
-                  <a:lnTo>
-                    <a:pt x="6940789" y="227505"/>
-                  </a:lnTo>
-                  <a:lnTo>
-                    <a:pt x="6867029" y="223350"/>
-                  </a:lnTo>
-                  <a:lnTo>
-                    <a:pt x="6793269" y="219167"/>
-                  </a:lnTo>
-                  <a:lnTo>
-                    <a:pt x="6719509" y="214958"/>
-                  </a:lnTo>
-                  <a:lnTo>
-                    <a:pt x="6645749" y="210721"/>
-                  </a:lnTo>
-                  <a:lnTo>
-                    <a:pt x="6571989" y="206456"/>
-                  </a:lnTo>
-                  <a:lnTo>
-                    <a:pt x="6498229" y="202164"/>
-                  </a:lnTo>
-                  <a:lnTo>
-                    <a:pt x="6424469" y="197844"/>
-                  </a:lnTo>
-                  <a:lnTo>
-                    <a:pt x="6350709" y="193496"/>
-                  </a:lnTo>
-                  <a:lnTo>
-                    <a:pt x="6276949" y="189120"/>
-                  </a:lnTo>
-                  <a:lnTo>
-                    <a:pt x="6203189" y="184716"/>
-                  </a:lnTo>
-                  <a:lnTo>
-                    <a:pt x="6129429" y="180283"/>
-                  </a:lnTo>
-                  <a:lnTo>
-                    <a:pt x="6055669" y="175821"/>
-                  </a:lnTo>
-                  <a:lnTo>
-                    <a:pt x="5981909" y="171330"/>
-                  </a:lnTo>
-                  <a:lnTo>
-                    <a:pt x="5908149" y="166810"/>
-                  </a:lnTo>
-                  <a:lnTo>
-                    <a:pt x="5834389" y="162260"/>
-                  </a:lnTo>
-                  <a:lnTo>
-                    <a:pt x="5760629" y="157682"/>
-                  </a:lnTo>
-                  <a:lnTo>
-                    <a:pt x="5686869" y="153073"/>
-                  </a:lnTo>
-                  <a:lnTo>
-                    <a:pt x="5613109" y="148435"/>
-                  </a:lnTo>
-                  <a:lnTo>
-                    <a:pt x="5539349" y="143766"/>
-                  </a:lnTo>
-                  <a:lnTo>
-                    <a:pt x="5465589" y="139067"/>
-                  </a:lnTo>
-                  <a:lnTo>
-                    <a:pt x="5391829" y="134338"/>
-                  </a:lnTo>
-                  <a:lnTo>
-                    <a:pt x="5318069" y="129578"/>
-                  </a:lnTo>
-                  <a:lnTo>
-                    <a:pt x="5244309" y="124787"/>
-                  </a:lnTo>
-                  <a:lnTo>
-                    <a:pt x="5170549" y="119965"/>
-                  </a:lnTo>
-                  <a:lnTo>
-                    <a:pt x="5096789" y="115112"/>
-                  </a:lnTo>
-                  <a:lnTo>
-                    <a:pt x="5023029" y="110227"/>
-                  </a:lnTo>
-                  <a:lnTo>
-                    <a:pt x="4949269" y="105311"/>
-                  </a:lnTo>
-                  <a:lnTo>
-                    <a:pt x="4875509" y="100362"/>
-                  </a:lnTo>
-                  <a:lnTo>
-                    <a:pt x="4801749" y="95382"/>
-                  </a:lnTo>
-                  <a:lnTo>
-                    <a:pt x="4727989" y="90369"/>
-                  </a:lnTo>
-                  <a:lnTo>
-                    <a:pt x="4654229" y="85324"/>
-                  </a:lnTo>
-                  <a:lnTo>
-                    <a:pt x="4580469" y="80246"/>
-                  </a:lnTo>
-                  <a:lnTo>
-                    <a:pt x="4506709" y="75135"/>
-                  </a:lnTo>
-                  <a:lnTo>
-                    <a:pt x="4432949" y="69991"/>
-                  </a:lnTo>
-                  <a:lnTo>
-                    <a:pt x="4359189" y="64813"/>
-                  </a:lnTo>
-                  <a:lnTo>
-                    <a:pt x="4285429" y="59602"/>
-                  </a:lnTo>
-                  <a:lnTo>
-                    <a:pt x="4211669" y="54357"/>
-                  </a:lnTo>
-                  <a:lnTo>
-                    <a:pt x="4137909" y="49078"/>
-                  </a:lnTo>
-                  <a:lnTo>
-                    <a:pt x="4064149" y="43765"/>
-                  </a:lnTo>
-                  <a:lnTo>
-                    <a:pt x="3990388" y="38417"/>
-                  </a:lnTo>
-                  <a:lnTo>
-                    <a:pt x="3916628" y="33035"/>
-                  </a:lnTo>
-                  <a:lnTo>
-                    <a:pt x="3842868" y="27618"/>
-                  </a:lnTo>
-                  <a:lnTo>
-                    <a:pt x="3769108" y="22165"/>
-                  </a:lnTo>
-                  <a:lnTo>
-                    <a:pt x="3695348" y="16677"/>
-                  </a:lnTo>
-                  <a:lnTo>
-                    <a:pt x="3621588" y="11154"/>
-                  </a:lnTo>
-                  <a:lnTo>
-                    <a:pt x="3547828" y="5595"/>
+                    <a:pt x="7162070" y="228723"/>
+                  </a:lnTo>
+                  <a:lnTo>
+                    <a:pt x="7088310" y="224836"/>
+                  </a:lnTo>
+                  <a:lnTo>
+                    <a:pt x="7014550" y="220923"/>
+                  </a:lnTo>
+                  <a:lnTo>
+                    <a:pt x="6940789" y="216985"/>
+                  </a:lnTo>
+                  <a:lnTo>
+                    <a:pt x="6867029" y="213022"/>
+                  </a:lnTo>
+                  <a:lnTo>
+                    <a:pt x="6793269" y="209033"/>
+                  </a:lnTo>
+                  <a:lnTo>
+                    <a:pt x="6719509" y="205018"/>
+                  </a:lnTo>
+                  <a:lnTo>
+                    <a:pt x="6645749" y="200977"/>
+                  </a:lnTo>
+                  <a:lnTo>
+                    <a:pt x="6571989" y="196910"/>
+                  </a:lnTo>
+                  <a:lnTo>
+                    <a:pt x="6498229" y="192816"/>
+                  </a:lnTo>
+                  <a:lnTo>
+                    <a:pt x="6424469" y="188696"/>
+                  </a:lnTo>
+                  <a:lnTo>
+                    <a:pt x="6350709" y="184549"/>
+                  </a:lnTo>
+                  <a:lnTo>
+                    <a:pt x="6276949" y="180375"/>
+                  </a:lnTo>
+                  <a:lnTo>
+                    <a:pt x="6203189" y="176174"/>
+                  </a:lnTo>
+                  <a:lnTo>
+                    <a:pt x="6129429" y="171946"/>
+                  </a:lnTo>
+                  <a:lnTo>
+                    <a:pt x="6055669" y="167691"/>
+                  </a:lnTo>
+                  <a:lnTo>
+                    <a:pt x="5981909" y="163408"/>
+                  </a:lnTo>
+                  <a:lnTo>
+                    <a:pt x="5908149" y="159097"/>
+                  </a:lnTo>
+                  <a:lnTo>
+                    <a:pt x="5834389" y="154758"/>
+                  </a:lnTo>
+                  <a:lnTo>
+                    <a:pt x="5760629" y="150390"/>
+                  </a:lnTo>
+                  <a:lnTo>
+                    <a:pt x="5686869" y="145995"/>
+                  </a:lnTo>
+                  <a:lnTo>
+                    <a:pt x="5613109" y="141571"/>
+                  </a:lnTo>
+                  <a:lnTo>
+                    <a:pt x="5539349" y="137118"/>
+                  </a:lnTo>
+                  <a:lnTo>
+                    <a:pt x="5465589" y="132637"/>
+                  </a:lnTo>
+                  <a:lnTo>
+                    <a:pt x="5391829" y="128126"/>
+                  </a:lnTo>
+                  <a:lnTo>
+                    <a:pt x="5318069" y="123586"/>
+                  </a:lnTo>
+                  <a:lnTo>
+                    <a:pt x="5244309" y="119017"/>
+                  </a:lnTo>
+                  <a:lnTo>
+                    <a:pt x="5170549" y="114418"/>
+                  </a:lnTo>
+                  <a:lnTo>
+                    <a:pt x="5096789" y="109789"/>
+                  </a:lnTo>
+                  <a:lnTo>
+                    <a:pt x="5023029" y="105130"/>
+                  </a:lnTo>
+                  <a:lnTo>
+                    <a:pt x="4949269" y="100441"/>
+                  </a:lnTo>
+                  <a:lnTo>
+                    <a:pt x="4875509" y="95722"/>
+                  </a:lnTo>
+                  <a:lnTo>
+                    <a:pt x="4801749" y="90971"/>
+                  </a:lnTo>
+                  <a:lnTo>
+                    <a:pt x="4727989" y="86190"/>
+                  </a:lnTo>
+                  <a:lnTo>
+                    <a:pt x="4654229" y="81378"/>
+                  </a:lnTo>
+                  <a:lnTo>
+                    <a:pt x="4580469" y="76535"/>
+                  </a:lnTo>
+                  <a:lnTo>
+                    <a:pt x="4506709" y="71661"/>
+                  </a:lnTo>
+                  <a:lnTo>
+                    <a:pt x="4432949" y="66754"/>
+                  </a:lnTo>
+                  <a:lnTo>
+                    <a:pt x="4359189" y="61816"/>
+                  </a:lnTo>
+                  <a:lnTo>
+                    <a:pt x="4285429" y="56846"/>
+                  </a:lnTo>
+                  <a:lnTo>
+                    <a:pt x="4211669" y="51844"/>
+                  </a:lnTo>
+                  <a:lnTo>
+                    <a:pt x="4137909" y="46809"/>
+                  </a:lnTo>
+                  <a:lnTo>
+                    <a:pt x="4064149" y="41741"/>
+                  </a:lnTo>
+                  <a:lnTo>
+                    <a:pt x="3990388" y="36641"/>
+                  </a:lnTo>
+                  <a:lnTo>
+                    <a:pt x="3916628" y="31507"/>
+                  </a:lnTo>
+                  <a:lnTo>
+                    <a:pt x="3842868" y="26341"/>
+                  </a:lnTo>
+                  <a:lnTo>
+                    <a:pt x="3769108" y="21140"/>
+                  </a:lnTo>
+                  <a:lnTo>
+                    <a:pt x="3695348" y="15906"/>
+                  </a:lnTo>
+                  <a:lnTo>
+                    <a:pt x="3621588" y="10638"/>
+                  </a:lnTo>
+                  <a:lnTo>
+                    <a:pt x="3547828" y="5336"/>
                   </a:lnTo>
                   <a:lnTo>
                     <a:pt x="3474068" y="0"/>
                   </a:lnTo>
                   <a:lnTo>
-                    <a:pt x="3400308" y="10520"/>
-                  </a:lnTo>
-                  <a:lnTo>
-                    <a:pt x="3326548" y="27793"/>
-                  </a:lnTo>
-                  <a:lnTo>
-                    <a:pt x="3252788" y="44718"/>
-                  </a:lnTo>
-                  <a:lnTo>
-                    <a:pt x="3179028" y="61301"/>
-                  </a:lnTo>
-                  <a:lnTo>
-                    <a:pt x="3105268" y="77551"/>
-                  </a:lnTo>
-                  <a:lnTo>
-                    <a:pt x="3031508" y="93473"/>
-                  </a:lnTo>
-                  <a:lnTo>
-                    <a:pt x="2957748" y="109075"/>
-                  </a:lnTo>
-                  <a:lnTo>
-                    <a:pt x="2883988" y="124362"/>
-                  </a:lnTo>
-                  <a:lnTo>
-                    <a:pt x="2810228" y="139342"/>
-                  </a:lnTo>
-                  <a:lnTo>
-                    <a:pt x="2736468" y="154019"/>
-                  </a:lnTo>
-                  <a:lnTo>
-                    <a:pt x="2662708" y="168401"/>
-                  </a:lnTo>
-                  <a:lnTo>
-                    <a:pt x="2588948" y="182493"/>
-                  </a:lnTo>
-                  <a:lnTo>
-                    <a:pt x="2515188" y="196302"/>
-                  </a:lnTo>
-                  <a:lnTo>
-                    <a:pt x="2441428" y="209832"/>
-                  </a:lnTo>
-                  <a:lnTo>
-                    <a:pt x="2367668" y="223089"/>
-                  </a:lnTo>
-                  <a:lnTo>
-                    <a:pt x="2293908" y="236080"/>
-                  </a:lnTo>
-                  <a:lnTo>
-                    <a:pt x="2220148" y="248809"/>
-                  </a:lnTo>
-                  <a:lnTo>
-                    <a:pt x="2146388" y="261281"/>
-                  </a:lnTo>
-                  <a:lnTo>
-                    <a:pt x="2072628" y="273503"/>
-                  </a:lnTo>
-                  <a:lnTo>
-                    <a:pt x="1998868" y="285478"/>
-                  </a:lnTo>
-                  <a:lnTo>
-                    <a:pt x="1925108" y="297211"/>
-                  </a:lnTo>
-                  <a:lnTo>
-                    <a:pt x="1851348" y="308709"/>
-                  </a:lnTo>
-                  <a:lnTo>
-                    <a:pt x="1777588" y="319975"/>
-                  </a:lnTo>
-                  <a:lnTo>
-                    <a:pt x="1703828" y="331014"/>
-                  </a:lnTo>
-                  <a:lnTo>
-                    <a:pt x="1630068" y="341830"/>
-                  </a:lnTo>
-                  <a:lnTo>
-                    <a:pt x="1556308" y="352429"/>
-                  </a:lnTo>
-                  <a:lnTo>
-                    <a:pt x="1482548" y="362814"/>
-                  </a:lnTo>
-                  <a:lnTo>
-                    <a:pt x="1408788" y="372990"/>
-                  </a:lnTo>
-                  <a:lnTo>
-                    <a:pt x="1335028" y="382961"/>
-                  </a:lnTo>
-                  <a:lnTo>
-                    <a:pt x="1261268" y="392731"/>
-                  </a:lnTo>
-                  <a:lnTo>
-                    <a:pt x="1187508" y="402304"/>
-                  </a:lnTo>
-                  <a:lnTo>
-                    <a:pt x="1113747" y="411685"/>
-                  </a:lnTo>
-                  <a:lnTo>
-                    <a:pt x="1039987" y="420876"/>
-                  </a:lnTo>
-                  <a:lnTo>
-                    <a:pt x="966227" y="429882"/>
-                  </a:lnTo>
-                  <a:lnTo>
-                    <a:pt x="892467" y="438707"/>
-                  </a:lnTo>
-                  <a:lnTo>
-                    <a:pt x="818707" y="447354"/>
-                  </a:lnTo>
-                  <a:lnTo>
-                    <a:pt x="744947" y="455827"/>
-                  </a:lnTo>
-                  <a:lnTo>
-                    <a:pt x="671187" y="464130"/>
-                  </a:lnTo>
-                  <a:lnTo>
-                    <a:pt x="597427" y="472265"/>
-                  </a:lnTo>
-                  <a:lnTo>
-                    <a:pt x="523667" y="480236"/>
-                  </a:lnTo>
-                  <a:lnTo>
-                    <a:pt x="449907" y="488046"/>
-                  </a:lnTo>
-                  <a:lnTo>
-                    <a:pt x="376147" y="495699"/>
-                  </a:lnTo>
-                  <a:lnTo>
-                    <a:pt x="302387" y="503199"/>
-                  </a:lnTo>
-                  <a:lnTo>
-                    <a:pt x="228627" y="510547"/>
-                  </a:lnTo>
-                  <a:lnTo>
-                    <a:pt x="154867" y="517746"/>
-                  </a:lnTo>
-                  <a:lnTo>
-                    <a:pt x="81107" y="524801"/>
-                  </a:lnTo>
-                  <a:lnTo>
-                    <a:pt x="7347" y="531714"/>
-                  </a:lnTo>
-                  <a:lnTo>
-                    <a:pt x="0" y="532389"/>
+                    <a:pt x="3400308" y="10034"/>
+                  </a:lnTo>
+                  <a:lnTo>
+                    <a:pt x="3326548" y="26508"/>
+                  </a:lnTo>
+                  <a:lnTo>
+                    <a:pt x="3252788" y="42650"/>
+                  </a:lnTo>
+                  <a:lnTo>
+                    <a:pt x="3179028" y="58467"/>
+                  </a:lnTo>
+                  <a:lnTo>
+                    <a:pt x="3105268" y="73965"/>
+                  </a:lnTo>
+                  <a:lnTo>
+                    <a:pt x="3031508" y="89151"/>
+                  </a:lnTo>
+                  <a:lnTo>
+                    <a:pt x="2957748" y="104031"/>
+                  </a:lnTo>
+                  <a:lnTo>
+                    <a:pt x="2883988" y="118612"/>
+                  </a:lnTo>
+                  <a:lnTo>
+                    <a:pt x="2810228" y="132898"/>
+                  </a:lnTo>
+                  <a:lnTo>
+                    <a:pt x="2736468" y="146897"/>
+                  </a:lnTo>
+                  <a:lnTo>
+                    <a:pt x="2662708" y="160614"/>
+                  </a:lnTo>
+                  <a:lnTo>
+                    <a:pt x="2588948" y="174055"/>
+                  </a:lnTo>
+                  <a:lnTo>
+                    <a:pt x="2515188" y="187225"/>
+                  </a:lnTo>
+                  <a:lnTo>
+                    <a:pt x="2441428" y="200129"/>
+                  </a:lnTo>
+                  <a:lnTo>
+                    <a:pt x="2367668" y="212774"/>
+                  </a:lnTo>
+                  <a:lnTo>
+                    <a:pt x="2293908" y="225164"/>
+                  </a:lnTo>
+                  <a:lnTo>
+                    <a:pt x="2220148" y="237304"/>
+                  </a:lnTo>
+                  <a:lnTo>
+                    <a:pt x="2146388" y="249200"/>
+                  </a:lnTo>
+                  <a:lnTo>
+                    <a:pt x="2072628" y="260856"/>
+                  </a:lnTo>
+                  <a:lnTo>
+                    <a:pt x="1998868" y="272277"/>
+                  </a:lnTo>
+                  <a:lnTo>
+                    <a:pt x="1925108" y="283469"/>
+                  </a:lnTo>
+                  <a:lnTo>
+                    <a:pt x="1851348" y="294434"/>
+                  </a:lnTo>
+                  <a:lnTo>
+                    <a:pt x="1777588" y="305179"/>
+                  </a:lnTo>
+                  <a:lnTo>
+                    <a:pt x="1703828" y="315708"/>
+                  </a:lnTo>
+                  <a:lnTo>
+                    <a:pt x="1630068" y="326024"/>
+                  </a:lnTo>
+                  <a:lnTo>
+                    <a:pt x="1556308" y="336133"/>
+                  </a:lnTo>
+                  <a:lnTo>
+                    <a:pt x="1482548" y="346038"/>
+                  </a:lnTo>
+                  <a:lnTo>
+                    <a:pt x="1408788" y="355743"/>
+                  </a:lnTo>
+                  <a:lnTo>
+                    <a:pt x="1335028" y="365253"/>
+                  </a:lnTo>
+                  <a:lnTo>
+                    <a:pt x="1261268" y="374571"/>
+                  </a:lnTo>
+                  <a:lnTo>
+                    <a:pt x="1187508" y="383702"/>
+                  </a:lnTo>
+                  <a:lnTo>
+                    <a:pt x="1113747" y="392648"/>
+                  </a:lnTo>
+                  <a:lnTo>
+                    <a:pt x="1039987" y="401415"/>
+                  </a:lnTo>
+                  <a:lnTo>
+                    <a:pt x="966227" y="410005"/>
+                  </a:lnTo>
+                  <a:lnTo>
+                    <a:pt x="892467" y="418422"/>
+                  </a:lnTo>
+                  <a:lnTo>
+                    <a:pt x="818707" y="426669"/>
+                  </a:lnTo>
+                  <a:lnTo>
+                    <a:pt x="744947" y="434750"/>
+                  </a:lnTo>
+                  <a:lnTo>
+                    <a:pt x="671187" y="442668"/>
+                  </a:lnTo>
+                  <a:lnTo>
+                    <a:pt x="597427" y="450427"/>
+                  </a:lnTo>
+                  <a:lnTo>
+                    <a:pt x="523667" y="458030"/>
+                  </a:lnTo>
+                  <a:lnTo>
+                    <a:pt x="449907" y="465479"/>
+                  </a:lnTo>
+                  <a:lnTo>
+                    <a:pt x="376147" y="472778"/>
+                  </a:lnTo>
+                  <a:lnTo>
+                    <a:pt x="302387" y="479931"/>
+                  </a:lnTo>
+                  <a:lnTo>
+                    <a:pt x="228627" y="486939"/>
+                  </a:lnTo>
+                  <a:lnTo>
+                    <a:pt x="154867" y="493806"/>
+                  </a:lnTo>
+                  <a:lnTo>
+                    <a:pt x="81107" y="500535"/>
+                  </a:lnTo>
+                  <a:lnTo>
+                    <a:pt x="7347" y="507128"/>
+                  </a:lnTo>
+                  <a:lnTo>
+                    <a:pt x="0" y="507772"/>
                   </a:lnTo>
                 </a:path>
               </a:pathLst>
@@ -4283,309 +4283,309 @@
           </p:nvSpPr>
           <p:spPr>
             <a:xfrm>
-              <a:off x="817517" y="4307506"/>
-              <a:ext cx="7235830" cy="613221"/>
+              <a:off x="817517" y="4372964"/>
+              <a:ext cx="7235830" cy="584866"/>
             </a:xfrm>
             <a:custGeom>
               <a:avLst/>
               <a:pathLst>
-                <a:path w="7235830" h="613221">
+                <a:path w="7235830" h="584866">
                   <a:moveTo>
-                    <a:pt x="0" y="613221"/>
+                    <a:pt x="0" y="584866"/>
                   </a:moveTo>
                   <a:lnTo>
-                    <a:pt x="7347" y="612787"/>
-                  </a:lnTo>
-                  <a:lnTo>
-                    <a:pt x="81107" y="608407"/>
-                  </a:lnTo>
-                  <a:lnTo>
-                    <a:pt x="154867" y="603996"/>
-                  </a:lnTo>
-                  <a:lnTo>
-                    <a:pt x="228627" y="599554"/>
-                  </a:lnTo>
-                  <a:lnTo>
-                    <a:pt x="302387" y="595081"/>
-                  </a:lnTo>
-                  <a:lnTo>
-                    <a:pt x="376147" y="590577"/>
-                  </a:lnTo>
-                  <a:lnTo>
-                    <a:pt x="449907" y="586042"/>
-                  </a:lnTo>
-                  <a:lnTo>
-                    <a:pt x="523667" y="581475"/>
-                  </a:lnTo>
-                  <a:lnTo>
-                    <a:pt x="597427" y="576876"/>
-                  </a:lnTo>
-                  <a:lnTo>
-                    <a:pt x="671187" y="572245"/>
-                  </a:lnTo>
-                  <a:lnTo>
-                    <a:pt x="744947" y="567582"/>
-                  </a:lnTo>
-                  <a:lnTo>
-                    <a:pt x="818707" y="562887"/>
-                  </a:lnTo>
-                  <a:lnTo>
-                    <a:pt x="892467" y="558158"/>
-                  </a:lnTo>
-                  <a:lnTo>
-                    <a:pt x="966227" y="553397"/>
-                  </a:lnTo>
-                  <a:lnTo>
-                    <a:pt x="1039987" y="548603"/>
-                  </a:lnTo>
-                  <a:lnTo>
-                    <a:pt x="1113747" y="543775"/>
-                  </a:lnTo>
-                  <a:lnTo>
-                    <a:pt x="1187508" y="538914"/>
-                  </a:lnTo>
-                  <a:lnTo>
-                    <a:pt x="1261268" y="534019"/>
-                  </a:lnTo>
-                  <a:lnTo>
-                    <a:pt x="1335028" y="529089"/>
-                  </a:lnTo>
-                  <a:lnTo>
-                    <a:pt x="1408788" y="524126"/>
-                  </a:lnTo>
-                  <a:lnTo>
-                    <a:pt x="1482548" y="519128"/>
-                  </a:lnTo>
-                  <a:lnTo>
-                    <a:pt x="1556308" y="514095"/>
-                  </a:lnTo>
-                  <a:lnTo>
-                    <a:pt x="1630068" y="509026"/>
-                  </a:lnTo>
-                  <a:lnTo>
-                    <a:pt x="1703828" y="503923"/>
-                  </a:lnTo>
-                  <a:lnTo>
-                    <a:pt x="1777588" y="498784"/>
-                  </a:lnTo>
-                  <a:lnTo>
-                    <a:pt x="1851348" y="493609"/>
-                  </a:lnTo>
-                  <a:lnTo>
-                    <a:pt x="1925108" y="488399"/>
-                  </a:lnTo>
-                  <a:lnTo>
-                    <a:pt x="1998868" y="483152"/>
-                  </a:lnTo>
-                  <a:lnTo>
-                    <a:pt x="2072628" y="477868"/>
-                  </a:lnTo>
-                  <a:lnTo>
-                    <a:pt x="2146388" y="472548"/>
-                  </a:lnTo>
-                  <a:lnTo>
-                    <a:pt x="2220148" y="467190"/>
-                  </a:lnTo>
-                  <a:lnTo>
-                    <a:pt x="2293908" y="461795"/>
-                  </a:lnTo>
-                  <a:lnTo>
-                    <a:pt x="2367668" y="456363"/>
-                  </a:lnTo>
-                  <a:lnTo>
-                    <a:pt x="2441428" y="450893"/>
-                  </a:lnTo>
-                  <a:lnTo>
-                    <a:pt x="2515188" y="445384"/>
-                  </a:lnTo>
-                  <a:lnTo>
-                    <a:pt x="2588948" y="439838"/>
-                  </a:lnTo>
-                  <a:lnTo>
-                    <a:pt x="2662708" y="434252"/>
-                  </a:lnTo>
-                  <a:lnTo>
-                    <a:pt x="2736468" y="428628"/>
-                  </a:lnTo>
-                  <a:lnTo>
-                    <a:pt x="2810228" y="422965"/>
-                  </a:lnTo>
-                  <a:lnTo>
-                    <a:pt x="2883988" y="417262"/>
-                  </a:lnTo>
-                  <a:lnTo>
-                    <a:pt x="2957748" y="411519"/>
-                  </a:lnTo>
-                  <a:lnTo>
-                    <a:pt x="3031508" y="405737"/>
-                  </a:lnTo>
-                  <a:lnTo>
-                    <a:pt x="3105268" y="399914"/>
-                  </a:lnTo>
-                  <a:lnTo>
-                    <a:pt x="3179028" y="394051"/>
-                  </a:lnTo>
-                  <a:lnTo>
-                    <a:pt x="3252788" y="388146"/>
-                  </a:lnTo>
-                  <a:lnTo>
-                    <a:pt x="3326548" y="382201"/>
-                  </a:lnTo>
-                  <a:lnTo>
-                    <a:pt x="3400308" y="376214"/>
-                  </a:lnTo>
-                  <a:lnTo>
-                    <a:pt x="3474068" y="370186"/>
-                  </a:lnTo>
-                  <a:lnTo>
-                    <a:pt x="3547828" y="364115"/>
-                  </a:lnTo>
-                  <a:lnTo>
-                    <a:pt x="3621588" y="358003"/>
-                  </a:lnTo>
-                  <a:lnTo>
-                    <a:pt x="3695348" y="351847"/>
-                  </a:lnTo>
-                  <a:lnTo>
-                    <a:pt x="3769108" y="345649"/>
-                  </a:lnTo>
-                  <a:lnTo>
-                    <a:pt x="3842868" y="339408"/>
-                  </a:lnTo>
-                  <a:lnTo>
-                    <a:pt x="3916628" y="333123"/>
-                  </a:lnTo>
-                  <a:lnTo>
-                    <a:pt x="3990388" y="326794"/>
-                  </a:lnTo>
-                  <a:lnTo>
-                    <a:pt x="4064149" y="320422"/>
-                  </a:lnTo>
-                  <a:lnTo>
-                    <a:pt x="4137909" y="314004"/>
-                  </a:lnTo>
-                  <a:lnTo>
-                    <a:pt x="4211669" y="307543"/>
-                  </a:lnTo>
-                  <a:lnTo>
-                    <a:pt x="4285429" y="301036"/>
-                  </a:lnTo>
-                  <a:lnTo>
-                    <a:pt x="4359189" y="294484"/>
-                  </a:lnTo>
-                  <a:lnTo>
-                    <a:pt x="4432949" y="287886"/>
-                  </a:lnTo>
-                  <a:lnTo>
-                    <a:pt x="4506709" y="281242"/>
-                  </a:lnTo>
-                  <a:lnTo>
-                    <a:pt x="4580469" y="274552"/>
-                  </a:lnTo>
-                  <a:lnTo>
-                    <a:pt x="4654229" y="267816"/>
-                  </a:lnTo>
-                  <a:lnTo>
-                    <a:pt x="4727989" y="261032"/>
-                  </a:lnTo>
-                  <a:lnTo>
-                    <a:pt x="4801749" y="254201"/>
-                  </a:lnTo>
-                  <a:lnTo>
-                    <a:pt x="4875509" y="247323"/>
-                  </a:lnTo>
-                  <a:lnTo>
-                    <a:pt x="4949269" y="240397"/>
-                  </a:lnTo>
-                  <a:lnTo>
-                    <a:pt x="5023029" y="233422"/>
-                  </a:lnTo>
-                  <a:lnTo>
-                    <a:pt x="5096789" y="226399"/>
-                  </a:lnTo>
-                  <a:lnTo>
-                    <a:pt x="5170549" y="219327"/>
-                  </a:lnTo>
-                  <a:lnTo>
-                    <a:pt x="5244309" y="212206"/>
-                  </a:lnTo>
-                  <a:lnTo>
-                    <a:pt x="5318069" y="205035"/>
-                  </a:lnTo>
-                  <a:lnTo>
-                    <a:pt x="5391829" y="197814"/>
-                  </a:lnTo>
-                  <a:lnTo>
-                    <a:pt x="5465589" y="190543"/>
-                  </a:lnTo>
-                  <a:lnTo>
-                    <a:pt x="5539349" y="183221"/>
-                  </a:lnTo>
-                  <a:lnTo>
-                    <a:pt x="5613109" y="175849"/>
-                  </a:lnTo>
-                  <a:lnTo>
-                    <a:pt x="5686869" y="168425"/>
-                  </a:lnTo>
-                  <a:lnTo>
-                    <a:pt x="5760629" y="160949"/>
-                  </a:lnTo>
-                  <a:lnTo>
-                    <a:pt x="5834389" y="153421"/>
-                  </a:lnTo>
-                  <a:lnTo>
-                    <a:pt x="5908149" y="145841"/>
-                  </a:lnTo>
-                  <a:lnTo>
-                    <a:pt x="5981909" y="138207"/>
-                  </a:lnTo>
-                  <a:lnTo>
-                    <a:pt x="6055669" y="130521"/>
-                  </a:lnTo>
-                  <a:lnTo>
-                    <a:pt x="6129429" y="122781"/>
-                  </a:lnTo>
-                  <a:lnTo>
-                    <a:pt x="6203189" y="114988"/>
-                  </a:lnTo>
-                  <a:lnTo>
-                    <a:pt x="6276949" y="107140"/>
-                  </a:lnTo>
-                  <a:lnTo>
-                    <a:pt x="6350709" y="99237"/>
-                  </a:lnTo>
-                  <a:lnTo>
-                    <a:pt x="6424469" y="91279"/>
-                  </a:lnTo>
-                  <a:lnTo>
-                    <a:pt x="6498229" y="83266"/>
-                  </a:lnTo>
-                  <a:lnTo>
-                    <a:pt x="6571989" y="75197"/>
-                  </a:lnTo>
-                  <a:lnTo>
-                    <a:pt x="6645749" y="67072"/>
-                  </a:lnTo>
-                  <a:lnTo>
-                    <a:pt x="6719509" y="58890"/>
-                  </a:lnTo>
-                  <a:lnTo>
-                    <a:pt x="6793269" y="50651"/>
-                  </a:lnTo>
-                  <a:lnTo>
-                    <a:pt x="6867029" y="42355"/>
-                  </a:lnTo>
-                  <a:lnTo>
-                    <a:pt x="6940789" y="34001"/>
-                  </a:lnTo>
-                  <a:lnTo>
-                    <a:pt x="7014550" y="25589"/>
-                  </a:lnTo>
-                  <a:lnTo>
-                    <a:pt x="7088310" y="17118"/>
-                  </a:lnTo>
-                  <a:lnTo>
-                    <a:pt x="7162070" y="8589"/>
+                    <a:pt x="7347" y="584452"/>
+                  </a:lnTo>
+                  <a:lnTo>
+                    <a:pt x="81107" y="580274"/>
+                  </a:lnTo>
+                  <a:lnTo>
+                    <a:pt x="154867" y="576067"/>
+                  </a:lnTo>
+                  <a:lnTo>
+                    <a:pt x="228627" y="571831"/>
+                  </a:lnTo>
+                  <a:lnTo>
+                    <a:pt x="302387" y="567565"/>
+                  </a:lnTo>
+                  <a:lnTo>
+                    <a:pt x="376147" y="563269"/>
+                  </a:lnTo>
+                  <a:lnTo>
+                    <a:pt x="449907" y="558943"/>
+                  </a:lnTo>
+                  <a:lnTo>
+                    <a:pt x="523667" y="554588"/>
+                  </a:lnTo>
+                  <a:lnTo>
+                    <a:pt x="597427" y="550201"/>
+                  </a:lnTo>
+                  <a:lnTo>
+                    <a:pt x="671187" y="545785"/>
+                  </a:lnTo>
+                  <a:lnTo>
+                    <a:pt x="744947" y="541337"/>
+                  </a:lnTo>
+                  <a:lnTo>
+                    <a:pt x="818707" y="536859"/>
+                  </a:lnTo>
+                  <a:lnTo>
+                    <a:pt x="892467" y="532349"/>
+                  </a:lnTo>
+                  <a:lnTo>
+                    <a:pt x="966227" y="527808"/>
+                  </a:lnTo>
+                  <a:lnTo>
+                    <a:pt x="1039987" y="523236"/>
+                  </a:lnTo>
+                  <a:lnTo>
+                    <a:pt x="1113747" y="518631"/>
+                  </a:lnTo>
+                  <a:lnTo>
+                    <a:pt x="1187508" y="513995"/>
+                  </a:lnTo>
+                  <a:lnTo>
+                    <a:pt x="1261268" y="509326"/>
+                  </a:lnTo>
+                  <a:lnTo>
+                    <a:pt x="1335028" y="504624"/>
+                  </a:lnTo>
+                  <a:lnTo>
+                    <a:pt x="1408788" y="499890"/>
+                  </a:lnTo>
+                  <a:lnTo>
+                    <a:pt x="1482548" y="495123"/>
+                  </a:lnTo>
+                  <a:lnTo>
+                    <a:pt x="1556308" y="490323"/>
+                  </a:lnTo>
+                  <a:lnTo>
+                    <a:pt x="1630068" y="485489"/>
+                  </a:lnTo>
+                  <a:lnTo>
+                    <a:pt x="1703828" y="480622"/>
+                  </a:lnTo>
+                  <a:lnTo>
+                    <a:pt x="1777588" y="475721"/>
+                  </a:lnTo>
+                  <a:lnTo>
+                    <a:pt x="1851348" y="470785"/>
+                  </a:lnTo>
+                  <a:lnTo>
+                    <a:pt x="1925108" y="465815"/>
+                  </a:lnTo>
+                  <a:lnTo>
+                    <a:pt x="1998868" y="460811"/>
+                  </a:lnTo>
+                  <a:lnTo>
+                    <a:pt x="2072628" y="455772"/>
+                  </a:lnTo>
+                  <a:lnTo>
+                    <a:pt x="2146388" y="450697"/>
+                  </a:lnTo>
+                  <a:lnTo>
+                    <a:pt x="2220148" y="445587"/>
+                  </a:lnTo>
+                  <a:lnTo>
+                    <a:pt x="2293908" y="440442"/>
+                  </a:lnTo>
+                  <a:lnTo>
+                    <a:pt x="2367668" y="435261"/>
+                  </a:lnTo>
+                  <a:lnTo>
+                    <a:pt x="2441428" y="430044"/>
+                  </a:lnTo>
+                  <a:lnTo>
+                    <a:pt x="2515188" y="424790"/>
+                  </a:lnTo>
+                  <a:lnTo>
+                    <a:pt x="2588948" y="419500"/>
+                  </a:lnTo>
+                  <a:lnTo>
+                    <a:pt x="2662708" y="414173"/>
+                  </a:lnTo>
+                  <a:lnTo>
+                    <a:pt x="2736468" y="408809"/>
+                  </a:lnTo>
+                  <a:lnTo>
+                    <a:pt x="2810228" y="403407"/>
+                  </a:lnTo>
+                  <a:lnTo>
+                    <a:pt x="2883988" y="397968"/>
+                  </a:lnTo>
+                  <a:lnTo>
+                    <a:pt x="2957748" y="392491"/>
+                  </a:lnTo>
+                  <a:lnTo>
+                    <a:pt x="3031508" y="386976"/>
+                  </a:lnTo>
+                  <a:lnTo>
+                    <a:pt x="3105268" y="381422"/>
+                  </a:lnTo>
+                  <a:lnTo>
+                    <a:pt x="3179028" y="375830"/>
+                  </a:lnTo>
+                  <a:lnTo>
+                    <a:pt x="3252788" y="370199"/>
+                  </a:lnTo>
+                  <a:lnTo>
+                    <a:pt x="3326548" y="364528"/>
+                  </a:lnTo>
+                  <a:lnTo>
+                    <a:pt x="3400308" y="358818"/>
+                  </a:lnTo>
+                  <a:lnTo>
+                    <a:pt x="3474068" y="353069"/>
+                  </a:lnTo>
+                  <a:lnTo>
+                    <a:pt x="3547828" y="347279"/>
+                  </a:lnTo>
+                  <a:lnTo>
+                    <a:pt x="3621588" y="341449"/>
+                  </a:lnTo>
+                  <a:lnTo>
+                    <a:pt x="3695348" y="335578"/>
+                  </a:lnTo>
+                  <a:lnTo>
+                    <a:pt x="3769108" y="329666"/>
+                  </a:lnTo>
+                  <a:lnTo>
+                    <a:pt x="3842868" y="323714"/>
+                  </a:lnTo>
+                  <a:lnTo>
+                    <a:pt x="3916628" y="317719"/>
+                  </a:lnTo>
+                  <a:lnTo>
+                    <a:pt x="3990388" y="311683"/>
+                  </a:lnTo>
+                  <a:lnTo>
+                    <a:pt x="4064149" y="305605"/>
+                  </a:lnTo>
+                  <a:lnTo>
+                    <a:pt x="4137909" y="299485"/>
+                  </a:lnTo>
+                  <a:lnTo>
+                    <a:pt x="4211669" y="293322"/>
+                  </a:lnTo>
+                  <a:lnTo>
+                    <a:pt x="4285429" y="287116"/>
+                  </a:lnTo>
+                  <a:lnTo>
+                    <a:pt x="4359189" y="280867"/>
+                  </a:lnTo>
+                  <a:lnTo>
+                    <a:pt x="4432949" y="274574"/>
+                  </a:lnTo>
+                  <a:lnTo>
+                    <a:pt x="4506709" y="268238"/>
+                  </a:lnTo>
+                  <a:lnTo>
+                    <a:pt x="4580469" y="261857"/>
+                  </a:lnTo>
+                  <a:lnTo>
+                    <a:pt x="4654229" y="255432"/>
+                  </a:lnTo>
+                  <a:lnTo>
+                    <a:pt x="4727989" y="248962"/>
+                  </a:lnTo>
+                  <a:lnTo>
+                    <a:pt x="4801749" y="242447"/>
+                  </a:lnTo>
+                  <a:lnTo>
+                    <a:pt x="4875509" y="235887"/>
+                  </a:lnTo>
+                  <a:lnTo>
+                    <a:pt x="4949269" y="229281"/>
+                  </a:lnTo>
+                  <a:lnTo>
+                    <a:pt x="5023029" y="222629"/>
+                  </a:lnTo>
+                  <a:lnTo>
+                    <a:pt x="5096789" y="215931"/>
+                  </a:lnTo>
+                  <a:lnTo>
+                    <a:pt x="5170549" y="209186"/>
+                  </a:lnTo>
+                  <a:lnTo>
+                    <a:pt x="5244309" y="202394"/>
+                  </a:lnTo>
+                  <a:lnTo>
+                    <a:pt x="5318069" y="195554"/>
+                  </a:lnTo>
+                  <a:lnTo>
+                    <a:pt x="5391829" y="188667"/>
+                  </a:lnTo>
+                  <a:lnTo>
+                    <a:pt x="5465589" y="181733"/>
+                  </a:lnTo>
+                  <a:lnTo>
+                    <a:pt x="5539349" y="174749"/>
+                  </a:lnTo>
+                  <a:lnTo>
+                    <a:pt x="5613109" y="167718"/>
+                  </a:lnTo>
+                  <a:lnTo>
+                    <a:pt x="5686869" y="160637"/>
+                  </a:lnTo>
+                  <a:lnTo>
+                    <a:pt x="5760629" y="153507"/>
+                  </a:lnTo>
+                  <a:lnTo>
+                    <a:pt x="5834389" y="146327"/>
+                  </a:lnTo>
+                  <a:lnTo>
+                    <a:pt x="5908149" y="139097"/>
+                  </a:lnTo>
+                  <a:lnTo>
+                    <a:pt x="5981909" y="131817"/>
+                  </a:lnTo>
+                  <a:lnTo>
+                    <a:pt x="6055669" y="124486"/>
+                  </a:lnTo>
+                  <a:lnTo>
+                    <a:pt x="6129429" y="117104"/>
+                  </a:lnTo>
+                  <a:lnTo>
+                    <a:pt x="6203189" y="109671"/>
+                  </a:lnTo>
+                  <a:lnTo>
+                    <a:pt x="6276949" y="102185"/>
+                  </a:lnTo>
+                  <a:lnTo>
+                    <a:pt x="6350709" y="94648"/>
+                  </a:lnTo>
+                  <a:lnTo>
+                    <a:pt x="6424469" y="87058"/>
+                  </a:lnTo>
+                  <a:lnTo>
+                    <a:pt x="6498229" y="79416"/>
+                  </a:lnTo>
+                  <a:lnTo>
+                    <a:pt x="6571989" y="71720"/>
+                  </a:lnTo>
+                  <a:lnTo>
+                    <a:pt x="6645749" y="63970"/>
+                  </a:lnTo>
+                  <a:lnTo>
+                    <a:pt x="6719509" y="56167"/>
+                  </a:lnTo>
+                  <a:lnTo>
+                    <a:pt x="6793269" y="48309"/>
+                  </a:lnTo>
+                  <a:lnTo>
+                    <a:pt x="6867029" y="40397"/>
+                  </a:lnTo>
+                  <a:lnTo>
+                    <a:pt x="6940789" y="32429"/>
+                  </a:lnTo>
+                  <a:lnTo>
+                    <a:pt x="7014550" y="24406"/>
+                  </a:lnTo>
+                  <a:lnTo>
+                    <a:pt x="7088310" y="16327"/>
+                  </a:lnTo>
+                  <a:lnTo>
+                    <a:pt x="7162070" y="8191"/>
                   </a:lnTo>
                   <a:lnTo>
                     <a:pt x="7235830" y="0"/>
@@ -4617,7 +4617,7 @@
           </p:nvSpPr>
           <p:spPr>
             <a:xfrm>
-              <a:off x="817517" y="4679530"/>
+              <a:off x="817517" y="4727786"/>
               <a:ext cx="7799693" cy="0"/>
             </a:xfrm>
             <a:custGeom>
@@ -4660,15 +4660,15 @@
           </p:nvSpPr>
           <p:spPr>
             <a:xfrm>
-              <a:off x="4269157" y="1896563"/>
-              <a:ext cx="0" cy="3826579"/>
+              <a:off x="4269157" y="2073503"/>
+              <a:ext cx="0" cy="3649639"/>
             </a:xfrm>
             <a:custGeom>
               <a:avLst/>
               <a:pathLst>
-                <a:path w="0" h="3826579">
+                <a:path w="0" h="3649639">
                   <a:moveTo>
-                    <a:pt x="0" y="3826579"/>
+                    <a:pt x="0" y="3649639"/>
                   </a:moveTo>
                   <a:lnTo>
                     <a:pt x="0" y="0"/>
@@ -4703,7 +4703,7 @@
           </p:nvSpPr>
           <p:spPr>
             <a:xfrm>
-              <a:off x="692708" y="5509156"/>
+              <a:off x="692708" y="5517199"/>
               <a:ext cx="62179" cy="80101"/>
             </a:xfrm>
             <a:prstGeom prst="rect">
@@ -4749,7 +4749,7 @@
           </p:nvSpPr>
           <p:spPr>
             <a:xfrm>
-              <a:off x="692708" y="4639479"/>
+              <a:off x="692708" y="4687735"/>
               <a:ext cx="62179" cy="80101"/>
             </a:xfrm>
             <a:prstGeom prst="rect">
@@ -4795,7 +4795,7 @@
           </p:nvSpPr>
           <p:spPr>
             <a:xfrm>
-              <a:off x="692708" y="3769802"/>
+              <a:off x="692708" y="3858272"/>
               <a:ext cx="62179" cy="80101"/>
             </a:xfrm>
             <a:prstGeom prst="rect">
@@ -4841,7 +4841,7 @@
           </p:nvSpPr>
           <p:spPr>
             <a:xfrm>
-              <a:off x="692708" y="2900125"/>
+              <a:off x="692708" y="3028808"/>
               <a:ext cx="62179" cy="80101"/>
             </a:xfrm>
             <a:prstGeom prst="rect">
@@ -4887,7 +4887,7 @@
           </p:nvSpPr>
           <p:spPr>
             <a:xfrm>
-              <a:off x="692708" y="2030448"/>
+              <a:off x="692708" y="2199345"/>
               <a:ext cx="62179" cy="80101"/>
             </a:xfrm>
             <a:prstGeom prst="rect">
@@ -5163,7 +5163,7 @@
           </p:nvSpPr>
           <p:spPr>
             <a:xfrm rot="-5400000">
-              <a:off x="68446" y="3759743"/>
+              <a:off x="68446" y="3848213"/>
               <a:ext cx="1016904" cy="100218"/>
             </a:xfrm>
             <a:prstGeom prst="rect">
@@ -5204,6 +5204,52 @@
         <p:sp>
           <p:nvSpPr>
             <p:cNvPr id="38" name="tx38"/>
+            <p:cNvSpPr/>
+            <p:nvPr/>
+          </p:nvSpPr>
+          <p:spPr>
+            <a:xfrm>
+              <a:off x="817517" y="1896563"/>
+              <a:ext cx="5626211" cy="82021"/>
+            </a:xfrm>
+            <a:prstGeom prst="rect">
+              <a:avLst/>
+            </a:prstGeom>
+            <a:noFill/>
+          </p:spPr>
+          <p:txBody>
+            <a:bodyPr lIns="0" rIns="0" tIns="0" bIns="0" anchorCtr="1" anchor="ctr" wrap="none"/>
+            <a:lstStyle/>
+            <a:p>
+              <a:pPr algn="l" marL="0" marR="0" indent="0">
+                <a:lnSpc>
+                  <a:spcPts val="900"/>
+                </a:lnSpc>
+                <a:spcBef>
+                  <a:spcPts val="0"/>
+                </a:spcBef>
+                <a:spcAft>
+                  <a:spcPts val="0"/>
+                </a:spcAft>
+              </a:pPr>
+              <a:r>
+                <a:rPr sz="900">
+                  <a:solidFill>
+                    <a:srgbClr val="404040">
+                      <a:alpha val="100000"/>
+                    </a:srgbClr>
+                  </a:solidFill>
+                  <a:latin typeface="Helvetica"/>
+                  <a:cs typeface="Helvetica"/>
+                </a:rPr>
+                <a:t>subHR per 0.1 ratio decline: 0.92 (0.78-1.08)  |  per IQR decline (Δ = 0.29): 0.78 (0.49-1.26)  |  IQR: [0.85, 1.15]</a:t>
+              </a:r>
+            </a:p>
+          </p:txBody>
+        </p:sp>
+        <p:sp>
+          <p:nvSpPr>
+            <p:cNvPr id="39" name="tx39"/>
             <p:cNvSpPr/>
             <p:nvPr/>
           </p:nvSpPr>

--- a/docs/pptx/whole/jx-linsubhr-ratio-hosp10.pptx
+++ b/docs/pptx/whole/jx-linsubhr-ratio-hosp10.pptx
@@ -5210,7 +5210,7 @@
           <p:spPr>
             <a:xfrm>
               <a:off x="817517" y="1896563"/>
-              <a:ext cx="5626211" cy="82021"/>
+              <a:ext cx="6169365" cy="82021"/>
             </a:xfrm>
             <a:prstGeom prst="rect">
               <a:avLst/>
@@ -5242,7 +5242,7 @@
                   <a:latin typeface="Helvetica"/>
                   <a:cs typeface="Helvetica"/>
                 </a:rPr>
-                <a:t>subHR per 0.1 ratio decline: 0.92 (0.78-1.08)  |  per IQR decline (Δ = 0.29): 0.78 (0.49-1.26)  |  IQR: [0.85, 1.15]</a:t>
+                <a:t>subHR per 0.1 ratio decline: 0.92 (0.78-1.08), p = 0.310  |  per IQR decline (Δ = 0.29): 0.78 (0.49-1.26)  |  IQR: [0.85, 1.15]</a:t>
               </a:r>
             </a:p>
           </p:txBody>

--- a/docs/pptx/whole/jx-linsubhr-ratio-hosp10.pptx
+++ b/docs/pptx/whole/jx-linsubhr-ratio-hosp10.pptx
@@ -2443,7 +2443,7 @@
           </p:nvSpPr>
           <p:spPr>
             <a:xfrm>
-              <a:off x="1615213" y="2073503"/>
+              <a:off x="1365633" y="2073503"/>
               <a:ext cx="0" cy="3649639"/>
             </a:xfrm>
             <a:custGeom>
@@ -2486,7 +2486,7 @@
           </p:nvSpPr>
           <p:spPr>
             <a:xfrm>
-              <a:off x="3387871" y="2073503"/>
+              <a:off x="3517243" y="2073503"/>
               <a:ext cx="0" cy="3649639"/>
             </a:xfrm>
             <a:custGeom>
@@ -2529,7 +2529,7 @@
           </p:nvSpPr>
           <p:spPr>
             <a:xfrm>
-              <a:off x="5160528" y="2073503"/>
+              <a:off x="5668852" y="2073503"/>
               <a:ext cx="0" cy="3649639"/>
             </a:xfrm>
             <a:custGeom>
@@ -2572,7 +2572,7 @@
           </p:nvSpPr>
           <p:spPr>
             <a:xfrm>
-              <a:off x="6933186" y="2073503"/>
+              <a:off x="7820461" y="2073503"/>
               <a:ext cx="0" cy="3649639"/>
             </a:xfrm>
             <a:custGeom>
@@ -2830,7 +2830,7 @@
           </p:nvSpPr>
           <p:spPr>
             <a:xfrm>
-              <a:off x="2501542" y="2073503"/>
+              <a:off x="2441438" y="2073503"/>
               <a:ext cx="0" cy="3649639"/>
             </a:xfrm>
             <a:custGeom>
@@ -2873,7 +2873,7 @@
           </p:nvSpPr>
           <p:spPr>
             <a:xfrm>
-              <a:off x="4274200" y="2073503"/>
+              <a:off x="4593047" y="2073503"/>
               <a:ext cx="0" cy="3649639"/>
             </a:xfrm>
             <a:custGeom>
@@ -2916,7 +2916,7 @@
           </p:nvSpPr>
           <p:spPr>
             <a:xfrm>
-              <a:off x="6046857" y="2073503"/>
+              <a:off x="6744657" y="2073503"/>
               <a:ext cx="0" cy="3649639"/>
             </a:xfrm>
             <a:custGeom>
@@ -2953,661 +2953,618 @@
         </p:sp>
         <p:sp>
           <p:nvSpPr>
-            <p:cNvPr id="20" name="pl20"/>
+            <p:cNvPr id="20" name="pg20"/>
             <p:cNvSpPr/>
             <p:nvPr/>
           </p:nvSpPr>
           <p:spPr>
             <a:xfrm>
-              <a:off x="7819515" y="2073503"/>
-              <a:ext cx="0" cy="3649639"/>
+              <a:off x="1172049" y="3201037"/>
+              <a:ext cx="7090630" cy="2041967"/>
             </a:xfrm>
             <a:custGeom>
               <a:avLst/>
               <a:pathLst>
-                <a:path w="0" h="3649639">
+                <a:path w="7090630" h="2041967">
                   <a:moveTo>
-                    <a:pt x="0" y="3649639"/>
+                    <a:pt x="0" y="1227035"/>
                   </a:moveTo>
                   <a:lnTo>
-                    <a:pt x="0" y="0"/>
-                  </a:lnTo>
-                  <a:lnTo>
-                    <a:pt x="0" y="0"/>
-                  </a:lnTo>
-                </a:path>
-              </a:pathLst>
-            </a:custGeom>
-            <a:ln w="13550" cap="flat">
-              <a:solidFill>
-                <a:srgbClr val="EBEBEB">
-                  <a:alpha val="100000"/>
-                </a:srgbClr>
-              </a:solidFill>
-              <a:prstDash val="solid"/>
-              <a:round/>
-            </a:ln>
-          </p:spPr>
-          <p:txBody>
-            <a:bodyPr/>
-            <a:lstStyle/>
-            <a:p/>
-          </p:txBody>
-        </p:sp>
-        <p:sp>
-          <p:nvSpPr>
-            <p:cNvPr id="21" name="pg21"/>
-            <p:cNvSpPr/>
-            <p:nvPr/>
-          </p:nvSpPr>
-          <p:spPr>
-            <a:xfrm>
-              <a:off x="817517" y="3201037"/>
-              <a:ext cx="7235830" cy="2036150"/>
-            </a:xfrm>
-            <a:custGeom>
-              <a:avLst/>
-              <a:pathLst>
-                <a:path w="7235830" h="2036150">
-                  <a:moveTo>
-                    <a:pt x="0" y="1233589"/>
-                  </a:moveTo>
-                  <a:lnTo>
-                    <a:pt x="7347" y="1234314"/>
-                  </a:lnTo>
-                  <a:lnTo>
-                    <a:pt x="81107" y="1241546"/>
-                  </a:lnTo>
-                  <a:lnTo>
-                    <a:pt x="154867" y="1248732"/>
-                  </a:lnTo>
-                  <a:lnTo>
-                    <a:pt x="228627" y="1255871"/>
-                  </a:lnTo>
-                  <a:lnTo>
-                    <a:pt x="302387" y="1262964"/>
-                  </a:lnTo>
-                  <a:lnTo>
-                    <a:pt x="376147" y="1270012"/>
-                  </a:lnTo>
-                  <a:lnTo>
-                    <a:pt x="449907" y="1277014"/>
-                  </a:lnTo>
-                  <a:lnTo>
-                    <a:pt x="523667" y="1283971"/>
-                  </a:lnTo>
-                  <a:lnTo>
-                    <a:pt x="597427" y="1290883"/>
-                  </a:lnTo>
-                  <a:lnTo>
-                    <a:pt x="671187" y="1297751"/>
-                  </a:lnTo>
-                  <a:lnTo>
-                    <a:pt x="744947" y="1304574"/>
-                  </a:lnTo>
-                  <a:lnTo>
-                    <a:pt x="818707" y="1311353"/>
-                  </a:lnTo>
-                  <a:lnTo>
-                    <a:pt x="892467" y="1318089"/>
-                  </a:lnTo>
-                  <a:lnTo>
-                    <a:pt x="966227" y="1324781"/>
-                  </a:lnTo>
-                  <a:lnTo>
-                    <a:pt x="1039987" y="1331430"/>
-                  </a:lnTo>
-                  <a:lnTo>
-                    <a:pt x="1113747" y="1338037"/>
-                  </a:lnTo>
-                  <a:lnTo>
-                    <a:pt x="1187508" y="1344600"/>
-                  </a:lnTo>
-                  <a:lnTo>
-                    <a:pt x="1261268" y="1351122"/>
-                  </a:lnTo>
-                  <a:lnTo>
-                    <a:pt x="1335028" y="1357601"/>
-                  </a:lnTo>
-                  <a:lnTo>
-                    <a:pt x="1408788" y="1364038"/>
-                  </a:lnTo>
-                  <a:lnTo>
-                    <a:pt x="1482548" y="1370434"/>
-                  </a:lnTo>
-                  <a:lnTo>
-                    <a:pt x="1556308" y="1376789"/>
-                  </a:lnTo>
-                  <a:lnTo>
-                    <a:pt x="1630068" y="1383103"/>
-                  </a:lnTo>
-                  <a:lnTo>
-                    <a:pt x="1703828" y="1389376"/>
-                  </a:lnTo>
-                  <a:lnTo>
-                    <a:pt x="1777588" y="1395609"/>
-                  </a:lnTo>
-                  <a:lnTo>
-                    <a:pt x="1851348" y="1401801"/>
-                  </a:lnTo>
-                  <a:lnTo>
-                    <a:pt x="1925108" y="1407954"/>
-                  </a:lnTo>
-                  <a:lnTo>
-                    <a:pt x="1998868" y="1414067"/>
-                  </a:lnTo>
-                  <a:lnTo>
-                    <a:pt x="2072628" y="1420140"/>
-                  </a:lnTo>
-                  <a:lnTo>
-                    <a:pt x="2146388" y="1426175"/>
-                  </a:lnTo>
-                  <a:lnTo>
-                    <a:pt x="2220148" y="1432170"/>
-                  </a:lnTo>
-                  <a:lnTo>
-                    <a:pt x="2293908" y="1438127"/>
-                  </a:lnTo>
-                  <a:lnTo>
-                    <a:pt x="2367668" y="1444045"/>
-                  </a:lnTo>
-                  <a:lnTo>
-                    <a:pt x="2441428" y="1449925"/>
-                  </a:lnTo>
-                  <a:lnTo>
-                    <a:pt x="2515188" y="1455768"/>
-                  </a:lnTo>
-                  <a:lnTo>
-                    <a:pt x="2588948" y="1461572"/>
-                  </a:lnTo>
-                  <a:lnTo>
-                    <a:pt x="2662708" y="1467340"/>
-                  </a:lnTo>
-                  <a:lnTo>
-                    <a:pt x="2736468" y="1473070"/>
-                  </a:lnTo>
-                  <a:lnTo>
-                    <a:pt x="2810228" y="1478763"/>
-                  </a:lnTo>
-                  <a:lnTo>
-                    <a:pt x="2883988" y="1484419"/>
-                  </a:lnTo>
-                  <a:lnTo>
-                    <a:pt x="2957748" y="1490039"/>
-                  </a:lnTo>
-                  <a:lnTo>
-                    <a:pt x="3031508" y="1495623"/>
-                  </a:lnTo>
-                  <a:lnTo>
-                    <a:pt x="3105268" y="1501171"/>
-                  </a:lnTo>
-                  <a:lnTo>
-                    <a:pt x="3179028" y="1506683"/>
-                  </a:lnTo>
-                  <a:lnTo>
-                    <a:pt x="3252788" y="1512159"/>
-                  </a:lnTo>
-                  <a:lnTo>
-                    <a:pt x="3326548" y="1517600"/>
-                  </a:lnTo>
-                  <a:lnTo>
-                    <a:pt x="3400308" y="1523006"/>
-                  </a:lnTo>
-                  <a:lnTo>
-                    <a:pt x="3474068" y="1521599"/>
-                  </a:lnTo>
-                  <a:lnTo>
-                    <a:pt x="3547828" y="1504441"/>
-                  </a:lnTo>
-                  <a:lnTo>
-                    <a:pt x="3621588" y="1486930"/>
-                  </a:lnTo>
-                  <a:lnTo>
-                    <a:pt x="3695348" y="1469059"/>
-                  </a:lnTo>
-                  <a:lnTo>
-                    <a:pt x="3769108" y="1450821"/>
-                  </a:lnTo>
-                  <a:lnTo>
-                    <a:pt x="3842868" y="1432208"/>
-                  </a:lnTo>
-                  <a:lnTo>
-                    <a:pt x="3916628" y="1413212"/>
-                  </a:lnTo>
-                  <a:lnTo>
-                    <a:pt x="3990388" y="1393825"/>
-                  </a:lnTo>
-                  <a:lnTo>
-                    <a:pt x="4064149" y="1374040"/>
-                  </a:lnTo>
-                  <a:lnTo>
-                    <a:pt x="4137909" y="1353848"/>
-                  </a:lnTo>
-                  <a:lnTo>
-                    <a:pt x="4211669" y="1333241"/>
-                  </a:lnTo>
-                  <a:lnTo>
-                    <a:pt x="4285429" y="1312211"/>
-                  </a:lnTo>
-                  <a:lnTo>
-                    <a:pt x="4359189" y="1290748"/>
-                  </a:lnTo>
-                  <a:lnTo>
-                    <a:pt x="4432949" y="1268844"/>
-                  </a:lnTo>
-                  <a:lnTo>
-                    <a:pt x="4506709" y="1246489"/>
-                  </a:lnTo>
-                  <a:lnTo>
-                    <a:pt x="4580469" y="1223675"/>
-                  </a:lnTo>
-                  <a:lnTo>
-                    <a:pt x="4654229" y="1200392"/>
-                  </a:lnTo>
-                  <a:lnTo>
-                    <a:pt x="4727989" y="1176630"/>
-                  </a:lnTo>
-                  <a:lnTo>
-                    <a:pt x="4801749" y="1152380"/>
-                  </a:lnTo>
-                  <a:lnTo>
-                    <a:pt x="4875509" y="1127631"/>
-                  </a:lnTo>
-                  <a:lnTo>
-                    <a:pt x="4949269" y="1102374"/>
-                  </a:lnTo>
-                  <a:lnTo>
-                    <a:pt x="5023029" y="1076597"/>
-                  </a:lnTo>
-                  <a:lnTo>
-                    <a:pt x="5096789" y="1050290"/>
-                  </a:lnTo>
-                  <a:lnTo>
-                    <a:pt x="5170549" y="1023442"/>
-                  </a:lnTo>
-                  <a:lnTo>
-                    <a:pt x="5244309" y="996043"/>
-                  </a:lnTo>
-                  <a:lnTo>
-                    <a:pt x="5318069" y="968080"/>
-                  </a:lnTo>
-                  <a:lnTo>
-                    <a:pt x="5391829" y="939542"/>
-                  </a:lnTo>
-                  <a:lnTo>
-                    <a:pt x="5465589" y="910418"/>
-                  </a:lnTo>
-                  <a:lnTo>
-                    <a:pt x="5539349" y="880695"/>
-                  </a:lnTo>
-                  <a:lnTo>
-                    <a:pt x="5613109" y="850361"/>
-                  </a:lnTo>
-                  <a:lnTo>
-                    <a:pt x="5686869" y="819403"/>
-                  </a:lnTo>
-                  <a:lnTo>
-                    <a:pt x="5760629" y="787809"/>
-                  </a:lnTo>
-                  <a:lnTo>
-                    <a:pt x="5834389" y="755565"/>
-                  </a:lnTo>
-                  <a:lnTo>
-                    <a:pt x="5908149" y="722658"/>
-                  </a:lnTo>
-                  <a:lnTo>
-                    <a:pt x="5981909" y="689075"/>
-                  </a:lnTo>
-                  <a:lnTo>
-                    <a:pt x="6055669" y="654802"/>
-                  </a:lnTo>
-                  <a:lnTo>
-                    <a:pt x="6129429" y="619823"/>
-                  </a:lnTo>
-                  <a:lnTo>
-                    <a:pt x="6203189" y="584126"/>
-                  </a:lnTo>
-                  <a:lnTo>
-                    <a:pt x="6276949" y="547695"/>
-                  </a:lnTo>
-                  <a:lnTo>
-                    <a:pt x="6350709" y="510515"/>
-                  </a:lnTo>
-                  <a:lnTo>
-                    <a:pt x="6424469" y="472570"/>
-                  </a:lnTo>
-                  <a:lnTo>
-                    <a:pt x="6498229" y="433846"/>
-                  </a:lnTo>
-                  <a:lnTo>
-                    <a:pt x="6571989" y="394325"/>
-                  </a:lnTo>
-                  <a:lnTo>
-                    <a:pt x="6645749" y="353992"/>
-                  </a:lnTo>
-                  <a:lnTo>
-                    <a:pt x="6719509" y="312830"/>
-                  </a:lnTo>
-                  <a:lnTo>
-                    <a:pt x="6793269" y="270821"/>
-                  </a:lnTo>
-                  <a:lnTo>
-                    <a:pt x="6867029" y="227949"/>
-                  </a:lnTo>
-                  <a:lnTo>
-                    <a:pt x="6940789" y="184196"/>
-                  </a:lnTo>
-                  <a:lnTo>
-                    <a:pt x="7014550" y="139542"/>
-                  </a:lnTo>
-                  <a:lnTo>
-                    <a:pt x="7088310" y="93971"/>
-                  </a:lnTo>
-                  <a:lnTo>
-                    <a:pt x="7162070" y="47464"/>
-                  </a:lnTo>
-                  <a:lnTo>
-                    <a:pt x="7235830" y="0"/>
-                  </a:lnTo>
-                  <a:lnTo>
-                    <a:pt x="7235830" y="1760963"/>
-                  </a:lnTo>
-                  <a:lnTo>
-                    <a:pt x="7162070" y="1757101"/>
-                  </a:lnTo>
-                  <a:lnTo>
-                    <a:pt x="7088310" y="1753214"/>
-                  </a:lnTo>
-                  <a:lnTo>
-                    <a:pt x="7014550" y="1749302"/>
-                  </a:lnTo>
-                  <a:lnTo>
-                    <a:pt x="6940789" y="1745364"/>
-                  </a:lnTo>
-                  <a:lnTo>
-                    <a:pt x="6867029" y="1741400"/>
-                  </a:lnTo>
-                  <a:lnTo>
-                    <a:pt x="6793269" y="1737411"/>
-                  </a:lnTo>
-                  <a:lnTo>
-                    <a:pt x="6719509" y="1733396"/>
-                  </a:lnTo>
-                  <a:lnTo>
-                    <a:pt x="6645749" y="1729355"/>
-                  </a:lnTo>
-                  <a:lnTo>
-                    <a:pt x="6571989" y="1725288"/>
-                  </a:lnTo>
-                  <a:lnTo>
-                    <a:pt x="6498229" y="1721194"/>
-                  </a:lnTo>
-                  <a:lnTo>
-                    <a:pt x="6424469" y="1717074"/>
-                  </a:lnTo>
-                  <a:lnTo>
-                    <a:pt x="6350709" y="1712927"/>
-                  </a:lnTo>
-                  <a:lnTo>
-                    <a:pt x="6276949" y="1708754"/>
-                  </a:lnTo>
-                  <a:lnTo>
-                    <a:pt x="6203189" y="1704553"/>
-                  </a:lnTo>
-                  <a:lnTo>
-                    <a:pt x="6129429" y="1700325"/>
-                  </a:lnTo>
-                  <a:lnTo>
-                    <a:pt x="6055669" y="1696069"/>
-                  </a:lnTo>
-                  <a:lnTo>
-                    <a:pt x="5981909" y="1691786"/>
-                  </a:lnTo>
-                  <a:lnTo>
-                    <a:pt x="5908149" y="1687475"/>
-                  </a:lnTo>
-                  <a:lnTo>
-                    <a:pt x="5834389" y="1683136"/>
-                  </a:lnTo>
-                  <a:lnTo>
-                    <a:pt x="5760629" y="1678769"/>
-                  </a:lnTo>
-                  <a:lnTo>
-                    <a:pt x="5686869" y="1674373"/>
-                  </a:lnTo>
-                  <a:lnTo>
-                    <a:pt x="5613109" y="1669949"/>
-                  </a:lnTo>
-                  <a:lnTo>
-                    <a:pt x="5539349" y="1665497"/>
-                  </a:lnTo>
-                  <a:lnTo>
-                    <a:pt x="5465589" y="1661015"/>
-                  </a:lnTo>
-                  <a:lnTo>
-                    <a:pt x="5391829" y="1656504"/>
-                  </a:lnTo>
-                  <a:lnTo>
-                    <a:pt x="5318069" y="1651965"/>
-                  </a:lnTo>
-                  <a:lnTo>
-                    <a:pt x="5244309" y="1647395"/>
-                  </a:lnTo>
-                  <a:lnTo>
-                    <a:pt x="5170549" y="1642796"/>
-                  </a:lnTo>
-                  <a:lnTo>
-                    <a:pt x="5096789" y="1638167"/>
-                  </a:lnTo>
-                  <a:lnTo>
-                    <a:pt x="5023029" y="1633508"/>
-                  </a:lnTo>
-                  <a:lnTo>
-                    <a:pt x="4949269" y="1628819"/>
-                  </a:lnTo>
-                  <a:lnTo>
-                    <a:pt x="4875509" y="1624100"/>
-                  </a:lnTo>
-                  <a:lnTo>
-                    <a:pt x="4801749" y="1619350"/>
-                  </a:lnTo>
-                  <a:lnTo>
-                    <a:pt x="4727989" y="1614569"/>
-                  </a:lnTo>
-                  <a:lnTo>
-                    <a:pt x="4654229" y="1609757"/>
-                  </a:lnTo>
-                  <a:lnTo>
-                    <a:pt x="4580469" y="1604913"/>
-                  </a:lnTo>
-                  <a:lnTo>
-                    <a:pt x="4506709" y="1600039"/>
-                  </a:lnTo>
-                  <a:lnTo>
-                    <a:pt x="4432949" y="1595133"/>
-                  </a:lnTo>
-                  <a:lnTo>
-                    <a:pt x="4359189" y="1590194"/>
-                  </a:lnTo>
-                  <a:lnTo>
-                    <a:pt x="4285429" y="1585224"/>
-                  </a:lnTo>
-                  <a:lnTo>
-                    <a:pt x="4211669" y="1580222"/>
-                  </a:lnTo>
-                  <a:lnTo>
-                    <a:pt x="4137909" y="1575187"/>
-                  </a:lnTo>
-                  <a:lnTo>
-                    <a:pt x="4064149" y="1570120"/>
-                  </a:lnTo>
-                  <a:lnTo>
-                    <a:pt x="3990388" y="1565019"/>
-                  </a:lnTo>
-                  <a:lnTo>
-                    <a:pt x="3916628" y="1559886"/>
-                  </a:lnTo>
-                  <a:lnTo>
-                    <a:pt x="3842868" y="1554719"/>
-                  </a:lnTo>
-                  <a:lnTo>
-                    <a:pt x="3769108" y="1549519"/>
-                  </a:lnTo>
-                  <a:lnTo>
-                    <a:pt x="3695348" y="1544285"/>
-                  </a:lnTo>
-                  <a:lnTo>
-                    <a:pt x="3621588" y="1539017"/>
-                  </a:lnTo>
-                  <a:lnTo>
-                    <a:pt x="3547828" y="1533714"/>
-                  </a:lnTo>
-                  <a:lnTo>
-                    <a:pt x="3474068" y="1528378"/>
-                  </a:lnTo>
-                  <a:lnTo>
-                    <a:pt x="3400308" y="1538412"/>
-                  </a:lnTo>
-                  <a:lnTo>
-                    <a:pt x="3326548" y="1554886"/>
-                  </a:lnTo>
-                  <a:lnTo>
-                    <a:pt x="3252788" y="1571028"/>
-                  </a:lnTo>
-                  <a:lnTo>
-                    <a:pt x="3179028" y="1586845"/>
-                  </a:lnTo>
-                  <a:lnTo>
-                    <a:pt x="3105268" y="1602343"/>
-                  </a:lnTo>
-                  <a:lnTo>
-                    <a:pt x="3031508" y="1617529"/>
-                  </a:lnTo>
-                  <a:lnTo>
-                    <a:pt x="2957748" y="1632410"/>
-                  </a:lnTo>
-                  <a:lnTo>
-                    <a:pt x="2883988" y="1646990"/>
-                  </a:lnTo>
-                  <a:lnTo>
-                    <a:pt x="2810228" y="1661277"/>
-                  </a:lnTo>
-                  <a:lnTo>
-                    <a:pt x="2736468" y="1675276"/>
-                  </a:lnTo>
-                  <a:lnTo>
-                    <a:pt x="2662708" y="1688992"/>
-                  </a:lnTo>
-                  <a:lnTo>
-                    <a:pt x="2588948" y="1702433"/>
-                  </a:lnTo>
-                  <a:lnTo>
-                    <a:pt x="2515188" y="1715603"/>
-                  </a:lnTo>
-                  <a:lnTo>
-                    <a:pt x="2441428" y="1728508"/>
-                  </a:lnTo>
-                  <a:lnTo>
-                    <a:pt x="2367668" y="1741152"/>
-                  </a:lnTo>
-                  <a:lnTo>
-                    <a:pt x="2293908" y="1753542"/>
-                  </a:lnTo>
-                  <a:lnTo>
-                    <a:pt x="2220148" y="1765682"/>
-                  </a:lnTo>
-                  <a:lnTo>
-                    <a:pt x="2146388" y="1777578"/>
-                  </a:lnTo>
-                  <a:lnTo>
-                    <a:pt x="2072628" y="1789234"/>
-                  </a:lnTo>
-                  <a:lnTo>
-                    <a:pt x="1998868" y="1800655"/>
-                  </a:lnTo>
-                  <a:lnTo>
-                    <a:pt x="1925108" y="1811847"/>
-                  </a:lnTo>
-                  <a:lnTo>
-                    <a:pt x="1851348" y="1822813"/>
-                  </a:lnTo>
-                  <a:lnTo>
-                    <a:pt x="1777588" y="1833557"/>
-                  </a:lnTo>
-                  <a:lnTo>
-                    <a:pt x="1703828" y="1844086"/>
-                  </a:lnTo>
-                  <a:lnTo>
-                    <a:pt x="1630068" y="1854402"/>
-                  </a:lnTo>
-                  <a:lnTo>
-                    <a:pt x="1556308" y="1864511"/>
-                  </a:lnTo>
-                  <a:lnTo>
-                    <a:pt x="1482548" y="1874416"/>
-                  </a:lnTo>
-                  <a:lnTo>
-                    <a:pt x="1408788" y="1884121"/>
-                  </a:lnTo>
-                  <a:lnTo>
-                    <a:pt x="1335028" y="1893631"/>
-                  </a:lnTo>
-                  <a:lnTo>
-                    <a:pt x="1261268" y="1902949"/>
-                  </a:lnTo>
-                  <a:lnTo>
-                    <a:pt x="1187508" y="1912080"/>
-                  </a:lnTo>
-                  <a:lnTo>
-                    <a:pt x="1113747" y="1921027"/>
-                  </a:lnTo>
-                  <a:lnTo>
-                    <a:pt x="1039987" y="1929793"/>
-                  </a:lnTo>
-                  <a:lnTo>
-                    <a:pt x="966227" y="1938383"/>
-                  </a:lnTo>
-                  <a:lnTo>
-                    <a:pt x="892467" y="1946800"/>
-                  </a:lnTo>
-                  <a:lnTo>
-                    <a:pt x="818707" y="1955047"/>
-                  </a:lnTo>
-                  <a:lnTo>
-                    <a:pt x="744947" y="1963128"/>
-                  </a:lnTo>
-                  <a:lnTo>
-                    <a:pt x="671187" y="1971047"/>
-                  </a:lnTo>
-                  <a:lnTo>
-                    <a:pt x="597427" y="1978805"/>
-                  </a:lnTo>
-                  <a:lnTo>
-                    <a:pt x="523667" y="1986408"/>
-                  </a:lnTo>
-                  <a:lnTo>
-                    <a:pt x="449907" y="1993857"/>
-                  </a:lnTo>
-                  <a:lnTo>
-                    <a:pt x="376147" y="2001157"/>
-                  </a:lnTo>
-                  <a:lnTo>
-                    <a:pt x="302387" y="2008309"/>
-                  </a:lnTo>
-                  <a:lnTo>
-                    <a:pt x="228627" y="2015317"/>
-                  </a:lnTo>
-                  <a:lnTo>
-                    <a:pt x="154867" y="2022184"/>
-                  </a:lnTo>
-                  <a:lnTo>
-                    <a:pt x="81107" y="2028913"/>
-                  </a:lnTo>
-                  <a:lnTo>
-                    <a:pt x="7347" y="2035506"/>
-                  </a:lnTo>
-                  <a:lnTo>
-                    <a:pt x="0" y="2036150"/>
+                    <a:pt x="71622" y="1234314"/>
+                  </a:lnTo>
+                  <a:lnTo>
+                    <a:pt x="143245" y="1241546"/>
+                  </a:lnTo>
+                  <a:lnTo>
+                    <a:pt x="214867" y="1248732"/>
+                  </a:lnTo>
+                  <a:lnTo>
+                    <a:pt x="286490" y="1255871"/>
+                  </a:lnTo>
+                  <a:lnTo>
+                    <a:pt x="358112" y="1262964"/>
+                  </a:lnTo>
+                  <a:lnTo>
+                    <a:pt x="429735" y="1270012"/>
+                  </a:lnTo>
+                  <a:lnTo>
+                    <a:pt x="501357" y="1277014"/>
+                  </a:lnTo>
+                  <a:lnTo>
+                    <a:pt x="572980" y="1283971"/>
+                  </a:lnTo>
+                  <a:lnTo>
+                    <a:pt x="644602" y="1290883"/>
+                  </a:lnTo>
+                  <a:lnTo>
+                    <a:pt x="716225" y="1297751"/>
+                  </a:lnTo>
+                  <a:lnTo>
+                    <a:pt x="787847" y="1304574"/>
+                  </a:lnTo>
+                  <a:lnTo>
+                    <a:pt x="859470" y="1311353"/>
+                  </a:lnTo>
+                  <a:lnTo>
+                    <a:pt x="931092" y="1318089"/>
+                  </a:lnTo>
+                  <a:lnTo>
+                    <a:pt x="1002715" y="1324781"/>
+                  </a:lnTo>
+                  <a:lnTo>
+                    <a:pt x="1074337" y="1331430"/>
+                  </a:lnTo>
+                  <a:lnTo>
+                    <a:pt x="1145960" y="1338037"/>
+                  </a:lnTo>
+                  <a:lnTo>
+                    <a:pt x="1217582" y="1344600"/>
+                  </a:lnTo>
+                  <a:lnTo>
+                    <a:pt x="1289205" y="1351122"/>
+                  </a:lnTo>
+                  <a:lnTo>
+                    <a:pt x="1360827" y="1357601"/>
+                  </a:lnTo>
+                  <a:lnTo>
+                    <a:pt x="1432450" y="1364038"/>
+                  </a:lnTo>
+                  <a:lnTo>
+                    <a:pt x="1504073" y="1370434"/>
+                  </a:lnTo>
+                  <a:lnTo>
+                    <a:pt x="1575695" y="1376789"/>
+                  </a:lnTo>
+                  <a:lnTo>
+                    <a:pt x="1647318" y="1383103"/>
+                  </a:lnTo>
+                  <a:lnTo>
+                    <a:pt x="1718940" y="1389376"/>
+                  </a:lnTo>
+                  <a:lnTo>
+                    <a:pt x="1790563" y="1395609"/>
+                  </a:lnTo>
+                  <a:lnTo>
+                    <a:pt x="1862185" y="1401801"/>
+                  </a:lnTo>
+                  <a:lnTo>
+                    <a:pt x="1933808" y="1407954"/>
+                  </a:lnTo>
+                  <a:lnTo>
+                    <a:pt x="2005430" y="1414067"/>
+                  </a:lnTo>
+                  <a:lnTo>
+                    <a:pt x="2077053" y="1420140"/>
+                  </a:lnTo>
+                  <a:lnTo>
+                    <a:pt x="2148675" y="1426175"/>
+                  </a:lnTo>
+                  <a:lnTo>
+                    <a:pt x="2220298" y="1432170"/>
+                  </a:lnTo>
+                  <a:lnTo>
+                    <a:pt x="2291920" y="1438127"/>
+                  </a:lnTo>
+                  <a:lnTo>
+                    <a:pt x="2363543" y="1444045"/>
+                  </a:lnTo>
+                  <a:lnTo>
+                    <a:pt x="2435165" y="1449925"/>
+                  </a:lnTo>
+                  <a:lnTo>
+                    <a:pt x="2506788" y="1455768"/>
+                  </a:lnTo>
+                  <a:lnTo>
+                    <a:pt x="2578410" y="1461572"/>
+                  </a:lnTo>
+                  <a:lnTo>
+                    <a:pt x="2650033" y="1467340"/>
+                  </a:lnTo>
+                  <a:lnTo>
+                    <a:pt x="2721655" y="1473070"/>
+                  </a:lnTo>
+                  <a:lnTo>
+                    <a:pt x="2793278" y="1478763"/>
+                  </a:lnTo>
+                  <a:lnTo>
+                    <a:pt x="2864901" y="1484419"/>
+                  </a:lnTo>
+                  <a:lnTo>
+                    <a:pt x="2936523" y="1490039"/>
+                  </a:lnTo>
+                  <a:lnTo>
+                    <a:pt x="3008146" y="1495623"/>
+                  </a:lnTo>
+                  <a:lnTo>
+                    <a:pt x="3079768" y="1501171"/>
+                  </a:lnTo>
+                  <a:lnTo>
+                    <a:pt x="3151391" y="1506683"/>
+                  </a:lnTo>
+                  <a:lnTo>
+                    <a:pt x="3223013" y="1512159"/>
+                  </a:lnTo>
+                  <a:lnTo>
+                    <a:pt x="3294636" y="1517600"/>
+                  </a:lnTo>
+                  <a:lnTo>
+                    <a:pt x="3366258" y="1523006"/>
+                  </a:lnTo>
+                  <a:lnTo>
+                    <a:pt x="3437881" y="1521599"/>
+                  </a:lnTo>
+                  <a:lnTo>
+                    <a:pt x="3509503" y="1504441"/>
+                  </a:lnTo>
+                  <a:lnTo>
+                    <a:pt x="3581126" y="1486930"/>
+                  </a:lnTo>
+                  <a:lnTo>
+                    <a:pt x="3652748" y="1469059"/>
+                  </a:lnTo>
+                  <a:lnTo>
+                    <a:pt x="3724371" y="1450821"/>
+                  </a:lnTo>
+                  <a:lnTo>
+                    <a:pt x="3795993" y="1432208"/>
+                  </a:lnTo>
+                  <a:lnTo>
+                    <a:pt x="3867616" y="1413212"/>
+                  </a:lnTo>
+                  <a:lnTo>
+                    <a:pt x="3939238" y="1393825"/>
+                  </a:lnTo>
+                  <a:lnTo>
+                    <a:pt x="4010861" y="1374040"/>
+                  </a:lnTo>
+                  <a:lnTo>
+                    <a:pt x="4082483" y="1353848"/>
+                  </a:lnTo>
+                  <a:lnTo>
+                    <a:pt x="4154106" y="1333241"/>
+                  </a:lnTo>
+                  <a:lnTo>
+                    <a:pt x="4225729" y="1312211"/>
+                  </a:lnTo>
+                  <a:lnTo>
+                    <a:pt x="4297351" y="1290748"/>
+                  </a:lnTo>
+                  <a:lnTo>
+                    <a:pt x="4368974" y="1268844"/>
+                  </a:lnTo>
+                  <a:lnTo>
+                    <a:pt x="4440596" y="1246489"/>
+                  </a:lnTo>
+                  <a:lnTo>
+                    <a:pt x="4512219" y="1223675"/>
+                  </a:lnTo>
+                  <a:lnTo>
+                    <a:pt x="4583841" y="1200392"/>
+                  </a:lnTo>
+                  <a:lnTo>
+                    <a:pt x="4655464" y="1176630"/>
+                  </a:lnTo>
+                  <a:lnTo>
+                    <a:pt x="4727086" y="1152380"/>
+                  </a:lnTo>
+                  <a:lnTo>
+                    <a:pt x="4798709" y="1127631"/>
+                  </a:lnTo>
+                  <a:lnTo>
+                    <a:pt x="4870331" y="1102374"/>
+                  </a:lnTo>
+                  <a:lnTo>
+                    <a:pt x="4941954" y="1076597"/>
+                  </a:lnTo>
+                  <a:lnTo>
+                    <a:pt x="5013576" y="1050290"/>
+                  </a:lnTo>
+                  <a:lnTo>
+                    <a:pt x="5085199" y="1023442"/>
+                  </a:lnTo>
+                  <a:lnTo>
+                    <a:pt x="5156821" y="996043"/>
+                  </a:lnTo>
+                  <a:lnTo>
+                    <a:pt x="5228444" y="968080"/>
+                  </a:lnTo>
+                  <a:lnTo>
+                    <a:pt x="5300066" y="939542"/>
+                  </a:lnTo>
+                  <a:lnTo>
+                    <a:pt x="5371689" y="910418"/>
+                  </a:lnTo>
+                  <a:lnTo>
+                    <a:pt x="5443311" y="880695"/>
+                  </a:lnTo>
+                  <a:lnTo>
+                    <a:pt x="5514934" y="850361"/>
+                  </a:lnTo>
+                  <a:lnTo>
+                    <a:pt x="5586557" y="819403"/>
+                  </a:lnTo>
+                  <a:lnTo>
+                    <a:pt x="5658179" y="787809"/>
+                  </a:lnTo>
+                  <a:lnTo>
+                    <a:pt x="5729802" y="755565"/>
+                  </a:lnTo>
+                  <a:lnTo>
+                    <a:pt x="5801424" y="722658"/>
+                  </a:lnTo>
+                  <a:lnTo>
+                    <a:pt x="5873047" y="689075"/>
+                  </a:lnTo>
+                  <a:lnTo>
+                    <a:pt x="5944669" y="654802"/>
+                  </a:lnTo>
+                  <a:lnTo>
+                    <a:pt x="6016292" y="619823"/>
+                  </a:lnTo>
+                  <a:lnTo>
+                    <a:pt x="6087914" y="584126"/>
+                  </a:lnTo>
+                  <a:lnTo>
+                    <a:pt x="6159537" y="547695"/>
+                  </a:lnTo>
+                  <a:lnTo>
+                    <a:pt x="6231159" y="510515"/>
+                  </a:lnTo>
+                  <a:lnTo>
+                    <a:pt x="6302782" y="472570"/>
+                  </a:lnTo>
+                  <a:lnTo>
+                    <a:pt x="6374404" y="433846"/>
+                  </a:lnTo>
+                  <a:lnTo>
+                    <a:pt x="6446027" y="394325"/>
+                  </a:lnTo>
+                  <a:lnTo>
+                    <a:pt x="6517649" y="353992"/>
+                  </a:lnTo>
+                  <a:lnTo>
+                    <a:pt x="6589272" y="312830"/>
+                  </a:lnTo>
+                  <a:lnTo>
+                    <a:pt x="6660894" y="270821"/>
+                  </a:lnTo>
+                  <a:lnTo>
+                    <a:pt x="6732517" y="227949"/>
+                  </a:lnTo>
+                  <a:lnTo>
+                    <a:pt x="6804139" y="184196"/>
+                  </a:lnTo>
+                  <a:lnTo>
+                    <a:pt x="6875762" y="139542"/>
+                  </a:lnTo>
+                  <a:lnTo>
+                    <a:pt x="6947385" y="93971"/>
+                  </a:lnTo>
+                  <a:lnTo>
+                    <a:pt x="7019007" y="47464"/>
+                  </a:lnTo>
+                  <a:lnTo>
+                    <a:pt x="7090630" y="0"/>
+                  </a:lnTo>
+                  <a:lnTo>
+                    <a:pt x="7090630" y="1760963"/>
+                  </a:lnTo>
+                  <a:lnTo>
+                    <a:pt x="7019007" y="1757101"/>
+                  </a:lnTo>
+                  <a:lnTo>
+                    <a:pt x="6947385" y="1753214"/>
+                  </a:lnTo>
+                  <a:lnTo>
+                    <a:pt x="6875762" y="1749302"/>
+                  </a:lnTo>
+                  <a:lnTo>
+                    <a:pt x="6804139" y="1745364"/>
+                  </a:lnTo>
+                  <a:lnTo>
+                    <a:pt x="6732517" y="1741400"/>
+                  </a:lnTo>
+                  <a:lnTo>
+                    <a:pt x="6660894" y="1737411"/>
+                  </a:lnTo>
+                  <a:lnTo>
+                    <a:pt x="6589272" y="1733396"/>
+                  </a:lnTo>
+                  <a:lnTo>
+                    <a:pt x="6517649" y="1729355"/>
+                  </a:lnTo>
+                  <a:lnTo>
+                    <a:pt x="6446027" y="1725288"/>
+                  </a:lnTo>
+                  <a:lnTo>
+                    <a:pt x="6374404" y="1721194"/>
+                  </a:lnTo>
+                  <a:lnTo>
+                    <a:pt x="6302782" y="1717074"/>
+                  </a:lnTo>
+                  <a:lnTo>
+                    <a:pt x="6231159" y="1712927"/>
+                  </a:lnTo>
+                  <a:lnTo>
+                    <a:pt x="6159537" y="1708754"/>
+                  </a:lnTo>
+                  <a:lnTo>
+                    <a:pt x="6087914" y="1704553"/>
+                  </a:lnTo>
+                  <a:lnTo>
+                    <a:pt x="6016292" y="1700325"/>
+                  </a:lnTo>
+                  <a:lnTo>
+                    <a:pt x="5944669" y="1696069"/>
+                  </a:lnTo>
+                  <a:lnTo>
+                    <a:pt x="5873047" y="1691786"/>
+                  </a:lnTo>
+                  <a:lnTo>
+                    <a:pt x="5801424" y="1687475"/>
+                  </a:lnTo>
+                  <a:lnTo>
+                    <a:pt x="5729802" y="1683136"/>
+                  </a:lnTo>
+                  <a:lnTo>
+                    <a:pt x="5658179" y="1678769"/>
+                  </a:lnTo>
+                  <a:lnTo>
+                    <a:pt x="5586557" y="1674373"/>
+                  </a:lnTo>
+                  <a:lnTo>
+                    <a:pt x="5514934" y="1669949"/>
+                  </a:lnTo>
+                  <a:lnTo>
+                    <a:pt x="5443311" y="1665497"/>
+                  </a:lnTo>
+                  <a:lnTo>
+                    <a:pt x="5371689" y="1661015"/>
+                  </a:lnTo>
+                  <a:lnTo>
+                    <a:pt x="5300066" y="1656504"/>
+                  </a:lnTo>
+                  <a:lnTo>
+                    <a:pt x="5228444" y="1651965"/>
+                  </a:lnTo>
+                  <a:lnTo>
+                    <a:pt x="5156821" y="1647395"/>
+                  </a:lnTo>
+                  <a:lnTo>
+                    <a:pt x="5085199" y="1642796"/>
+                  </a:lnTo>
+                  <a:lnTo>
+                    <a:pt x="5013576" y="1638167"/>
+                  </a:lnTo>
+                  <a:lnTo>
+                    <a:pt x="4941954" y="1633508"/>
+                  </a:lnTo>
+                  <a:lnTo>
+                    <a:pt x="4870331" y="1628819"/>
+                  </a:lnTo>
+                  <a:lnTo>
+                    <a:pt x="4798709" y="1624100"/>
+                  </a:lnTo>
+                  <a:lnTo>
+                    <a:pt x="4727086" y="1619350"/>
+                  </a:lnTo>
+                  <a:lnTo>
+                    <a:pt x="4655464" y="1614569"/>
+                  </a:lnTo>
+                  <a:lnTo>
+                    <a:pt x="4583841" y="1609757"/>
+                  </a:lnTo>
+                  <a:lnTo>
+                    <a:pt x="4512219" y="1604913"/>
+                  </a:lnTo>
+                  <a:lnTo>
+                    <a:pt x="4440596" y="1600039"/>
+                  </a:lnTo>
+                  <a:lnTo>
+                    <a:pt x="4368974" y="1595133"/>
+                  </a:lnTo>
+                  <a:lnTo>
+                    <a:pt x="4297351" y="1590194"/>
+                  </a:lnTo>
+                  <a:lnTo>
+                    <a:pt x="4225729" y="1585224"/>
+                  </a:lnTo>
+                  <a:lnTo>
+                    <a:pt x="4154106" y="1580222"/>
+                  </a:lnTo>
+                  <a:lnTo>
+                    <a:pt x="4082483" y="1575187"/>
+                  </a:lnTo>
+                  <a:lnTo>
+                    <a:pt x="4010861" y="1570120"/>
+                  </a:lnTo>
+                  <a:lnTo>
+                    <a:pt x="3939238" y="1565019"/>
+                  </a:lnTo>
+                  <a:lnTo>
+                    <a:pt x="3867616" y="1559886"/>
+                  </a:lnTo>
+                  <a:lnTo>
+                    <a:pt x="3795993" y="1554719"/>
+                  </a:lnTo>
+                  <a:lnTo>
+                    <a:pt x="3724371" y="1549519"/>
+                  </a:lnTo>
+                  <a:lnTo>
+                    <a:pt x="3652748" y="1544285"/>
+                  </a:lnTo>
+                  <a:lnTo>
+                    <a:pt x="3581126" y="1539017"/>
+                  </a:lnTo>
+                  <a:lnTo>
+                    <a:pt x="3509503" y="1533714"/>
+                  </a:lnTo>
+                  <a:lnTo>
+                    <a:pt x="3437881" y="1528378"/>
+                  </a:lnTo>
+                  <a:lnTo>
+                    <a:pt x="3366258" y="1538412"/>
+                  </a:lnTo>
+                  <a:lnTo>
+                    <a:pt x="3294636" y="1554886"/>
+                  </a:lnTo>
+                  <a:lnTo>
+                    <a:pt x="3223013" y="1571028"/>
+                  </a:lnTo>
+                  <a:lnTo>
+                    <a:pt x="3151391" y="1586845"/>
+                  </a:lnTo>
+                  <a:lnTo>
+                    <a:pt x="3079768" y="1602343"/>
+                  </a:lnTo>
+                  <a:lnTo>
+                    <a:pt x="3008146" y="1617529"/>
+                  </a:lnTo>
+                  <a:lnTo>
+                    <a:pt x="2936523" y="1632410"/>
+                  </a:lnTo>
+                  <a:lnTo>
+                    <a:pt x="2864901" y="1646990"/>
+                  </a:lnTo>
+                  <a:lnTo>
+                    <a:pt x="2793278" y="1661277"/>
+                  </a:lnTo>
+                  <a:lnTo>
+                    <a:pt x="2721655" y="1675276"/>
+                  </a:lnTo>
+                  <a:lnTo>
+                    <a:pt x="2650033" y="1688992"/>
+                  </a:lnTo>
+                  <a:lnTo>
+                    <a:pt x="2578410" y="1702433"/>
+                  </a:lnTo>
+                  <a:lnTo>
+                    <a:pt x="2506788" y="1715603"/>
+                  </a:lnTo>
+                  <a:lnTo>
+                    <a:pt x="2435165" y="1728508"/>
+                  </a:lnTo>
+                  <a:lnTo>
+                    <a:pt x="2363543" y="1741152"/>
+                  </a:lnTo>
+                  <a:lnTo>
+                    <a:pt x="2291920" y="1753542"/>
+                  </a:lnTo>
+                  <a:lnTo>
+                    <a:pt x="2220298" y="1765682"/>
+                  </a:lnTo>
+                  <a:lnTo>
+                    <a:pt x="2148675" y="1777578"/>
+                  </a:lnTo>
+                  <a:lnTo>
+                    <a:pt x="2077053" y="1789234"/>
+                  </a:lnTo>
+                  <a:lnTo>
+                    <a:pt x="2005430" y="1800655"/>
+                  </a:lnTo>
+                  <a:lnTo>
+                    <a:pt x="1933808" y="1811847"/>
+                  </a:lnTo>
+                  <a:lnTo>
+                    <a:pt x="1862185" y="1822813"/>
+                  </a:lnTo>
+                  <a:lnTo>
+                    <a:pt x="1790563" y="1833557"/>
+                  </a:lnTo>
+                  <a:lnTo>
+                    <a:pt x="1718940" y="1844086"/>
+                  </a:lnTo>
+                  <a:lnTo>
+                    <a:pt x="1647318" y="1854402"/>
+                  </a:lnTo>
+                  <a:lnTo>
+                    <a:pt x="1575695" y="1864511"/>
+                  </a:lnTo>
+                  <a:lnTo>
+                    <a:pt x="1504073" y="1874416"/>
+                  </a:lnTo>
+                  <a:lnTo>
+                    <a:pt x="1432450" y="1884121"/>
+                  </a:lnTo>
+                  <a:lnTo>
+                    <a:pt x="1360827" y="1893631"/>
+                  </a:lnTo>
+                  <a:lnTo>
+                    <a:pt x="1289205" y="1902949"/>
+                  </a:lnTo>
+                  <a:lnTo>
+                    <a:pt x="1217582" y="1912080"/>
+                  </a:lnTo>
+                  <a:lnTo>
+                    <a:pt x="1145960" y="1921027"/>
+                  </a:lnTo>
+                  <a:lnTo>
+                    <a:pt x="1074337" y="1929793"/>
+                  </a:lnTo>
+                  <a:lnTo>
+                    <a:pt x="1002715" y="1938383"/>
+                  </a:lnTo>
+                  <a:lnTo>
+                    <a:pt x="931092" y="1946800"/>
+                  </a:lnTo>
+                  <a:lnTo>
+                    <a:pt x="859470" y="1955047"/>
+                  </a:lnTo>
+                  <a:lnTo>
+                    <a:pt x="787847" y="1963128"/>
+                  </a:lnTo>
+                  <a:lnTo>
+                    <a:pt x="716225" y="1971047"/>
+                  </a:lnTo>
+                  <a:lnTo>
+                    <a:pt x="644602" y="1978805"/>
+                  </a:lnTo>
+                  <a:lnTo>
+                    <a:pt x="572980" y="1986408"/>
+                  </a:lnTo>
+                  <a:lnTo>
+                    <a:pt x="501357" y="1993857"/>
+                  </a:lnTo>
+                  <a:lnTo>
+                    <a:pt x="429735" y="2001157"/>
+                  </a:lnTo>
+                  <a:lnTo>
+                    <a:pt x="358112" y="2008309"/>
+                  </a:lnTo>
+                  <a:lnTo>
+                    <a:pt x="286490" y="2015317"/>
+                  </a:lnTo>
+                  <a:lnTo>
+                    <a:pt x="214867" y="2022184"/>
+                  </a:lnTo>
+                  <a:lnTo>
+                    <a:pt x="143245" y="2028913"/>
+                  </a:lnTo>
+                  <a:lnTo>
+                    <a:pt x="71622" y="2035506"/>
+                  </a:lnTo>
+                  <a:lnTo>
+                    <a:pt x="0" y="2041967"/>
                   </a:lnTo>
                   <a:close/>
                 </a:path>
@@ -3627,318 +3584,643 @@
         </p:sp>
         <p:sp>
           <p:nvSpPr>
+            <p:cNvPr id="21" name="pl21"/>
+            <p:cNvSpPr/>
+            <p:nvPr/>
+          </p:nvSpPr>
+          <p:spPr>
+            <a:xfrm>
+              <a:off x="1172049" y="3201037"/>
+              <a:ext cx="7090630" cy="1523006"/>
+            </a:xfrm>
+            <a:custGeom>
+              <a:avLst/>
+              <a:pathLst>
+                <a:path w="7090630" h="1523006">
+                  <a:moveTo>
+                    <a:pt x="0" y="1227035"/>
+                  </a:moveTo>
+                  <a:lnTo>
+                    <a:pt x="71622" y="1234314"/>
+                  </a:lnTo>
+                  <a:lnTo>
+                    <a:pt x="143245" y="1241546"/>
+                  </a:lnTo>
+                  <a:lnTo>
+                    <a:pt x="214867" y="1248732"/>
+                  </a:lnTo>
+                  <a:lnTo>
+                    <a:pt x="286490" y="1255871"/>
+                  </a:lnTo>
+                  <a:lnTo>
+                    <a:pt x="358112" y="1262964"/>
+                  </a:lnTo>
+                  <a:lnTo>
+                    <a:pt x="429735" y="1270012"/>
+                  </a:lnTo>
+                  <a:lnTo>
+                    <a:pt x="501357" y="1277014"/>
+                  </a:lnTo>
+                  <a:lnTo>
+                    <a:pt x="572980" y="1283971"/>
+                  </a:lnTo>
+                  <a:lnTo>
+                    <a:pt x="644602" y="1290883"/>
+                  </a:lnTo>
+                  <a:lnTo>
+                    <a:pt x="716225" y="1297751"/>
+                  </a:lnTo>
+                  <a:lnTo>
+                    <a:pt x="787847" y="1304574"/>
+                  </a:lnTo>
+                  <a:lnTo>
+                    <a:pt x="859470" y="1311353"/>
+                  </a:lnTo>
+                  <a:lnTo>
+                    <a:pt x="931092" y="1318089"/>
+                  </a:lnTo>
+                  <a:lnTo>
+                    <a:pt x="1002715" y="1324781"/>
+                  </a:lnTo>
+                  <a:lnTo>
+                    <a:pt x="1074337" y="1331430"/>
+                  </a:lnTo>
+                  <a:lnTo>
+                    <a:pt x="1145960" y="1338037"/>
+                  </a:lnTo>
+                  <a:lnTo>
+                    <a:pt x="1217582" y="1344600"/>
+                  </a:lnTo>
+                  <a:lnTo>
+                    <a:pt x="1289205" y="1351122"/>
+                  </a:lnTo>
+                  <a:lnTo>
+                    <a:pt x="1360827" y="1357601"/>
+                  </a:lnTo>
+                  <a:lnTo>
+                    <a:pt x="1432450" y="1364038"/>
+                  </a:lnTo>
+                  <a:lnTo>
+                    <a:pt x="1504073" y="1370434"/>
+                  </a:lnTo>
+                  <a:lnTo>
+                    <a:pt x="1575695" y="1376789"/>
+                  </a:lnTo>
+                  <a:lnTo>
+                    <a:pt x="1647318" y="1383103"/>
+                  </a:lnTo>
+                  <a:lnTo>
+                    <a:pt x="1718940" y="1389376"/>
+                  </a:lnTo>
+                  <a:lnTo>
+                    <a:pt x="1790563" y="1395609"/>
+                  </a:lnTo>
+                  <a:lnTo>
+                    <a:pt x="1862185" y="1401801"/>
+                  </a:lnTo>
+                  <a:lnTo>
+                    <a:pt x="1933808" y="1407954"/>
+                  </a:lnTo>
+                  <a:lnTo>
+                    <a:pt x="2005430" y="1414067"/>
+                  </a:lnTo>
+                  <a:lnTo>
+                    <a:pt x="2077053" y="1420140"/>
+                  </a:lnTo>
+                  <a:lnTo>
+                    <a:pt x="2148675" y="1426175"/>
+                  </a:lnTo>
+                  <a:lnTo>
+                    <a:pt x="2220298" y="1432170"/>
+                  </a:lnTo>
+                  <a:lnTo>
+                    <a:pt x="2291920" y="1438127"/>
+                  </a:lnTo>
+                  <a:lnTo>
+                    <a:pt x="2363543" y="1444045"/>
+                  </a:lnTo>
+                  <a:lnTo>
+                    <a:pt x="2435165" y="1449925"/>
+                  </a:lnTo>
+                  <a:lnTo>
+                    <a:pt x="2506788" y="1455768"/>
+                  </a:lnTo>
+                  <a:lnTo>
+                    <a:pt x="2578410" y="1461572"/>
+                  </a:lnTo>
+                  <a:lnTo>
+                    <a:pt x="2650033" y="1467340"/>
+                  </a:lnTo>
+                  <a:lnTo>
+                    <a:pt x="2721655" y="1473070"/>
+                  </a:lnTo>
+                  <a:lnTo>
+                    <a:pt x="2793278" y="1478763"/>
+                  </a:lnTo>
+                  <a:lnTo>
+                    <a:pt x="2864901" y="1484419"/>
+                  </a:lnTo>
+                  <a:lnTo>
+                    <a:pt x="2936523" y="1490039"/>
+                  </a:lnTo>
+                  <a:lnTo>
+                    <a:pt x="3008146" y="1495623"/>
+                  </a:lnTo>
+                  <a:lnTo>
+                    <a:pt x="3079768" y="1501171"/>
+                  </a:lnTo>
+                  <a:lnTo>
+                    <a:pt x="3151391" y="1506683"/>
+                  </a:lnTo>
+                  <a:lnTo>
+                    <a:pt x="3223013" y="1512159"/>
+                  </a:lnTo>
+                  <a:lnTo>
+                    <a:pt x="3294636" y="1517600"/>
+                  </a:lnTo>
+                  <a:lnTo>
+                    <a:pt x="3366258" y="1523006"/>
+                  </a:lnTo>
+                  <a:lnTo>
+                    <a:pt x="3437881" y="1521599"/>
+                  </a:lnTo>
+                  <a:lnTo>
+                    <a:pt x="3509503" y="1504441"/>
+                  </a:lnTo>
+                  <a:lnTo>
+                    <a:pt x="3581126" y="1486930"/>
+                  </a:lnTo>
+                  <a:lnTo>
+                    <a:pt x="3652748" y="1469059"/>
+                  </a:lnTo>
+                  <a:lnTo>
+                    <a:pt x="3724371" y="1450821"/>
+                  </a:lnTo>
+                  <a:lnTo>
+                    <a:pt x="3795993" y="1432208"/>
+                  </a:lnTo>
+                  <a:lnTo>
+                    <a:pt x="3867616" y="1413212"/>
+                  </a:lnTo>
+                  <a:lnTo>
+                    <a:pt x="3939238" y="1393825"/>
+                  </a:lnTo>
+                  <a:lnTo>
+                    <a:pt x="4010861" y="1374040"/>
+                  </a:lnTo>
+                  <a:lnTo>
+                    <a:pt x="4082483" y="1353848"/>
+                  </a:lnTo>
+                  <a:lnTo>
+                    <a:pt x="4154106" y="1333241"/>
+                  </a:lnTo>
+                  <a:lnTo>
+                    <a:pt x="4225729" y="1312211"/>
+                  </a:lnTo>
+                  <a:lnTo>
+                    <a:pt x="4297351" y="1290748"/>
+                  </a:lnTo>
+                  <a:lnTo>
+                    <a:pt x="4368974" y="1268844"/>
+                  </a:lnTo>
+                  <a:lnTo>
+                    <a:pt x="4440596" y="1246489"/>
+                  </a:lnTo>
+                  <a:lnTo>
+                    <a:pt x="4512219" y="1223675"/>
+                  </a:lnTo>
+                  <a:lnTo>
+                    <a:pt x="4583841" y="1200392"/>
+                  </a:lnTo>
+                  <a:lnTo>
+                    <a:pt x="4655464" y="1176630"/>
+                  </a:lnTo>
+                  <a:lnTo>
+                    <a:pt x="4727086" y="1152380"/>
+                  </a:lnTo>
+                  <a:lnTo>
+                    <a:pt x="4798709" y="1127631"/>
+                  </a:lnTo>
+                  <a:lnTo>
+                    <a:pt x="4870331" y="1102374"/>
+                  </a:lnTo>
+                  <a:lnTo>
+                    <a:pt x="4941954" y="1076597"/>
+                  </a:lnTo>
+                  <a:lnTo>
+                    <a:pt x="5013576" y="1050290"/>
+                  </a:lnTo>
+                  <a:lnTo>
+                    <a:pt x="5085199" y="1023442"/>
+                  </a:lnTo>
+                  <a:lnTo>
+                    <a:pt x="5156821" y="996043"/>
+                  </a:lnTo>
+                  <a:lnTo>
+                    <a:pt x="5228444" y="968080"/>
+                  </a:lnTo>
+                  <a:lnTo>
+                    <a:pt x="5300066" y="939542"/>
+                  </a:lnTo>
+                  <a:lnTo>
+                    <a:pt x="5371689" y="910418"/>
+                  </a:lnTo>
+                  <a:lnTo>
+                    <a:pt x="5443311" y="880695"/>
+                  </a:lnTo>
+                  <a:lnTo>
+                    <a:pt x="5514934" y="850361"/>
+                  </a:lnTo>
+                  <a:lnTo>
+                    <a:pt x="5586557" y="819403"/>
+                  </a:lnTo>
+                  <a:lnTo>
+                    <a:pt x="5658179" y="787809"/>
+                  </a:lnTo>
+                  <a:lnTo>
+                    <a:pt x="5729802" y="755565"/>
+                  </a:lnTo>
+                  <a:lnTo>
+                    <a:pt x="5801424" y="722658"/>
+                  </a:lnTo>
+                  <a:lnTo>
+                    <a:pt x="5873047" y="689075"/>
+                  </a:lnTo>
+                  <a:lnTo>
+                    <a:pt x="5944669" y="654802"/>
+                  </a:lnTo>
+                  <a:lnTo>
+                    <a:pt x="6016292" y="619823"/>
+                  </a:lnTo>
+                  <a:lnTo>
+                    <a:pt x="6087914" y="584126"/>
+                  </a:lnTo>
+                  <a:lnTo>
+                    <a:pt x="6159537" y="547695"/>
+                  </a:lnTo>
+                  <a:lnTo>
+                    <a:pt x="6231159" y="510515"/>
+                  </a:lnTo>
+                  <a:lnTo>
+                    <a:pt x="6302782" y="472570"/>
+                  </a:lnTo>
+                  <a:lnTo>
+                    <a:pt x="6374404" y="433846"/>
+                  </a:lnTo>
+                  <a:lnTo>
+                    <a:pt x="6446027" y="394325"/>
+                  </a:lnTo>
+                  <a:lnTo>
+                    <a:pt x="6517649" y="353992"/>
+                  </a:lnTo>
+                  <a:lnTo>
+                    <a:pt x="6589272" y="312830"/>
+                  </a:lnTo>
+                  <a:lnTo>
+                    <a:pt x="6660894" y="270821"/>
+                  </a:lnTo>
+                  <a:lnTo>
+                    <a:pt x="6732517" y="227949"/>
+                  </a:lnTo>
+                  <a:lnTo>
+                    <a:pt x="6804139" y="184196"/>
+                  </a:lnTo>
+                  <a:lnTo>
+                    <a:pt x="6875762" y="139542"/>
+                  </a:lnTo>
+                  <a:lnTo>
+                    <a:pt x="6947385" y="93971"/>
+                  </a:lnTo>
+                  <a:lnTo>
+                    <a:pt x="7019007" y="47464"/>
+                  </a:lnTo>
+                  <a:lnTo>
+                    <a:pt x="7090630" y="0"/>
+                  </a:lnTo>
+                </a:path>
+              </a:pathLst>
+            </a:custGeom>
+          </p:spPr>
+          <p:txBody>
+            <a:bodyPr/>
+            <a:lstStyle/>
+            <a:p/>
+          </p:txBody>
+        </p:sp>
+        <p:sp>
+          <p:nvSpPr>
             <p:cNvPr id="22" name="pl22"/>
             <p:cNvSpPr/>
             <p:nvPr/>
           </p:nvSpPr>
           <p:spPr>
             <a:xfrm>
-              <a:off x="817517" y="3201037"/>
-              <a:ext cx="7235830" cy="1523006"/>
+              <a:off x="1172049" y="4729416"/>
+              <a:ext cx="7090630" cy="513588"/>
             </a:xfrm>
             <a:custGeom>
               <a:avLst/>
               <a:pathLst>
-                <a:path w="7235830" h="1523006">
+                <a:path w="7090630" h="513588">
                   <a:moveTo>
-                    <a:pt x="0" y="1233589"/>
+                    <a:pt x="7090630" y="232585"/>
                   </a:moveTo>
                   <a:lnTo>
-                    <a:pt x="7347" y="1234314"/>
-                  </a:lnTo>
-                  <a:lnTo>
-                    <a:pt x="81107" y="1241546"/>
-                  </a:lnTo>
-                  <a:lnTo>
-                    <a:pt x="154867" y="1248732"/>
-                  </a:lnTo>
-                  <a:lnTo>
-                    <a:pt x="228627" y="1255871"/>
-                  </a:lnTo>
-                  <a:lnTo>
-                    <a:pt x="302387" y="1262964"/>
-                  </a:lnTo>
-                  <a:lnTo>
-                    <a:pt x="376147" y="1270012"/>
-                  </a:lnTo>
-                  <a:lnTo>
-                    <a:pt x="449907" y="1277014"/>
-                  </a:lnTo>
-                  <a:lnTo>
-                    <a:pt x="523667" y="1283971"/>
-                  </a:lnTo>
-                  <a:lnTo>
-                    <a:pt x="597427" y="1290883"/>
-                  </a:lnTo>
-                  <a:lnTo>
-                    <a:pt x="671187" y="1297751"/>
-                  </a:lnTo>
-                  <a:lnTo>
-                    <a:pt x="744947" y="1304574"/>
-                  </a:lnTo>
-                  <a:lnTo>
-                    <a:pt x="818707" y="1311353"/>
-                  </a:lnTo>
-                  <a:lnTo>
-                    <a:pt x="892467" y="1318089"/>
-                  </a:lnTo>
-                  <a:lnTo>
-                    <a:pt x="966227" y="1324781"/>
-                  </a:lnTo>
-                  <a:lnTo>
-                    <a:pt x="1039987" y="1331430"/>
-                  </a:lnTo>
-                  <a:lnTo>
-                    <a:pt x="1113747" y="1338037"/>
-                  </a:lnTo>
-                  <a:lnTo>
-                    <a:pt x="1187508" y="1344600"/>
-                  </a:lnTo>
-                  <a:lnTo>
-                    <a:pt x="1261268" y="1351122"/>
-                  </a:lnTo>
-                  <a:lnTo>
-                    <a:pt x="1335028" y="1357601"/>
-                  </a:lnTo>
-                  <a:lnTo>
-                    <a:pt x="1408788" y="1364038"/>
-                  </a:lnTo>
-                  <a:lnTo>
-                    <a:pt x="1482548" y="1370434"/>
-                  </a:lnTo>
-                  <a:lnTo>
-                    <a:pt x="1556308" y="1376789"/>
-                  </a:lnTo>
-                  <a:lnTo>
-                    <a:pt x="1630068" y="1383103"/>
-                  </a:lnTo>
-                  <a:lnTo>
-                    <a:pt x="1703828" y="1389376"/>
-                  </a:lnTo>
-                  <a:lnTo>
-                    <a:pt x="1777588" y="1395609"/>
-                  </a:lnTo>
-                  <a:lnTo>
-                    <a:pt x="1851348" y="1401801"/>
-                  </a:lnTo>
-                  <a:lnTo>
-                    <a:pt x="1925108" y="1407954"/>
-                  </a:lnTo>
-                  <a:lnTo>
-                    <a:pt x="1998868" y="1414067"/>
-                  </a:lnTo>
-                  <a:lnTo>
-                    <a:pt x="2072628" y="1420140"/>
-                  </a:lnTo>
-                  <a:lnTo>
-                    <a:pt x="2146388" y="1426175"/>
-                  </a:lnTo>
-                  <a:lnTo>
-                    <a:pt x="2220148" y="1432170"/>
-                  </a:lnTo>
-                  <a:lnTo>
-                    <a:pt x="2293908" y="1438127"/>
-                  </a:lnTo>
-                  <a:lnTo>
-                    <a:pt x="2367668" y="1444045"/>
-                  </a:lnTo>
-                  <a:lnTo>
-                    <a:pt x="2441428" y="1449925"/>
-                  </a:lnTo>
-                  <a:lnTo>
-                    <a:pt x="2515188" y="1455768"/>
-                  </a:lnTo>
-                  <a:lnTo>
-                    <a:pt x="2588948" y="1461572"/>
-                  </a:lnTo>
-                  <a:lnTo>
-                    <a:pt x="2662708" y="1467340"/>
-                  </a:lnTo>
-                  <a:lnTo>
-                    <a:pt x="2736468" y="1473070"/>
-                  </a:lnTo>
-                  <a:lnTo>
-                    <a:pt x="2810228" y="1478763"/>
-                  </a:lnTo>
-                  <a:lnTo>
-                    <a:pt x="2883988" y="1484419"/>
-                  </a:lnTo>
-                  <a:lnTo>
-                    <a:pt x="2957748" y="1490039"/>
-                  </a:lnTo>
-                  <a:lnTo>
-                    <a:pt x="3031508" y="1495623"/>
-                  </a:lnTo>
-                  <a:lnTo>
-                    <a:pt x="3105268" y="1501171"/>
-                  </a:lnTo>
-                  <a:lnTo>
-                    <a:pt x="3179028" y="1506683"/>
-                  </a:lnTo>
-                  <a:lnTo>
-                    <a:pt x="3252788" y="1512159"/>
-                  </a:lnTo>
-                  <a:lnTo>
-                    <a:pt x="3326548" y="1517600"/>
-                  </a:lnTo>
-                  <a:lnTo>
-                    <a:pt x="3400308" y="1523006"/>
-                  </a:lnTo>
-                  <a:lnTo>
-                    <a:pt x="3474068" y="1521599"/>
-                  </a:lnTo>
-                  <a:lnTo>
-                    <a:pt x="3547828" y="1504441"/>
-                  </a:lnTo>
-                  <a:lnTo>
-                    <a:pt x="3621588" y="1486930"/>
-                  </a:lnTo>
-                  <a:lnTo>
-                    <a:pt x="3695348" y="1469059"/>
-                  </a:lnTo>
-                  <a:lnTo>
-                    <a:pt x="3769108" y="1450821"/>
-                  </a:lnTo>
-                  <a:lnTo>
-                    <a:pt x="3842868" y="1432208"/>
-                  </a:lnTo>
-                  <a:lnTo>
-                    <a:pt x="3916628" y="1413212"/>
-                  </a:lnTo>
-                  <a:lnTo>
-                    <a:pt x="3990388" y="1393825"/>
-                  </a:lnTo>
-                  <a:lnTo>
-                    <a:pt x="4064149" y="1374040"/>
-                  </a:lnTo>
-                  <a:lnTo>
-                    <a:pt x="4137909" y="1353848"/>
-                  </a:lnTo>
-                  <a:lnTo>
-                    <a:pt x="4211669" y="1333241"/>
-                  </a:lnTo>
-                  <a:lnTo>
-                    <a:pt x="4285429" y="1312211"/>
-                  </a:lnTo>
-                  <a:lnTo>
-                    <a:pt x="4359189" y="1290748"/>
-                  </a:lnTo>
-                  <a:lnTo>
-                    <a:pt x="4432949" y="1268844"/>
-                  </a:lnTo>
-                  <a:lnTo>
-                    <a:pt x="4506709" y="1246489"/>
-                  </a:lnTo>
-                  <a:lnTo>
-                    <a:pt x="4580469" y="1223675"/>
-                  </a:lnTo>
-                  <a:lnTo>
-                    <a:pt x="4654229" y="1200392"/>
-                  </a:lnTo>
-                  <a:lnTo>
-                    <a:pt x="4727989" y="1176630"/>
-                  </a:lnTo>
-                  <a:lnTo>
-                    <a:pt x="4801749" y="1152380"/>
-                  </a:lnTo>
-                  <a:lnTo>
-                    <a:pt x="4875509" y="1127631"/>
-                  </a:lnTo>
-                  <a:lnTo>
-                    <a:pt x="4949269" y="1102374"/>
-                  </a:lnTo>
-                  <a:lnTo>
-                    <a:pt x="5023029" y="1076597"/>
-                  </a:lnTo>
-                  <a:lnTo>
-                    <a:pt x="5096789" y="1050290"/>
-                  </a:lnTo>
-                  <a:lnTo>
-                    <a:pt x="5170549" y="1023442"/>
-                  </a:lnTo>
-                  <a:lnTo>
-                    <a:pt x="5244309" y="996043"/>
-                  </a:lnTo>
-                  <a:lnTo>
-                    <a:pt x="5318069" y="968080"/>
-                  </a:lnTo>
-                  <a:lnTo>
-                    <a:pt x="5391829" y="939542"/>
-                  </a:lnTo>
-                  <a:lnTo>
-                    <a:pt x="5465589" y="910418"/>
-                  </a:lnTo>
-                  <a:lnTo>
-                    <a:pt x="5539349" y="880695"/>
-                  </a:lnTo>
-                  <a:lnTo>
-                    <a:pt x="5613109" y="850361"/>
-                  </a:lnTo>
-                  <a:lnTo>
-                    <a:pt x="5686869" y="819403"/>
-                  </a:lnTo>
-                  <a:lnTo>
-                    <a:pt x="5760629" y="787809"/>
-                  </a:lnTo>
-                  <a:lnTo>
-                    <a:pt x="5834389" y="755565"/>
-                  </a:lnTo>
-                  <a:lnTo>
-                    <a:pt x="5908149" y="722658"/>
-                  </a:lnTo>
-                  <a:lnTo>
-                    <a:pt x="5981909" y="689075"/>
-                  </a:lnTo>
-                  <a:lnTo>
-                    <a:pt x="6055669" y="654802"/>
-                  </a:lnTo>
-                  <a:lnTo>
-                    <a:pt x="6129429" y="619823"/>
-                  </a:lnTo>
-                  <a:lnTo>
-                    <a:pt x="6203189" y="584126"/>
-                  </a:lnTo>
-                  <a:lnTo>
-                    <a:pt x="6276949" y="547695"/>
-                  </a:lnTo>
-                  <a:lnTo>
-                    <a:pt x="6350709" y="510515"/>
-                  </a:lnTo>
-                  <a:lnTo>
-                    <a:pt x="6424469" y="472570"/>
-                  </a:lnTo>
-                  <a:lnTo>
-                    <a:pt x="6498229" y="433846"/>
-                  </a:lnTo>
-                  <a:lnTo>
-                    <a:pt x="6571989" y="394325"/>
-                  </a:lnTo>
-                  <a:lnTo>
-                    <a:pt x="6645749" y="353992"/>
-                  </a:lnTo>
-                  <a:lnTo>
-                    <a:pt x="6719509" y="312830"/>
-                  </a:lnTo>
-                  <a:lnTo>
-                    <a:pt x="6793269" y="270821"/>
-                  </a:lnTo>
-                  <a:lnTo>
-                    <a:pt x="6867029" y="227949"/>
-                  </a:lnTo>
-                  <a:lnTo>
-                    <a:pt x="6940789" y="184196"/>
-                  </a:lnTo>
-                  <a:lnTo>
-                    <a:pt x="7014550" y="139542"/>
-                  </a:lnTo>
-                  <a:lnTo>
-                    <a:pt x="7088310" y="93971"/>
-                  </a:lnTo>
-                  <a:lnTo>
-                    <a:pt x="7162070" y="47464"/>
-                  </a:lnTo>
-                  <a:lnTo>
-                    <a:pt x="7235830" y="0"/>
+                    <a:pt x="7019007" y="228723"/>
+                  </a:lnTo>
+                  <a:lnTo>
+                    <a:pt x="6947385" y="224836"/>
+                  </a:lnTo>
+                  <a:lnTo>
+                    <a:pt x="6875762" y="220923"/>
+                  </a:lnTo>
+                  <a:lnTo>
+                    <a:pt x="6804139" y="216985"/>
+                  </a:lnTo>
+                  <a:lnTo>
+                    <a:pt x="6732517" y="213022"/>
+                  </a:lnTo>
+                  <a:lnTo>
+                    <a:pt x="6660894" y="209033"/>
+                  </a:lnTo>
+                  <a:lnTo>
+                    <a:pt x="6589272" y="205018"/>
+                  </a:lnTo>
+                  <a:lnTo>
+                    <a:pt x="6517649" y="200977"/>
+                  </a:lnTo>
+                  <a:lnTo>
+                    <a:pt x="6446027" y="196910"/>
+                  </a:lnTo>
+                  <a:lnTo>
+                    <a:pt x="6374404" y="192816"/>
+                  </a:lnTo>
+                  <a:lnTo>
+                    <a:pt x="6302782" y="188696"/>
+                  </a:lnTo>
+                  <a:lnTo>
+                    <a:pt x="6231159" y="184549"/>
+                  </a:lnTo>
+                  <a:lnTo>
+                    <a:pt x="6159537" y="180375"/>
+                  </a:lnTo>
+                  <a:lnTo>
+                    <a:pt x="6087914" y="176174"/>
+                  </a:lnTo>
+                  <a:lnTo>
+                    <a:pt x="6016292" y="171946"/>
+                  </a:lnTo>
+                  <a:lnTo>
+                    <a:pt x="5944669" y="167691"/>
+                  </a:lnTo>
+                  <a:lnTo>
+                    <a:pt x="5873047" y="163408"/>
+                  </a:lnTo>
+                  <a:lnTo>
+                    <a:pt x="5801424" y="159097"/>
+                  </a:lnTo>
+                  <a:lnTo>
+                    <a:pt x="5729802" y="154758"/>
+                  </a:lnTo>
+                  <a:lnTo>
+                    <a:pt x="5658179" y="150390"/>
+                  </a:lnTo>
+                  <a:lnTo>
+                    <a:pt x="5586557" y="145995"/>
+                  </a:lnTo>
+                  <a:lnTo>
+                    <a:pt x="5514934" y="141571"/>
+                  </a:lnTo>
+                  <a:lnTo>
+                    <a:pt x="5443311" y="137118"/>
+                  </a:lnTo>
+                  <a:lnTo>
+                    <a:pt x="5371689" y="132637"/>
+                  </a:lnTo>
+                  <a:lnTo>
+                    <a:pt x="5300066" y="128126"/>
+                  </a:lnTo>
+                  <a:lnTo>
+                    <a:pt x="5228444" y="123586"/>
+                  </a:lnTo>
+                  <a:lnTo>
+                    <a:pt x="5156821" y="119017"/>
+                  </a:lnTo>
+                  <a:lnTo>
+                    <a:pt x="5085199" y="114418"/>
+                  </a:lnTo>
+                  <a:lnTo>
+                    <a:pt x="5013576" y="109789"/>
+                  </a:lnTo>
+                  <a:lnTo>
+                    <a:pt x="4941954" y="105130"/>
+                  </a:lnTo>
+                  <a:lnTo>
+                    <a:pt x="4870331" y="100441"/>
+                  </a:lnTo>
+                  <a:lnTo>
+                    <a:pt x="4798709" y="95722"/>
+                  </a:lnTo>
+                  <a:lnTo>
+                    <a:pt x="4727086" y="90971"/>
+                  </a:lnTo>
+                  <a:lnTo>
+                    <a:pt x="4655464" y="86190"/>
+                  </a:lnTo>
+                  <a:lnTo>
+                    <a:pt x="4583841" y="81378"/>
+                  </a:lnTo>
+                  <a:lnTo>
+                    <a:pt x="4512219" y="76535"/>
+                  </a:lnTo>
+                  <a:lnTo>
+                    <a:pt x="4440596" y="71661"/>
+                  </a:lnTo>
+                  <a:lnTo>
+                    <a:pt x="4368974" y="66754"/>
+                  </a:lnTo>
+                  <a:lnTo>
+                    <a:pt x="4297351" y="61816"/>
+                  </a:lnTo>
+                  <a:lnTo>
+                    <a:pt x="4225729" y="56846"/>
+                  </a:lnTo>
+                  <a:lnTo>
+                    <a:pt x="4154106" y="51844"/>
+                  </a:lnTo>
+                  <a:lnTo>
+                    <a:pt x="4082483" y="46809"/>
+                  </a:lnTo>
+                  <a:lnTo>
+                    <a:pt x="4010861" y="41741"/>
+                  </a:lnTo>
+                  <a:lnTo>
+                    <a:pt x="3939238" y="36641"/>
+                  </a:lnTo>
+                  <a:lnTo>
+                    <a:pt x="3867616" y="31507"/>
+                  </a:lnTo>
+                  <a:lnTo>
+                    <a:pt x="3795993" y="26341"/>
+                  </a:lnTo>
+                  <a:lnTo>
+                    <a:pt x="3724371" y="21140"/>
+                  </a:lnTo>
+                  <a:lnTo>
+                    <a:pt x="3652748" y="15906"/>
+                  </a:lnTo>
+                  <a:lnTo>
+                    <a:pt x="3581126" y="10638"/>
+                  </a:lnTo>
+                  <a:lnTo>
+                    <a:pt x="3509503" y="5336"/>
+                  </a:lnTo>
+                  <a:lnTo>
+                    <a:pt x="3437881" y="0"/>
+                  </a:lnTo>
+                  <a:lnTo>
+                    <a:pt x="3366258" y="10034"/>
+                  </a:lnTo>
+                  <a:lnTo>
+                    <a:pt x="3294636" y="26508"/>
+                  </a:lnTo>
+                  <a:lnTo>
+                    <a:pt x="3223013" y="42650"/>
+                  </a:lnTo>
+                  <a:lnTo>
+                    <a:pt x="3151391" y="58467"/>
+                  </a:lnTo>
+                  <a:lnTo>
+                    <a:pt x="3079768" y="73965"/>
+                  </a:lnTo>
+                  <a:lnTo>
+                    <a:pt x="3008146" y="89151"/>
+                  </a:lnTo>
+                  <a:lnTo>
+                    <a:pt x="2936523" y="104031"/>
+                  </a:lnTo>
+                  <a:lnTo>
+                    <a:pt x="2864901" y="118612"/>
+                  </a:lnTo>
+                  <a:lnTo>
+                    <a:pt x="2793278" y="132898"/>
+                  </a:lnTo>
+                  <a:lnTo>
+                    <a:pt x="2721655" y="146897"/>
+                  </a:lnTo>
+                  <a:lnTo>
+                    <a:pt x="2650033" y="160614"/>
+                  </a:lnTo>
+                  <a:lnTo>
+                    <a:pt x="2578410" y="174055"/>
+                  </a:lnTo>
+                  <a:lnTo>
+                    <a:pt x="2506788" y="187225"/>
+                  </a:lnTo>
+                  <a:lnTo>
+                    <a:pt x="2435165" y="200129"/>
+                  </a:lnTo>
+                  <a:lnTo>
+                    <a:pt x="2363543" y="212774"/>
+                  </a:lnTo>
+                  <a:lnTo>
+                    <a:pt x="2291920" y="225164"/>
+                  </a:lnTo>
+                  <a:lnTo>
+                    <a:pt x="2220298" y="237304"/>
+                  </a:lnTo>
+                  <a:lnTo>
+                    <a:pt x="2148675" y="249200"/>
+                  </a:lnTo>
+                  <a:lnTo>
+                    <a:pt x="2077053" y="260856"/>
+                  </a:lnTo>
+                  <a:lnTo>
+                    <a:pt x="2005430" y="272277"/>
+                  </a:lnTo>
+                  <a:lnTo>
+                    <a:pt x="1933808" y="283469"/>
+                  </a:lnTo>
+                  <a:lnTo>
+                    <a:pt x="1862185" y="294434"/>
+                  </a:lnTo>
+                  <a:lnTo>
+                    <a:pt x="1790563" y="305179"/>
+                  </a:lnTo>
+                  <a:lnTo>
+                    <a:pt x="1718940" y="315708"/>
+                  </a:lnTo>
+                  <a:lnTo>
+                    <a:pt x="1647318" y="326024"/>
+                  </a:lnTo>
+                  <a:lnTo>
+                    <a:pt x="1575695" y="336133"/>
+                  </a:lnTo>
+                  <a:lnTo>
+                    <a:pt x="1504073" y="346038"/>
+                  </a:lnTo>
+                  <a:lnTo>
+                    <a:pt x="1432450" y="355743"/>
+                  </a:lnTo>
+                  <a:lnTo>
+                    <a:pt x="1360827" y="365253"/>
+                  </a:lnTo>
+                  <a:lnTo>
+                    <a:pt x="1289205" y="374571"/>
+                  </a:lnTo>
+                  <a:lnTo>
+                    <a:pt x="1217582" y="383702"/>
+                  </a:lnTo>
+                  <a:lnTo>
+                    <a:pt x="1145960" y="392648"/>
+                  </a:lnTo>
+                  <a:lnTo>
+                    <a:pt x="1074337" y="401415"/>
+                  </a:lnTo>
+                  <a:lnTo>
+                    <a:pt x="1002715" y="410005"/>
+                  </a:lnTo>
+                  <a:lnTo>
+                    <a:pt x="931092" y="418422"/>
+                  </a:lnTo>
+                  <a:lnTo>
+                    <a:pt x="859470" y="426669"/>
+                  </a:lnTo>
+                  <a:lnTo>
+                    <a:pt x="787847" y="434750"/>
+                  </a:lnTo>
+                  <a:lnTo>
+                    <a:pt x="716225" y="442668"/>
+                  </a:lnTo>
+                  <a:lnTo>
+                    <a:pt x="644602" y="450427"/>
+                  </a:lnTo>
+                  <a:lnTo>
+                    <a:pt x="572980" y="458030"/>
+                  </a:lnTo>
+                  <a:lnTo>
+                    <a:pt x="501357" y="465479"/>
+                  </a:lnTo>
+                  <a:lnTo>
+                    <a:pt x="429735" y="472778"/>
+                  </a:lnTo>
+                  <a:lnTo>
+                    <a:pt x="358112" y="479931"/>
+                  </a:lnTo>
+                  <a:lnTo>
+                    <a:pt x="286490" y="486939"/>
+                  </a:lnTo>
+                  <a:lnTo>
+                    <a:pt x="214867" y="493806"/>
+                  </a:lnTo>
+                  <a:lnTo>
+                    <a:pt x="143245" y="500535"/>
+                  </a:lnTo>
+                  <a:lnTo>
+                    <a:pt x="71622" y="507128"/>
+                  </a:lnTo>
+                  <a:lnTo>
+                    <a:pt x="0" y="513588"/>
                   </a:lnTo>
                 </a:path>
               </a:pathLst>
@@ -3958,637 +4240,312 @@
           </p:nvSpPr>
           <p:spPr>
             <a:xfrm>
-              <a:off x="817517" y="4729416"/>
-              <a:ext cx="7235830" cy="507772"/>
+              <a:off x="1172049" y="4372964"/>
+              <a:ext cx="7090630" cy="588602"/>
             </a:xfrm>
             <a:custGeom>
               <a:avLst/>
               <a:pathLst>
-                <a:path w="7235830" h="507772">
+                <a:path w="7090630" h="588602">
                   <a:moveTo>
-                    <a:pt x="7235830" y="232585"/>
+                    <a:pt x="0" y="588602"/>
                   </a:moveTo>
                   <a:lnTo>
-                    <a:pt x="7162070" y="228723"/>
-                  </a:lnTo>
-                  <a:lnTo>
-                    <a:pt x="7088310" y="224836"/>
-                  </a:lnTo>
-                  <a:lnTo>
-                    <a:pt x="7014550" y="220923"/>
-                  </a:lnTo>
-                  <a:lnTo>
-                    <a:pt x="6940789" y="216985"/>
-                  </a:lnTo>
-                  <a:lnTo>
-                    <a:pt x="6867029" y="213022"/>
-                  </a:lnTo>
-                  <a:lnTo>
-                    <a:pt x="6793269" y="209033"/>
-                  </a:lnTo>
-                  <a:lnTo>
-                    <a:pt x="6719509" y="205018"/>
-                  </a:lnTo>
-                  <a:lnTo>
-                    <a:pt x="6645749" y="200977"/>
-                  </a:lnTo>
-                  <a:lnTo>
-                    <a:pt x="6571989" y="196910"/>
-                  </a:lnTo>
-                  <a:lnTo>
-                    <a:pt x="6498229" y="192816"/>
-                  </a:lnTo>
-                  <a:lnTo>
-                    <a:pt x="6424469" y="188696"/>
-                  </a:lnTo>
-                  <a:lnTo>
-                    <a:pt x="6350709" y="184549"/>
-                  </a:lnTo>
-                  <a:lnTo>
-                    <a:pt x="6276949" y="180375"/>
-                  </a:lnTo>
-                  <a:lnTo>
-                    <a:pt x="6203189" y="176174"/>
-                  </a:lnTo>
-                  <a:lnTo>
-                    <a:pt x="6129429" y="171946"/>
-                  </a:lnTo>
-                  <a:lnTo>
-                    <a:pt x="6055669" y="167691"/>
-                  </a:lnTo>
-                  <a:lnTo>
-                    <a:pt x="5981909" y="163408"/>
-                  </a:lnTo>
-                  <a:lnTo>
-                    <a:pt x="5908149" y="159097"/>
-                  </a:lnTo>
-                  <a:lnTo>
-                    <a:pt x="5834389" y="154758"/>
-                  </a:lnTo>
-                  <a:lnTo>
-                    <a:pt x="5760629" y="150390"/>
-                  </a:lnTo>
-                  <a:lnTo>
-                    <a:pt x="5686869" y="145995"/>
-                  </a:lnTo>
-                  <a:lnTo>
-                    <a:pt x="5613109" y="141571"/>
-                  </a:lnTo>
-                  <a:lnTo>
-                    <a:pt x="5539349" y="137118"/>
-                  </a:lnTo>
-                  <a:lnTo>
-                    <a:pt x="5465589" y="132637"/>
-                  </a:lnTo>
-                  <a:lnTo>
-                    <a:pt x="5391829" y="128126"/>
-                  </a:lnTo>
-                  <a:lnTo>
-                    <a:pt x="5318069" y="123586"/>
-                  </a:lnTo>
-                  <a:lnTo>
-                    <a:pt x="5244309" y="119017"/>
-                  </a:lnTo>
-                  <a:lnTo>
-                    <a:pt x="5170549" y="114418"/>
-                  </a:lnTo>
-                  <a:lnTo>
-                    <a:pt x="5096789" y="109789"/>
-                  </a:lnTo>
-                  <a:lnTo>
-                    <a:pt x="5023029" y="105130"/>
-                  </a:lnTo>
-                  <a:lnTo>
-                    <a:pt x="4949269" y="100441"/>
-                  </a:lnTo>
-                  <a:lnTo>
-                    <a:pt x="4875509" y="95722"/>
-                  </a:lnTo>
-                  <a:lnTo>
-                    <a:pt x="4801749" y="90971"/>
-                  </a:lnTo>
-                  <a:lnTo>
-                    <a:pt x="4727989" y="86190"/>
-                  </a:lnTo>
-                  <a:lnTo>
-                    <a:pt x="4654229" y="81378"/>
-                  </a:lnTo>
-                  <a:lnTo>
-                    <a:pt x="4580469" y="76535"/>
-                  </a:lnTo>
-                  <a:lnTo>
-                    <a:pt x="4506709" y="71661"/>
-                  </a:lnTo>
-                  <a:lnTo>
-                    <a:pt x="4432949" y="66754"/>
-                  </a:lnTo>
-                  <a:lnTo>
-                    <a:pt x="4359189" y="61816"/>
-                  </a:lnTo>
-                  <a:lnTo>
-                    <a:pt x="4285429" y="56846"/>
-                  </a:lnTo>
-                  <a:lnTo>
-                    <a:pt x="4211669" y="51844"/>
-                  </a:lnTo>
-                  <a:lnTo>
-                    <a:pt x="4137909" y="46809"/>
-                  </a:lnTo>
-                  <a:lnTo>
-                    <a:pt x="4064149" y="41741"/>
-                  </a:lnTo>
-                  <a:lnTo>
-                    <a:pt x="3990388" y="36641"/>
-                  </a:lnTo>
-                  <a:lnTo>
-                    <a:pt x="3916628" y="31507"/>
-                  </a:lnTo>
-                  <a:lnTo>
-                    <a:pt x="3842868" y="26341"/>
-                  </a:lnTo>
-                  <a:lnTo>
-                    <a:pt x="3769108" y="21140"/>
-                  </a:lnTo>
-                  <a:lnTo>
-                    <a:pt x="3695348" y="15906"/>
-                  </a:lnTo>
-                  <a:lnTo>
-                    <a:pt x="3621588" y="10638"/>
-                  </a:lnTo>
-                  <a:lnTo>
-                    <a:pt x="3547828" y="5336"/>
-                  </a:lnTo>
-                  <a:lnTo>
-                    <a:pt x="3474068" y="0"/>
-                  </a:lnTo>
-                  <a:lnTo>
-                    <a:pt x="3400308" y="10034"/>
-                  </a:lnTo>
-                  <a:lnTo>
-                    <a:pt x="3326548" y="26508"/>
-                  </a:lnTo>
-                  <a:lnTo>
-                    <a:pt x="3252788" y="42650"/>
-                  </a:lnTo>
-                  <a:lnTo>
-                    <a:pt x="3179028" y="58467"/>
-                  </a:lnTo>
-                  <a:lnTo>
-                    <a:pt x="3105268" y="73965"/>
-                  </a:lnTo>
-                  <a:lnTo>
-                    <a:pt x="3031508" y="89151"/>
-                  </a:lnTo>
-                  <a:lnTo>
-                    <a:pt x="2957748" y="104031"/>
-                  </a:lnTo>
-                  <a:lnTo>
-                    <a:pt x="2883988" y="118612"/>
-                  </a:lnTo>
-                  <a:lnTo>
-                    <a:pt x="2810228" y="132898"/>
-                  </a:lnTo>
-                  <a:lnTo>
-                    <a:pt x="2736468" y="146897"/>
-                  </a:lnTo>
-                  <a:lnTo>
-                    <a:pt x="2662708" y="160614"/>
-                  </a:lnTo>
-                  <a:lnTo>
-                    <a:pt x="2588948" y="174055"/>
-                  </a:lnTo>
-                  <a:lnTo>
-                    <a:pt x="2515188" y="187225"/>
-                  </a:lnTo>
-                  <a:lnTo>
-                    <a:pt x="2441428" y="200129"/>
-                  </a:lnTo>
-                  <a:lnTo>
-                    <a:pt x="2367668" y="212774"/>
-                  </a:lnTo>
-                  <a:lnTo>
-                    <a:pt x="2293908" y="225164"/>
-                  </a:lnTo>
-                  <a:lnTo>
-                    <a:pt x="2220148" y="237304"/>
-                  </a:lnTo>
-                  <a:lnTo>
-                    <a:pt x="2146388" y="249200"/>
-                  </a:lnTo>
-                  <a:lnTo>
-                    <a:pt x="2072628" y="260856"/>
-                  </a:lnTo>
-                  <a:lnTo>
-                    <a:pt x="1998868" y="272277"/>
-                  </a:lnTo>
-                  <a:lnTo>
-                    <a:pt x="1925108" y="283469"/>
-                  </a:lnTo>
-                  <a:lnTo>
-                    <a:pt x="1851348" y="294434"/>
-                  </a:lnTo>
-                  <a:lnTo>
-                    <a:pt x="1777588" y="305179"/>
-                  </a:lnTo>
-                  <a:lnTo>
-                    <a:pt x="1703828" y="315708"/>
-                  </a:lnTo>
-                  <a:lnTo>
-                    <a:pt x="1630068" y="326024"/>
-                  </a:lnTo>
-                  <a:lnTo>
-                    <a:pt x="1556308" y="336133"/>
-                  </a:lnTo>
-                  <a:lnTo>
-                    <a:pt x="1482548" y="346038"/>
-                  </a:lnTo>
-                  <a:lnTo>
-                    <a:pt x="1408788" y="355743"/>
-                  </a:lnTo>
-                  <a:lnTo>
-                    <a:pt x="1335028" y="365253"/>
-                  </a:lnTo>
-                  <a:lnTo>
-                    <a:pt x="1261268" y="374571"/>
-                  </a:lnTo>
-                  <a:lnTo>
-                    <a:pt x="1187508" y="383702"/>
-                  </a:lnTo>
-                  <a:lnTo>
-                    <a:pt x="1113747" y="392648"/>
-                  </a:lnTo>
-                  <a:lnTo>
-                    <a:pt x="1039987" y="401415"/>
-                  </a:lnTo>
-                  <a:lnTo>
-                    <a:pt x="966227" y="410005"/>
-                  </a:lnTo>
-                  <a:lnTo>
-                    <a:pt x="892467" y="418422"/>
-                  </a:lnTo>
-                  <a:lnTo>
-                    <a:pt x="818707" y="426669"/>
-                  </a:lnTo>
-                  <a:lnTo>
-                    <a:pt x="744947" y="434750"/>
-                  </a:lnTo>
-                  <a:lnTo>
-                    <a:pt x="671187" y="442668"/>
-                  </a:lnTo>
-                  <a:lnTo>
-                    <a:pt x="597427" y="450427"/>
-                  </a:lnTo>
-                  <a:lnTo>
-                    <a:pt x="523667" y="458030"/>
-                  </a:lnTo>
-                  <a:lnTo>
-                    <a:pt x="449907" y="465479"/>
-                  </a:lnTo>
-                  <a:lnTo>
-                    <a:pt x="376147" y="472778"/>
-                  </a:lnTo>
-                  <a:lnTo>
-                    <a:pt x="302387" y="479931"/>
-                  </a:lnTo>
-                  <a:lnTo>
-                    <a:pt x="228627" y="486939"/>
-                  </a:lnTo>
-                  <a:lnTo>
-                    <a:pt x="154867" y="493806"/>
-                  </a:lnTo>
-                  <a:lnTo>
-                    <a:pt x="81107" y="500535"/>
-                  </a:lnTo>
-                  <a:lnTo>
-                    <a:pt x="7347" y="507128"/>
-                  </a:lnTo>
-                  <a:lnTo>
-                    <a:pt x="0" y="507772"/>
-                  </a:lnTo>
-                </a:path>
-              </a:pathLst>
-            </a:custGeom>
-          </p:spPr>
-          <p:txBody>
-            <a:bodyPr/>
-            <a:lstStyle/>
-            <a:p/>
-          </p:txBody>
-        </p:sp>
-        <p:sp>
-          <p:nvSpPr>
-            <p:cNvPr id="24" name="pl24"/>
-            <p:cNvSpPr/>
-            <p:nvPr/>
-          </p:nvSpPr>
-          <p:spPr>
-            <a:xfrm>
-              <a:off x="817517" y="4372964"/>
-              <a:ext cx="7235830" cy="584866"/>
-            </a:xfrm>
-            <a:custGeom>
-              <a:avLst/>
-              <a:pathLst>
-                <a:path w="7235830" h="584866">
-                  <a:moveTo>
-                    <a:pt x="0" y="584866"/>
-                  </a:moveTo>
-                  <a:lnTo>
-                    <a:pt x="7347" y="584452"/>
-                  </a:lnTo>
-                  <a:lnTo>
-                    <a:pt x="81107" y="580274"/>
-                  </a:lnTo>
-                  <a:lnTo>
-                    <a:pt x="154867" y="576067"/>
-                  </a:lnTo>
-                  <a:lnTo>
-                    <a:pt x="228627" y="571831"/>
-                  </a:lnTo>
-                  <a:lnTo>
-                    <a:pt x="302387" y="567565"/>
-                  </a:lnTo>
-                  <a:lnTo>
-                    <a:pt x="376147" y="563269"/>
-                  </a:lnTo>
-                  <a:lnTo>
-                    <a:pt x="449907" y="558943"/>
-                  </a:lnTo>
-                  <a:lnTo>
-                    <a:pt x="523667" y="554588"/>
-                  </a:lnTo>
-                  <a:lnTo>
-                    <a:pt x="597427" y="550201"/>
-                  </a:lnTo>
-                  <a:lnTo>
-                    <a:pt x="671187" y="545785"/>
-                  </a:lnTo>
-                  <a:lnTo>
-                    <a:pt x="744947" y="541337"/>
-                  </a:lnTo>
-                  <a:lnTo>
-                    <a:pt x="818707" y="536859"/>
-                  </a:lnTo>
-                  <a:lnTo>
-                    <a:pt x="892467" y="532349"/>
-                  </a:lnTo>
-                  <a:lnTo>
-                    <a:pt x="966227" y="527808"/>
-                  </a:lnTo>
-                  <a:lnTo>
-                    <a:pt x="1039987" y="523236"/>
-                  </a:lnTo>
-                  <a:lnTo>
-                    <a:pt x="1113747" y="518631"/>
-                  </a:lnTo>
-                  <a:lnTo>
-                    <a:pt x="1187508" y="513995"/>
-                  </a:lnTo>
-                  <a:lnTo>
-                    <a:pt x="1261268" y="509326"/>
-                  </a:lnTo>
-                  <a:lnTo>
-                    <a:pt x="1335028" y="504624"/>
-                  </a:lnTo>
-                  <a:lnTo>
-                    <a:pt x="1408788" y="499890"/>
-                  </a:lnTo>
-                  <a:lnTo>
-                    <a:pt x="1482548" y="495123"/>
-                  </a:lnTo>
-                  <a:lnTo>
-                    <a:pt x="1556308" y="490323"/>
-                  </a:lnTo>
-                  <a:lnTo>
-                    <a:pt x="1630068" y="485489"/>
-                  </a:lnTo>
-                  <a:lnTo>
-                    <a:pt x="1703828" y="480622"/>
-                  </a:lnTo>
-                  <a:lnTo>
-                    <a:pt x="1777588" y="475721"/>
-                  </a:lnTo>
-                  <a:lnTo>
-                    <a:pt x="1851348" y="470785"/>
-                  </a:lnTo>
-                  <a:lnTo>
-                    <a:pt x="1925108" y="465815"/>
-                  </a:lnTo>
-                  <a:lnTo>
-                    <a:pt x="1998868" y="460811"/>
-                  </a:lnTo>
-                  <a:lnTo>
-                    <a:pt x="2072628" y="455772"/>
-                  </a:lnTo>
-                  <a:lnTo>
-                    <a:pt x="2146388" y="450697"/>
-                  </a:lnTo>
-                  <a:lnTo>
-                    <a:pt x="2220148" y="445587"/>
-                  </a:lnTo>
-                  <a:lnTo>
-                    <a:pt x="2293908" y="440442"/>
-                  </a:lnTo>
-                  <a:lnTo>
-                    <a:pt x="2367668" y="435261"/>
-                  </a:lnTo>
-                  <a:lnTo>
-                    <a:pt x="2441428" y="430044"/>
-                  </a:lnTo>
-                  <a:lnTo>
-                    <a:pt x="2515188" y="424790"/>
-                  </a:lnTo>
-                  <a:lnTo>
-                    <a:pt x="2588948" y="419500"/>
-                  </a:lnTo>
-                  <a:lnTo>
-                    <a:pt x="2662708" y="414173"/>
-                  </a:lnTo>
-                  <a:lnTo>
-                    <a:pt x="2736468" y="408809"/>
-                  </a:lnTo>
-                  <a:lnTo>
-                    <a:pt x="2810228" y="403407"/>
-                  </a:lnTo>
-                  <a:lnTo>
-                    <a:pt x="2883988" y="397968"/>
-                  </a:lnTo>
-                  <a:lnTo>
-                    <a:pt x="2957748" y="392491"/>
-                  </a:lnTo>
-                  <a:lnTo>
-                    <a:pt x="3031508" y="386976"/>
-                  </a:lnTo>
-                  <a:lnTo>
-                    <a:pt x="3105268" y="381422"/>
-                  </a:lnTo>
-                  <a:lnTo>
-                    <a:pt x="3179028" y="375830"/>
-                  </a:lnTo>
-                  <a:lnTo>
-                    <a:pt x="3252788" y="370199"/>
-                  </a:lnTo>
-                  <a:lnTo>
-                    <a:pt x="3326548" y="364528"/>
-                  </a:lnTo>
-                  <a:lnTo>
-                    <a:pt x="3400308" y="358818"/>
-                  </a:lnTo>
-                  <a:lnTo>
-                    <a:pt x="3474068" y="353069"/>
-                  </a:lnTo>
-                  <a:lnTo>
-                    <a:pt x="3547828" y="347279"/>
-                  </a:lnTo>
-                  <a:lnTo>
-                    <a:pt x="3621588" y="341449"/>
-                  </a:lnTo>
-                  <a:lnTo>
-                    <a:pt x="3695348" y="335578"/>
-                  </a:lnTo>
-                  <a:lnTo>
-                    <a:pt x="3769108" y="329666"/>
-                  </a:lnTo>
-                  <a:lnTo>
-                    <a:pt x="3842868" y="323714"/>
-                  </a:lnTo>
-                  <a:lnTo>
-                    <a:pt x="3916628" y="317719"/>
-                  </a:lnTo>
-                  <a:lnTo>
-                    <a:pt x="3990388" y="311683"/>
-                  </a:lnTo>
-                  <a:lnTo>
-                    <a:pt x="4064149" y="305605"/>
-                  </a:lnTo>
-                  <a:lnTo>
-                    <a:pt x="4137909" y="299485"/>
-                  </a:lnTo>
-                  <a:lnTo>
-                    <a:pt x="4211669" y="293322"/>
-                  </a:lnTo>
-                  <a:lnTo>
-                    <a:pt x="4285429" y="287116"/>
-                  </a:lnTo>
-                  <a:lnTo>
-                    <a:pt x="4359189" y="280867"/>
-                  </a:lnTo>
-                  <a:lnTo>
-                    <a:pt x="4432949" y="274574"/>
-                  </a:lnTo>
-                  <a:lnTo>
-                    <a:pt x="4506709" y="268238"/>
-                  </a:lnTo>
-                  <a:lnTo>
-                    <a:pt x="4580469" y="261857"/>
-                  </a:lnTo>
-                  <a:lnTo>
-                    <a:pt x="4654229" y="255432"/>
-                  </a:lnTo>
-                  <a:lnTo>
-                    <a:pt x="4727989" y="248962"/>
-                  </a:lnTo>
-                  <a:lnTo>
-                    <a:pt x="4801749" y="242447"/>
-                  </a:lnTo>
-                  <a:lnTo>
-                    <a:pt x="4875509" y="235887"/>
-                  </a:lnTo>
-                  <a:lnTo>
-                    <a:pt x="4949269" y="229281"/>
-                  </a:lnTo>
-                  <a:lnTo>
-                    <a:pt x="5023029" y="222629"/>
-                  </a:lnTo>
-                  <a:lnTo>
-                    <a:pt x="5096789" y="215931"/>
-                  </a:lnTo>
-                  <a:lnTo>
-                    <a:pt x="5170549" y="209186"/>
-                  </a:lnTo>
-                  <a:lnTo>
-                    <a:pt x="5244309" y="202394"/>
-                  </a:lnTo>
-                  <a:lnTo>
-                    <a:pt x="5318069" y="195554"/>
-                  </a:lnTo>
-                  <a:lnTo>
-                    <a:pt x="5391829" y="188667"/>
-                  </a:lnTo>
-                  <a:lnTo>
-                    <a:pt x="5465589" y="181733"/>
-                  </a:lnTo>
-                  <a:lnTo>
-                    <a:pt x="5539349" y="174749"/>
-                  </a:lnTo>
-                  <a:lnTo>
-                    <a:pt x="5613109" y="167718"/>
-                  </a:lnTo>
-                  <a:lnTo>
-                    <a:pt x="5686869" y="160637"/>
-                  </a:lnTo>
-                  <a:lnTo>
-                    <a:pt x="5760629" y="153507"/>
-                  </a:lnTo>
-                  <a:lnTo>
-                    <a:pt x="5834389" y="146327"/>
-                  </a:lnTo>
-                  <a:lnTo>
-                    <a:pt x="5908149" y="139097"/>
-                  </a:lnTo>
-                  <a:lnTo>
-                    <a:pt x="5981909" y="131817"/>
-                  </a:lnTo>
-                  <a:lnTo>
-                    <a:pt x="6055669" y="124486"/>
-                  </a:lnTo>
-                  <a:lnTo>
-                    <a:pt x="6129429" y="117104"/>
-                  </a:lnTo>
-                  <a:lnTo>
-                    <a:pt x="6203189" y="109671"/>
-                  </a:lnTo>
-                  <a:lnTo>
-                    <a:pt x="6276949" y="102185"/>
-                  </a:lnTo>
-                  <a:lnTo>
-                    <a:pt x="6350709" y="94648"/>
-                  </a:lnTo>
-                  <a:lnTo>
-                    <a:pt x="6424469" y="87058"/>
-                  </a:lnTo>
-                  <a:lnTo>
-                    <a:pt x="6498229" y="79416"/>
-                  </a:lnTo>
-                  <a:lnTo>
-                    <a:pt x="6571989" y="71720"/>
-                  </a:lnTo>
-                  <a:lnTo>
-                    <a:pt x="6645749" y="63970"/>
-                  </a:lnTo>
-                  <a:lnTo>
-                    <a:pt x="6719509" y="56167"/>
-                  </a:lnTo>
-                  <a:lnTo>
-                    <a:pt x="6793269" y="48309"/>
-                  </a:lnTo>
-                  <a:lnTo>
-                    <a:pt x="6867029" y="40397"/>
-                  </a:lnTo>
-                  <a:lnTo>
-                    <a:pt x="6940789" y="32429"/>
-                  </a:lnTo>
-                  <a:lnTo>
-                    <a:pt x="7014550" y="24406"/>
-                  </a:lnTo>
-                  <a:lnTo>
-                    <a:pt x="7088310" y="16327"/>
-                  </a:lnTo>
-                  <a:lnTo>
-                    <a:pt x="7162070" y="8191"/>
-                  </a:lnTo>
-                  <a:lnTo>
-                    <a:pt x="7235830" y="0"/>
+                    <a:pt x="71622" y="584452"/>
+                  </a:lnTo>
+                  <a:lnTo>
+                    <a:pt x="143245" y="580274"/>
+                  </a:lnTo>
+                  <a:lnTo>
+                    <a:pt x="214867" y="576067"/>
+                  </a:lnTo>
+                  <a:lnTo>
+                    <a:pt x="286490" y="571831"/>
+                  </a:lnTo>
+                  <a:lnTo>
+                    <a:pt x="358112" y="567565"/>
+                  </a:lnTo>
+                  <a:lnTo>
+                    <a:pt x="429735" y="563269"/>
+                  </a:lnTo>
+                  <a:lnTo>
+                    <a:pt x="501357" y="558943"/>
+                  </a:lnTo>
+                  <a:lnTo>
+                    <a:pt x="572980" y="554588"/>
+                  </a:lnTo>
+                  <a:lnTo>
+                    <a:pt x="644602" y="550201"/>
+                  </a:lnTo>
+                  <a:lnTo>
+                    <a:pt x="716225" y="545785"/>
+                  </a:lnTo>
+                  <a:lnTo>
+                    <a:pt x="787847" y="541337"/>
+                  </a:lnTo>
+                  <a:lnTo>
+                    <a:pt x="859470" y="536859"/>
+                  </a:lnTo>
+                  <a:lnTo>
+                    <a:pt x="931092" y="532349"/>
+                  </a:lnTo>
+                  <a:lnTo>
+                    <a:pt x="1002715" y="527808"/>
+                  </a:lnTo>
+                  <a:lnTo>
+                    <a:pt x="1074337" y="523236"/>
+                  </a:lnTo>
+                  <a:lnTo>
+                    <a:pt x="1145960" y="518631"/>
+                  </a:lnTo>
+                  <a:lnTo>
+                    <a:pt x="1217582" y="513995"/>
+                  </a:lnTo>
+                  <a:lnTo>
+                    <a:pt x="1289205" y="509326"/>
+                  </a:lnTo>
+                  <a:lnTo>
+                    <a:pt x="1360827" y="504624"/>
+                  </a:lnTo>
+                  <a:lnTo>
+                    <a:pt x="1432450" y="499890"/>
+                  </a:lnTo>
+                  <a:lnTo>
+                    <a:pt x="1504073" y="495123"/>
+                  </a:lnTo>
+                  <a:lnTo>
+                    <a:pt x="1575695" y="490323"/>
+                  </a:lnTo>
+                  <a:lnTo>
+                    <a:pt x="1647318" y="485489"/>
+                  </a:lnTo>
+                  <a:lnTo>
+                    <a:pt x="1718940" y="480622"/>
+                  </a:lnTo>
+                  <a:lnTo>
+                    <a:pt x="1790563" y="475721"/>
+                  </a:lnTo>
+                  <a:lnTo>
+                    <a:pt x="1862185" y="470785"/>
+                  </a:lnTo>
+                  <a:lnTo>
+                    <a:pt x="1933808" y="465815"/>
+                  </a:lnTo>
+                  <a:lnTo>
+                    <a:pt x="2005430" y="460811"/>
+                  </a:lnTo>
+                  <a:lnTo>
+                    <a:pt x="2077053" y="455772"/>
+                  </a:lnTo>
+                  <a:lnTo>
+                    <a:pt x="2148675" y="450697"/>
+                  </a:lnTo>
+                  <a:lnTo>
+                    <a:pt x="2220298" y="445587"/>
+                  </a:lnTo>
+                  <a:lnTo>
+                    <a:pt x="2291920" y="440442"/>
+                  </a:lnTo>
+                  <a:lnTo>
+                    <a:pt x="2363543" y="435261"/>
+                  </a:lnTo>
+                  <a:lnTo>
+                    <a:pt x="2435165" y="430044"/>
+                  </a:lnTo>
+                  <a:lnTo>
+                    <a:pt x="2506788" y="424790"/>
+                  </a:lnTo>
+                  <a:lnTo>
+                    <a:pt x="2578410" y="419500"/>
+                  </a:lnTo>
+                  <a:lnTo>
+                    <a:pt x="2650033" y="414173"/>
+                  </a:lnTo>
+                  <a:lnTo>
+                    <a:pt x="2721655" y="408809"/>
+                  </a:lnTo>
+                  <a:lnTo>
+                    <a:pt x="2793278" y="403407"/>
+                  </a:lnTo>
+                  <a:lnTo>
+                    <a:pt x="2864901" y="397968"/>
+                  </a:lnTo>
+                  <a:lnTo>
+                    <a:pt x="2936523" y="392491"/>
+                  </a:lnTo>
+                  <a:lnTo>
+                    <a:pt x="3008146" y="386976"/>
+                  </a:lnTo>
+                  <a:lnTo>
+                    <a:pt x="3079768" y="381422"/>
+                  </a:lnTo>
+                  <a:lnTo>
+                    <a:pt x="3151391" y="375830"/>
+                  </a:lnTo>
+                  <a:lnTo>
+                    <a:pt x="3223013" y="370199"/>
+                  </a:lnTo>
+                  <a:lnTo>
+                    <a:pt x="3294636" y="364528"/>
+                  </a:lnTo>
+                  <a:lnTo>
+                    <a:pt x="3366258" y="358818"/>
+                  </a:lnTo>
+                  <a:lnTo>
+                    <a:pt x="3437881" y="353069"/>
+                  </a:lnTo>
+                  <a:lnTo>
+                    <a:pt x="3509503" y="347279"/>
+                  </a:lnTo>
+                  <a:lnTo>
+                    <a:pt x="3581126" y="341449"/>
+                  </a:lnTo>
+                  <a:lnTo>
+                    <a:pt x="3652748" y="335578"/>
+                  </a:lnTo>
+                  <a:lnTo>
+                    <a:pt x="3724371" y="329666"/>
+                  </a:lnTo>
+                  <a:lnTo>
+                    <a:pt x="3795993" y="323714"/>
+                  </a:lnTo>
+                  <a:lnTo>
+                    <a:pt x="3867616" y="317719"/>
+                  </a:lnTo>
+                  <a:lnTo>
+                    <a:pt x="3939238" y="311683"/>
+                  </a:lnTo>
+                  <a:lnTo>
+                    <a:pt x="4010861" y="305605"/>
+                  </a:lnTo>
+                  <a:lnTo>
+                    <a:pt x="4082483" y="299485"/>
+                  </a:lnTo>
+                  <a:lnTo>
+                    <a:pt x="4154106" y="293322"/>
+                  </a:lnTo>
+                  <a:lnTo>
+                    <a:pt x="4225729" y="287116"/>
+                  </a:lnTo>
+                  <a:lnTo>
+                    <a:pt x="4297351" y="280867"/>
+                  </a:lnTo>
+                  <a:lnTo>
+                    <a:pt x="4368974" y="274574"/>
+                  </a:lnTo>
+                  <a:lnTo>
+                    <a:pt x="4440596" y="268238"/>
+                  </a:lnTo>
+                  <a:lnTo>
+                    <a:pt x="4512219" y="261857"/>
+                  </a:lnTo>
+                  <a:lnTo>
+                    <a:pt x="4583841" y="255432"/>
+                  </a:lnTo>
+                  <a:lnTo>
+                    <a:pt x="4655464" y="248962"/>
+                  </a:lnTo>
+                  <a:lnTo>
+                    <a:pt x="4727086" y="242447"/>
+                  </a:lnTo>
+                  <a:lnTo>
+                    <a:pt x="4798709" y="235887"/>
+                  </a:lnTo>
+                  <a:lnTo>
+                    <a:pt x="4870331" y="229281"/>
+                  </a:lnTo>
+                  <a:lnTo>
+                    <a:pt x="4941954" y="222629"/>
+                  </a:lnTo>
+                  <a:lnTo>
+                    <a:pt x="5013576" y="215931"/>
+                  </a:lnTo>
+                  <a:lnTo>
+                    <a:pt x="5085199" y="209186"/>
+                  </a:lnTo>
+                  <a:lnTo>
+                    <a:pt x="5156821" y="202394"/>
+                  </a:lnTo>
+                  <a:lnTo>
+                    <a:pt x="5228444" y="195554"/>
+                  </a:lnTo>
+                  <a:lnTo>
+                    <a:pt x="5300066" y="188667"/>
+                  </a:lnTo>
+                  <a:lnTo>
+                    <a:pt x="5371689" y="181733"/>
+                  </a:lnTo>
+                  <a:lnTo>
+                    <a:pt x="5443311" y="174749"/>
+                  </a:lnTo>
+                  <a:lnTo>
+                    <a:pt x="5514934" y="167718"/>
+                  </a:lnTo>
+                  <a:lnTo>
+                    <a:pt x="5586557" y="160637"/>
+                  </a:lnTo>
+                  <a:lnTo>
+                    <a:pt x="5658179" y="153507"/>
+                  </a:lnTo>
+                  <a:lnTo>
+                    <a:pt x="5729802" y="146327"/>
+                  </a:lnTo>
+                  <a:lnTo>
+                    <a:pt x="5801424" y="139097"/>
+                  </a:lnTo>
+                  <a:lnTo>
+                    <a:pt x="5873047" y="131817"/>
+                  </a:lnTo>
+                  <a:lnTo>
+                    <a:pt x="5944669" y="124486"/>
+                  </a:lnTo>
+                  <a:lnTo>
+                    <a:pt x="6016292" y="117104"/>
+                  </a:lnTo>
+                  <a:lnTo>
+                    <a:pt x="6087914" y="109671"/>
+                  </a:lnTo>
+                  <a:lnTo>
+                    <a:pt x="6159537" y="102185"/>
+                  </a:lnTo>
+                  <a:lnTo>
+                    <a:pt x="6231159" y="94648"/>
+                  </a:lnTo>
+                  <a:lnTo>
+                    <a:pt x="6302782" y="87058"/>
+                  </a:lnTo>
+                  <a:lnTo>
+                    <a:pt x="6374404" y="79416"/>
+                  </a:lnTo>
+                  <a:lnTo>
+                    <a:pt x="6446027" y="71720"/>
+                  </a:lnTo>
+                  <a:lnTo>
+                    <a:pt x="6517649" y="63970"/>
+                  </a:lnTo>
+                  <a:lnTo>
+                    <a:pt x="6589272" y="56167"/>
+                  </a:lnTo>
+                  <a:lnTo>
+                    <a:pt x="6660894" y="48309"/>
+                  </a:lnTo>
+                  <a:lnTo>
+                    <a:pt x="6732517" y="40397"/>
+                  </a:lnTo>
+                  <a:lnTo>
+                    <a:pt x="6804139" y="32429"/>
+                  </a:lnTo>
+                  <a:lnTo>
+                    <a:pt x="6875762" y="24406"/>
+                  </a:lnTo>
+                  <a:lnTo>
+                    <a:pt x="6947385" y="16327"/>
+                  </a:lnTo>
+                  <a:lnTo>
+                    <a:pt x="7019007" y="8191"/>
+                  </a:lnTo>
+                  <a:lnTo>
+                    <a:pt x="7090630" y="0"/>
                   </a:lnTo>
                 </a:path>
               </a:pathLst>
@@ -4611,7 +4568,7 @@
         </p:sp>
         <p:sp>
           <p:nvSpPr>
-            <p:cNvPr id="25" name="pl25"/>
+            <p:cNvPr id="24" name="pl24"/>
             <p:cNvSpPr/>
             <p:nvPr/>
           </p:nvSpPr>
@@ -4654,13 +4611,13 @@
         </p:sp>
         <p:sp>
           <p:nvSpPr>
-            <p:cNvPr id="26" name="pl26"/>
+            <p:cNvPr id="25" name="pl25"/>
             <p:cNvSpPr/>
             <p:nvPr/>
           </p:nvSpPr>
           <p:spPr>
             <a:xfrm>
-              <a:off x="4269157" y="2073503"/>
+              <a:off x="4588151" y="2073503"/>
               <a:ext cx="0" cy="3649639"/>
             </a:xfrm>
             <a:custGeom>
@@ -4697,7 +4654,7 @@
         </p:sp>
         <p:sp>
           <p:nvSpPr>
-            <p:cNvPr id="27" name="tx27"/>
+            <p:cNvPr id="26" name="tx26"/>
             <p:cNvSpPr/>
             <p:nvPr/>
           </p:nvSpPr>
@@ -4743,7 +4700,7 @@
         </p:sp>
         <p:sp>
           <p:nvSpPr>
-            <p:cNvPr id="28" name="tx28"/>
+            <p:cNvPr id="27" name="tx27"/>
             <p:cNvSpPr/>
             <p:nvPr/>
           </p:nvSpPr>
@@ -4789,7 +4746,7 @@
         </p:sp>
         <p:sp>
           <p:nvSpPr>
-            <p:cNvPr id="29" name="tx29"/>
+            <p:cNvPr id="28" name="tx28"/>
             <p:cNvSpPr/>
             <p:nvPr/>
           </p:nvSpPr>
@@ -4835,7 +4792,7 @@
         </p:sp>
         <p:sp>
           <p:nvSpPr>
-            <p:cNvPr id="30" name="tx30"/>
+            <p:cNvPr id="29" name="tx29"/>
             <p:cNvSpPr/>
             <p:nvPr/>
           </p:nvSpPr>
@@ -4881,7 +4838,7 @@
         </p:sp>
         <p:sp>
           <p:nvSpPr>
-            <p:cNvPr id="31" name="tx31"/>
+            <p:cNvPr id="30" name="tx30"/>
             <p:cNvSpPr/>
             <p:nvPr/>
           </p:nvSpPr>
@@ -4927,14 +4884,14 @@
         </p:sp>
         <p:sp>
           <p:nvSpPr>
-            <p:cNvPr id="32" name="tx32"/>
+            <p:cNvPr id="31" name="tx31"/>
             <p:cNvSpPr/>
             <p:nvPr/>
           </p:nvSpPr>
           <p:spPr>
             <a:xfrm>
-              <a:off x="2423864" y="5785772"/>
-              <a:ext cx="155356" cy="80101"/>
+              <a:off x="2360651" y="5785772"/>
+              <a:ext cx="161574" cy="80101"/>
             </a:xfrm>
             <a:prstGeom prst="rect">
               <a:avLst/>
@@ -4966,21 +4923,21 @@
                   <a:latin typeface="Helvetica"/>
                   <a:cs typeface="Helvetica"/>
                 </a:rPr>
-                <a:t>0.8</a:t>
+                <a:t>-25</a:t>
               </a:r>
             </a:p>
           </p:txBody>
         </p:sp>
         <p:sp>
           <p:nvSpPr>
-            <p:cNvPr id="33" name="tx33"/>
+            <p:cNvPr id="32" name="tx32"/>
             <p:cNvSpPr/>
             <p:nvPr/>
           </p:nvSpPr>
           <p:spPr>
             <a:xfrm>
-              <a:off x="4196521" y="5785772"/>
-              <a:ext cx="155356" cy="80101"/>
+              <a:off x="4561958" y="5785772"/>
+              <a:ext cx="62179" cy="80101"/>
             </a:xfrm>
             <a:prstGeom prst="rect">
               <a:avLst/>
@@ -5012,21 +4969,21 @@
                   <a:latin typeface="Helvetica"/>
                   <a:cs typeface="Helvetica"/>
                 </a:rPr>
-                <a:t>1.0</a:t>
+                <a:t>0</a:t>
               </a:r>
             </a:p>
           </p:txBody>
         </p:sp>
         <p:sp>
           <p:nvSpPr>
-            <p:cNvPr id="34" name="tx34"/>
+            <p:cNvPr id="33" name="tx33"/>
             <p:cNvSpPr/>
             <p:nvPr/>
           </p:nvSpPr>
           <p:spPr>
             <a:xfrm>
-              <a:off x="5969179" y="5785772"/>
-              <a:ext cx="155356" cy="80101"/>
+              <a:off x="6682478" y="5785772"/>
+              <a:ext cx="124358" cy="80101"/>
             </a:xfrm>
             <a:prstGeom prst="rect">
               <a:avLst/>
@@ -5058,67 +5015,21 @@
                   <a:latin typeface="Helvetica"/>
                   <a:cs typeface="Helvetica"/>
                 </a:rPr>
-                <a:t>1.2</a:t>
+                <a:t>25</a:t>
               </a:r>
             </a:p>
           </p:txBody>
         </p:sp>
         <p:sp>
           <p:nvSpPr>
-            <p:cNvPr id="35" name="tx35"/>
+            <p:cNvPr id="34" name="tx34"/>
             <p:cNvSpPr/>
             <p:nvPr/>
           </p:nvSpPr>
           <p:spPr>
             <a:xfrm>
-              <a:off x="7741836" y="5785772"/>
-              <a:ext cx="155356" cy="80101"/>
-            </a:xfrm>
-            <a:prstGeom prst="rect">
-              <a:avLst/>
-            </a:prstGeom>
-            <a:noFill/>
-          </p:spPr>
-          <p:txBody>
-            <a:bodyPr lIns="0" rIns="0" tIns="0" bIns="0" anchorCtr="1" anchor="ctr" wrap="none"/>
-            <a:lstStyle/>
-            <a:p>
-              <a:pPr algn="l" marL="0" marR="0" indent="0">
-                <a:lnSpc>
-                  <a:spcPts val="880"/>
-                </a:lnSpc>
-                <a:spcBef>
-                  <a:spcPts val="0"/>
-                </a:spcBef>
-                <a:spcAft>
-                  <a:spcPts val="0"/>
-                </a:spcAft>
-              </a:pPr>
-              <a:r>
-                <a:rPr sz="880">
-                  <a:solidFill>
-                    <a:srgbClr val="4D4D4D">
-                      <a:alpha val="100000"/>
-                    </a:srgbClr>
-                  </a:solidFill>
-                  <a:latin typeface="Helvetica"/>
-                  <a:cs typeface="Helvetica"/>
-                </a:rPr>
-                <a:t>1.4</a:t>
-              </a:r>
-            </a:p>
-          </p:txBody>
-        </p:sp>
-        <p:sp>
-          <p:nvSpPr>
-            <p:cNvPr id="36" name="tx36"/>
-            <p:cNvSpPr/>
-            <p:nvPr/>
-          </p:nvSpPr>
-          <p:spPr>
-            <a:xfrm>
-              <a:off x="3879271" y="5925448"/>
-              <a:ext cx="1676186" cy="100218"/>
+              <a:off x="2928340" y="5925448"/>
+              <a:ext cx="3578047" cy="100218"/>
             </a:xfrm>
             <a:prstGeom prst="rect">
               <a:avLst/>
@@ -5150,14 +5061,14 @@
                   <a:latin typeface="Helvetica"/>
                   <a:cs typeface="Helvetica"/>
                 </a:rPr>
-                <a:t>CKD-EPI Cr-Cys / CG ratio</a:t>
+                <a:t>eGFR difference (%): 100 × (CKD-EPI Cr-Cys − CG) / CG</a:t>
               </a:r>
             </a:p>
           </p:txBody>
         </p:sp>
         <p:sp>
           <p:nvSpPr>
-            <p:cNvPr id="37" name="tx37"/>
+            <p:cNvPr id="35" name="tx35"/>
             <p:cNvSpPr/>
             <p:nvPr/>
           </p:nvSpPr>
@@ -5203,14 +5114,14 @@
         </p:sp>
         <p:sp>
           <p:nvSpPr>
-            <p:cNvPr id="38" name="tx38"/>
+            <p:cNvPr id="36" name="tx36"/>
             <p:cNvSpPr/>
             <p:nvPr/>
           </p:nvSpPr>
           <p:spPr>
             <a:xfrm>
               <a:off x="817517" y="1896563"/>
-              <a:ext cx="6169365" cy="82021"/>
+              <a:ext cx="6321612" cy="82021"/>
             </a:xfrm>
             <a:prstGeom prst="rect">
               <a:avLst/>
@@ -5242,14 +5153,14 @@
                   <a:latin typeface="Helvetica"/>
                   <a:cs typeface="Helvetica"/>
                 </a:rPr>
-                <a:t>subHR per 0.1 ratio decline: 0.92 (0.78-1.08), p = 0.310  |  per IQR decline (Δ = 0.29): 0.78 (0.49-1.26)  |  IQR: [0.85, 1.15]</a:t>
+                <a:t>subHR per 10 % decline: 0.92 (0.78-1.08), p = 0.310  |  per IQR decline (Δ = 29.3 %): 0.78 (0.49-1.26)  |  IQR: [-14.6, 14.7] %</a:t>
               </a:r>
             </a:p>
           </p:txBody>
         </p:sp>
         <p:sp>
           <p:nvSpPr>
-            <p:cNvPr id="39" name="tx39"/>
+            <p:cNvPr id="37" name="tx37"/>
             <p:cNvSpPr/>
             <p:nvPr/>
           </p:nvSpPr>

--- a/docs/pptx/whole/jx-linsubhr-ratio-hosp10.pptx
+++ b/docs/pptx/whole/jx-linsubhr-ratio-hosp10.pptx
@@ -2265,34 +2265,26 @@
         </p:sp>
         <p:sp>
           <p:nvSpPr>
-            <p:cNvPr id="4" name="pl4"/>
+            <p:cNvPr id="4" name="rc4"/>
             <p:cNvSpPr/>
             <p:nvPr/>
           </p:nvSpPr>
           <p:spPr>
             <a:xfrm>
-              <a:off x="817517" y="5142518"/>
-              <a:ext cx="7799693" cy="0"/>
+              <a:off x="457200" y="1600200"/>
+              <a:ext cx="8229600" cy="4525962"/>
             </a:xfrm>
-            <a:custGeom>
+            <a:prstGeom prst="rect">
               <a:avLst/>
-              <a:pathLst>
-                <a:path w="7799693" h="0">
-                  <a:moveTo>
-                    <a:pt x="0" y="0"/>
-                  </a:moveTo>
-                  <a:lnTo>
-                    <a:pt x="7799693" y="0"/>
-                  </a:lnTo>
-                  <a:lnTo>
-                    <a:pt x="7799693" y="0"/>
-                  </a:lnTo>
-                </a:path>
-              </a:pathLst>
-            </a:custGeom>
-            <a:ln w="6775" cap="flat">
+            </a:prstGeom>
+            <a:solidFill>
+              <a:srgbClr val="FFFFFF">
+                <a:alpha val="100000"/>
+              </a:srgbClr>
+            </a:solidFill>
+            <a:ln w="13550" cap="rnd">
               <a:solidFill>
-                <a:srgbClr val="EBEBEB">
+                <a:srgbClr val="FFFFFF">
                   <a:alpha val="100000"/>
                 </a:srgbClr>
               </a:solidFill>
@@ -2314,21 +2306,21 @@
           </p:nvSpPr>
           <p:spPr>
             <a:xfrm>
-              <a:off x="817517" y="4313054"/>
-              <a:ext cx="7799693" cy="0"/>
+              <a:off x="887106" y="3250627"/>
+              <a:ext cx="7660515" cy="0"/>
             </a:xfrm>
             <a:custGeom>
               <a:avLst/>
               <a:pathLst>
-                <a:path w="7799693" h="0">
+                <a:path w="7660515" h="0">
                   <a:moveTo>
                     <a:pt x="0" y="0"/>
                   </a:moveTo>
                   <a:lnTo>
-                    <a:pt x="7799693" y="0"/>
-                  </a:lnTo>
-                  <a:lnTo>
-                    <a:pt x="7799693" y="0"/>
+                    <a:pt x="7660515" y="0"/>
+                  </a:lnTo>
+                  <a:lnTo>
+                    <a:pt x="7660515" y="0"/>
                   </a:lnTo>
                 </a:path>
               </a:pathLst>
@@ -2357,21 +2349,21 @@
           </p:nvSpPr>
           <p:spPr>
             <a:xfrm>
-              <a:off x="817517" y="3483591"/>
-              <a:ext cx="7799693" cy="0"/>
+              <a:off x="887106" y="2951293"/>
+              <a:ext cx="7660515" cy="0"/>
             </a:xfrm>
             <a:custGeom>
               <a:avLst/>
               <a:pathLst>
-                <a:path w="7799693" h="0">
+                <a:path w="7660515" h="0">
                   <a:moveTo>
                     <a:pt x="0" y="0"/>
                   </a:moveTo>
                   <a:lnTo>
-                    <a:pt x="7799693" y="0"/>
-                  </a:lnTo>
-                  <a:lnTo>
-                    <a:pt x="7799693" y="0"/>
+                    <a:pt x="7660515" y="0"/>
+                  </a:lnTo>
+                  <a:lnTo>
+                    <a:pt x="7660515" y="0"/>
                   </a:lnTo>
                 </a:path>
               </a:pathLst>
@@ -2400,21 +2392,21 @@
           </p:nvSpPr>
           <p:spPr>
             <a:xfrm>
-              <a:off x="817517" y="2654127"/>
-              <a:ext cx="7799693" cy="0"/>
+              <a:off x="887106" y="2651959"/>
+              <a:ext cx="7660515" cy="0"/>
             </a:xfrm>
             <a:custGeom>
               <a:avLst/>
               <a:pathLst>
-                <a:path w="7799693" h="0">
+                <a:path w="7660515" h="0">
                   <a:moveTo>
                     <a:pt x="0" y="0"/>
                   </a:moveTo>
                   <a:lnTo>
-                    <a:pt x="7799693" y="0"/>
-                  </a:lnTo>
-                  <a:lnTo>
-                    <a:pt x="7799693" y="0"/>
+                    <a:pt x="7660515" y="0"/>
+                  </a:lnTo>
+                  <a:lnTo>
+                    <a:pt x="7660515" y="0"/>
                   </a:lnTo>
                 </a:path>
               </a:pathLst>
@@ -2443,21 +2435,21 @@
           </p:nvSpPr>
           <p:spPr>
             <a:xfrm>
-              <a:off x="1365633" y="2073503"/>
-              <a:ext cx="0" cy="3649639"/>
+              <a:off x="887106" y="2352625"/>
+              <a:ext cx="7660515" cy="0"/>
             </a:xfrm>
             <a:custGeom>
               <a:avLst/>
               <a:pathLst>
-                <a:path w="0" h="3649639">
+                <a:path w="7660515" h="0">
                   <a:moveTo>
-                    <a:pt x="0" y="3649639"/>
+                    <a:pt x="0" y="0"/>
                   </a:moveTo>
                   <a:lnTo>
-                    <a:pt x="0" y="0"/>
-                  </a:lnTo>
-                  <a:lnTo>
-                    <a:pt x="0" y="0"/>
+                    <a:pt x="7660515" y="0"/>
+                  </a:lnTo>
+                  <a:lnTo>
+                    <a:pt x="7660515" y="0"/>
                   </a:lnTo>
                 </a:path>
               </a:pathLst>
@@ -2486,15 +2478,15 @@
           </p:nvSpPr>
           <p:spPr>
             <a:xfrm>
-              <a:off x="3517243" y="2073503"/>
-              <a:ext cx="0" cy="3649639"/>
+              <a:off x="1425442" y="2143092"/>
+              <a:ext cx="0" cy="1317069"/>
             </a:xfrm>
             <a:custGeom>
               <a:avLst/>
               <a:pathLst>
-                <a:path w="0" h="3649639">
+                <a:path w="0" h="1317069">
                   <a:moveTo>
-                    <a:pt x="0" y="3649639"/>
+                    <a:pt x="0" y="1317069"/>
                   </a:moveTo>
                   <a:lnTo>
                     <a:pt x="0" y="0"/>
@@ -2529,15 +2521,15 @@
           </p:nvSpPr>
           <p:spPr>
             <a:xfrm>
-              <a:off x="5668852" y="2073503"/>
-              <a:ext cx="0" cy="3649639"/>
+              <a:off x="3538658" y="2143092"/>
+              <a:ext cx="0" cy="1317069"/>
             </a:xfrm>
             <a:custGeom>
               <a:avLst/>
               <a:pathLst>
-                <a:path w="0" h="3649639">
+                <a:path w="0" h="1317069">
                   <a:moveTo>
-                    <a:pt x="0" y="3649639"/>
+                    <a:pt x="0" y="1317069"/>
                   </a:moveTo>
                   <a:lnTo>
                     <a:pt x="0" y="0"/>
@@ -2572,15 +2564,15 @@
           </p:nvSpPr>
           <p:spPr>
             <a:xfrm>
-              <a:off x="7820461" y="2073503"/>
-              <a:ext cx="0" cy="3649639"/>
+              <a:off x="5651874" y="2143092"/>
+              <a:ext cx="0" cy="1317069"/>
             </a:xfrm>
             <a:custGeom>
               <a:avLst/>
               <a:pathLst>
-                <a:path w="0" h="3649639">
+                <a:path w="0" h="1317069">
                   <a:moveTo>
-                    <a:pt x="0" y="3649639"/>
+                    <a:pt x="0" y="1317069"/>
                   </a:moveTo>
                   <a:lnTo>
                     <a:pt x="0" y="0"/>
@@ -2615,26 +2607,26 @@
           </p:nvSpPr>
           <p:spPr>
             <a:xfrm>
-              <a:off x="817517" y="5557249"/>
-              <a:ext cx="7799693" cy="0"/>
+              <a:off x="7765090" y="2143092"/>
+              <a:ext cx="0" cy="1317069"/>
             </a:xfrm>
             <a:custGeom>
               <a:avLst/>
               <a:pathLst>
-                <a:path w="7799693" h="0">
+                <a:path w="0" h="1317069">
                   <a:moveTo>
+                    <a:pt x="0" y="1317069"/>
+                  </a:moveTo>
+                  <a:lnTo>
                     <a:pt x="0" y="0"/>
-                  </a:moveTo>
-                  <a:lnTo>
-                    <a:pt x="7799693" y="0"/>
-                  </a:lnTo>
-                  <a:lnTo>
-                    <a:pt x="7799693" y="0"/>
+                  </a:lnTo>
+                  <a:lnTo>
+                    <a:pt x="0" y="0"/>
                   </a:lnTo>
                 </a:path>
               </a:pathLst>
             </a:custGeom>
-            <a:ln w="13550" cap="flat">
+            <a:ln w="6775" cap="flat">
               <a:solidFill>
                 <a:srgbClr val="EBEBEB">
                   <a:alpha val="100000"/>
@@ -2658,21 +2650,21 @@
           </p:nvSpPr>
           <p:spPr>
             <a:xfrm>
-              <a:off x="817517" y="4727786"/>
-              <a:ext cx="7799693" cy="0"/>
+              <a:off x="887106" y="3400294"/>
+              <a:ext cx="7660515" cy="0"/>
             </a:xfrm>
             <a:custGeom>
               <a:avLst/>
               <a:pathLst>
-                <a:path w="7799693" h="0">
+                <a:path w="7660515" h="0">
                   <a:moveTo>
                     <a:pt x="0" y="0"/>
                   </a:moveTo>
                   <a:lnTo>
-                    <a:pt x="7799693" y="0"/>
-                  </a:lnTo>
-                  <a:lnTo>
-                    <a:pt x="7799693" y="0"/>
+                    <a:pt x="7660515" y="0"/>
+                  </a:lnTo>
+                  <a:lnTo>
+                    <a:pt x="7660515" y="0"/>
                   </a:lnTo>
                 </a:path>
               </a:pathLst>
@@ -2701,21 +2693,21 @@
           </p:nvSpPr>
           <p:spPr>
             <a:xfrm>
-              <a:off x="817517" y="3898322"/>
-              <a:ext cx="7799693" cy="0"/>
+              <a:off x="887106" y="3100960"/>
+              <a:ext cx="7660515" cy="0"/>
             </a:xfrm>
             <a:custGeom>
               <a:avLst/>
               <a:pathLst>
-                <a:path w="7799693" h="0">
+                <a:path w="7660515" h="0">
                   <a:moveTo>
                     <a:pt x="0" y="0"/>
                   </a:moveTo>
                   <a:lnTo>
-                    <a:pt x="7799693" y="0"/>
-                  </a:lnTo>
-                  <a:lnTo>
-                    <a:pt x="7799693" y="0"/>
+                    <a:pt x="7660515" y="0"/>
+                  </a:lnTo>
+                  <a:lnTo>
+                    <a:pt x="7660515" y="0"/>
                   </a:lnTo>
                 </a:path>
               </a:pathLst>
@@ -2744,21 +2736,21 @@
           </p:nvSpPr>
           <p:spPr>
             <a:xfrm>
-              <a:off x="817517" y="3068859"/>
-              <a:ext cx="7799693" cy="0"/>
+              <a:off x="887106" y="2801626"/>
+              <a:ext cx="7660515" cy="0"/>
             </a:xfrm>
             <a:custGeom>
               <a:avLst/>
               <a:pathLst>
-                <a:path w="7799693" h="0">
+                <a:path w="7660515" h="0">
                   <a:moveTo>
                     <a:pt x="0" y="0"/>
                   </a:moveTo>
                   <a:lnTo>
-                    <a:pt x="7799693" y="0"/>
-                  </a:lnTo>
-                  <a:lnTo>
-                    <a:pt x="7799693" y="0"/>
+                    <a:pt x="7660515" y="0"/>
+                  </a:lnTo>
+                  <a:lnTo>
+                    <a:pt x="7660515" y="0"/>
                   </a:lnTo>
                 </a:path>
               </a:pathLst>
@@ -2787,21 +2779,21 @@
           </p:nvSpPr>
           <p:spPr>
             <a:xfrm>
-              <a:off x="817517" y="2239395"/>
-              <a:ext cx="7799693" cy="0"/>
+              <a:off x="887106" y="2502292"/>
+              <a:ext cx="7660515" cy="0"/>
             </a:xfrm>
             <a:custGeom>
               <a:avLst/>
               <a:pathLst>
-                <a:path w="7799693" h="0">
+                <a:path w="7660515" h="0">
                   <a:moveTo>
                     <a:pt x="0" y="0"/>
                   </a:moveTo>
                   <a:lnTo>
-                    <a:pt x="7799693" y="0"/>
-                  </a:lnTo>
-                  <a:lnTo>
-                    <a:pt x="7799693" y="0"/>
+                    <a:pt x="7660515" y="0"/>
+                  </a:lnTo>
+                  <a:lnTo>
+                    <a:pt x="7660515" y="0"/>
                   </a:lnTo>
                 </a:path>
               </a:pathLst>
@@ -2830,21 +2822,21 @@
           </p:nvSpPr>
           <p:spPr>
             <a:xfrm>
-              <a:off x="2441438" y="2073503"/>
-              <a:ext cx="0" cy="3649639"/>
+              <a:off x="887106" y="2202958"/>
+              <a:ext cx="7660515" cy="0"/>
             </a:xfrm>
             <a:custGeom>
               <a:avLst/>
               <a:pathLst>
-                <a:path w="0" h="3649639">
+                <a:path w="7660515" h="0">
                   <a:moveTo>
-                    <a:pt x="0" y="3649639"/>
+                    <a:pt x="0" y="0"/>
                   </a:moveTo>
                   <a:lnTo>
-                    <a:pt x="0" y="0"/>
-                  </a:lnTo>
-                  <a:lnTo>
-                    <a:pt x="0" y="0"/>
+                    <a:pt x="7660515" y="0"/>
+                  </a:lnTo>
+                  <a:lnTo>
+                    <a:pt x="7660515" y="0"/>
                   </a:lnTo>
                 </a:path>
               </a:pathLst>
@@ -2873,15 +2865,15 @@
           </p:nvSpPr>
           <p:spPr>
             <a:xfrm>
-              <a:off x="4593047" y="2073503"/>
-              <a:ext cx="0" cy="3649639"/>
+              <a:off x="2482050" y="2143092"/>
+              <a:ext cx="0" cy="1317069"/>
             </a:xfrm>
             <a:custGeom>
               <a:avLst/>
               <a:pathLst>
-                <a:path w="0" h="3649639">
+                <a:path w="0" h="1317069">
                   <a:moveTo>
-                    <a:pt x="0" y="3649639"/>
+                    <a:pt x="0" y="1317069"/>
                   </a:moveTo>
                   <a:lnTo>
                     <a:pt x="0" y="0"/>
@@ -2916,15 +2908,15 @@
           </p:nvSpPr>
           <p:spPr>
             <a:xfrm>
-              <a:off x="6744657" y="2073503"/>
-              <a:ext cx="0" cy="3649639"/>
+              <a:off x="4595266" y="2143092"/>
+              <a:ext cx="0" cy="1317069"/>
             </a:xfrm>
             <a:custGeom>
               <a:avLst/>
               <a:pathLst>
-                <a:path w="0" h="3649639">
+                <a:path w="0" h="1317069">
                   <a:moveTo>
-                    <a:pt x="0" y="3649639"/>
+                    <a:pt x="0" y="1317069"/>
                   </a:moveTo>
                   <a:lnTo>
                     <a:pt x="0" y="0"/>
@@ -2953,618 +2945,661 @@
         </p:sp>
         <p:sp>
           <p:nvSpPr>
-            <p:cNvPr id="20" name="pg20"/>
+            <p:cNvPr id="20" name="pl20"/>
             <p:cNvSpPr/>
             <p:nvPr/>
           </p:nvSpPr>
           <p:spPr>
             <a:xfrm>
-              <a:off x="1172049" y="3201037"/>
-              <a:ext cx="7090630" cy="2041967"/>
+              <a:off x="6708482" y="2143092"/>
+              <a:ext cx="0" cy="1317069"/>
             </a:xfrm>
             <a:custGeom>
               <a:avLst/>
               <a:pathLst>
-                <a:path w="7090630" h="2041967">
+                <a:path w="0" h="1317069">
                   <a:moveTo>
-                    <a:pt x="0" y="1227035"/>
+                    <a:pt x="0" y="1317069"/>
                   </a:moveTo>
                   <a:lnTo>
-                    <a:pt x="71622" y="1234314"/>
-                  </a:lnTo>
-                  <a:lnTo>
-                    <a:pt x="143245" y="1241546"/>
-                  </a:lnTo>
-                  <a:lnTo>
-                    <a:pt x="214867" y="1248732"/>
-                  </a:lnTo>
-                  <a:lnTo>
-                    <a:pt x="286490" y="1255871"/>
-                  </a:lnTo>
-                  <a:lnTo>
-                    <a:pt x="358112" y="1262964"/>
-                  </a:lnTo>
-                  <a:lnTo>
-                    <a:pt x="429735" y="1270012"/>
-                  </a:lnTo>
-                  <a:lnTo>
-                    <a:pt x="501357" y="1277014"/>
-                  </a:lnTo>
-                  <a:lnTo>
-                    <a:pt x="572980" y="1283971"/>
-                  </a:lnTo>
-                  <a:lnTo>
-                    <a:pt x="644602" y="1290883"/>
-                  </a:lnTo>
-                  <a:lnTo>
-                    <a:pt x="716225" y="1297751"/>
-                  </a:lnTo>
-                  <a:lnTo>
-                    <a:pt x="787847" y="1304574"/>
-                  </a:lnTo>
-                  <a:lnTo>
-                    <a:pt x="859470" y="1311353"/>
-                  </a:lnTo>
-                  <a:lnTo>
-                    <a:pt x="931092" y="1318089"/>
-                  </a:lnTo>
-                  <a:lnTo>
-                    <a:pt x="1002715" y="1324781"/>
-                  </a:lnTo>
-                  <a:lnTo>
-                    <a:pt x="1074337" y="1331430"/>
-                  </a:lnTo>
-                  <a:lnTo>
-                    <a:pt x="1145960" y="1338037"/>
-                  </a:lnTo>
-                  <a:lnTo>
-                    <a:pt x="1217582" y="1344600"/>
-                  </a:lnTo>
-                  <a:lnTo>
-                    <a:pt x="1289205" y="1351122"/>
-                  </a:lnTo>
-                  <a:lnTo>
-                    <a:pt x="1360827" y="1357601"/>
-                  </a:lnTo>
-                  <a:lnTo>
-                    <a:pt x="1432450" y="1364038"/>
-                  </a:lnTo>
-                  <a:lnTo>
-                    <a:pt x="1504073" y="1370434"/>
-                  </a:lnTo>
-                  <a:lnTo>
-                    <a:pt x="1575695" y="1376789"/>
-                  </a:lnTo>
-                  <a:lnTo>
-                    <a:pt x="1647318" y="1383103"/>
-                  </a:lnTo>
-                  <a:lnTo>
-                    <a:pt x="1718940" y="1389376"/>
-                  </a:lnTo>
-                  <a:lnTo>
-                    <a:pt x="1790563" y="1395609"/>
-                  </a:lnTo>
-                  <a:lnTo>
-                    <a:pt x="1862185" y="1401801"/>
-                  </a:lnTo>
-                  <a:lnTo>
-                    <a:pt x="1933808" y="1407954"/>
-                  </a:lnTo>
-                  <a:lnTo>
-                    <a:pt x="2005430" y="1414067"/>
-                  </a:lnTo>
-                  <a:lnTo>
-                    <a:pt x="2077053" y="1420140"/>
-                  </a:lnTo>
-                  <a:lnTo>
-                    <a:pt x="2148675" y="1426175"/>
-                  </a:lnTo>
-                  <a:lnTo>
-                    <a:pt x="2220298" y="1432170"/>
-                  </a:lnTo>
-                  <a:lnTo>
-                    <a:pt x="2291920" y="1438127"/>
-                  </a:lnTo>
-                  <a:lnTo>
-                    <a:pt x="2363543" y="1444045"/>
-                  </a:lnTo>
-                  <a:lnTo>
-                    <a:pt x="2435165" y="1449925"/>
-                  </a:lnTo>
-                  <a:lnTo>
-                    <a:pt x="2506788" y="1455768"/>
-                  </a:lnTo>
-                  <a:lnTo>
-                    <a:pt x="2578410" y="1461572"/>
-                  </a:lnTo>
-                  <a:lnTo>
-                    <a:pt x="2650033" y="1467340"/>
-                  </a:lnTo>
-                  <a:lnTo>
-                    <a:pt x="2721655" y="1473070"/>
-                  </a:lnTo>
-                  <a:lnTo>
-                    <a:pt x="2793278" y="1478763"/>
-                  </a:lnTo>
-                  <a:lnTo>
-                    <a:pt x="2864901" y="1484419"/>
-                  </a:lnTo>
-                  <a:lnTo>
-                    <a:pt x="2936523" y="1490039"/>
-                  </a:lnTo>
-                  <a:lnTo>
-                    <a:pt x="3008146" y="1495623"/>
-                  </a:lnTo>
-                  <a:lnTo>
-                    <a:pt x="3079768" y="1501171"/>
-                  </a:lnTo>
-                  <a:lnTo>
-                    <a:pt x="3151391" y="1506683"/>
-                  </a:lnTo>
-                  <a:lnTo>
-                    <a:pt x="3223013" y="1512159"/>
-                  </a:lnTo>
-                  <a:lnTo>
-                    <a:pt x="3294636" y="1517600"/>
-                  </a:lnTo>
-                  <a:lnTo>
-                    <a:pt x="3366258" y="1523006"/>
-                  </a:lnTo>
-                  <a:lnTo>
-                    <a:pt x="3437881" y="1521599"/>
-                  </a:lnTo>
-                  <a:lnTo>
-                    <a:pt x="3509503" y="1504441"/>
-                  </a:lnTo>
-                  <a:lnTo>
-                    <a:pt x="3581126" y="1486930"/>
-                  </a:lnTo>
-                  <a:lnTo>
-                    <a:pt x="3652748" y="1469059"/>
-                  </a:lnTo>
-                  <a:lnTo>
-                    <a:pt x="3724371" y="1450821"/>
-                  </a:lnTo>
-                  <a:lnTo>
-                    <a:pt x="3795993" y="1432208"/>
-                  </a:lnTo>
-                  <a:lnTo>
-                    <a:pt x="3867616" y="1413212"/>
-                  </a:lnTo>
-                  <a:lnTo>
-                    <a:pt x="3939238" y="1393825"/>
-                  </a:lnTo>
-                  <a:lnTo>
-                    <a:pt x="4010861" y="1374040"/>
-                  </a:lnTo>
-                  <a:lnTo>
-                    <a:pt x="4082483" y="1353848"/>
-                  </a:lnTo>
-                  <a:lnTo>
-                    <a:pt x="4154106" y="1333241"/>
-                  </a:lnTo>
-                  <a:lnTo>
-                    <a:pt x="4225729" y="1312211"/>
-                  </a:lnTo>
-                  <a:lnTo>
-                    <a:pt x="4297351" y="1290748"/>
-                  </a:lnTo>
-                  <a:lnTo>
-                    <a:pt x="4368974" y="1268844"/>
-                  </a:lnTo>
-                  <a:lnTo>
-                    <a:pt x="4440596" y="1246489"/>
-                  </a:lnTo>
-                  <a:lnTo>
-                    <a:pt x="4512219" y="1223675"/>
-                  </a:lnTo>
-                  <a:lnTo>
-                    <a:pt x="4583841" y="1200392"/>
-                  </a:lnTo>
-                  <a:lnTo>
-                    <a:pt x="4655464" y="1176630"/>
-                  </a:lnTo>
-                  <a:lnTo>
-                    <a:pt x="4727086" y="1152380"/>
-                  </a:lnTo>
-                  <a:lnTo>
-                    <a:pt x="4798709" y="1127631"/>
-                  </a:lnTo>
-                  <a:lnTo>
-                    <a:pt x="4870331" y="1102374"/>
-                  </a:lnTo>
-                  <a:lnTo>
-                    <a:pt x="4941954" y="1076597"/>
-                  </a:lnTo>
-                  <a:lnTo>
-                    <a:pt x="5013576" y="1050290"/>
-                  </a:lnTo>
-                  <a:lnTo>
-                    <a:pt x="5085199" y="1023442"/>
-                  </a:lnTo>
-                  <a:lnTo>
-                    <a:pt x="5156821" y="996043"/>
-                  </a:lnTo>
-                  <a:lnTo>
-                    <a:pt x="5228444" y="968080"/>
-                  </a:lnTo>
-                  <a:lnTo>
-                    <a:pt x="5300066" y="939542"/>
-                  </a:lnTo>
-                  <a:lnTo>
-                    <a:pt x="5371689" y="910418"/>
-                  </a:lnTo>
-                  <a:lnTo>
-                    <a:pt x="5443311" y="880695"/>
-                  </a:lnTo>
-                  <a:lnTo>
-                    <a:pt x="5514934" y="850361"/>
-                  </a:lnTo>
-                  <a:lnTo>
-                    <a:pt x="5586557" y="819403"/>
-                  </a:lnTo>
-                  <a:lnTo>
-                    <a:pt x="5658179" y="787809"/>
-                  </a:lnTo>
-                  <a:lnTo>
-                    <a:pt x="5729802" y="755565"/>
-                  </a:lnTo>
-                  <a:lnTo>
-                    <a:pt x="5801424" y="722658"/>
-                  </a:lnTo>
-                  <a:lnTo>
-                    <a:pt x="5873047" y="689075"/>
-                  </a:lnTo>
-                  <a:lnTo>
-                    <a:pt x="5944669" y="654802"/>
-                  </a:lnTo>
-                  <a:lnTo>
-                    <a:pt x="6016292" y="619823"/>
-                  </a:lnTo>
-                  <a:lnTo>
-                    <a:pt x="6087914" y="584126"/>
-                  </a:lnTo>
-                  <a:lnTo>
-                    <a:pt x="6159537" y="547695"/>
-                  </a:lnTo>
-                  <a:lnTo>
-                    <a:pt x="6231159" y="510515"/>
-                  </a:lnTo>
-                  <a:lnTo>
-                    <a:pt x="6302782" y="472570"/>
-                  </a:lnTo>
-                  <a:lnTo>
-                    <a:pt x="6374404" y="433846"/>
-                  </a:lnTo>
-                  <a:lnTo>
-                    <a:pt x="6446027" y="394325"/>
-                  </a:lnTo>
-                  <a:lnTo>
-                    <a:pt x="6517649" y="353992"/>
-                  </a:lnTo>
-                  <a:lnTo>
-                    <a:pt x="6589272" y="312830"/>
-                  </a:lnTo>
-                  <a:lnTo>
-                    <a:pt x="6660894" y="270821"/>
-                  </a:lnTo>
-                  <a:lnTo>
-                    <a:pt x="6732517" y="227949"/>
-                  </a:lnTo>
-                  <a:lnTo>
-                    <a:pt x="6804139" y="184196"/>
-                  </a:lnTo>
-                  <a:lnTo>
-                    <a:pt x="6875762" y="139542"/>
-                  </a:lnTo>
-                  <a:lnTo>
-                    <a:pt x="6947385" y="93971"/>
-                  </a:lnTo>
-                  <a:lnTo>
-                    <a:pt x="7019007" y="47464"/>
-                  </a:lnTo>
-                  <a:lnTo>
-                    <a:pt x="7090630" y="0"/>
-                  </a:lnTo>
-                  <a:lnTo>
-                    <a:pt x="7090630" y="1760963"/>
-                  </a:lnTo>
-                  <a:lnTo>
-                    <a:pt x="7019007" y="1757101"/>
-                  </a:lnTo>
-                  <a:lnTo>
-                    <a:pt x="6947385" y="1753214"/>
-                  </a:lnTo>
-                  <a:lnTo>
-                    <a:pt x="6875762" y="1749302"/>
-                  </a:lnTo>
-                  <a:lnTo>
-                    <a:pt x="6804139" y="1745364"/>
-                  </a:lnTo>
-                  <a:lnTo>
-                    <a:pt x="6732517" y="1741400"/>
-                  </a:lnTo>
-                  <a:lnTo>
-                    <a:pt x="6660894" y="1737411"/>
-                  </a:lnTo>
-                  <a:lnTo>
-                    <a:pt x="6589272" y="1733396"/>
-                  </a:lnTo>
-                  <a:lnTo>
-                    <a:pt x="6517649" y="1729355"/>
-                  </a:lnTo>
-                  <a:lnTo>
-                    <a:pt x="6446027" y="1725288"/>
-                  </a:lnTo>
-                  <a:lnTo>
-                    <a:pt x="6374404" y="1721194"/>
-                  </a:lnTo>
-                  <a:lnTo>
-                    <a:pt x="6302782" y="1717074"/>
-                  </a:lnTo>
-                  <a:lnTo>
-                    <a:pt x="6231159" y="1712927"/>
-                  </a:lnTo>
-                  <a:lnTo>
-                    <a:pt x="6159537" y="1708754"/>
-                  </a:lnTo>
-                  <a:lnTo>
-                    <a:pt x="6087914" y="1704553"/>
-                  </a:lnTo>
-                  <a:lnTo>
-                    <a:pt x="6016292" y="1700325"/>
-                  </a:lnTo>
-                  <a:lnTo>
-                    <a:pt x="5944669" y="1696069"/>
-                  </a:lnTo>
-                  <a:lnTo>
-                    <a:pt x="5873047" y="1691786"/>
-                  </a:lnTo>
-                  <a:lnTo>
-                    <a:pt x="5801424" y="1687475"/>
-                  </a:lnTo>
-                  <a:lnTo>
-                    <a:pt x="5729802" y="1683136"/>
-                  </a:lnTo>
-                  <a:lnTo>
-                    <a:pt x="5658179" y="1678769"/>
-                  </a:lnTo>
-                  <a:lnTo>
-                    <a:pt x="5586557" y="1674373"/>
-                  </a:lnTo>
-                  <a:lnTo>
-                    <a:pt x="5514934" y="1669949"/>
-                  </a:lnTo>
-                  <a:lnTo>
-                    <a:pt x="5443311" y="1665497"/>
-                  </a:lnTo>
-                  <a:lnTo>
-                    <a:pt x="5371689" y="1661015"/>
-                  </a:lnTo>
-                  <a:lnTo>
-                    <a:pt x="5300066" y="1656504"/>
-                  </a:lnTo>
-                  <a:lnTo>
-                    <a:pt x="5228444" y="1651965"/>
-                  </a:lnTo>
-                  <a:lnTo>
-                    <a:pt x="5156821" y="1647395"/>
-                  </a:lnTo>
-                  <a:lnTo>
-                    <a:pt x="5085199" y="1642796"/>
-                  </a:lnTo>
-                  <a:lnTo>
-                    <a:pt x="5013576" y="1638167"/>
-                  </a:lnTo>
-                  <a:lnTo>
-                    <a:pt x="4941954" y="1633508"/>
-                  </a:lnTo>
-                  <a:lnTo>
-                    <a:pt x="4870331" y="1628819"/>
-                  </a:lnTo>
-                  <a:lnTo>
-                    <a:pt x="4798709" y="1624100"/>
-                  </a:lnTo>
-                  <a:lnTo>
-                    <a:pt x="4727086" y="1619350"/>
-                  </a:lnTo>
-                  <a:lnTo>
-                    <a:pt x="4655464" y="1614569"/>
-                  </a:lnTo>
-                  <a:lnTo>
-                    <a:pt x="4583841" y="1609757"/>
-                  </a:lnTo>
-                  <a:lnTo>
-                    <a:pt x="4512219" y="1604913"/>
-                  </a:lnTo>
-                  <a:lnTo>
-                    <a:pt x="4440596" y="1600039"/>
-                  </a:lnTo>
-                  <a:lnTo>
-                    <a:pt x="4368974" y="1595133"/>
-                  </a:lnTo>
-                  <a:lnTo>
-                    <a:pt x="4297351" y="1590194"/>
-                  </a:lnTo>
-                  <a:lnTo>
-                    <a:pt x="4225729" y="1585224"/>
-                  </a:lnTo>
-                  <a:lnTo>
-                    <a:pt x="4154106" y="1580222"/>
-                  </a:lnTo>
-                  <a:lnTo>
-                    <a:pt x="4082483" y="1575187"/>
-                  </a:lnTo>
-                  <a:lnTo>
-                    <a:pt x="4010861" y="1570120"/>
-                  </a:lnTo>
-                  <a:lnTo>
-                    <a:pt x="3939238" y="1565019"/>
-                  </a:lnTo>
-                  <a:lnTo>
-                    <a:pt x="3867616" y="1559886"/>
-                  </a:lnTo>
-                  <a:lnTo>
-                    <a:pt x="3795993" y="1554719"/>
-                  </a:lnTo>
-                  <a:lnTo>
-                    <a:pt x="3724371" y="1549519"/>
-                  </a:lnTo>
-                  <a:lnTo>
-                    <a:pt x="3652748" y="1544285"/>
-                  </a:lnTo>
-                  <a:lnTo>
-                    <a:pt x="3581126" y="1539017"/>
-                  </a:lnTo>
-                  <a:lnTo>
-                    <a:pt x="3509503" y="1533714"/>
-                  </a:lnTo>
-                  <a:lnTo>
-                    <a:pt x="3437881" y="1528378"/>
-                  </a:lnTo>
-                  <a:lnTo>
-                    <a:pt x="3366258" y="1538412"/>
-                  </a:lnTo>
-                  <a:lnTo>
-                    <a:pt x="3294636" y="1554886"/>
-                  </a:lnTo>
-                  <a:lnTo>
-                    <a:pt x="3223013" y="1571028"/>
-                  </a:lnTo>
-                  <a:lnTo>
-                    <a:pt x="3151391" y="1586845"/>
-                  </a:lnTo>
-                  <a:lnTo>
-                    <a:pt x="3079768" y="1602343"/>
-                  </a:lnTo>
-                  <a:lnTo>
-                    <a:pt x="3008146" y="1617529"/>
-                  </a:lnTo>
-                  <a:lnTo>
-                    <a:pt x="2936523" y="1632410"/>
-                  </a:lnTo>
-                  <a:lnTo>
-                    <a:pt x="2864901" y="1646990"/>
-                  </a:lnTo>
-                  <a:lnTo>
-                    <a:pt x="2793278" y="1661277"/>
-                  </a:lnTo>
-                  <a:lnTo>
-                    <a:pt x="2721655" y="1675276"/>
-                  </a:lnTo>
-                  <a:lnTo>
-                    <a:pt x="2650033" y="1688992"/>
-                  </a:lnTo>
-                  <a:lnTo>
-                    <a:pt x="2578410" y="1702433"/>
-                  </a:lnTo>
-                  <a:lnTo>
-                    <a:pt x="2506788" y="1715603"/>
-                  </a:lnTo>
-                  <a:lnTo>
-                    <a:pt x="2435165" y="1728508"/>
-                  </a:lnTo>
-                  <a:lnTo>
-                    <a:pt x="2363543" y="1741152"/>
-                  </a:lnTo>
-                  <a:lnTo>
-                    <a:pt x="2291920" y="1753542"/>
-                  </a:lnTo>
-                  <a:lnTo>
-                    <a:pt x="2220298" y="1765682"/>
-                  </a:lnTo>
-                  <a:lnTo>
-                    <a:pt x="2148675" y="1777578"/>
-                  </a:lnTo>
-                  <a:lnTo>
-                    <a:pt x="2077053" y="1789234"/>
-                  </a:lnTo>
-                  <a:lnTo>
-                    <a:pt x="2005430" y="1800655"/>
-                  </a:lnTo>
-                  <a:lnTo>
-                    <a:pt x="1933808" y="1811847"/>
-                  </a:lnTo>
-                  <a:lnTo>
-                    <a:pt x="1862185" y="1822813"/>
-                  </a:lnTo>
-                  <a:lnTo>
-                    <a:pt x="1790563" y="1833557"/>
-                  </a:lnTo>
-                  <a:lnTo>
-                    <a:pt x="1718940" y="1844086"/>
-                  </a:lnTo>
-                  <a:lnTo>
-                    <a:pt x="1647318" y="1854402"/>
-                  </a:lnTo>
-                  <a:lnTo>
-                    <a:pt x="1575695" y="1864511"/>
-                  </a:lnTo>
-                  <a:lnTo>
-                    <a:pt x="1504073" y="1874416"/>
-                  </a:lnTo>
-                  <a:lnTo>
-                    <a:pt x="1432450" y="1884121"/>
-                  </a:lnTo>
-                  <a:lnTo>
-                    <a:pt x="1360827" y="1893631"/>
-                  </a:lnTo>
-                  <a:lnTo>
-                    <a:pt x="1289205" y="1902949"/>
-                  </a:lnTo>
-                  <a:lnTo>
-                    <a:pt x="1217582" y="1912080"/>
-                  </a:lnTo>
-                  <a:lnTo>
-                    <a:pt x="1145960" y="1921027"/>
-                  </a:lnTo>
-                  <a:lnTo>
-                    <a:pt x="1074337" y="1929793"/>
-                  </a:lnTo>
-                  <a:lnTo>
-                    <a:pt x="1002715" y="1938383"/>
-                  </a:lnTo>
-                  <a:lnTo>
-                    <a:pt x="931092" y="1946800"/>
-                  </a:lnTo>
-                  <a:lnTo>
-                    <a:pt x="859470" y="1955047"/>
-                  </a:lnTo>
-                  <a:lnTo>
-                    <a:pt x="787847" y="1963128"/>
-                  </a:lnTo>
-                  <a:lnTo>
-                    <a:pt x="716225" y="1971047"/>
-                  </a:lnTo>
-                  <a:lnTo>
-                    <a:pt x="644602" y="1978805"/>
-                  </a:lnTo>
-                  <a:lnTo>
-                    <a:pt x="572980" y="1986408"/>
-                  </a:lnTo>
-                  <a:lnTo>
-                    <a:pt x="501357" y="1993857"/>
-                  </a:lnTo>
-                  <a:lnTo>
-                    <a:pt x="429735" y="2001157"/>
-                  </a:lnTo>
-                  <a:lnTo>
-                    <a:pt x="358112" y="2008309"/>
-                  </a:lnTo>
-                  <a:lnTo>
-                    <a:pt x="286490" y="2015317"/>
-                  </a:lnTo>
-                  <a:lnTo>
-                    <a:pt x="214867" y="2022184"/>
-                  </a:lnTo>
-                  <a:lnTo>
-                    <a:pt x="143245" y="2028913"/>
-                  </a:lnTo>
-                  <a:lnTo>
-                    <a:pt x="71622" y="2035506"/>
-                  </a:lnTo>
-                  <a:lnTo>
-                    <a:pt x="0" y="2041967"/>
+                    <a:pt x="0" y="0"/>
+                  </a:lnTo>
+                  <a:lnTo>
+                    <a:pt x="0" y="0"/>
+                  </a:lnTo>
+                </a:path>
+              </a:pathLst>
+            </a:custGeom>
+            <a:ln w="13550" cap="flat">
+              <a:solidFill>
+                <a:srgbClr val="EBEBEB">
+                  <a:alpha val="100000"/>
+                </a:srgbClr>
+              </a:solidFill>
+              <a:prstDash val="solid"/>
+              <a:round/>
+            </a:ln>
+          </p:spPr>
+          <p:txBody>
+            <a:bodyPr/>
+            <a:lstStyle/>
+            <a:p/>
+          </p:txBody>
+        </p:sp>
+        <p:sp>
+          <p:nvSpPr>
+            <p:cNvPr id="21" name="pg21"/>
+            <p:cNvSpPr/>
+            <p:nvPr/>
+          </p:nvSpPr>
+          <p:spPr>
+            <a:xfrm>
+              <a:off x="1235312" y="2549992"/>
+              <a:ext cx="6964104" cy="736897"/>
+            </a:xfrm>
+            <a:custGeom>
+              <a:avLst/>
+              <a:pathLst>
+                <a:path w="6964104" h="736897">
+                  <a:moveTo>
+                    <a:pt x="0" y="442808"/>
+                  </a:moveTo>
+                  <a:lnTo>
+                    <a:pt x="70344" y="445434"/>
+                  </a:lnTo>
+                  <a:lnTo>
+                    <a:pt x="140688" y="448044"/>
+                  </a:lnTo>
+                  <a:lnTo>
+                    <a:pt x="211033" y="450638"/>
+                  </a:lnTo>
+                  <a:lnTo>
+                    <a:pt x="281377" y="453214"/>
+                  </a:lnTo>
+                  <a:lnTo>
+                    <a:pt x="351722" y="455774"/>
+                  </a:lnTo>
+                  <a:lnTo>
+                    <a:pt x="422066" y="458317"/>
+                  </a:lnTo>
+                  <a:lnTo>
+                    <a:pt x="492411" y="460844"/>
+                  </a:lnTo>
+                  <a:lnTo>
+                    <a:pt x="562755" y="463355"/>
+                  </a:lnTo>
+                  <a:lnTo>
+                    <a:pt x="633100" y="465849"/>
+                  </a:lnTo>
+                  <a:lnTo>
+                    <a:pt x="703444" y="468327"/>
+                  </a:lnTo>
+                  <a:lnTo>
+                    <a:pt x="773789" y="470790"/>
+                  </a:lnTo>
+                  <a:lnTo>
+                    <a:pt x="844133" y="473236"/>
+                  </a:lnTo>
+                  <a:lnTo>
+                    <a:pt x="914478" y="475667"/>
+                  </a:lnTo>
+                  <a:lnTo>
+                    <a:pt x="984822" y="478082"/>
+                  </a:lnTo>
+                  <a:lnTo>
+                    <a:pt x="1055167" y="480482"/>
+                  </a:lnTo>
+                  <a:lnTo>
+                    <a:pt x="1125511" y="482866"/>
+                  </a:lnTo>
+                  <a:lnTo>
+                    <a:pt x="1195856" y="485234"/>
+                  </a:lnTo>
+                  <a:lnTo>
+                    <a:pt x="1266200" y="487588"/>
+                  </a:lnTo>
+                  <a:lnTo>
+                    <a:pt x="1336545" y="489926"/>
+                  </a:lnTo>
+                  <a:lnTo>
+                    <a:pt x="1406889" y="492249"/>
+                  </a:lnTo>
+                  <a:lnTo>
+                    <a:pt x="1477234" y="494557"/>
+                  </a:lnTo>
+                  <a:lnTo>
+                    <a:pt x="1547578" y="496850"/>
+                  </a:lnTo>
+                  <a:lnTo>
+                    <a:pt x="1617923" y="499129"/>
+                  </a:lnTo>
+                  <a:lnTo>
+                    <a:pt x="1688267" y="501393"/>
+                  </a:lnTo>
+                  <a:lnTo>
+                    <a:pt x="1758612" y="503642"/>
+                  </a:lnTo>
+                  <a:lnTo>
+                    <a:pt x="1828956" y="505877"/>
+                  </a:lnTo>
+                  <a:lnTo>
+                    <a:pt x="1899301" y="508097"/>
+                  </a:lnTo>
+                  <a:lnTo>
+                    <a:pt x="1969645" y="510303"/>
+                  </a:lnTo>
+                  <a:lnTo>
+                    <a:pt x="2039990" y="512495"/>
+                  </a:lnTo>
+                  <a:lnTo>
+                    <a:pt x="2110334" y="514673"/>
+                  </a:lnTo>
+                  <a:lnTo>
+                    <a:pt x="2180679" y="516836"/>
+                  </a:lnTo>
+                  <a:lnTo>
+                    <a:pt x="2251023" y="518986"/>
+                  </a:lnTo>
+                  <a:lnTo>
+                    <a:pt x="2321368" y="521122"/>
+                  </a:lnTo>
+                  <a:lnTo>
+                    <a:pt x="2391712" y="523244"/>
+                  </a:lnTo>
+                  <a:lnTo>
+                    <a:pt x="2462057" y="525352"/>
+                  </a:lnTo>
+                  <a:lnTo>
+                    <a:pt x="2532401" y="527447"/>
+                  </a:lnTo>
+                  <a:lnTo>
+                    <a:pt x="2602746" y="529528"/>
+                  </a:lnTo>
+                  <a:lnTo>
+                    <a:pt x="2673090" y="531596"/>
+                  </a:lnTo>
+                  <a:lnTo>
+                    <a:pt x="2743435" y="533650"/>
+                  </a:lnTo>
+                  <a:lnTo>
+                    <a:pt x="2813779" y="535692"/>
+                  </a:lnTo>
+                  <a:lnTo>
+                    <a:pt x="2884124" y="537720"/>
+                  </a:lnTo>
+                  <a:lnTo>
+                    <a:pt x="2954468" y="539735"/>
+                  </a:lnTo>
+                  <a:lnTo>
+                    <a:pt x="3024813" y="541737"/>
+                  </a:lnTo>
+                  <a:lnTo>
+                    <a:pt x="3095157" y="543726"/>
+                  </a:lnTo>
+                  <a:lnTo>
+                    <a:pt x="3165502" y="545702"/>
+                  </a:lnTo>
+                  <a:lnTo>
+                    <a:pt x="3235846" y="547666"/>
+                  </a:lnTo>
+                  <a:lnTo>
+                    <a:pt x="3306191" y="549617"/>
+                  </a:lnTo>
+                  <a:lnTo>
+                    <a:pt x="3376535" y="549109"/>
+                  </a:lnTo>
+                  <a:lnTo>
+                    <a:pt x="3446880" y="542917"/>
+                  </a:lnTo>
+                  <a:lnTo>
+                    <a:pt x="3517224" y="536598"/>
+                  </a:lnTo>
+                  <a:lnTo>
+                    <a:pt x="3587569" y="530149"/>
+                  </a:lnTo>
+                  <a:lnTo>
+                    <a:pt x="3657913" y="523567"/>
+                  </a:lnTo>
+                  <a:lnTo>
+                    <a:pt x="3728257" y="516850"/>
+                  </a:lnTo>
+                  <a:lnTo>
+                    <a:pt x="3798602" y="509994"/>
+                  </a:lnTo>
+                  <a:lnTo>
+                    <a:pt x="3868946" y="502998"/>
+                  </a:lnTo>
+                  <a:lnTo>
+                    <a:pt x="3939291" y="495858"/>
+                  </a:lnTo>
+                  <a:lnTo>
+                    <a:pt x="4009635" y="488572"/>
+                  </a:lnTo>
+                  <a:lnTo>
+                    <a:pt x="4079980" y="481135"/>
+                  </a:lnTo>
+                  <a:lnTo>
+                    <a:pt x="4150324" y="473546"/>
+                  </a:lnTo>
+                  <a:lnTo>
+                    <a:pt x="4220669" y="465800"/>
+                  </a:lnTo>
+                  <a:lnTo>
+                    <a:pt x="4291013" y="457895"/>
+                  </a:lnTo>
+                  <a:lnTo>
+                    <a:pt x="4361358" y="449828"/>
+                  </a:lnTo>
+                  <a:lnTo>
+                    <a:pt x="4431702" y="441595"/>
+                  </a:lnTo>
+                  <a:lnTo>
+                    <a:pt x="4502047" y="433193"/>
+                  </a:lnTo>
+                  <a:lnTo>
+                    <a:pt x="4572391" y="424618"/>
+                  </a:lnTo>
+                  <a:lnTo>
+                    <a:pt x="4642736" y="415866"/>
+                  </a:lnTo>
+                  <a:lnTo>
+                    <a:pt x="4713080" y="406935"/>
+                  </a:lnTo>
+                  <a:lnTo>
+                    <a:pt x="4783425" y="397820"/>
+                  </a:lnTo>
+                  <a:lnTo>
+                    <a:pt x="4853769" y="388518"/>
+                  </a:lnTo>
+                  <a:lnTo>
+                    <a:pt x="4924114" y="379025"/>
+                  </a:lnTo>
+                  <a:lnTo>
+                    <a:pt x="4994458" y="369336"/>
+                  </a:lnTo>
+                  <a:lnTo>
+                    <a:pt x="5064803" y="359448"/>
+                  </a:lnTo>
+                  <a:lnTo>
+                    <a:pt x="5135147" y="349357"/>
+                  </a:lnTo>
+                  <a:lnTo>
+                    <a:pt x="5205492" y="339058"/>
+                  </a:lnTo>
+                  <a:lnTo>
+                    <a:pt x="5275836" y="328548"/>
+                  </a:lnTo>
+                  <a:lnTo>
+                    <a:pt x="5346181" y="317822"/>
+                  </a:lnTo>
+                  <a:lnTo>
+                    <a:pt x="5416525" y="306875"/>
+                  </a:lnTo>
+                  <a:lnTo>
+                    <a:pt x="5486870" y="295703"/>
+                  </a:lnTo>
+                  <a:lnTo>
+                    <a:pt x="5557214" y="284301"/>
+                  </a:lnTo>
+                  <a:lnTo>
+                    <a:pt x="5627559" y="272665"/>
+                  </a:lnTo>
+                  <a:lnTo>
+                    <a:pt x="5697903" y="260790"/>
+                  </a:lnTo>
+                  <a:lnTo>
+                    <a:pt x="5768248" y="248671"/>
+                  </a:lnTo>
+                  <a:lnTo>
+                    <a:pt x="5838592" y="236302"/>
+                  </a:lnTo>
+                  <a:lnTo>
+                    <a:pt x="5908937" y="223679"/>
+                  </a:lnTo>
+                  <a:lnTo>
+                    <a:pt x="5979281" y="210797"/>
+                  </a:lnTo>
+                  <a:lnTo>
+                    <a:pt x="6049626" y="197650"/>
+                  </a:lnTo>
+                  <a:lnTo>
+                    <a:pt x="6119970" y="184232"/>
+                  </a:lnTo>
+                  <a:lnTo>
+                    <a:pt x="6190315" y="170539"/>
+                  </a:lnTo>
+                  <a:lnTo>
+                    <a:pt x="6260659" y="156564"/>
+                  </a:lnTo>
+                  <a:lnTo>
+                    <a:pt x="6331004" y="142302"/>
+                  </a:lnTo>
+                  <a:lnTo>
+                    <a:pt x="6401348" y="127747"/>
+                  </a:lnTo>
+                  <a:lnTo>
+                    <a:pt x="6471693" y="112893"/>
+                  </a:lnTo>
+                  <a:lnTo>
+                    <a:pt x="6542037" y="97733"/>
+                  </a:lnTo>
+                  <a:lnTo>
+                    <a:pt x="6612382" y="82261"/>
+                  </a:lnTo>
+                  <a:lnTo>
+                    <a:pt x="6682726" y="66472"/>
+                  </a:lnTo>
+                  <a:lnTo>
+                    <a:pt x="6753071" y="50357"/>
+                  </a:lnTo>
+                  <a:lnTo>
+                    <a:pt x="6823415" y="33912"/>
+                  </a:lnTo>
+                  <a:lnTo>
+                    <a:pt x="6893760" y="17128"/>
+                  </a:lnTo>
+                  <a:lnTo>
+                    <a:pt x="6964104" y="0"/>
+                  </a:lnTo>
+                  <a:lnTo>
+                    <a:pt x="6964104" y="635490"/>
+                  </a:lnTo>
+                  <a:lnTo>
+                    <a:pt x="6893760" y="634096"/>
+                  </a:lnTo>
+                  <a:lnTo>
+                    <a:pt x="6823415" y="632693"/>
+                  </a:lnTo>
+                  <a:lnTo>
+                    <a:pt x="6753071" y="631281"/>
+                  </a:lnTo>
+                  <a:lnTo>
+                    <a:pt x="6682726" y="629860"/>
+                  </a:lnTo>
+                  <a:lnTo>
+                    <a:pt x="6612382" y="628430"/>
+                  </a:lnTo>
+                  <a:lnTo>
+                    <a:pt x="6542037" y="626991"/>
+                  </a:lnTo>
+                  <a:lnTo>
+                    <a:pt x="6471693" y="625542"/>
+                  </a:lnTo>
+                  <a:lnTo>
+                    <a:pt x="6401348" y="624083"/>
+                  </a:lnTo>
+                  <a:lnTo>
+                    <a:pt x="6331004" y="622616"/>
+                  </a:lnTo>
+                  <a:lnTo>
+                    <a:pt x="6260659" y="621138"/>
+                  </a:lnTo>
+                  <a:lnTo>
+                    <a:pt x="6190315" y="619651"/>
+                  </a:lnTo>
+                  <a:lnTo>
+                    <a:pt x="6119970" y="618155"/>
+                  </a:lnTo>
+                  <a:lnTo>
+                    <a:pt x="6049626" y="616649"/>
+                  </a:lnTo>
+                  <a:lnTo>
+                    <a:pt x="5979281" y="615133"/>
+                  </a:lnTo>
+                  <a:lnTo>
+                    <a:pt x="5908937" y="613607"/>
+                  </a:lnTo>
+                  <a:lnTo>
+                    <a:pt x="5838592" y="612071"/>
+                  </a:lnTo>
+                  <a:lnTo>
+                    <a:pt x="5768248" y="610525"/>
+                  </a:lnTo>
+                  <a:lnTo>
+                    <a:pt x="5697903" y="608970"/>
+                  </a:lnTo>
+                  <a:lnTo>
+                    <a:pt x="5627559" y="607404"/>
+                  </a:lnTo>
+                  <a:lnTo>
+                    <a:pt x="5557214" y="605828"/>
+                  </a:lnTo>
+                  <a:lnTo>
+                    <a:pt x="5486870" y="604242"/>
+                  </a:lnTo>
+                  <a:lnTo>
+                    <a:pt x="5416525" y="602645"/>
+                  </a:lnTo>
+                  <a:lnTo>
+                    <a:pt x="5346181" y="601038"/>
+                  </a:lnTo>
+                  <a:lnTo>
+                    <a:pt x="5275836" y="599421"/>
+                  </a:lnTo>
+                  <a:lnTo>
+                    <a:pt x="5205492" y="597793"/>
+                  </a:lnTo>
+                  <a:lnTo>
+                    <a:pt x="5135147" y="596155"/>
+                  </a:lnTo>
+                  <a:lnTo>
+                    <a:pt x="5064803" y="594506"/>
+                  </a:lnTo>
+                  <a:lnTo>
+                    <a:pt x="4994458" y="592846"/>
+                  </a:lnTo>
+                  <a:lnTo>
+                    <a:pt x="4924114" y="591176"/>
+                  </a:lnTo>
+                  <a:lnTo>
+                    <a:pt x="4853769" y="589494"/>
+                  </a:lnTo>
+                  <a:lnTo>
+                    <a:pt x="4783425" y="587802"/>
+                  </a:lnTo>
+                  <a:lnTo>
+                    <a:pt x="4713080" y="586099"/>
+                  </a:lnTo>
+                  <a:lnTo>
+                    <a:pt x="4642736" y="584385"/>
+                  </a:lnTo>
+                  <a:lnTo>
+                    <a:pt x="4572391" y="582660"/>
+                  </a:lnTo>
+                  <a:lnTo>
+                    <a:pt x="4502047" y="580923"/>
+                  </a:lnTo>
+                  <a:lnTo>
+                    <a:pt x="4431702" y="579175"/>
+                  </a:lnTo>
+                  <a:lnTo>
+                    <a:pt x="4361358" y="577416"/>
+                  </a:lnTo>
+                  <a:lnTo>
+                    <a:pt x="4291013" y="575645"/>
+                  </a:lnTo>
+                  <a:lnTo>
+                    <a:pt x="4220669" y="573863"/>
+                  </a:lnTo>
+                  <a:lnTo>
+                    <a:pt x="4150324" y="572070"/>
+                  </a:lnTo>
+                  <a:lnTo>
+                    <a:pt x="4079980" y="570265"/>
+                  </a:lnTo>
+                  <a:lnTo>
+                    <a:pt x="4009635" y="568448"/>
+                  </a:lnTo>
+                  <a:lnTo>
+                    <a:pt x="3939291" y="566619"/>
+                  </a:lnTo>
+                  <a:lnTo>
+                    <a:pt x="3868946" y="564778"/>
+                  </a:lnTo>
+                  <a:lnTo>
+                    <a:pt x="3798602" y="562926"/>
+                  </a:lnTo>
+                  <a:lnTo>
+                    <a:pt x="3728257" y="561061"/>
+                  </a:lnTo>
+                  <a:lnTo>
+                    <a:pt x="3657913" y="559184"/>
+                  </a:lnTo>
+                  <a:lnTo>
+                    <a:pt x="3587569" y="557296"/>
+                  </a:lnTo>
+                  <a:lnTo>
+                    <a:pt x="3517224" y="555395"/>
+                  </a:lnTo>
+                  <a:lnTo>
+                    <a:pt x="3446880" y="553481"/>
+                  </a:lnTo>
+                  <a:lnTo>
+                    <a:pt x="3376535" y="551555"/>
+                  </a:lnTo>
+                  <a:lnTo>
+                    <a:pt x="3306191" y="555176"/>
+                  </a:lnTo>
+                  <a:lnTo>
+                    <a:pt x="3235846" y="561121"/>
+                  </a:lnTo>
+                  <a:lnTo>
+                    <a:pt x="3165502" y="566947"/>
+                  </a:lnTo>
+                  <a:lnTo>
+                    <a:pt x="3095157" y="572655"/>
+                  </a:lnTo>
+                  <a:lnTo>
+                    <a:pt x="3024813" y="578248"/>
+                  </a:lnTo>
+                  <a:lnTo>
+                    <a:pt x="2954468" y="583728"/>
+                  </a:lnTo>
+                  <a:lnTo>
+                    <a:pt x="2884124" y="589098"/>
+                  </a:lnTo>
+                  <a:lnTo>
+                    <a:pt x="2813779" y="594360"/>
+                  </a:lnTo>
+                  <a:lnTo>
+                    <a:pt x="2743435" y="599515"/>
+                  </a:lnTo>
+                  <a:lnTo>
+                    <a:pt x="2673090" y="604567"/>
+                  </a:lnTo>
+                  <a:lnTo>
+                    <a:pt x="2602746" y="609517"/>
+                  </a:lnTo>
+                  <a:lnTo>
+                    <a:pt x="2532401" y="614368"/>
+                  </a:lnTo>
+                  <a:lnTo>
+                    <a:pt x="2462057" y="619120"/>
+                  </a:lnTo>
+                  <a:lnTo>
+                    <a:pt x="2391712" y="623777"/>
+                  </a:lnTo>
+                  <a:lnTo>
+                    <a:pt x="2321368" y="628341"/>
+                  </a:lnTo>
+                  <a:lnTo>
+                    <a:pt x="2251023" y="632812"/>
+                  </a:lnTo>
+                  <a:lnTo>
+                    <a:pt x="2180679" y="637193"/>
+                  </a:lnTo>
+                  <a:lnTo>
+                    <a:pt x="2110334" y="641486"/>
+                  </a:lnTo>
+                  <a:lnTo>
+                    <a:pt x="2039990" y="645692"/>
+                  </a:lnTo>
+                  <a:lnTo>
+                    <a:pt x="1969645" y="649814"/>
+                  </a:lnTo>
+                  <a:lnTo>
+                    <a:pt x="1899301" y="653853"/>
+                  </a:lnTo>
+                  <a:lnTo>
+                    <a:pt x="1828956" y="657810"/>
+                  </a:lnTo>
+                  <a:lnTo>
+                    <a:pt x="1758612" y="661687"/>
+                  </a:lnTo>
+                  <a:lnTo>
+                    <a:pt x="1688267" y="665487"/>
+                  </a:lnTo>
+                  <a:lnTo>
+                    <a:pt x="1617923" y="669210"/>
+                  </a:lnTo>
+                  <a:lnTo>
+                    <a:pt x="1547578" y="672858"/>
+                  </a:lnTo>
+                  <a:lnTo>
+                    <a:pt x="1477234" y="676432"/>
+                  </a:lnTo>
+                  <a:lnTo>
+                    <a:pt x="1406889" y="679935"/>
+                  </a:lnTo>
+                  <a:lnTo>
+                    <a:pt x="1336545" y="683367"/>
+                  </a:lnTo>
+                  <a:lnTo>
+                    <a:pt x="1266200" y="686729"/>
+                  </a:lnTo>
+                  <a:lnTo>
+                    <a:pt x="1195856" y="690024"/>
+                  </a:lnTo>
+                  <a:lnTo>
+                    <a:pt x="1125511" y="693253"/>
+                  </a:lnTo>
+                  <a:lnTo>
+                    <a:pt x="1055167" y="696417"/>
+                  </a:lnTo>
+                  <a:lnTo>
+                    <a:pt x="984822" y="699516"/>
+                  </a:lnTo>
+                  <a:lnTo>
+                    <a:pt x="914478" y="702554"/>
+                  </a:lnTo>
+                  <a:lnTo>
+                    <a:pt x="844133" y="705530"/>
+                  </a:lnTo>
+                  <a:lnTo>
+                    <a:pt x="773789" y="708446"/>
+                  </a:lnTo>
+                  <a:lnTo>
+                    <a:pt x="703444" y="711304"/>
+                  </a:lnTo>
+                  <a:lnTo>
+                    <a:pt x="633100" y="714104"/>
+                  </a:lnTo>
+                  <a:lnTo>
+                    <a:pt x="562755" y="716848"/>
+                  </a:lnTo>
+                  <a:lnTo>
+                    <a:pt x="492411" y="719536"/>
+                  </a:lnTo>
+                  <a:lnTo>
+                    <a:pt x="422066" y="722170"/>
+                  </a:lnTo>
+                  <a:lnTo>
+                    <a:pt x="351722" y="724751"/>
+                  </a:lnTo>
+                  <a:lnTo>
+                    <a:pt x="281377" y="727280"/>
+                  </a:lnTo>
+                  <a:lnTo>
+                    <a:pt x="211033" y="729758"/>
+                  </a:lnTo>
+                  <a:lnTo>
+                    <a:pt x="140688" y="732187"/>
+                  </a:lnTo>
+                  <a:lnTo>
+                    <a:pt x="70344" y="734566"/>
+                  </a:lnTo>
+                  <a:lnTo>
+                    <a:pt x="0" y="736897"/>
                   </a:lnTo>
                   <a:close/>
                 </a:path>
@@ -3584,643 +3619,318 @@
         </p:sp>
         <p:sp>
           <p:nvSpPr>
-            <p:cNvPr id="21" name="pl21"/>
-            <p:cNvSpPr/>
-            <p:nvPr/>
-          </p:nvSpPr>
-          <p:spPr>
-            <a:xfrm>
-              <a:off x="1172049" y="3201037"/>
-              <a:ext cx="7090630" cy="1523006"/>
-            </a:xfrm>
-            <a:custGeom>
-              <a:avLst/>
-              <a:pathLst>
-                <a:path w="7090630" h="1523006">
-                  <a:moveTo>
-                    <a:pt x="0" y="1227035"/>
-                  </a:moveTo>
-                  <a:lnTo>
-                    <a:pt x="71622" y="1234314"/>
-                  </a:lnTo>
-                  <a:lnTo>
-                    <a:pt x="143245" y="1241546"/>
-                  </a:lnTo>
-                  <a:lnTo>
-                    <a:pt x="214867" y="1248732"/>
-                  </a:lnTo>
-                  <a:lnTo>
-                    <a:pt x="286490" y="1255871"/>
-                  </a:lnTo>
-                  <a:lnTo>
-                    <a:pt x="358112" y="1262964"/>
-                  </a:lnTo>
-                  <a:lnTo>
-                    <a:pt x="429735" y="1270012"/>
-                  </a:lnTo>
-                  <a:lnTo>
-                    <a:pt x="501357" y="1277014"/>
-                  </a:lnTo>
-                  <a:lnTo>
-                    <a:pt x="572980" y="1283971"/>
-                  </a:lnTo>
-                  <a:lnTo>
-                    <a:pt x="644602" y="1290883"/>
-                  </a:lnTo>
-                  <a:lnTo>
-                    <a:pt x="716225" y="1297751"/>
-                  </a:lnTo>
-                  <a:lnTo>
-                    <a:pt x="787847" y="1304574"/>
-                  </a:lnTo>
-                  <a:lnTo>
-                    <a:pt x="859470" y="1311353"/>
-                  </a:lnTo>
-                  <a:lnTo>
-                    <a:pt x="931092" y="1318089"/>
-                  </a:lnTo>
-                  <a:lnTo>
-                    <a:pt x="1002715" y="1324781"/>
-                  </a:lnTo>
-                  <a:lnTo>
-                    <a:pt x="1074337" y="1331430"/>
-                  </a:lnTo>
-                  <a:lnTo>
-                    <a:pt x="1145960" y="1338037"/>
-                  </a:lnTo>
-                  <a:lnTo>
-                    <a:pt x="1217582" y="1344600"/>
-                  </a:lnTo>
-                  <a:lnTo>
-                    <a:pt x="1289205" y="1351122"/>
-                  </a:lnTo>
-                  <a:lnTo>
-                    <a:pt x="1360827" y="1357601"/>
-                  </a:lnTo>
-                  <a:lnTo>
-                    <a:pt x="1432450" y="1364038"/>
-                  </a:lnTo>
-                  <a:lnTo>
-                    <a:pt x="1504073" y="1370434"/>
-                  </a:lnTo>
-                  <a:lnTo>
-                    <a:pt x="1575695" y="1376789"/>
-                  </a:lnTo>
-                  <a:lnTo>
-                    <a:pt x="1647318" y="1383103"/>
-                  </a:lnTo>
-                  <a:lnTo>
-                    <a:pt x="1718940" y="1389376"/>
-                  </a:lnTo>
-                  <a:lnTo>
-                    <a:pt x="1790563" y="1395609"/>
-                  </a:lnTo>
-                  <a:lnTo>
-                    <a:pt x="1862185" y="1401801"/>
-                  </a:lnTo>
-                  <a:lnTo>
-                    <a:pt x="1933808" y="1407954"/>
-                  </a:lnTo>
-                  <a:lnTo>
-                    <a:pt x="2005430" y="1414067"/>
-                  </a:lnTo>
-                  <a:lnTo>
-                    <a:pt x="2077053" y="1420140"/>
-                  </a:lnTo>
-                  <a:lnTo>
-                    <a:pt x="2148675" y="1426175"/>
-                  </a:lnTo>
-                  <a:lnTo>
-                    <a:pt x="2220298" y="1432170"/>
-                  </a:lnTo>
-                  <a:lnTo>
-                    <a:pt x="2291920" y="1438127"/>
-                  </a:lnTo>
-                  <a:lnTo>
-                    <a:pt x="2363543" y="1444045"/>
-                  </a:lnTo>
-                  <a:lnTo>
-                    <a:pt x="2435165" y="1449925"/>
-                  </a:lnTo>
-                  <a:lnTo>
-                    <a:pt x="2506788" y="1455768"/>
-                  </a:lnTo>
-                  <a:lnTo>
-                    <a:pt x="2578410" y="1461572"/>
-                  </a:lnTo>
-                  <a:lnTo>
-                    <a:pt x="2650033" y="1467340"/>
-                  </a:lnTo>
-                  <a:lnTo>
-                    <a:pt x="2721655" y="1473070"/>
-                  </a:lnTo>
-                  <a:lnTo>
-                    <a:pt x="2793278" y="1478763"/>
-                  </a:lnTo>
-                  <a:lnTo>
-                    <a:pt x="2864901" y="1484419"/>
-                  </a:lnTo>
-                  <a:lnTo>
-                    <a:pt x="2936523" y="1490039"/>
-                  </a:lnTo>
-                  <a:lnTo>
-                    <a:pt x="3008146" y="1495623"/>
-                  </a:lnTo>
-                  <a:lnTo>
-                    <a:pt x="3079768" y="1501171"/>
-                  </a:lnTo>
-                  <a:lnTo>
-                    <a:pt x="3151391" y="1506683"/>
-                  </a:lnTo>
-                  <a:lnTo>
-                    <a:pt x="3223013" y="1512159"/>
-                  </a:lnTo>
-                  <a:lnTo>
-                    <a:pt x="3294636" y="1517600"/>
-                  </a:lnTo>
-                  <a:lnTo>
-                    <a:pt x="3366258" y="1523006"/>
-                  </a:lnTo>
-                  <a:lnTo>
-                    <a:pt x="3437881" y="1521599"/>
-                  </a:lnTo>
-                  <a:lnTo>
-                    <a:pt x="3509503" y="1504441"/>
-                  </a:lnTo>
-                  <a:lnTo>
-                    <a:pt x="3581126" y="1486930"/>
-                  </a:lnTo>
-                  <a:lnTo>
-                    <a:pt x="3652748" y="1469059"/>
-                  </a:lnTo>
-                  <a:lnTo>
-                    <a:pt x="3724371" y="1450821"/>
-                  </a:lnTo>
-                  <a:lnTo>
-                    <a:pt x="3795993" y="1432208"/>
-                  </a:lnTo>
-                  <a:lnTo>
-                    <a:pt x="3867616" y="1413212"/>
-                  </a:lnTo>
-                  <a:lnTo>
-                    <a:pt x="3939238" y="1393825"/>
-                  </a:lnTo>
-                  <a:lnTo>
-                    <a:pt x="4010861" y="1374040"/>
-                  </a:lnTo>
-                  <a:lnTo>
-                    <a:pt x="4082483" y="1353848"/>
-                  </a:lnTo>
-                  <a:lnTo>
-                    <a:pt x="4154106" y="1333241"/>
-                  </a:lnTo>
-                  <a:lnTo>
-                    <a:pt x="4225729" y="1312211"/>
-                  </a:lnTo>
-                  <a:lnTo>
-                    <a:pt x="4297351" y="1290748"/>
-                  </a:lnTo>
-                  <a:lnTo>
-                    <a:pt x="4368974" y="1268844"/>
-                  </a:lnTo>
-                  <a:lnTo>
-                    <a:pt x="4440596" y="1246489"/>
-                  </a:lnTo>
-                  <a:lnTo>
-                    <a:pt x="4512219" y="1223675"/>
-                  </a:lnTo>
-                  <a:lnTo>
-                    <a:pt x="4583841" y="1200392"/>
-                  </a:lnTo>
-                  <a:lnTo>
-                    <a:pt x="4655464" y="1176630"/>
-                  </a:lnTo>
-                  <a:lnTo>
-                    <a:pt x="4727086" y="1152380"/>
-                  </a:lnTo>
-                  <a:lnTo>
-                    <a:pt x="4798709" y="1127631"/>
-                  </a:lnTo>
-                  <a:lnTo>
-                    <a:pt x="4870331" y="1102374"/>
-                  </a:lnTo>
-                  <a:lnTo>
-                    <a:pt x="4941954" y="1076597"/>
-                  </a:lnTo>
-                  <a:lnTo>
-                    <a:pt x="5013576" y="1050290"/>
-                  </a:lnTo>
-                  <a:lnTo>
-                    <a:pt x="5085199" y="1023442"/>
-                  </a:lnTo>
-                  <a:lnTo>
-                    <a:pt x="5156821" y="996043"/>
-                  </a:lnTo>
-                  <a:lnTo>
-                    <a:pt x="5228444" y="968080"/>
-                  </a:lnTo>
-                  <a:lnTo>
-                    <a:pt x="5300066" y="939542"/>
-                  </a:lnTo>
-                  <a:lnTo>
-                    <a:pt x="5371689" y="910418"/>
-                  </a:lnTo>
-                  <a:lnTo>
-                    <a:pt x="5443311" y="880695"/>
-                  </a:lnTo>
-                  <a:lnTo>
-                    <a:pt x="5514934" y="850361"/>
-                  </a:lnTo>
-                  <a:lnTo>
-                    <a:pt x="5586557" y="819403"/>
-                  </a:lnTo>
-                  <a:lnTo>
-                    <a:pt x="5658179" y="787809"/>
-                  </a:lnTo>
-                  <a:lnTo>
-                    <a:pt x="5729802" y="755565"/>
-                  </a:lnTo>
-                  <a:lnTo>
-                    <a:pt x="5801424" y="722658"/>
-                  </a:lnTo>
-                  <a:lnTo>
-                    <a:pt x="5873047" y="689075"/>
-                  </a:lnTo>
-                  <a:lnTo>
-                    <a:pt x="5944669" y="654802"/>
-                  </a:lnTo>
-                  <a:lnTo>
-                    <a:pt x="6016292" y="619823"/>
-                  </a:lnTo>
-                  <a:lnTo>
-                    <a:pt x="6087914" y="584126"/>
-                  </a:lnTo>
-                  <a:lnTo>
-                    <a:pt x="6159537" y="547695"/>
-                  </a:lnTo>
-                  <a:lnTo>
-                    <a:pt x="6231159" y="510515"/>
-                  </a:lnTo>
-                  <a:lnTo>
-                    <a:pt x="6302782" y="472570"/>
-                  </a:lnTo>
-                  <a:lnTo>
-                    <a:pt x="6374404" y="433846"/>
-                  </a:lnTo>
-                  <a:lnTo>
-                    <a:pt x="6446027" y="394325"/>
-                  </a:lnTo>
-                  <a:lnTo>
-                    <a:pt x="6517649" y="353992"/>
-                  </a:lnTo>
-                  <a:lnTo>
-                    <a:pt x="6589272" y="312830"/>
-                  </a:lnTo>
-                  <a:lnTo>
-                    <a:pt x="6660894" y="270821"/>
-                  </a:lnTo>
-                  <a:lnTo>
-                    <a:pt x="6732517" y="227949"/>
-                  </a:lnTo>
-                  <a:lnTo>
-                    <a:pt x="6804139" y="184196"/>
-                  </a:lnTo>
-                  <a:lnTo>
-                    <a:pt x="6875762" y="139542"/>
-                  </a:lnTo>
-                  <a:lnTo>
-                    <a:pt x="6947385" y="93971"/>
-                  </a:lnTo>
-                  <a:lnTo>
-                    <a:pt x="7019007" y="47464"/>
-                  </a:lnTo>
-                  <a:lnTo>
-                    <a:pt x="7090630" y="0"/>
-                  </a:lnTo>
-                </a:path>
-              </a:pathLst>
-            </a:custGeom>
-          </p:spPr>
-          <p:txBody>
-            <a:bodyPr/>
-            <a:lstStyle/>
-            <a:p/>
-          </p:txBody>
-        </p:sp>
-        <p:sp>
-          <p:nvSpPr>
             <p:cNvPr id="22" name="pl22"/>
             <p:cNvSpPr/>
             <p:nvPr/>
           </p:nvSpPr>
           <p:spPr>
             <a:xfrm>
-              <a:off x="1172049" y="4729416"/>
-              <a:ext cx="7090630" cy="513588"/>
+              <a:off x="1235312" y="2549992"/>
+              <a:ext cx="6964104" cy="549617"/>
             </a:xfrm>
             <a:custGeom>
               <a:avLst/>
               <a:pathLst>
-                <a:path w="7090630" h="513588">
+                <a:path w="6964104" h="549617">
                   <a:moveTo>
-                    <a:pt x="7090630" y="232585"/>
+                    <a:pt x="0" y="442808"/>
                   </a:moveTo>
                   <a:lnTo>
-                    <a:pt x="7019007" y="228723"/>
-                  </a:lnTo>
-                  <a:lnTo>
-                    <a:pt x="6947385" y="224836"/>
-                  </a:lnTo>
-                  <a:lnTo>
-                    <a:pt x="6875762" y="220923"/>
-                  </a:lnTo>
-                  <a:lnTo>
-                    <a:pt x="6804139" y="216985"/>
-                  </a:lnTo>
-                  <a:lnTo>
-                    <a:pt x="6732517" y="213022"/>
-                  </a:lnTo>
-                  <a:lnTo>
-                    <a:pt x="6660894" y="209033"/>
-                  </a:lnTo>
-                  <a:lnTo>
-                    <a:pt x="6589272" y="205018"/>
-                  </a:lnTo>
-                  <a:lnTo>
-                    <a:pt x="6517649" y="200977"/>
-                  </a:lnTo>
-                  <a:lnTo>
-                    <a:pt x="6446027" y="196910"/>
-                  </a:lnTo>
-                  <a:lnTo>
-                    <a:pt x="6374404" y="192816"/>
-                  </a:lnTo>
-                  <a:lnTo>
-                    <a:pt x="6302782" y="188696"/>
-                  </a:lnTo>
-                  <a:lnTo>
-                    <a:pt x="6231159" y="184549"/>
-                  </a:lnTo>
-                  <a:lnTo>
-                    <a:pt x="6159537" y="180375"/>
-                  </a:lnTo>
-                  <a:lnTo>
-                    <a:pt x="6087914" y="176174"/>
-                  </a:lnTo>
-                  <a:lnTo>
-                    <a:pt x="6016292" y="171946"/>
-                  </a:lnTo>
-                  <a:lnTo>
-                    <a:pt x="5944669" y="167691"/>
-                  </a:lnTo>
-                  <a:lnTo>
-                    <a:pt x="5873047" y="163408"/>
-                  </a:lnTo>
-                  <a:lnTo>
-                    <a:pt x="5801424" y="159097"/>
-                  </a:lnTo>
-                  <a:lnTo>
-                    <a:pt x="5729802" y="154758"/>
-                  </a:lnTo>
-                  <a:lnTo>
-                    <a:pt x="5658179" y="150390"/>
-                  </a:lnTo>
-                  <a:lnTo>
-                    <a:pt x="5586557" y="145995"/>
-                  </a:lnTo>
-                  <a:lnTo>
-                    <a:pt x="5514934" y="141571"/>
-                  </a:lnTo>
-                  <a:lnTo>
-                    <a:pt x="5443311" y="137118"/>
-                  </a:lnTo>
-                  <a:lnTo>
-                    <a:pt x="5371689" y="132637"/>
-                  </a:lnTo>
-                  <a:lnTo>
-                    <a:pt x="5300066" y="128126"/>
-                  </a:lnTo>
-                  <a:lnTo>
-                    <a:pt x="5228444" y="123586"/>
-                  </a:lnTo>
-                  <a:lnTo>
-                    <a:pt x="5156821" y="119017"/>
-                  </a:lnTo>
-                  <a:lnTo>
-                    <a:pt x="5085199" y="114418"/>
-                  </a:lnTo>
-                  <a:lnTo>
-                    <a:pt x="5013576" y="109789"/>
-                  </a:lnTo>
-                  <a:lnTo>
-                    <a:pt x="4941954" y="105130"/>
-                  </a:lnTo>
-                  <a:lnTo>
-                    <a:pt x="4870331" y="100441"/>
-                  </a:lnTo>
-                  <a:lnTo>
-                    <a:pt x="4798709" y="95722"/>
-                  </a:lnTo>
-                  <a:lnTo>
-                    <a:pt x="4727086" y="90971"/>
-                  </a:lnTo>
-                  <a:lnTo>
-                    <a:pt x="4655464" y="86190"/>
-                  </a:lnTo>
-                  <a:lnTo>
-                    <a:pt x="4583841" y="81378"/>
-                  </a:lnTo>
-                  <a:lnTo>
-                    <a:pt x="4512219" y="76535"/>
-                  </a:lnTo>
-                  <a:lnTo>
-                    <a:pt x="4440596" y="71661"/>
-                  </a:lnTo>
-                  <a:lnTo>
-                    <a:pt x="4368974" y="66754"/>
-                  </a:lnTo>
-                  <a:lnTo>
-                    <a:pt x="4297351" y="61816"/>
-                  </a:lnTo>
-                  <a:lnTo>
-                    <a:pt x="4225729" y="56846"/>
-                  </a:lnTo>
-                  <a:lnTo>
-                    <a:pt x="4154106" y="51844"/>
-                  </a:lnTo>
-                  <a:lnTo>
-                    <a:pt x="4082483" y="46809"/>
-                  </a:lnTo>
-                  <a:lnTo>
-                    <a:pt x="4010861" y="41741"/>
-                  </a:lnTo>
-                  <a:lnTo>
-                    <a:pt x="3939238" y="36641"/>
-                  </a:lnTo>
-                  <a:lnTo>
-                    <a:pt x="3867616" y="31507"/>
-                  </a:lnTo>
-                  <a:lnTo>
-                    <a:pt x="3795993" y="26341"/>
-                  </a:lnTo>
-                  <a:lnTo>
-                    <a:pt x="3724371" y="21140"/>
-                  </a:lnTo>
-                  <a:lnTo>
-                    <a:pt x="3652748" y="15906"/>
-                  </a:lnTo>
-                  <a:lnTo>
-                    <a:pt x="3581126" y="10638"/>
-                  </a:lnTo>
-                  <a:lnTo>
-                    <a:pt x="3509503" y="5336"/>
-                  </a:lnTo>
-                  <a:lnTo>
-                    <a:pt x="3437881" y="0"/>
-                  </a:lnTo>
-                  <a:lnTo>
-                    <a:pt x="3366258" y="10034"/>
-                  </a:lnTo>
-                  <a:lnTo>
-                    <a:pt x="3294636" y="26508"/>
-                  </a:lnTo>
-                  <a:lnTo>
-                    <a:pt x="3223013" y="42650"/>
-                  </a:lnTo>
-                  <a:lnTo>
-                    <a:pt x="3151391" y="58467"/>
-                  </a:lnTo>
-                  <a:lnTo>
-                    <a:pt x="3079768" y="73965"/>
-                  </a:lnTo>
-                  <a:lnTo>
-                    <a:pt x="3008146" y="89151"/>
-                  </a:lnTo>
-                  <a:lnTo>
-                    <a:pt x="2936523" y="104031"/>
-                  </a:lnTo>
-                  <a:lnTo>
-                    <a:pt x="2864901" y="118612"/>
-                  </a:lnTo>
-                  <a:lnTo>
-                    <a:pt x="2793278" y="132898"/>
-                  </a:lnTo>
-                  <a:lnTo>
-                    <a:pt x="2721655" y="146897"/>
-                  </a:lnTo>
-                  <a:lnTo>
-                    <a:pt x="2650033" y="160614"/>
-                  </a:lnTo>
-                  <a:lnTo>
-                    <a:pt x="2578410" y="174055"/>
-                  </a:lnTo>
-                  <a:lnTo>
-                    <a:pt x="2506788" y="187225"/>
-                  </a:lnTo>
-                  <a:lnTo>
-                    <a:pt x="2435165" y="200129"/>
-                  </a:lnTo>
-                  <a:lnTo>
-                    <a:pt x="2363543" y="212774"/>
-                  </a:lnTo>
-                  <a:lnTo>
-                    <a:pt x="2291920" y="225164"/>
-                  </a:lnTo>
-                  <a:lnTo>
-                    <a:pt x="2220298" y="237304"/>
-                  </a:lnTo>
-                  <a:lnTo>
-                    <a:pt x="2148675" y="249200"/>
-                  </a:lnTo>
-                  <a:lnTo>
-                    <a:pt x="2077053" y="260856"/>
-                  </a:lnTo>
-                  <a:lnTo>
-                    <a:pt x="2005430" y="272277"/>
-                  </a:lnTo>
-                  <a:lnTo>
-                    <a:pt x="1933808" y="283469"/>
-                  </a:lnTo>
-                  <a:lnTo>
-                    <a:pt x="1862185" y="294434"/>
-                  </a:lnTo>
-                  <a:lnTo>
-                    <a:pt x="1790563" y="305179"/>
-                  </a:lnTo>
-                  <a:lnTo>
-                    <a:pt x="1718940" y="315708"/>
-                  </a:lnTo>
-                  <a:lnTo>
-                    <a:pt x="1647318" y="326024"/>
-                  </a:lnTo>
-                  <a:lnTo>
-                    <a:pt x="1575695" y="336133"/>
-                  </a:lnTo>
-                  <a:lnTo>
-                    <a:pt x="1504073" y="346038"/>
-                  </a:lnTo>
-                  <a:lnTo>
-                    <a:pt x="1432450" y="355743"/>
-                  </a:lnTo>
-                  <a:lnTo>
-                    <a:pt x="1360827" y="365253"/>
-                  </a:lnTo>
-                  <a:lnTo>
-                    <a:pt x="1289205" y="374571"/>
-                  </a:lnTo>
-                  <a:lnTo>
-                    <a:pt x="1217582" y="383702"/>
-                  </a:lnTo>
-                  <a:lnTo>
-                    <a:pt x="1145960" y="392648"/>
-                  </a:lnTo>
-                  <a:lnTo>
-                    <a:pt x="1074337" y="401415"/>
-                  </a:lnTo>
-                  <a:lnTo>
-                    <a:pt x="1002715" y="410005"/>
-                  </a:lnTo>
-                  <a:lnTo>
-                    <a:pt x="931092" y="418422"/>
-                  </a:lnTo>
-                  <a:lnTo>
-                    <a:pt x="859470" y="426669"/>
-                  </a:lnTo>
-                  <a:lnTo>
-                    <a:pt x="787847" y="434750"/>
-                  </a:lnTo>
-                  <a:lnTo>
-                    <a:pt x="716225" y="442668"/>
-                  </a:lnTo>
-                  <a:lnTo>
-                    <a:pt x="644602" y="450427"/>
-                  </a:lnTo>
-                  <a:lnTo>
-                    <a:pt x="572980" y="458030"/>
-                  </a:lnTo>
-                  <a:lnTo>
-                    <a:pt x="501357" y="465479"/>
-                  </a:lnTo>
-                  <a:lnTo>
-                    <a:pt x="429735" y="472778"/>
-                  </a:lnTo>
-                  <a:lnTo>
-                    <a:pt x="358112" y="479931"/>
-                  </a:lnTo>
-                  <a:lnTo>
-                    <a:pt x="286490" y="486939"/>
-                  </a:lnTo>
-                  <a:lnTo>
-                    <a:pt x="214867" y="493806"/>
-                  </a:lnTo>
-                  <a:lnTo>
-                    <a:pt x="143245" y="500535"/>
-                  </a:lnTo>
-                  <a:lnTo>
-                    <a:pt x="71622" y="507128"/>
-                  </a:lnTo>
-                  <a:lnTo>
-                    <a:pt x="0" y="513588"/>
+                    <a:pt x="70344" y="445434"/>
+                  </a:lnTo>
+                  <a:lnTo>
+                    <a:pt x="140688" y="448044"/>
+                  </a:lnTo>
+                  <a:lnTo>
+                    <a:pt x="211033" y="450638"/>
+                  </a:lnTo>
+                  <a:lnTo>
+                    <a:pt x="281377" y="453214"/>
+                  </a:lnTo>
+                  <a:lnTo>
+                    <a:pt x="351722" y="455774"/>
+                  </a:lnTo>
+                  <a:lnTo>
+                    <a:pt x="422066" y="458317"/>
+                  </a:lnTo>
+                  <a:lnTo>
+                    <a:pt x="492411" y="460844"/>
+                  </a:lnTo>
+                  <a:lnTo>
+                    <a:pt x="562755" y="463355"/>
+                  </a:lnTo>
+                  <a:lnTo>
+                    <a:pt x="633100" y="465849"/>
+                  </a:lnTo>
+                  <a:lnTo>
+                    <a:pt x="703444" y="468327"/>
+                  </a:lnTo>
+                  <a:lnTo>
+                    <a:pt x="773789" y="470790"/>
+                  </a:lnTo>
+                  <a:lnTo>
+                    <a:pt x="844133" y="473236"/>
+                  </a:lnTo>
+                  <a:lnTo>
+                    <a:pt x="914478" y="475667"/>
+                  </a:lnTo>
+                  <a:lnTo>
+                    <a:pt x="984822" y="478082"/>
+                  </a:lnTo>
+                  <a:lnTo>
+                    <a:pt x="1055167" y="480482"/>
+                  </a:lnTo>
+                  <a:lnTo>
+                    <a:pt x="1125511" y="482866"/>
+                  </a:lnTo>
+                  <a:lnTo>
+                    <a:pt x="1195856" y="485234"/>
+                  </a:lnTo>
+                  <a:lnTo>
+                    <a:pt x="1266200" y="487588"/>
+                  </a:lnTo>
+                  <a:lnTo>
+                    <a:pt x="1336545" y="489926"/>
+                  </a:lnTo>
+                  <a:lnTo>
+                    <a:pt x="1406889" y="492249"/>
+                  </a:lnTo>
+                  <a:lnTo>
+                    <a:pt x="1477234" y="494557"/>
+                  </a:lnTo>
+                  <a:lnTo>
+                    <a:pt x="1547578" y="496850"/>
+                  </a:lnTo>
+                  <a:lnTo>
+                    <a:pt x="1617923" y="499129"/>
+                  </a:lnTo>
+                  <a:lnTo>
+                    <a:pt x="1688267" y="501393"/>
+                  </a:lnTo>
+                  <a:lnTo>
+                    <a:pt x="1758612" y="503642"/>
+                  </a:lnTo>
+                  <a:lnTo>
+                    <a:pt x="1828956" y="505877"/>
+                  </a:lnTo>
+                  <a:lnTo>
+                    <a:pt x="1899301" y="508097"/>
+                  </a:lnTo>
+                  <a:lnTo>
+                    <a:pt x="1969645" y="510303"/>
+                  </a:lnTo>
+                  <a:lnTo>
+                    <a:pt x="2039990" y="512495"/>
+                  </a:lnTo>
+                  <a:lnTo>
+                    <a:pt x="2110334" y="514673"/>
+                  </a:lnTo>
+                  <a:lnTo>
+                    <a:pt x="2180679" y="516836"/>
+                  </a:lnTo>
+                  <a:lnTo>
+                    <a:pt x="2251023" y="518986"/>
+                  </a:lnTo>
+                  <a:lnTo>
+                    <a:pt x="2321368" y="521122"/>
+                  </a:lnTo>
+                  <a:lnTo>
+                    <a:pt x="2391712" y="523244"/>
+                  </a:lnTo>
+                  <a:lnTo>
+                    <a:pt x="2462057" y="525352"/>
+                  </a:lnTo>
+                  <a:lnTo>
+                    <a:pt x="2532401" y="527447"/>
+                  </a:lnTo>
+                  <a:lnTo>
+                    <a:pt x="2602746" y="529528"/>
+                  </a:lnTo>
+                  <a:lnTo>
+                    <a:pt x="2673090" y="531596"/>
+                  </a:lnTo>
+                  <a:lnTo>
+                    <a:pt x="2743435" y="533650"/>
+                  </a:lnTo>
+                  <a:lnTo>
+                    <a:pt x="2813779" y="535692"/>
+                  </a:lnTo>
+                  <a:lnTo>
+                    <a:pt x="2884124" y="537720"/>
+                  </a:lnTo>
+                  <a:lnTo>
+                    <a:pt x="2954468" y="539735"/>
+                  </a:lnTo>
+                  <a:lnTo>
+                    <a:pt x="3024813" y="541737"/>
+                  </a:lnTo>
+                  <a:lnTo>
+                    <a:pt x="3095157" y="543726"/>
+                  </a:lnTo>
+                  <a:lnTo>
+                    <a:pt x="3165502" y="545702"/>
+                  </a:lnTo>
+                  <a:lnTo>
+                    <a:pt x="3235846" y="547666"/>
+                  </a:lnTo>
+                  <a:lnTo>
+                    <a:pt x="3306191" y="549617"/>
+                  </a:lnTo>
+                  <a:lnTo>
+                    <a:pt x="3376535" y="549109"/>
+                  </a:lnTo>
+                  <a:lnTo>
+                    <a:pt x="3446880" y="542917"/>
+                  </a:lnTo>
+                  <a:lnTo>
+                    <a:pt x="3517224" y="536598"/>
+                  </a:lnTo>
+                  <a:lnTo>
+                    <a:pt x="3587569" y="530149"/>
+                  </a:lnTo>
+                  <a:lnTo>
+                    <a:pt x="3657913" y="523567"/>
+                  </a:lnTo>
+                  <a:lnTo>
+                    <a:pt x="3728257" y="516850"/>
+                  </a:lnTo>
+                  <a:lnTo>
+                    <a:pt x="3798602" y="509994"/>
+                  </a:lnTo>
+                  <a:lnTo>
+                    <a:pt x="3868946" y="502998"/>
+                  </a:lnTo>
+                  <a:lnTo>
+                    <a:pt x="3939291" y="495858"/>
+                  </a:lnTo>
+                  <a:lnTo>
+                    <a:pt x="4009635" y="488572"/>
+                  </a:lnTo>
+                  <a:lnTo>
+                    <a:pt x="4079980" y="481135"/>
+                  </a:lnTo>
+                  <a:lnTo>
+                    <a:pt x="4150324" y="473546"/>
+                  </a:lnTo>
+                  <a:lnTo>
+                    <a:pt x="4220669" y="465800"/>
+                  </a:lnTo>
+                  <a:lnTo>
+                    <a:pt x="4291013" y="457895"/>
+                  </a:lnTo>
+                  <a:lnTo>
+                    <a:pt x="4361358" y="449828"/>
+                  </a:lnTo>
+                  <a:lnTo>
+                    <a:pt x="4431702" y="441595"/>
+                  </a:lnTo>
+                  <a:lnTo>
+                    <a:pt x="4502047" y="433193"/>
+                  </a:lnTo>
+                  <a:lnTo>
+                    <a:pt x="4572391" y="424618"/>
+                  </a:lnTo>
+                  <a:lnTo>
+                    <a:pt x="4642736" y="415866"/>
+                  </a:lnTo>
+                  <a:lnTo>
+                    <a:pt x="4713080" y="406935"/>
+                  </a:lnTo>
+                  <a:lnTo>
+                    <a:pt x="4783425" y="397820"/>
+                  </a:lnTo>
+                  <a:lnTo>
+                    <a:pt x="4853769" y="388518"/>
+                  </a:lnTo>
+                  <a:lnTo>
+                    <a:pt x="4924114" y="379025"/>
+                  </a:lnTo>
+                  <a:lnTo>
+                    <a:pt x="4994458" y="369336"/>
+                  </a:lnTo>
+                  <a:lnTo>
+                    <a:pt x="5064803" y="359448"/>
+                  </a:lnTo>
+                  <a:lnTo>
+                    <a:pt x="5135147" y="349357"/>
+                  </a:lnTo>
+                  <a:lnTo>
+                    <a:pt x="5205492" y="339058"/>
+                  </a:lnTo>
+                  <a:lnTo>
+                    <a:pt x="5275836" y="328548"/>
+                  </a:lnTo>
+                  <a:lnTo>
+                    <a:pt x="5346181" y="317822"/>
+                  </a:lnTo>
+                  <a:lnTo>
+                    <a:pt x="5416525" y="306875"/>
+                  </a:lnTo>
+                  <a:lnTo>
+                    <a:pt x="5486870" y="295703"/>
+                  </a:lnTo>
+                  <a:lnTo>
+                    <a:pt x="5557214" y="284301"/>
+                  </a:lnTo>
+                  <a:lnTo>
+                    <a:pt x="5627559" y="272665"/>
+                  </a:lnTo>
+                  <a:lnTo>
+                    <a:pt x="5697903" y="260790"/>
+                  </a:lnTo>
+                  <a:lnTo>
+                    <a:pt x="5768248" y="248671"/>
+                  </a:lnTo>
+                  <a:lnTo>
+                    <a:pt x="5838592" y="236302"/>
+                  </a:lnTo>
+                  <a:lnTo>
+                    <a:pt x="5908937" y="223679"/>
+                  </a:lnTo>
+                  <a:lnTo>
+                    <a:pt x="5979281" y="210797"/>
+                  </a:lnTo>
+                  <a:lnTo>
+                    <a:pt x="6049626" y="197650"/>
+                  </a:lnTo>
+                  <a:lnTo>
+                    <a:pt x="6119970" y="184232"/>
+                  </a:lnTo>
+                  <a:lnTo>
+                    <a:pt x="6190315" y="170539"/>
+                  </a:lnTo>
+                  <a:lnTo>
+                    <a:pt x="6260659" y="156564"/>
+                  </a:lnTo>
+                  <a:lnTo>
+                    <a:pt x="6331004" y="142302"/>
+                  </a:lnTo>
+                  <a:lnTo>
+                    <a:pt x="6401348" y="127747"/>
+                  </a:lnTo>
+                  <a:lnTo>
+                    <a:pt x="6471693" y="112893"/>
+                  </a:lnTo>
+                  <a:lnTo>
+                    <a:pt x="6542037" y="97733"/>
+                  </a:lnTo>
+                  <a:lnTo>
+                    <a:pt x="6612382" y="82261"/>
+                  </a:lnTo>
+                  <a:lnTo>
+                    <a:pt x="6682726" y="66472"/>
+                  </a:lnTo>
+                  <a:lnTo>
+                    <a:pt x="6753071" y="50357"/>
+                  </a:lnTo>
+                  <a:lnTo>
+                    <a:pt x="6823415" y="33912"/>
+                  </a:lnTo>
+                  <a:lnTo>
+                    <a:pt x="6893760" y="17128"/>
+                  </a:lnTo>
+                  <a:lnTo>
+                    <a:pt x="6964104" y="0"/>
                   </a:lnTo>
                 </a:path>
               </a:pathLst>
@@ -4240,312 +3950,637 @@
           </p:nvSpPr>
           <p:spPr>
             <a:xfrm>
-              <a:off x="1172049" y="4372964"/>
-              <a:ext cx="7090630" cy="588602"/>
+              <a:off x="1235312" y="3101548"/>
+              <a:ext cx="6964104" cy="185342"/>
             </a:xfrm>
             <a:custGeom>
               <a:avLst/>
               <a:pathLst>
-                <a:path w="7090630" h="588602">
+                <a:path w="6964104" h="185342">
                   <a:moveTo>
-                    <a:pt x="0" y="588602"/>
+                    <a:pt x="6964104" y="83934"/>
                   </a:moveTo>
                   <a:lnTo>
-                    <a:pt x="71622" y="584452"/>
-                  </a:lnTo>
-                  <a:lnTo>
-                    <a:pt x="143245" y="580274"/>
-                  </a:lnTo>
-                  <a:lnTo>
-                    <a:pt x="214867" y="576067"/>
-                  </a:lnTo>
-                  <a:lnTo>
-                    <a:pt x="286490" y="571831"/>
-                  </a:lnTo>
-                  <a:lnTo>
-                    <a:pt x="358112" y="567565"/>
-                  </a:lnTo>
-                  <a:lnTo>
-                    <a:pt x="429735" y="563269"/>
-                  </a:lnTo>
-                  <a:lnTo>
-                    <a:pt x="501357" y="558943"/>
-                  </a:lnTo>
-                  <a:lnTo>
-                    <a:pt x="572980" y="554588"/>
-                  </a:lnTo>
-                  <a:lnTo>
-                    <a:pt x="644602" y="550201"/>
-                  </a:lnTo>
-                  <a:lnTo>
-                    <a:pt x="716225" y="545785"/>
-                  </a:lnTo>
-                  <a:lnTo>
-                    <a:pt x="787847" y="541337"/>
-                  </a:lnTo>
-                  <a:lnTo>
-                    <a:pt x="859470" y="536859"/>
-                  </a:lnTo>
-                  <a:lnTo>
-                    <a:pt x="931092" y="532349"/>
-                  </a:lnTo>
-                  <a:lnTo>
-                    <a:pt x="1002715" y="527808"/>
-                  </a:lnTo>
-                  <a:lnTo>
-                    <a:pt x="1074337" y="523236"/>
-                  </a:lnTo>
-                  <a:lnTo>
-                    <a:pt x="1145960" y="518631"/>
-                  </a:lnTo>
-                  <a:lnTo>
-                    <a:pt x="1217582" y="513995"/>
-                  </a:lnTo>
-                  <a:lnTo>
-                    <a:pt x="1289205" y="509326"/>
-                  </a:lnTo>
-                  <a:lnTo>
-                    <a:pt x="1360827" y="504624"/>
-                  </a:lnTo>
-                  <a:lnTo>
-                    <a:pt x="1432450" y="499890"/>
-                  </a:lnTo>
-                  <a:lnTo>
-                    <a:pt x="1504073" y="495123"/>
-                  </a:lnTo>
-                  <a:lnTo>
-                    <a:pt x="1575695" y="490323"/>
-                  </a:lnTo>
-                  <a:lnTo>
-                    <a:pt x="1647318" y="485489"/>
-                  </a:lnTo>
-                  <a:lnTo>
-                    <a:pt x="1718940" y="480622"/>
-                  </a:lnTo>
-                  <a:lnTo>
-                    <a:pt x="1790563" y="475721"/>
-                  </a:lnTo>
-                  <a:lnTo>
-                    <a:pt x="1862185" y="470785"/>
-                  </a:lnTo>
-                  <a:lnTo>
-                    <a:pt x="1933808" y="465815"/>
-                  </a:lnTo>
-                  <a:lnTo>
-                    <a:pt x="2005430" y="460811"/>
-                  </a:lnTo>
-                  <a:lnTo>
-                    <a:pt x="2077053" y="455772"/>
-                  </a:lnTo>
-                  <a:lnTo>
-                    <a:pt x="2148675" y="450697"/>
-                  </a:lnTo>
-                  <a:lnTo>
-                    <a:pt x="2220298" y="445587"/>
-                  </a:lnTo>
-                  <a:lnTo>
-                    <a:pt x="2291920" y="440442"/>
-                  </a:lnTo>
-                  <a:lnTo>
-                    <a:pt x="2363543" y="435261"/>
-                  </a:lnTo>
-                  <a:lnTo>
-                    <a:pt x="2435165" y="430044"/>
-                  </a:lnTo>
-                  <a:lnTo>
-                    <a:pt x="2506788" y="424790"/>
-                  </a:lnTo>
-                  <a:lnTo>
-                    <a:pt x="2578410" y="419500"/>
-                  </a:lnTo>
-                  <a:lnTo>
-                    <a:pt x="2650033" y="414173"/>
-                  </a:lnTo>
-                  <a:lnTo>
-                    <a:pt x="2721655" y="408809"/>
-                  </a:lnTo>
-                  <a:lnTo>
-                    <a:pt x="2793278" y="403407"/>
-                  </a:lnTo>
-                  <a:lnTo>
-                    <a:pt x="2864901" y="397968"/>
-                  </a:lnTo>
-                  <a:lnTo>
-                    <a:pt x="2936523" y="392491"/>
-                  </a:lnTo>
-                  <a:lnTo>
-                    <a:pt x="3008146" y="386976"/>
-                  </a:lnTo>
-                  <a:lnTo>
-                    <a:pt x="3079768" y="381422"/>
-                  </a:lnTo>
-                  <a:lnTo>
-                    <a:pt x="3151391" y="375830"/>
-                  </a:lnTo>
-                  <a:lnTo>
-                    <a:pt x="3223013" y="370199"/>
-                  </a:lnTo>
-                  <a:lnTo>
-                    <a:pt x="3294636" y="364528"/>
-                  </a:lnTo>
-                  <a:lnTo>
-                    <a:pt x="3366258" y="358818"/>
-                  </a:lnTo>
-                  <a:lnTo>
-                    <a:pt x="3437881" y="353069"/>
-                  </a:lnTo>
-                  <a:lnTo>
-                    <a:pt x="3509503" y="347279"/>
-                  </a:lnTo>
-                  <a:lnTo>
-                    <a:pt x="3581126" y="341449"/>
-                  </a:lnTo>
-                  <a:lnTo>
-                    <a:pt x="3652748" y="335578"/>
-                  </a:lnTo>
-                  <a:lnTo>
-                    <a:pt x="3724371" y="329666"/>
-                  </a:lnTo>
-                  <a:lnTo>
-                    <a:pt x="3795993" y="323714"/>
-                  </a:lnTo>
-                  <a:lnTo>
-                    <a:pt x="3867616" y="317719"/>
-                  </a:lnTo>
-                  <a:lnTo>
-                    <a:pt x="3939238" y="311683"/>
-                  </a:lnTo>
-                  <a:lnTo>
-                    <a:pt x="4010861" y="305605"/>
-                  </a:lnTo>
-                  <a:lnTo>
-                    <a:pt x="4082483" y="299485"/>
-                  </a:lnTo>
-                  <a:lnTo>
-                    <a:pt x="4154106" y="293322"/>
-                  </a:lnTo>
-                  <a:lnTo>
-                    <a:pt x="4225729" y="287116"/>
-                  </a:lnTo>
-                  <a:lnTo>
-                    <a:pt x="4297351" y="280867"/>
-                  </a:lnTo>
-                  <a:lnTo>
-                    <a:pt x="4368974" y="274574"/>
-                  </a:lnTo>
-                  <a:lnTo>
-                    <a:pt x="4440596" y="268238"/>
-                  </a:lnTo>
-                  <a:lnTo>
-                    <a:pt x="4512219" y="261857"/>
-                  </a:lnTo>
-                  <a:lnTo>
-                    <a:pt x="4583841" y="255432"/>
-                  </a:lnTo>
-                  <a:lnTo>
-                    <a:pt x="4655464" y="248962"/>
-                  </a:lnTo>
-                  <a:lnTo>
-                    <a:pt x="4727086" y="242447"/>
-                  </a:lnTo>
-                  <a:lnTo>
-                    <a:pt x="4798709" y="235887"/>
-                  </a:lnTo>
-                  <a:lnTo>
-                    <a:pt x="4870331" y="229281"/>
-                  </a:lnTo>
-                  <a:lnTo>
-                    <a:pt x="4941954" y="222629"/>
-                  </a:lnTo>
-                  <a:lnTo>
-                    <a:pt x="5013576" y="215931"/>
-                  </a:lnTo>
-                  <a:lnTo>
-                    <a:pt x="5085199" y="209186"/>
-                  </a:lnTo>
-                  <a:lnTo>
-                    <a:pt x="5156821" y="202394"/>
-                  </a:lnTo>
-                  <a:lnTo>
-                    <a:pt x="5228444" y="195554"/>
-                  </a:lnTo>
-                  <a:lnTo>
-                    <a:pt x="5300066" y="188667"/>
-                  </a:lnTo>
-                  <a:lnTo>
-                    <a:pt x="5371689" y="181733"/>
-                  </a:lnTo>
-                  <a:lnTo>
-                    <a:pt x="5443311" y="174749"/>
-                  </a:lnTo>
-                  <a:lnTo>
-                    <a:pt x="5514934" y="167718"/>
-                  </a:lnTo>
-                  <a:lnTo>
-                    <a:pt x="5586557" y="160637"/>
-                  </a:lnTo>
-                  <a:lnTo>
-                    <a:pt x="5658179" y="153507"/>
-                  </a:lnTo>
-                  <a:lnTo>
-                    <a:pt x="5729802" y="146327"/>
-                  </a:lnTo>
-                  <a:lnTo>
-                    <a:pt x="5801424" y="139097"/>
-                  </a:lnTo>
-                  <a:lnTo>
-                    <a:pt x="5873047" y="131817"/>
-                  </a:lnTo>
-                  <a:lnTo>
-                    <a:pt x="5944669" y="124486"/>
-                  </a:lnTo>
-                  <a:lnTo>
-                    <a:pt x="6016292" y="117104"/>
-                  </a:lnTo>
-                  <a:lnTo>
-                    <a:pt x="6087914" y="109671"/>
-                  </a:lnTo>
-                  <a:lnTo>
-                    <a:pt x="6159537" y="102185"/>
-                  </a:lnTo>
-                  <a:lnTo>
-                    <a:pt x="6231159" y="94648"/>
-                  </a:lnTo>
-                  <a:lnTo>
-                    <a:pt x="6302782" y="87058"/>
-                  </a:lnTo>
-                  <a:lnTo>
-                    <a:pt x="6374404" y="79416"/>
-                  </a:lnTo>
-                  <a:lnTo>
-                    <a:pt x="6446027" y="71720"/>
-                  </a:lnTo>
-                  <a:lnTo>
-                    <a:pt x="6517649" y="63970"/>
-                  </a:lnTo>
-                  <a:lnTo>
-                    <a:pt x="6589272" y="56167"/>
-                  </a:lnTo>
-                  <a:lnTo>
-                    <a:pt x="6660894" y="48309"/>
-                  </a:lnTo>
-                  <a:lnTo>
-                    <a:pt x="6732517" y="40397"/>
-                  </a:lnTo>
-                  <a:lnTo>
-                    <a:pt x="6804139" y="32429"/>
-                  </a:lnTo>
-                  <a:lnTo>
-                    <a:pt x="6875762" y="24406"/>
-                  </a:lnTo>
-                  <a:lnTo>
-                    <a:pt x="6947385" y="16327"/>
-                  </a:lnTo>
-                  <a:lnTo>
-                    <a:pt x="7019007" y="8191"/>
-                  </a:lnTo>
-                  <a:lnTo>
-                    <a:pt x="7090630" y="0"/>
+                    <a:pt x="6893760" y="82540"/>
+                  </a:lnTo>
+                  <a:lnTo>
+                    <a:pt x="6823415" y="81138"/>
+                  </a:lnTo>
+                  <a:lnTo>
+                    <a:pt x="6753071" y="79726"/>
+                  </a:lnTo>
+                  <a:lnTo>
+                    <a:pt x="6682726" y="78305"/>
+                  </a:lnTo>
+                  <a:lnTo>
+                    <a:pt x="6612382" y="76874"/>
+                  </a:lnTo>
+                  <a:lnTo>
+                    <a:pt x="6542037" y="75435"/>
+                  </a:lnTo>
+                  <a:lnTo>
+                    <a:pt x="6471693" y="73986"/>
+                  </a:lnTo>
+                  <a:lnTo>
+                    <a:pt x="6401348" y="72528"/>
+                  </a:lnTo>
+                  <a:lnTo>
+                    <a:pt x="6331004" y="71060"/>
+                  </a:lnTo>
+                  <a:lnTo>
+                    <a:pt x="6260659" y="69583"/>
+                  </a:lnTo>
+                  <a:lnTo>
+                    <a:pt x="6190315" y="68096"/>
+                  </a:lnTo>
+                  <a:lnTo>
+                    <a:pt x="6119970" y="66599"/>
+                  </a:lnTo>
+                  <a:lnTo>
+                    <a:pt x="6049626" y="65093"/>
+                  </a:lnTo>
+                  <a:lnTo>
+                    <a:pt x="5979281" y="63577"/>
+                  </a:lnTo>
+                  <a:lnTo>
+                    <a:pt x="5908937" y="62051"/>
+                  </a:lnTo>
+                  <a:lnTo>
+                    <a:pt x="5838592" y="60515"/>
+                  </a:lnTo>
+                  <a:lnTo>
+                    <a:pt x="5768248" y="58970"/>
+                  </a:lnTo>
+                  <a:lnTo>
+                    <a:pt x="5697903" y="57414"/>
+                  </a:lnTo>
+                  <a:lnTo>
+                    <a:pt x="5627559" y="55848"/>
+                  </a:lnTo>
+                  <a:lnTo>
+                    <a:pt x="5557214" y="54272"/>
+                  </a:lnTo>
+                  <a:lnTo>
+                    <a:pt x="5486870" y="52686"/>
+                  </a:lnTo>
+                  <a:lnTo>
+                    <a:pt x="5416525" y="51089"/>
+                  </a:lnTo>
+                  <a:lnTo>
+                    <a:pt x="5346181" y="49482"/>
+                  </a:lnTo>
+                  <a:lnTo>
+                    <a:pt x="5275836" y="47865"/>
+                  </a:lnTo>
+                  <a:lnTo>
+                    <a:pt x="5205492" y="46237"/>
+                  </a:lnTo>
+                  <a:lnTo>
+                    <a:pt x="5135147" y="44599"/>
+                  </a:lnTo>
+                  <a:lnTo>
+                    <a:pt x="5064803" y="42950"/>
+                  </a:lnTo>
+                  <a:lnTo>
+                    <a:pt x="4994458" y="41290"/>
+                  </a:lnTo>
+                  <a:lnTo>
+                    <a:pt x="4924114" y="39620"/>
+                  </a:lnTo>
+                  <a:lnTo>
+                    <a:pt x="4853769" y="37939"/>
+                  </a:lnTo>
+                  <a:lnTo>
+                    <a:pt x="4783425" y="36247"/>
+                  </a:lnTo>
+                  <a:lnTo>
+                    <a:pt x="4713080" y="34543"/>
+                  </a:lnTo>
+                  <a:lnTo>
+                    <a:pt x="4642736" y="32829"/>
+                  </a:lnTo>
+                  <a:lnTo>
+                    <a:pt x="4572391" y="31104"/>
+                  </a:lnTo>
+                  <a:lnTo>
+                    <a:pt x="4502047" y="29367"/>
+                  </a:lnTo>
+                  <a:lnTo>
+                    <a:pt x="4431702" y="27619"/>
+                  </a:lnTo>
+                  <a:lnTo>
+                    <a:pt x="4361358" y="25860"/>
+                  </a:lnTo>
+                  <a:lnTo>
+                    <a:pt x="4291013" y="24090"/>
+                  </a:lnTo>
+                  <a:lnTo>
+                    <a:pt x="4220669" y="22308"/>
+                  </a:lnTo>
+                  <a:lnTo>
+                    <a:pt x="4150324" y="20514"/>
+                  </a:lnTo>
+                  <a:lnTo>
+                    <a:pt x="4079980" y="18709"/>
+                  </a:lnTo>
+                  <a:lnTo>
+                    <a:pt x="4009635" y="16892"/>
+                  </a:lnTo>
+                  <a:lnTo>
+                    <a:pt x="3939291" y="15063"/>
+                  </a:lnTo>
+                  <a:lnTo>
+                    <a:pt x="3868946" y="13223"/>
+                  </a:lnTo>
+                  <a:lnTo>
+                    <a:pt x="3798602" y="11370"/>
+                  </a:lnTo>
+                  <a:lnTo>
+                    <a:pt x="3728257" y="9505"/>
+                  </a:lnTo>
+                  <a:lnTo>
+                    <a:pt x="3657913" y="7629"/>
+                  </a:lnTo>
+                  <a:lnTo>
+                    <a:pt x="3587569" y="5740"/>
+                  </a:lnTo>
+                  <a:lnTo>
+                    <a:pt x="3517224" y="3839"/>
+                  </a:lnTo>
+                  <a:lnTo>
+                    <a:pt x="3446880" y="1925"/>
+                  </a:lnTo>
+                  <a:lnTo>
+                    <a:pt x="3376535" y="0"/>
+                  </a:lnTo>
+                  <a:lnTo>
+                    <a:pt x="3306191" y="3621"/>
+                  </a:lnTo>
+                  <a:lnTo>
+                    <a:pt x="3235846" y="9566"/>
+                  </a:lnTo>
+                  <a:lnTo>
+                    <a:pt x="3165502" y="15391"/>
+                  </a:lnTo>
+                  <a:lnTo>
+                    <a:pt x="3095157" y="21099"/>
+                  </a:lnTo>
+                  <a:lnTo>
+                    <a:pt x="3024813" y="26692"/>
+                  </a:lnTo>
+                  <a:lnTo>
+                    <a:pt x="2954468" y="32172"/>
+                  </a:lnTo>
+                  <a:lnTo>
+                    <a:pt x="2884124" y="37542"/>
+                  </a:lnTo>
+                  <a:lnTo>
+                    <a:pt x="2813779" y="42804"/>
+                  </a:lnTo>
+                  <a:lnTo>
+                    <a:pt x="2743435" y="47960"/>
+                  </a:lnTo>
+                  <a:lnTo>
+                    <a:pt x="2673090" y="53011"/>
+                  </a:lnTo>
+                  <a:lnTo>
+                    <a:pt x="2602746" y="57962"/>
+                  </a:lnTo>
+                  <a:lnTo>
+                    <a:pt x="2532401" y="62812"/>
+                  </a:lnTo>
+                  <a:lnTo>
+                    <a:pt x="2462057" y="67565"/>
+                  </a:lnTo>
+                  <a:lnTo>
+                    <a:pt x="2391712" y="72222"/>
+                  </a:lnTo>
+                  <a:lnTo>
+                    <a:pt x="2321368" y="76785"/>
+                  </a:lnTo>
+                  <a:lnTo>
+                    <a:pt x="2251023" y="81256"/>
+                  </a:lnTo>
+                  <a:lnTo>
+                    <a:pt x="2180679" y="85637"/>
+                  </a:lnTo>
+                  <a:lnTo>
+                    <a:pt x="2110334" y="89930"/>
+                  </a:lnTo>
+                  <a:lnTo>
+                    <a:pt x="2039990" y="94136"/>
+                  </a:lnTo>
+                  <a:lnTo>
+                    <a:pt x="1969645" y="98258"/>
+                  </a:lnTo>
+                  <a:lnTo>
+                    <a:pt x="1899301" y="102297"/>
+                  </a:lnTo>
+                  <a:lnTo>
+                    <a:pt x="1828956" y="106254"/>
+                  </a:lnTo>
+                  <a:lnTo>
+                    <a:pt x="1758612" y="110132"/>
+                  </a:lnTo>
+                  <a:lnTo>
+                    <a:pt x="1688267" y="113931"/>
+                  </a:lnTo>
+                  <a:lnTo>
+                    <a:pt x="1617923" y="117654"/>
+                  </a:lnTo>
+                  <a:lnTo>
+                    <a:pt x="1547578" y="121302"/>
+                  </a:lnTo>
+                  <a:lnTo>
+                    <a:pt x="1477234" y="124876"/>
+                  </a:lnTo>
+                  <a:lnTo>
+                    <a:pt x="1406889" y="128379"/>
+                  </a:lnTo>
+                  <a:lnTo>
+                    <a:pt x="1336545" y="131811"/>
+                  </a:lnTo>
+                  <a:lnTo>
+                    <a:pt x="1266200" y="135174"/>
+                  </a:lnTo>
+                  <a:lnTo>
+                    <a:pt x="1195856" y="138469"/>
+                  </a:lnTo>
+                  <a:lnTo>
+                    <a:pt x="1125511" y="141697"/>
+                  </a:lnTo>
+                  <a:lnTo>
+                    <a:pt x="1055167" y="144861"/>
+                  </a:lnTo>
+                  <a:lnTo>
+                    <a:pt x="984822" y="147961"/>
+                  </a:lnTo>
+                  <a:lnTo>
+                    <a:pt x="914478" y="150998"/>
+                  </a:lnTo>
+                  <a:lnTo>
+                    <a:pt x="844133" y="153974"/>
+                  </a:lnTo>
+                  <a:lnTo>
+                    <a:pt x="773789" y="156891"/>
+                  </a:lnTo>
+                  <a:lnTo>
+                    <a:pt x="703444" y="159748"/>
+                  </a:lnTo>
+                  <a:lnTo>
+                    <a:pt x="633100" y="162548"/>
+                  </a:lnTo>
+                  <a:lnTo>
+                    <a:pt x="562755" y="165292"/>
+                  </a:lnTo>
+                  <a:lnTo>
+                    <a:pt x="492411" y="167980"/>
+                  </a:lnTo>
+                  <a:lnTo>
+                    <a:pt x="422066" y="170614"/>
+                  </a:lnTo>
+                  <a:lnTo>
+                    <a:pt x="351722" y="173195"/>
+                  </a:lnTo>
+                  <a:lnTo>
+                    <a:pt x="281377" y="175725"/>
+                  </a:lnTo>
+                  <a:lnTo>
+                    <a:pt x="211033" y="178203"/>
+                  </a:lnTo>
+                  <a:lnTo>
+                    <a:pt x="140688" y="180631"/>
+                  </a:lnTo>
+                  <a:lnTo>
+                    <a:pt x="70344" y="183010"/>
+                  </a:lnTo>
+                  <a:lnTo>
+                    <a:pt x="0" y="185342"/>
+                  </a:lnTo>
+                </a:path>
+              </a:pathLst>
+            </a:custGeom>
+          </p:spPr>
+          <p:txBody>
+            <a:bodyPr/>
+            <a:lstStyle/>
+            <a:p/>
+          </p:txBody>
+        </p:sp>
+        <p:sp>
+          <p:nvSpPr>
+            <p:cNvPr id="24" name="pl24"/>
+            <p:cNvSpPr/>
+            <p:nvPr/>
+          </p:nvSpPr>
+          <p:spPr>
+            <a:xfrm>
+              <a:off x="1235312" y="2972913"/>
+              <a:ext cx="6964104" cy="212412"/>
+            </a:xfrm>
+            <a:custGeom>
+              <a:avLst/>
+              <a:pathLst>
+                <a:path w="6964104" h="212412">
+                  <a:moveTo>
+                    <a:pt x="0" y="212412"/>
+                  </a:moveTo>
+                  <a:lnTo>
+                    <a:pt x="70344" y="210915"/>
+                  </a:lnTo>
+                  <a:lnTo>
+                    <a:pt x="140688" y="209407"/>
+                  </a:lnTo>
+                  <a:lnTo>
+                    <a:pt x="211033" y="207889"/>
+                  </a:lnTo>
+                  <a:lnTo>
+                    <a:pt x="281377" y="206360"/>
+                  </a:lnTo>
+                  <a:lnTo>
+                    <a:pt x="351722" y="204820"/>
+                  </a:lnTo>
+                  <a:lnTo>
+                    <a:pt x="422066" y="203270"/>
+                  </a:lnTo>
+                  <a:lnTo>
+                    <a:pt x="492411" y="201709"/>
+                  </a:lnTo>
+                  <a:lnTo>
+                    <a:pt x="562755" y="200137"/>
+                  </a:lnTo>
+                  <a:lnTo>
+                    <a:pt x="633100" y="198554"/>
+                  </a:lnTo>
+                  <a:lnTo>
+                    <a:pt x="703444" y="196961"/>
+                  </a:lnTo>
+                  <a:lnTo>
+                    <a:pt x="773789" y="195356"/>
+                  </a:lnTo>
+                  <a:lnTo>
+                    <a:pt x="844133" y="193739"/>
+                  </a:lnTo>
+                  <a:lnTo>
+                    <a:pt x="914478" y="192112"/>
+                  </a:lnTo>
+                  <a:lnTo>
+                    <a:pt x="984822" y="190473"/>
+                  </a:lnTo>
+                  <a:lnTo>
+                    <a:pt x="1055167" y="188823"/>
+                  </a:lnTo>
+                  <a:lnTo>
+                    <a:pt x="1125511" y="187161"/>
+                  </a:lnTo>
+                  <a:lnTo>
+                    <a:pt x="1195856" y="185488"/>
+                  </a:lnTo>
+                  <a:lnTo>
+                    <a:pt x="1266200" y="183803"/>
+                  </a:lnTo>
+                  <a:lnTo>
+                    <a:pt x="1336545" y="182107"/>
+                  </a:lnTo>
+                  <a:lnTo>
+                    <a:pt x="1406889" y="180398"/>
+                  </a:lnTo>
+                  <a:lnTo>
+                    <a:pt x="1477234" y="178678"/>
+                  </a:lnTo>
+                  <a:lnTo>
+                    <a:pt x="1547578" y="176946"/>
+                  </a:lnTo>
+                  <a:lnTo>
+                    <a:pt x="1617923" y="175201"/>
+                  </a:lnTo>
+                  <a:lnTo>
+                    <a:pt x="1688267" y="173445"/>
+                  </a:lnTo>
+                  <a:lnTo>
+                    <a:pt x="1758612" y="171676"/>
+                  </a:lnTo>
+                  <a:lnTo>
+                    <a:pt x="1828956" y="169895"/>
+                  </a:lnTo>
+                  <a:lnTo>
+                    <a:pt x="1899301" y="168101"/>
+                  </a:lnTo>
+                  <a:lnTo>
+                    <a:pt x="1969645" y="166295"/>
+                  </a:lnTo>
+                  <a:lnTo>
+                    <a:pt x="2039990" y="164477"/>
+                  </a:lnTo>
+                  <a:lnTo>
+                    <a:pt x="2110334" y="162646"/>
+                  </a:lnTo>
+                  <a:lnTo>
+                    <a:pt x="2180679" y="160802"/>
+                  </a:lnTo>
+                  <a:lnTo>
+                    <a:pt x="2251023" y="158945"/>
+                  </a:lnTo>
+                  <a:lnTo>
+                    <a:pt x="2321368" y="157075"/>
+                  </a:lnTo>
+                  <a:lnTo>
+                    <a:pt x="2391712" y="155192"/>
+                  </a:lnTo>
+                  <a:lnTo>
+                    <a:pt x="2462057" y="153296"/>
+                  </a:lnTo>
+                  <a:lnTo>
+                    <a:pt x="2532401" y="151387"/>
+                  </a:lnTo>
+                  <a:lnTo>
+                    <a:pt x="2602746" y="149465"/>
+                  </a:lnTo>
+                  <a:lnTo>
+                    <a:pt x="2673090" y="147529"/>
+                  </a:lnTo>
+                  <a:lnTo>
+                    <a:pt x="2743435" y="145580"/>
+                  </a:lnTo>
+                  <a:lnTo>
+                    <a:pt x="2813779" y="143617"/>
+                  </a:lnTo>
+                  <a:lnTo>
+                    <a:pt x="2884124" y="141640"/>
+                  </a:lnTo>
+                  <a:lnTo>
+                    <a:pt x="2954468" y="139650"/>
+                  </a:lnTo>
+                  <a:lnTo>
+                    <a:pt x="3024813" y="137646"/>
+                  </a:lnTo>
+                  <a:lnTo>
+                    <a:pt x="3095157" y="135628"/>
+                  </a:lnTo>
+                  <a:lnTo>
+                    <a:pt x="3165502" y="133596"/>
+                  </a:lnTo>
+                  <a:lnTo>
+                    <a:pt x="3235846" y="131549"/>
+                  </a:lnTo>
+                  <a:lnTo>
+                    <a:pt x="3306191" y="129489"/>
+                  </a:lnTo>
+                  <a:lnTo>
+                    <a:pt x="3376535" y="127414"/>
+                  </a:lnTo>
+                  <a:lnTo>
+                    <a:pt x="3446880" y="125324"/>
+                  </a:lnTo>
+                  <a:lnTo>
+                    <a:pt x="3517224" y="123220"/>
+                  </a:lnTo>
+                  <a:lnTo>
+                    <a:pt x="3587569" y="121102"/>
+                  </a:lnTo>
+                  <a:lnTo>
+                    <a:pt x="3657913" y="118969"/>
+                  </a:lnTo>
+                  <a:lnTo>
+                    <a:pt x="3728257" y="116820"/>
+                  </a:lnTo>
+                  <a:lnTo>
+                    <a:pt x="3798602" y="114657"/>
+                  </a:lnTo>
+                  <a:lnTo>
+                    <a:pt x="3868946" y="112479"/>
+                  </a:lnTo>
+                  <a:lnTo>
+                    <a:pt x="3939291" y="110285"/>
+                  </a:lnTo>
+                  <a:lnTo>
+                    <a:pt x="4009635" y="108077"/>
+                  </a:lnTo>
+                  <a:lnTo>
+                    <a:pt x="4079980" y="105853"/>
+                  </a:lnTo>
+                  <a:lnTo>
+                    <a:pt x="4150324" y="103613"/>
+                  </a:lnTo>
+                  <a:lnTo>
+                    <a:pt x="4220669" y="101358"/>
+                  </a:lnTo>
+                  <a:lnTo>
+                    <a:pt x="4291013" y="99087"/>
+                  </a:lnTo>
+                  <a:lnTo>
+                    <a:pt x="4361358" y="96800"/>
+                  </a:lnTo>
+                  <a:lnTo>
+                    <a:pt x="4431702" y="94498"/>
+                  </a:lnTo>
+                  <a:lnTo>
+                    <a:pt x="4502047" y="92179"/>
+                  </a:lnTo>
+                  <a:lnTo>
+                    <a:pt x="4572391" y="89844"/>
+                  </a:lnTo>
+                  <a:lnTo>
+                    <a:pt x="4642736" y="87493"/>
+                  </a:lnTo>
+                  <a:lnTo>
+                    <a:pt x="4713080" y="85126"/>
+                  </a:lnTo>
+                  <a:lnTo>
+                    <a:pt x="4783425" y="82742"/>
+                  </a:lnTo>
+                  <a:lnTo>
+                    <a:pt x="4853769" y="80341"/>
+                  </a:lnTo>
+                  <a:lnTo>
+                    <a:pt x="4924114" y="77924"/>
+                  </a:lnTo>
+                  <a:lnTo>
+                    <a:pt x="4994458" y="75490"/>
+                  </a:lnTo>
+                  <a:lnTo>
+                    <a:pt x="5064803" y="73039"/>
+                  </a:lnTo>
+                  <a:lnTo>
+                    <a:pt x="5135147" y="70571"/>
+                  </a:lnTo>
+                  <a:lnTo>
+                    <a:pt x="5205492" y="68085"/>
+                  </a:lnTo>
+                  <a:lnTo>
+                    <a:pt x="5275836" y="65583"/>
+                  </a:lnTo>
+                  <a:lnTo>
+                    <a:pt x="5346181" y="63063"/>
+                  </a:lnTo>
+                  <a:lnTo>
+                    <a:pt x="5416525" y="60525"/>
+                  </a:lnTo>
+                  <a:lnTo>
+                    <a:pt x="5486870" y="57970"/>
+                  </a:lnTo>
+                  <a:lnTo>
+                    <a:pt x="5557214" y="55397"/>
+                  </a:lnTo>
+                  <a:lnTo>
+                    <a:pt x="5627559" y="52806"/>
+                  </a:lnTo>
+                  <a:lnTo>
+                    <a:pt x="5697903" y="50197"/>
+                  </a:lnTo>
+                  <a:lnTo>
+                    <a:pt x="5768248" y="47569"/>
+                  </a:lnTo>
+                  <a:lnTo>
+                    <a:pt x="5838592" y="44924"/>
+                  </a:lnTo>
+                  <a:lnTo>
+                    <a:pt x="5908937" y="42260"/>
+                  </a:lnTo>
+                  <a:lnTo>
+                    <a:pt x="5979281" y="39577"/>
+                  </a:lnTo>
+                  <a:lnTo>
+                    <a:pt x="6049626" y="36876"/>
+                  </a:lnTo>
+                  <a:lnTo>
+                    <a:pt x="6119970" y="34156"/>
+                  </a:lnTo>
+                  <a:lnTo>
+                    <a:pt x="6190315" y="31417"/>
+                  </a:lnTo>
+                  <a:lnTo>
+                    <a:pt x="6260659" y="28659"/>
+                  </a:lnTo>
+                  <a:lnTo>
+                    <a:pt x="6331004" y="25882"/>
+                  </a:lnTo>
+                  <a:lnTo>
+                    <a:pt x="6401348" y="23085"/>
+                  </a:lnTo>
+                  <a:lnTo>
+                    <a:pt x="6471693" y="20269"/>
+                  </a:lnTo>
+                  <a:lnTo>
+                    <a:pt x="6542037" y="17433"/>
+                  </a:lnTo>
+                  <a:lnTo>
+                    <a:pt x="6612382" y="14578"/>
+                  </a:lnTo>
+                  <a:lnTo>
+                    <a:pt x="6682726" y="11703"/>
+                  </a:lnTo>
+                  <a:lnTo>
+                    <a:pt x="6753071" y="8807"/>
+                  </a:lnTo>
+                  <a:lnTo>
+                    <a:pt x="6823415" y="5892"/>
+                  </a:lnTo>
+                  <a:lnTo>
+                    <a:pt x="6893760" y="2956"/>
+                  </a:lnTo>
+                  <a:lnTo>
+                    <a:pt x="6964104" y="0"/>
                   </a:lnTo>
                 </a:path>
               </a:pathLst>
@@ -4568,27 +4603,27 @@
         </p:sp>
         <p:sp>
           <p:nvSpPr>
-            <p:cNvPr id="24" name="pl24"/>
+            <p:cNvPr id="25" name="pl25"/>
             <p:cNvSpPr/>
             <p:nvPr/>
           </p:nvSpPr>
           <p:spPr>
             <a:xfrm>
-              <a:off x="817517" y="4727786"/>
-              <a:ext cx="7799693" cy="0"/>
+              <a:off x="887106" y="3100960"/>
+              <a:ext cx="7660515" cy="0"/>
             </a:xfrm>
             <a:custGeom>
               <a:avLst/>
               <a:pathLst>
-                <a:path w="7799693" h="0">
+                <a:path w="7660515" h="0">
                   <a:moveTo>
                     <a:pt x="0" y="0"/>
                   </a:moveTo>
                   <a:lnTo>
-                    <a:pt x="7799693" y="0"/>
-                  </a:lnTo>
-                  <a:lnTo>
-                    <a:pt x="7799693" y="0"/>
+                    <a:pt x="7660515" y="0"/>
+                  </a:lnTo>
+                  <a:lnTo>
+                    <a:pt x="7660515" y="0"/>
                   </a:lnTo>
                 </a:path>
               </a:pathLst>
@@ -4611,21 +4646,21 @@
         </p:sp>
         <p:sp>
           <p:nvSpPr>
-            <p:cNvPr id="25" name="pl25"/>
+            <p:cNvPr id="26" name="pl26"/>
             <p:cNvSpPr/>
             <p:nvPr/>
           </p:nvSpPr>
           <p:spPr>
             <a:xfrm>
-              <a:off x="4588151" y="2073503"/>
-              <a:ext cx="0" cy="3649639"/>
+              <a:off x="4590457" y="2143092"/>
+              <a:ext cx="0" cy="1317069"/>
             </a:xfrm>
             <a:custGeom>
               <a:avLst/>
               <a:pathLst>
-                <a:path w="0" h="3649639">
+                <a:path w="0" h="1317069">
                   <a:moveTo>
-                    <a:pt x="0" y="3649639"/>
+                    <a:pt x="0" y="1317069"/>
                   </a:moveTo>
                   <a:lnTo>
                     <a:pt x="0" y="0"/>
@@ -4654,13 +4689,13 @@
         </p:sp>
         <p:sp>
           <p:nvSpPr>
-            <p:cNvPr id="26" name="tx26"/>
+            <p:cNvPr id="27" name="tx27"/>
             <p:cNvSpPr/>
             <p:nvPr/>
           </p:nvSpPr>
           <p:spPr>
             <a:xfrm>
-              <a:off x="692708" y="5517199"/>
+              <a:off x="762297" y="3360243"/>
               <a:ext cx="62179" cy="80101"/>
             </a:xfrm>
             <a:prstGeom prst="rect">
@@ -4700,13 +4735,13 @@
         </p:sp>
         <p:sp>
           <p:nvSpPr>
-            <p:cNvPr id="27" name="tx27"/>
+            <p:cNvPr id="28" name="tx28"/>
             <p:cNvSpPr/>
             <p:nvPr/>
           </p:nvSpPr>
           <p:spPr>
             <a:xfrm>
-              <a:off x="692708" y="4687735"/>
+              <a:off x="762297" y="3060909"/>
               <a:ext cx="62179" cy="80101"/>
             </a:xfrm>
             <a:prstGeom prst="rect">
@@ -4746,13 +4781,13 @@
         </p:sp>
         <p:sp>
           <p:nvSpPr>
-            <p:cNvPr id="28" name="tx28"/>
+            <p:cNvPr id="29" name="tx29"/>
             <p:cNvSpPr/>
             <p:nvPr/>
           </p:nvSpPr>
           <p:spPr>
             <a:xfrm>
-              <a:off x="692708" y="3858272"/>
+              <a:off x="762297" y="2761575"/>
               <a:ext cx="62179" cy="80101"/>
             </a:xfrm>
             <a:prstGeom prst="rect">
@@ -4792,13 +4827,13 @@
         </p:sp>
         <p:sp>
           <p:nvSpPr>
-            <p:cNvPr id="29" name="tx29"/>
+            <p:cNvPr id="30" name="tx30"/>
             <p:cNvSpPr/>
             <p:nvPr/>
           </p:nvSpPr>
           <p:spPr>
             <a:xfrm>
-              <a:off x="692708" y="3028808"/>
+              <a:off x="762297" y="2462242"/>
               <a:ext cx="62179" cy="80101"/>
             </a:xfrm>
             <a:prstGeom prst="rect">
@@ -4838,13 +4873,13 @@
         </p:sp>
         <p:sp>
           <p:nvSpPr>
-            <p:cNvPr id="30" name="tx30"/>
+            <p:cNvPr id="31" name="tx31"/>
             <p:cNvSpPr/>
             <p:nvPr/>
           </p:nvSpPr>
           <p:spPr>
             <a:xfrm>
-              <a:off x="692708" y="2199345"/>
+              <a:off x="762297" y="2162908"/>
               <a:ext cx="62179" cy="80101"/>
             </a:xfrm>
             <a:prstGeom prst="rect">
@@ -4884,13 +4919,13 @@
         </p:sp>
         <p:sp>
           <p:nvSpPr>
-            <p:cNvPr id="31" name="tx31"/>
+            <p:cNvPr id="32" name="tx32"/>
             <p:cNvSpPr/>
             <p:nvPr/>
           </p:nvSpPr>
           <p:spPr>
             <a:xfrm>
-              <a:off x="2360651" y="5785772"/>
+              <a:off x="2401262" y="3522791"/>
               <a:ext cx="161574" cy="80101"/>
             </a:xfrm>
             <a:prstGeom prst="rect">
@@ -4930,13 +4965,13 @@
         </p:sp>
         <p:sp>
           <p:nvSpPr>
-            <p:cNvPr id="32" name="tx32"/>
+            <p:cNvPr id="33" name="tx33"/>
             <p:cNvSpPr/>
             <p:nvPr/>
           </p:nvSpPr>
           <p:spPr>
             <a:xfrm>
-              <a:off x="4561958" y="5785772"/>
+              <a:off x="4564176" y="3522791"/>
               <a:ext cx="62179" cy="80101"/>
             </a:xfrm>
             <a:prstGeom prst="rect">
@@ -4976,13 +5011,13 @@
         </p:sp>
         <p:sp>
           <p:nvSpPr>
-            <p:cNvPr id="33" name="tx33"/>
+            <p:cNvPr id="34" name="tx34"/>
             <p:cNvSpPr/>
             <p:nvPr/>
           </p:nvSpPr>
           <p:spPr>
             <a:xfrm>
-              <a:off x="6682478" y="5785772"/>
+              <a:off x="6646302" y="3522791"/>
               <a:ext cx="124358" cy="80101"/>
             </a:xfrm>
             <a:prstGeom prst="rect">
@@ -5022,13 +5057,13 @@
         </p:sp>
         <p:sp>
           <p:nvSpPr>
-            <p:cNvPr id="34" name="tx34"/>
+            <p:cNvPr id="35" name="tx35"/>
             <p:cNvSpPr/>
             <p:nvPr/>
           </p:nvSpPr>
           <p:spPr>
             <a:xfrm>
-              <a:off x="2928340" y="5925448"/>
+              <a:off x="2928340" y="3662467"/>
               <a:ext cx="3578047" cy="100218"/>
             </a:xfrm>
             <a:prstGeom prst="rect">
@@ -5068,13 +5103,13 @@
         </p:sp>
         <p:sp>
           <p:nvSpPr>
-            <p:cNvPr id="35" name="tx35"/>
+            <p:cNvPr id="36" name="tx36"/>
             <p:cNvSpPr/>
             <p:nvPr/>
           </p:nvSpPr>
           <p:spPr>
             <a:xfrm rot="-5400000">
-              <a:off x="68446" y="3848213"/>
+              <a:off x="138035" y="2751517"/>
               <a:ext cx="1016904" cy="100218"/>
             </a:xfrm>
             <a:prstGeom prst="rect">
@@ -5114,13 +5149,13 @@
         </p:sp>
         <p:sp>
           <p:nvSpPr>
-            <p:cNvPr id="36" name="tx36"/>
+            <p:cNvPr id="37" name="tx37"/>
             <p:cNvSpPr/>
             <p:nvPr/>
           </p:nvSpPr>
           <p:spPr>
             <a:xfrm>
-              <a:off x="817517" y="1896563"/>
+              <a:off x="887106" y="1966152"/>
               <a:ext cx="6321612" cy="82021"/>
             </a:xfrm>
             <a:prstGeom prst="rect">
@@ -5160,13 +5195,3703 @@
         </p:sp>
         <p:sp>
           <p:nvSpPr>
-            <p:cNvPr id="37" name="tx37"/>
+            <p:cNvPr id="38" name="tx38"/>
             <p:cNvSpPr/>
             <p:nvPr/>
           </p:nvSpPr>
           <p:spPr>
             <a:xfrm>
-              <a:off x="817517" y="1669789"/>
+              <a:off x="887106" y="1739378"/>
+              <a:ext cx="1601754" cy="120152"/>
+            </a:xfrm>
+            <a:prstGeom prst="rect">
+              <a:avLst/>
+            </a:prstGeom>
+            <a:noFill/>
+          </p:spPr>
+          <p:txBody>
+            <a:bodyPr lIns="0" rIns="0" tIns="0" bIns="0" anchorCtr="1" anchor="ctr" wrap="none"/>
+            <a:lstStyle/>
+            <a:p>
+              <a:pPr algn="l" marL="0" marR="0" indent="0">
+                <a:lnSpc>
+                  <a:spcPts val="1320"/>
+                </a:lnSpc>
+                <a:spcBef>
+                  <a:spcPts val="0"/>
+                </a:spcBef>
+                <a:spcAft>
+                  <a:spcPts val="0"/>
+                </a:spcAft>
+              </a:pPr>
+              <a:r>
+                <a:rPr sz="1320">
+                  <a:solidFill>
+                    <a:srgbClr val="000000">
+                      <a:alpha val="100000"/>
+                    </a:srgbClr>
+                  </a:solidFill>
+                  <a:latin typeface="Helvetica"/>
+                  <a:cs typeface="Helvetica"/>
+                </a:rPr>
+                <a:t>Planned Surgery/Port</a:t>
+              </a:r>
+            </a:p>
+          </p:txBody>
+        </p:sp>
+        <p:sp>
+          <p:nvSpPr>
+            <p:cNvPr id="39" name="pl39"/>
+            <p:cNvSpPr/>
+            <p:nvPr/>
+          </p:nvSpPr>
+          <p:spPr>
+            <a:xfrm>
+              <a:off x="887106" y="5444019"/>
+              <a:ext cx="7660515" cy="0"/>
+            </a:xfrm>
+            <a:custGeom>
+              <a:avLst/>
+              <a:pathLst>
+                <a:path w="7660515" h="0">
+                  <a:moveTo>
+                    <a:pt x="0" y="0"/>
+                  </a:moveTo>
+                  <a:lnTo>
+                    <a:pt x="7660515" y="0"/>
+                  </a:lnTo>
+                  <a:lnTo>
+                    <a:pt x="7660515" y="0"/>
+                  </a:lnTo>
+                </a:path>
+              </a:pathLst>
+            </a:custGeom>
+            <a:ln w="6775" cap="flat">
+              <a:solidFill>
+                <a:srgbClr val="EBEBEB">
+                  <a:alpha val="100000"/>
+                </a:srgbClr>
+              </a:solidFill>
+              <a:prstDash val="solid"/>
+              <a:round/>
+            </a:ln>
+          </p:spPr>
+          <p:txBody>
+            <a:bodyPr/>
+            <a:lstStyle/>
+            <a:p/>
+          </p:txBody>
+        </p:sp>
+        <p:sp>
+          <p:nvSpPr>
+            <p:cNvPr id="40" name="pl40"/>
+            <p:cNvSpPr/>
+            <p:nvPr/>
+          </p:nvSpPr>
+          <p:spPr>
+            <a:xfrm>
+              <a:off x="887106" y="5144686"/>
+              <a:ext cx="7660515" cy="0"/>
+            </a:xfrm>
+            <a:custGeom>
+              <a:avLst/>
+              <a:pathLst>
+                <a:path w="7660515" h="0">
+                  <a:moveTo>
+                    <a:pt x="0" y="0"/>
+                  </a:moveTo>
+                  <a:lnTo>
+                    <a:pt x="7660515" y="0"/>
+                  </a:lnTo>
+                  <a:lnTo>
+                    <a:pt x="7660515" y="0"/>
+                  </a:lnTo>
+                </a:path>
+              </a:pathLst>
+            </a:custGeom>
+            <a:ln w="6775" cap="flat">
+              <a:solidFill>
+                <a:srgbClr val="EBEBEB">
+                  <a:alpha val="100000"/>
+                </a:srgbClr>
+              </a:solidFill>
+              <a:prstDash val="solid"/>
+              <a:round/>
+            </a:ln>
+          </p:spPr>
+          <p:txBody>
+            <a:bodyPr/>
+            <a:lstStyle/>
+            <a:p/>
+          </p:txBody>
+        </p:sp>
+        <p:sp>
+          <p:nvSpPr>
+            <p:cNvPr id="41" name="pl41"/>
+            <p:cNvSpPr/>
+            <p:nvPr/>
+          </p:nvSpPr>
+          <p:spPr>
+            <a:xfrm>
+              <a:off x="887106" y="4845352"/>
+              <a:ext cx="7660515" cy="0"/>
+            </a:xfrm>
+            <a:custGeom>
+              <a:avLst/>
+              <a:pathLst>
+                <a:path w="7660515" h="0">
+                  <a:moveTo>
+                    <a:pt x="0" y="0"/>
+                  </a:moveTo>
+                  <a:lnTo>
+                    <a:pt x="7660515" y="0"/>
+                  </a:lnTo>
+                  <a:lnTo>
+                    <a:pt x="7660515" y="0"/>
+                  </a:lnTo>
+                </a:path>
+              </a:pathLst>
+            </a:custGeom>
+            <a:ln w="6775" cap="flat">
+              <a:solidFill>
+                <a:srgbClr val="EBEBEB">
+                  <a:alpha val="100000"/>
+                </a:srgbClr>
+              </a:solidFill>
+              <a:prstDash val="solid"/>
+              <a:round/>
+            </a:ln>
+          </p:spPr>
+          <p:txBody>
+            <a:bodyPr/>
+            <a:lstStyle/>
+            <a:p/>
+          </p:txBody>
+        </p:sp>
+        <p:sp>
+          <p:nvSpPr>
+            <p:cNvPr id="42" name="pl42"/>
+            <p:cNvSpPr/>
+            <p:nvPr/>
+          </p:nvSpPr>
+          <p:spPr>
+            <a:xfrm>
+              <a:off x="887106" y="4546018"/>
+              <a:ext cx="7660515" cy="0"/>
+            </a:xfrm>
+            <a:custGeom>
+              <a:avLst/>
+              <a:pathLst>
+                <a:path w="7660515" h="0">
+                  <a:moveTo>
+                    <a:pt x="0" y="0"/>
+                  </a:moveTo>
+                  <a:lnTo>
+                    <a:pt x="7660515" y="0"/>
+                  </a:lnTo>
+                  <a:lnTo>
+                    <a:pt x="7660515" y="0"/>
+                  </a:lnTo>
+                </a:path>
+              </a:pathLst>
+            </a:custGeom>
+            <a:ln w="6775" cap="flat">
+              <a:solidFill>
+                <a:srgbClr val="EBEBEB">
+                  <a:alpha val="100000"/>
+                </a:srgbClr>
+              </a:solidFill>
+              <a:prstDash val="solid"/>
+              <a:round/>
+            </a:ln>
+          </p:spPr>
+          <p:txBody>
+            <a:bodyPr/>
+            <a:lstStyle/>
+            <a:p/>
+          </p:txBody>
+        </p:sp>
+        <p:sp>
+          <p:nvSpPr>
+            <p:cNvPr id="43" name="pl43"/>
+            <p:cNvSpPr/>
+            <p:nvPr/>
+          </p:nvSpPr>
+          <p:spPr>
+            <a:xfrm>
+              <a:off x="1636763" y="4336484"/>
+              <a:ext cx="0" cy="1317069"/>
+            </a:xfrm>
+            <a:custGeom>
+              <a:avLst/>
+              <a:pathLst>
+                <a:path w="0" h="1317069">
+                  <a:moveTo>
+                    <a:pt x="0" y="1317069"/>
+                  </a:moveTo>
+                  <a:lnTo>
+                    <a:pt x="0" y="0"/>
+                  </a:lnTo>
+                  <a:lnTo>
+                    <a:pt x="0" y="0"/>
+                  </a:lnTo>
+                </a:path>
+              </a:pathLst>
+            </a:custGeom>
+            <a:ln w="6775" cap="flat">
+              <a:solidFill>
+                <a:srgbClr val="EBEBEB">
+                  <a:alpha val="100000"/>
+                </a:srgbClr>
+              </a:solidFill>
+              <a:prstDash val="solid"/>
+              <a:round/>
+            </a:ln>
+          </p:spPr>
+          <p:txBody>
+            <a:bodyPr/>
+            <a:lstStyle/>
+            <a:p/>
+          </p:txBody>
+        </p:sp>
+        <p:sp>
+          <p:nvSpPr>
+            <p:cNvPr id="44" name="pl44"/>
+            <p:cNvSpPr/>
+            <p:nvPr/>
+          </p:nvSpPr>
+          <p:spPr>
+            <a:xfrm>
+              <a:off x="2482050" y="4336484"/>
+              <a:ext cx="0" cy="1317069"/>
+            </a:xfrm>
+            <a:custGeom>
+              <a:avLst/>
+              <a:pathLst>
+                <a:path w="0" h="1317069">
+                  <a:moveTo>
+                    <a:pt x="0" y="1317069"/>
+                  </a:moveTo>
+                  <a:lnTo>
+                    <a:pt x="0" y="0"/>
+                  </a:lnTo>
+                  <a:lnTo>
+                    <a:pt x="0" y="0"/>
+                  </a:lnTo>
+                </a:path>
+              </a:pathLst>
+            </a:custGeom>
+            <a:ln w="6775" cap="flat">
+              <a:solidFill>
+                <a:srgbClr val="EBEBEB">
+                  <a:alpha val="100000"/>
+                </a:srgbClr>
+              </a:solidFill>
+              <a:prstDash val="solid"/>
+              <a:round/>
+            </a:ln>
+          </p:spPr>
+          <p:txBody>
+            <a:bodyPr/>
+            <a:lstStyle/>
+            <a:p/>
+          </p:txBody>
+        </p:sp>
+        <p:sp>
+          <p:nvSpPr>
+            <p:cNvPr id="45" name="pl45"/>
+            <p:cNvSpPr/>
+            <p:nvPr/>
+          </p:nvSpPr>
+          <p:spPr>
+            <a:xfrm>
+              <a:off x="3327336" y="4336484"/>
+              <a:ext cx="0" cy="1317069"/>
+            </a:xfrm>
+            <a:custGeom>
+              <a:avLst/>
+              <a:pathLst>
+                <a:path w="0" h="1317069">
+                  <a:moveTo>
+                    <a:pt x="0" y="1317069"/>
+                  </a:moveTo>
+                  <a:lnTo>
+                    <a:pt x="0" y="0"/>
+                  </a:lnTo>
+                  <a:lnTo>
+                    <a:pt x="0" y="0"/>
+                  </a:lnTo>
+                </a:path>
+              </a:pathLst>
+            </a:custGeom>
+            <a:ln w="6775" cap="flat">
+              <a:solidFill>
+                <a:srgbClr val="EBEBEB">
+                  <a:alpha val="100000"/>
+                </a:srgbClr>
+              </a:solidFill>
+              <a:prstDash val="solid"/>
+              <a:round/>
+            </a:ln>
+          </p:spPr>
+          <p:txBody>
+            <a:bodyPr/>
+            <a:lstStyle/>
+            <a:p/>
+          </p:txBody>
+        </p:sp>
+        <p:sp>
+          <p:nvSpPr>
+            <p:cNvPr id="46" name="pl46"/>
+            <p:cNvSpPr/>
+            <p:nvPr/>
+          </p:nvSpPr>
+          <p:spPr>
+            <a:xfrm>
+              <a:off x="4172622" y="4336484"/>
+              <a:ext cx="0" cy="1317069"/>
+            </a:xfrm>
+            <a:custGeom>
+              <a:avLst/>
+              <a:pathLst>
+                <a:path w="0" h="1317069">
+                  <a:moveTo>
+                    <a:pt x="0" y="1317069"/>
+                  </a:moveTo>
+                  <a:lnTo>
+                    <a:pt x="0" y="0"/>
+                  </a:lnTo>
+                  <a:lnTo>
+                    <a:pt x="0" y="0"/>
+                  </a:lnTo>
+                </a:path>
+              </a:pathLst>
+            </a:custGeom>
+            <a:ln w="6775" cap="flat">
+              <a:solidFill>
+                <a:srgbClr val="EBEBEB">
+                  <a:alpha val="100000"/>
+                </a:srgbClr>
+              </a:solidFill>
+              <a:prstDash val="solid"/>
+              <a:round/>
+            </a:ln>
+          </p:spPr>
+          <p:txBody>
+            <a:bodyPr/>
+            <a:lstStyle/>
+            <a:p/>
+          </p:txBody>
+        </p:sp>
+        <p:sp>
+          <p:nvSpPr>
+            <p:cNvPr id="47" name="pl47"/>
+            <p:cNvSpPr/>
+            <p:nvPr/>
+          </p:nvSpPr>
+          <p:spPr>
+            <a:xfrm>
+              <a:off x="5017909" y="4336484"/>
+              <a:ext cx="0" cy="1317069"/>
+            </a:xfrm>
+            <a:custGeom>
+              <a:avLst/>
+              <a:pathLst>
+                <a:path w="0" h="1317069">
+                  <a:moveTo>
+                    <a:pt x="0" y="1317069"/>
+                  </a:moveTo>
+                  <a:lnTo>
+                    <a:pt x="0" y="0"/>
+                  </a:lnTo>
+                  <a:lnTo>
+                    <a:pt x="0" y="0"/>
+                  </a:lnTo>
+                </a:path>
+              </a:pathLst>
+            </a:custGeom>
+            <a:ln w="6775" cap="flat">
+              <a:solidFill>
+                <a:srgbClr val="EBEBEB">
+                  <a:alpha val="100000"/>
+                </a:srgbClr>
+              </a:solidFill>
+              <a:prstDash val="solid"/>
+              <a:round/>
+            </a:ln>
+          </p:spPr>
+          <p:txBody>
+            <a:bodyPr/>
+            <a:lstStyle/>
+            <a:p/>
+          </p:txBody>
+        </p:sp>
+        <p:sp>
+          <p:nvSpPr>
+            <p:cNvPr id="48" name="pl48"/>
+            <p:cNvSpPr/>
+            <p:nvPr/>
+          </p:nvSpPr>
+          <p:spPr>
+            <a:xfrm>
+              <a:off x="5863195" y="4336484"/>
+              <a:ext cx="0" cy="1317069"/>
+            </a:xfrm>
+            <a:custGeom>
+              <a:avLst/>
+              <a:pathLst>
+                <a:path w="0" h="1317069">
+                  <a:moveTo>
+                    <a:pt x="0" y="1317069"/>
+                  </a:moveTo>
+                  <a:lnTo>
+                    <a:pt x="0" y="0"/>
+                  </a:lnTo>
+                  <a:lnTo>
+                    <a:pt x="0" y="0"/>
+                  </a:lnTo>
+                </a:path>
+              </a:pathLst>
+            </a:custGeom>
+            <a:ln w="6775" cap="flat">
+              <a:solidFill>
+                <a:srgbClr val="EBEBEB">
+                  <a:alpha val="100000"/>
+                </a:srgbClr>
+              </a:solidFill>
+              <a:prstDash val="solid"/>
+              <a:round/>
+            </a:ln>
+          </p:spPr>
+          <p:txBody>
+            <a:bodyPr/>
+            <a:lstStyle/>
+            <a:p/>
+          </p:txBody>
+        </p:sp>
+        <p:sp>
+          <p:nvSpPr>
+            <p:cNvPr id="49" name="pl49"/>
+            <p:cNvSpPr/>
+            <p:nvPr/>
+          </p:nvSpPr>
+          <p:spPr>
+            <a:xfrm>
+              <a:off x="6708482" y="4336484"/>
+              <a:ext cx="0" cy="1317069"/>
+            </a:xfrm>
+            <a:custGeom>
+              <a:avLst/>
+              <a:pathLst>
+                <a:path w="0" h="1317069">
+                  <a:moveTo>
+                    <a:pt x="0" y="1317069"/>
+                  </a:moveTo>
+                  <a:lnTo>
+                    <a:pt x="0" y="0"/>
+                  </a:lnTo>
+                  <a:lnTo>
+                    <a:pt x="0" y="0"/>
+                  </a:lnTo>
+                </a:path>
+              </a:pathLst>
+            </a:custGeom>
+            <a:ln w="6775" cap="flat">
+              <a:solidFill>
+                <a:srgbClr val="EBEBEB">
+                  <a:alpha val="100000"/>
+                </a:srgbClr>
+              </a:solidFill>
+              <a:prstDash val="solid"/>
+              <a:round/>
+            </a:ln>
+          </p:spPr>
+          <p:txBody>
+            <a:bodyPr/>
+            <a:lstStyle/>
+            <a:p/>
+          </p:txBody>
+        </p:sp>
+        <p:sp>
+          <p:nvSpPr>
+            <p:cNvPr id="50" name="pl50"/>
+            <p:cNvSpPr/>
+            <p:nvPr/>
+          </p:nvSpPr>
+          <p:spPr>
+            <a:xfrm>
+              <a:off x="7553768" y="4336484"/>
+              <a:ext cx="0" cy="1317069"/>
+            </a:xfrm>
+            <a:custGeom>
+              <a:avLst/>
+              <a:pathLst>
+                <a:path w="0" h="1317069">
+                  <a:moveTo>
+                    <a:pt x="0" y="1317069"/>
+                  </a:moveTo>
+                  <a:lnTo>
+                    <a:pt x="0" y="0"/>
+                  </a:lnTo>
+                  <a:lnTo>
+                    <a:pt x="0" y="0"/>
+                  </a:lnTo>
+                </a:path>
+              </a:pathLst>
+            </a:custGeom>
+            <a:ln w="6775" cap="flat">
+              <a:solidFill>
+                <a:srgbClr val="EBEBEB">
+                  <a:alpha val="100000"/>
+                </a:srgbClr>
+              </a:solidFill>
+              <a:prstDash val="solid"/>
+              <a:round/>
+            </a:ln>
+          </p:spPr>
+          <p:txBody>
+            <a:bodyPr/>
+            <a:lstStyle/>
+            <a:p/>
+          </p:txBody>
+        </p:sp>
+        <p:sp>
+          <p:nvSpPr>
+            <p:cNvPr id="51" name="pl51"/>
+            <p:cNvSpPr/>
+            <p:nvPr/>
+          </p:nvSpPr>
+          <p:spPr>
+            <a:xfrm>
+              <a:off x="8399054" y="4336484"/>
+              <a:ext cx="0" cy="1317069"/>
+            </a:xfrm>
+            <a:custGeom>
+              <a:avLst/>
+              <a:pathLst>
+                <a:path w="0" h="1317069">
+                  <a:moveTo>
+                    <a:pt x="0" y="1317069"/>
+                  </a:moveTo>
+                  <a:lnTo>
+                    <a:pt x="0" y="0"/>
+                  </a:lnTo>
+                  <a:lnTo>
+                    <a:pt x="0" y="0"/>
+                  </a:lnTo>
+                </a:path>
+              </a:pathLst>
+            </a:custGeom>
+            <a:ln w="6775" cap="flat">
+              <a:solidFill>
+                <a:srgbClr val="EBEBEB">
+                  <a:alpha val="100000"/>
+                </a:srgbClr>
+              </a:solidFill>
+              <a:prstDash val="solid"/>
+              <a:round/>
+            </a:ln>
+          </p:spPr>
+          <p:txBody>
+            <a:bodyPr/>
+            <a:lstStyle/>
+            <a:p/>
+          </p:txBody>
+        </p:sp>
+        <p:sp>
+          <p:nvSpPr>
+            <p:cNvPr id="52" name="pl52"/>
+            <p:cNvSpPr/>
+            <p:nvPr/>
+          </p:nvSpPr>
+          <p:spPr>
+            <a:xfrm>
+              <a:off x="887106" y="5593686"/>
+              <a:ext cx="7660515" cy="0"/>
+            </a:xfrm>
+            <a:custGeom>
+              <a:avLst/>
+              <a:pathLst>
+                <a:path w="7660515" h="0">
+                  <a:moveTo>
+                    <a:pt x="0" y="0"/>
+                  </a:moveTo>
+                  <a:lnTo>
+                    <a:pt x="7660515" y="0"/>
+                  </a:lnTo>
+                  <a:lnTo>
+                    <a:pt x="7660515" y="0"/>
+                  </a:lnTo>
+                </a:path>
+              </a:pathLst>
+            </a:custGeom>
+            <a:ln w="13550" cap="flat">
+              <a:solidFill>
+                <a:srgbClr val="EBEBEB">
+                  <a:alpha val="100000"/>
+                </a:srgbClr>
+              </a:solidFill>
+              <a:prstDash val="solid"/>
+              <a:round/>
+            </a:ln>
+          </p:spPr>
+          <p:txBody>
+            <a:bodyPr/>
+            <a:lstStyle/>
+            <a:p/>
+          </p:txBody>
+        </p:sp>
+        <p:sp>
+          <p:nvSpPr>
+            <p:cNvPr id="53" name="pl53"/>
+            <p:cNvSpPr/>
+            <p:nvPr/>
+          </p:nvSpPr>
+          <p:spPr>
+            <a:xfrm>
+              <a:off x="887106" y="5294352"/>
+              <a:ext cx="7660515" cy="0"/>
+            </a:xfrm>
+            <a:custGeom>
+              <a:avLst/>
+              <a:pathLst>
+                <a:path w="7660515" h="0">
+                  <a:moveTo>
+                    <a:pt x="0" y="0"/>
+                  </a:moveTo>
+                  <a:lnTo>
+                    <a:pt x="7660515" y="0"/>
+                  </a:lnTo>
+                  <a:lnTo>
+                    <a:pt x="7660515" y="0"/>
+                  </a:lnTo>
+                </a:path>
+              </a:pathLst>
+            </a:custGeom>
+            <a:ln w="13550" cap="flat">
+              <a:solidFill>
+                <a:srgbClr val="EBEBEB">
+                  <a:alpha val="100000"/>
+                </a:srgbClr>
+              </a:solidFill>
+              <a:prstDash val="solid"/>
+              <a:round/>
+            </a:ln>
+          </p:spPr>
+          <p:txBody>
+            <a:bodyPr/>
+            <a:lstStyle/>
+            <a:p/>
+          </p:txBody>
+        </p:sp>
+        <p:sp>
+          <p:nvSpPr>
+            <p:cNvPr id="54" name="pl54"/>
+            <p:cNvSpPr/>
+            <p:nvPr/>
+          </p:nvSpPr>
+          <p:spPr>
+            <a:xfrm>
+              <a:off x="887106" y="4995019"/>
+              <a:ext cx="7660515" cy="0"/>
+            </a:xfrm>
+            <a:custGeom>
+              <a:avLst/>
+              <a:pathLst>
+                <a:path w="7660515" h="0">
+                  <a:moveTo>
+                    <a:pt x="0" y="0"/>
+                  </a:moveTo>
+                  <a:lnTo>
+                    <a:pt x="7660515" y="0"/>
+                  </a:lnTo>
+                  <a:lnTo>
+                    <a:pt x="7660515" y="0"/>
+                  </a:lnTo>
+                </a:path>
+              </a:pathLst>
+            </a:custGeom>
+            <a:ln w="13550" cap="flat">
+              <a:solidFill>
+                <a:srgbClr val="EBEBEB">
+                  <a:alpha val="100000"/>
+                </a:srgbClr>
+              </a:solidFill>
+              <a:prstDash val="solid"/>
+              <a:round/>
+            </a:ln>
+          </p:spPr>
+          <p:txBody>
+            <a:bodyPr/>
+            <a:lstStyle/>
+            <a:p/>
+          </p:txBody>
+        </p:sp>
+        <p:sp>
+          <p:nvSpPr>
+            <p:cNvPr id="55" name="pl55"/>
+            <p:cNvSpPr/>
+            <p:nvPr/>
+          </p:nvSpPr>
+          <p:spPr>
+            <a:xfrm>
+              <a:off x="887106" y="4695685"/>
+              <a:ext cx="7660515" cy="0"/>
+            </a:xfrm>
+            <a:custGeom>
+              <a:avLst/>
+              <a:pathLst>
+                <a:path w="7660515" h="0">
+                  <a:moveTo>
+                    <a:pt x="0" y="0"/>
+                  </a:moveTo>
+                  <a:lnTo>
+                    <a:pt x="7660515" y="0"/>
+                  </a:lnTo>
+                  <a:lnTo>
+                    <a:pt x="7660515" y="0"/>
+                  </a:lnTo>
+                </a:path>
+              </a:pathLst>
+            </a:custGeom>
+            <a:ln w="13550" cap="flat">
+              <a:solidFill>
+                <a:srgbClr val="EBEBEB">
+                  <a:alpha val="100000"/>
+                </a:srgbClr>
+              </a:solidFill>
+              <a:prstDash val="solid"/>
+              <a:round/>
+            </a:ln>
+          </p:spPr>
+          <p:txBody>
+            <a:bodyPr/>
+            <a:lstStyle/>
+            <a:p/>
+          </p:txBody>
+        </p:sp>
+        <p:sp>
+          <p:nvSpPr>
+            <p:cNvPr id="56" name="pl56"/>
+            <p:cNvSpPr/>
+            <p:nvPr/>
+          </p:nvSpPr>
+          <p:spPr>
+            <a:xfrm>
+              <a:off x="887106" y="4396351"/>
+              <a:ext cx="7660515" cy="0"/>
+            </a:xfrm>
+            <a:custGeom>
+              <a:avLst/>
+              <a:pathLst>
+                <a:path w="7660515" h="0">
+                  <a:moveTo>
+                    <a:pt x="0" y="0"/>
+                  </a:moveTo>
+                  <a:lnTo>
+                    <a:pt x="7660515" y="0"/>
+                  </a:lnTo>
+                  <a:lnTo>
+                    <a:pt x="7660515" y="0"/>
+                  </a:lnTo>
+                </a:path>
+              </a:pathLst>
+            </a:custGeom>
+            <a:ln w="13550" cap="flat">
+              <a:solidFill>
+                <a:srgbClr val="EBEBEB">
+                  <a:alpha val="100000"/>
+                </a:srgbClr>
+              </a:solidFill>
+              <a:prstDash val="solid"/>
+              <a:round/>
+            </a:ln>
+          </p:spPr>
+          <p:txBody>
+            <a:bodyPr/>
+            <a:lstStyle/>
+            <a:p/>
+          </p:txBody>
+        </p:sp>
+        <p:sp>
+          <p:nvSpPr>
+            <p:cNvPr id="57" name="pl57"/>
+            <p:cNvSpPr/>
+            <p:nvPr/>
+          </p:nvSpPr>
+          <p:spPr>
+            <a:xfrm>
+              <a:off x="1214120" y="4336484"/>
+              <a:ext cx="0" cy="1317069"/>
+            </a:xfrm>
+            <a:custGeom>
+              <a:avLst/>
+              <a:pathLst>
+                <a:path w="0" h="1317069">
+                  <a:moveTo>
+                    <a:pt x="0" y="1317069"/>
+                  </a:moveTo>
+                  <a:lnTo>
+                    <a:pt x="0" y="0"/>
+                  </a:lnTo>
+                  <a:lnTo>
+                    <a:pt x="0" y="0"/>
+                  </a:lnTo>
+                </a:path>
+              </a:pathLst>
+            </a:custGeom>
+            <a:ln w="13550" cap="flat">
+              <a:solidFill>
+                <a:srgbClr val="EBEBEB">
+                  <a:alpha val="100000"/>
+                </a:srgbClr>
+              </a:solidFill>
+              <a:prstDash val="solid"/>
+              <a:round/>
+            </a:ln>
+          </p:spPr>
+          <p:txBody>
+            <a:bodyPr/>
+            <a:lstStyle/>
+            <a:p/>
+          </p:txBody>
+        </p:sp>
+        <p:sp>
+          <p:nvSpPr>
+            <p:cNvPr id="58" name="pl58"/>
+            <p:cNvSpPr/>
+            <p:nvPr/>
+          </p:nvSpPr>
+          <p:spPr>
+            <a:xfrm>
+              <a:off x="2059406" y="4336484"/>
+              <a:ext cx="0" cy="1317069"/>
+            </a:xfrm>
+            <a:custGeom>
+              <a:avLst/>
+              <a:pathLst>
+                <a:path w="0" h="1317069">
+                  <a:moveTo>
+                    <a:pt x="0" y="1317069"/>
+                  </a:moveTo>
+                  <a:lnTo>
+                    <a:pt x="0" y="0"/>
+                  </a:lnTo>
+                  <a:lnTo>
+                    <a:pt x="0" y="0"/>
+                  </a:lnTo>
+                </a:path>
+              </a:pathLst>
+            </a:custGeom>
+            <a:ln w="13550" cap="flat">
+              <a:solidFill>
+                <a:srgbClr val="EBEBEB">
+                  <a:alpha val="100000"/>
+                </a:srgbClr>
+              </a:solidFill>
+              <a:prstDash val="solid"/>
+              <a:round/>
+            </a:ln>
+          </p:spPr>
+          <p:txBody>
+            <a:bodyPr/>
+            <a:lstStyle/>
+            <a:p/>
+          </p:txBody>
+        </p:sp>
+        <p:sp>
+          <p:nvSpPr>
+            <p:cNvPr id="59" name="pl59"/>
+            <p:cNvSpPr/>
+            <p:nvPr/>
+          </p:nvSpPr>
+          <p:spPr>
+            <a:xfrm>
+              <a:off x="2904693" y="4336484"/>
+              <a:ext cx="0" cy="1317069"/>
+            </a:xfrm>
+            <a:custGeom>
+              <a:avLst/>
+              <a:pathLst>
+                <a:path w="0" h="1317069">
+                  <a:moveTo>
+                    <a:pt x="0" y="1317069"/>
+                  </a:moveTo>
+                  <a:lnTo>
+                    <a:pt x="0" y="0"/>
+                  </a:lnTo>
+                  <a:lnTo>
+                    <a:pt x="0" y="0"/>
+                  </a:lnTo>
+                </a:path>
+              </a:pathLst>
+            </a:custGeom>
+            <a:ln w="13550" cap="flat">
+              <a:solidFill>
+                <a:srgbClr val="EBEBEB">
+                  <a:alpha val="100000"/>
+                </a:srgbClr>
+              </a:solidFill>
+              <a:prstDash val="solid"/>
+              <a:round/>
+            </a:ln>
+          </p:spPr>
+          <p:txBody>
+            <a:bodyPr/>
+            <a:lstStyle/>
+            <a:p/>
+          </p:txBody>
+        </p:sp>
+        <p:sp>
+          <p:nvSpPr>
+            <p:cNvPr id="60" name="pl60"/>
+            <p:cNvSpPr/>
+            <p:nvPr/>
+          </p:nvSpPr>
+          <p:spPr>
+            <a:xfrm>
+              <a:off x="3749979" y="4336484"/>
+              <a:ext cx="0" cy="1317069"/>
+            </a:xfrm>
+            <a:custGeom>
+              <a:avLst/>
+              <a:pathLst>
+                <a:path w="0" h="1317069">
+                  <a:moveTo>
+                    <a:pt x="0" y="1317069"/>
+                  </a:moveTo>
+                  <a:lnTo>
+                    <a:pt x="0" y="0"/>
+                  </a:lnTo>
+                  <a:lnTo>
+                    <a:pt x="0" y="0"/>
+                  </a:lnTo>
+                </a:path>
+              </a:pathLst>
+            </a:custGeom>
+            <a:ln w="13550" cap="flat">
+              <a:solidFill>
+                <a:srgbClr val="EBEBEB">
+                  <a:alpha val="100000"/>
+                </a:srgbClr>
+              </a:solidFill>
+              <a:prstDash val="solid"/>
+              <a:round/>
+            </a:ln>
+          </p:spPr>
+          <p:txBody>
+            <a:bodyPr/>
+            <a:lstStyle/>
+            <a:p/>
+          </p:txBody>
+        </p:sp>
+        <p:sp>
+          <p:nvSpPr>
+            <p:cNvPr id="61" name="pl61"/>
+            <p:cNvSpPr/>
+            <p:nvPr/>
+          </p:nvSpPr>
+          <p:spPr>
+            <a:xfrm>
+              <a:off x="4595266" y="4336484"/>
+              <a:ext cx="0" cy="1317069"/>
+            </a:xfrm>
+            <a:custGeom>
+              <a:avLst/>
+              <a:pathLst>
+                <a:path w="0" h="1317069">
+                  <a:moveTo>
+                    <a:pt x="0" y="1317069"/>
+                  </a:moveTo>
+                  <a:lnTo>
+                    <a:pt x="0" y="0"/>
+                  </a:lnTo>
+                  <a:lnTo>
+                    <a:pt x="0" y="0"/>
+                  </a:lnTo>
+                </a:path>
+              </a:pathLst>
+            </a:custGeom>
+            <a:ln w="13550" cap="flat">
+              <a:solidFill>
+                <a:srgbClr val="EBEBEB">
+                  <a:alpha val="100000"/>
+                </a:srgbClr>
+              </a:solidFill>
+              <a:prstDash val="solid"/>
+              <a:round/>
+            </a:ln>
+          </p:spPr>
+          <p:txBody>
+            <a:bodyPr/>
+            <a:lstStyle/>
+            <a:p/>
+          </p:txBody>
+        </p:sp>
+        <p:sp>
+          <p:nvSpPr>
+            <p:cNvPr id="62" name="pl62"/>
+            <p:cNvSpPr/>
+            <p:nvPr/>
+          </p:nvSpPr>
+          <p:spPr>
+            <a:xfrm>
+              <a:off x="5440552" y="4336484"/>
+              <a:ext cx="0" cy="1317069"/>
+            </a:xfrm>
+            <a:custGeom>
+              <a:avLst/>
+              <a:pathLst>
+                <a:path w="0" h="1317069">
+                  <a:moveTo>
+                    <a:pt x="0" y="1317069"/>
+                  </a:moveTo>
+                  <a:lnTo>
+                    <a:pt x="0" y="0"/>
+                  </a:lnTo>
+                  <a:lnTo>
+                    <a:pt x="0" y="0"/>
+                  </a:lnTo>
+                </a:path>
+              </a:pathLst>
+            </a:custGeom>
+            <a:ln w="13550" cap="flat">
+              <a:solidFill>
+                <a:srgbClr val="EBEBEB">
+                  <a:alpha val="100000"/>
+                </a:srgbClr>
+              </a:solidFill>
+              <a:prstDash val="solid"/>
+              <a:round/>
+            </a:ln>
+          </p:spPr>
+          <p:txBody>
+            <a:bodyPr/>
+            <a:lstStyle/>
+            <a:p/>
+          </p:txBody>
+        </p:sp>
+        <p:sp>
+          <p:nvSpPr>
+            <p:cNvPr id="63" name="pl63"/>
+            <p:cNvSpPr/>
+            <p:nvPr/>
+          </p:nvSpPr>
+          <p:spPr>
+            <a:xfrm>
+              <a:off x="6285838" y="4336484"/>
+              <a:ext cx="0" cy="1317069"/>
+            </a:xfrm>
+            <a:custGeom>
+              <a:avLst/>
+              <a:pathLst>
+                <a:path w="0" h="1317069">
+                  <a:moveTo>
+                    <a:pt x="0" y="1317069"/>
+                  </a:moveTo>
+                  <a:lnTo>
+                    <a:pt x="0" y="0"/>
+                  </a:lnTo>
+                  <a:lnTo>
+                    <a:pt x="0" y="0"/>
+                  </a:lnTo>
+                </a:path>
+              </a:pathLst>
+            </a:custGeom>
+            <a:ln w="13550" cap="flat">
+              <a:solidFill>
+                <a:srgbClr val="EBEBEB">
+                  <a:alpha val="100000"/>
+                </a:srgbClr>
+              </a:solidFill>
+              <a:prstDash val="solid"/>
+              <a:round/>
+            </a:ln>
+          </p:spPr>
+          <p:txBody>
+            <a:bodyPr/>
+            <a:lstStyle/>
+            <a:p/>
+          </p:txBody>
+        </p:sp>
+        <p:sp>
+          <p:nvSpPr>
+            <p:cNvPr id="64" name="pl64"/>
+            <p:cNvSpPr/>
+            <p:nvPr/>
+          </p:nvSpPr>
+          <p:spPr>
+            <a:xfrm>
+              <a:off x="7131125" y="4336484"/>
+              <a:ext cx="0" cy="1317069"/>
+            </a:xfrm>
+            <a:custGeom>
+              <a:avLst/>
+              <a:pathLst>
+                <a:path w="0" h="1317069">
+                  <a:moveTo>
+                    <a:pt x="0" y="1317069"/>
+                  </a:moveTo>
+                  <a:lnTo>
+                    <a:pt x="0" y="0"/>
+                  </a:lnTo>
+                  <a:lnTo>
+                    <a:pt x="0" y="0"/>
+                  </a:lnTo>
+                </a:path>
+              </a:pathLst>
+            </a:custGeom>
+            <a:ln w="13550" cap="flat">
+              <a:solidFill>
+                <a:srgbClr val="EBEBEB">
+                  <a:alpha val="100000"/>
+                </a:srgbClr>
+              </a:solidFill>
+              <a:prstDash val="solid"/>
+              <a:round/>
+            </a:ln>
+          </p:spPr>
+          <p:txBody>
+            <a:bodyPr/>
+            <a:lstStyle/>
+            <a:p/>
+          </p:txBody>
+        </p:sp>
+        <p:sp>
+          <p:nvSpPr>
+            <p:cNvPr id="65" name="pl65"/>
+            <p:cNvSpPr/>
+            <p:nvPr/>
+          </p:nvSpPr>
+          <p:spPr>
+            <a:xfrm>
+              <a:off x="7976411" y="4336484"/>
+              <a:ext cx="0" cy="1317069"/>
+            </a:xfrm>
+            <a:custGeom>
+              <a:avLst/>
+              <a:pathLst>
+                <a:path w="0" h="1317069">
+                  <a:moveTo>
+                    <a:pt x="0" y="1317069"/>
+                  </a:moveTo>
+                  <a:lnTo>
+                    <a:pt x="0" y="0"/>
+                  </a:lnTo>
+                  <a:lnTo>
+                    <a:pt x="0" y="0"/>
+                  </a:lnTo>
+                </a:path>
+              </a:pathLst>
+            </a:custGeom>
+            <a:ln w="13550" cap="flat">
+              <a:solidFill>
+                <a:srgbClr val="EBEBEB">
+                  <a:alpha val="100000"/>
+                </a:srgbClr>
+              </a:solidFill>
+              <a:prstDash val="solid"/>
+              <a:round/>
+            </a:ln>
+          </p:spPr>
+          <p:txBody>
+            <a:bodyPr/>
+            <a:lstStyle/>
+            <a:p/>
+          </p:txBody>
+        </p:sp>
+        <p:sp>
+          <p:nvSpPr>
+            <p:cNvPr id="66" name="pg66"/>
+            <p:cNvSpPr/>
+            <p:nvPr/>
+          </p:nvSpPr>
+          <p:spPr>
+            <a:xfrm>
+              <a:off x="1235312" y="4743385"/>
+              <a:ext cx="6964104" cy="736897"/>
+            </a:xfrm>
+            <a:custGeom>
+              <a:avLst/>
+              <a:pathLst>
+                <a:path w="6964104" h="736897">
+                  <a:moveTo>
+                    <a:pt x="0" y="442808"/>
+                  </a:moveTo>
+                  <a:lnTo>
+                    <a:pt x="70344" y="445434"/>
+                  </a:lnTo>
+                  <a:lnTo>
+                    <a:pt x="140688" y="448044"/>
+                  </a:lnTo>
+                  <a:lnTo>
+                    <a:pt x="211033" y="450638"/>
+                  </a:lnTo>
+                  <a:lnTo>
+                    <a:pt x="281377" y="453214"/>
+                  </a:lnTo>
+                  <a:lnTo>
+                    <a:pt x="351722" y="455774"/>
+                  </a:lnTo>
+                  <a:lnTo>
+                    <a:pt x="422066" y="458317"/>
+                  </a:lnTo>
+                  <a:lnTo>
+                    <a:pt x="492411" y="460844"/>
+                  </a:lnTo>
+                  <a:lnTo>
+                    <a:pt x="562755" y="463355"/>
+                  </a:lnTo>
+                  <a:lnTo>
+                    <a:pt x="633100" y="465849"/>
+                  </a:lnTo>
+                  <a:lnTo>
+                    <a:pt x="703444" y="468327"/>
+                  </a:lnTo>
+                  <a:lnTo>
+                    <a:pt x="773789" y="470790"/>
+                  </a:lnTo>
+                  <a:lnTo>
+                    <a:pt x="844133" y="473236"/>
+                  </a:lnTo>
+                  <a:lnTo>
+                    <a:pt x="914478" y="475667"/>
+                  </a:lnTo>
+                  <a:lnTo>
+                    <a:pt x="984822" y="478082"/>
+                  </a:lnTo>
+                  <a:lnTo>
+                    <a:pt x="1055167" y="480482"/>
+                  </a:lnTo>
+                  <a:lnTo>
+                    <a:pt x="1125511" y="482866"/>
+                  </a:lnTo>
+                  <a:lnTo>
+                    <a:pt x="1195856" y="485234"/>
+                  </a:lnTo>
+                  <a:lnTo>
+                    <a:pt x="1266200" y="487588"/>
+                  </a:lnTo>
+                  <a:lnTo>
+                    <a:pt x="1336545" y="489926"/>
+                  </a:lnTo>
+                  <a:lnTo>
+                    <a:pt x="1406889" y="492249"/>
+                  </a:lnTo>
+                  <a:lnTo>
+                    <a:pt x="1477234" y="494557"/>
+                  </a:lnTo>
+                  <a:lnTo>
+                    <a:pt x="1547578" y="496850"/>
+                  </a:lnTo>
+                  <a:lnTo>
+                    <a:pt x="1617923" y="499129"/>
+                  </a:lnTo>
+                  <a:lnTo>
+                    <a:pt x="1688267" y="501393"/>
+                  </a:lnTo>
+                  <a:lnTo>
+                    <a:pt x="1758612" y="503642"/>
+                  </a:lnTo>
+                  <a:lnTo>
+                    <a:pt x="1828956" y="505877"/>
+                  </a:lnTo>
+                  <a:lnTo>
+                    <a:pt x="1899301" y="508097"/>
+                  </a:lnTo>
+                  <a:lnTo>
+                    <a:pt x="1969645" y="510303"/>
+                  </a:lnTo>
+                  <a:lnTo>
+                    <a:pt x="2039990" y="512495"/>
+                  </a:lnTo>
+                  <a:lnTo>
+                    <a:pt x="2110334" y="514673"/>
+                  </a:lnTo>
+                  <a:lnTo>
+                    <a:pt x="2180679" y="516836"/>
+                  </a:lnTo>
+                  <a:lnTo>
+                    <a:pt x="2251023" y="518986"/>
+                  </a:lnTo>
+                  <a:lnTo>
+                    <a:pt x="2321368" y="521122"/>
+                  </a:lnTo>
+                  <a:lnTo>
+                    <a:pt x="2391712" y="523244"/>
+                  </a:lnTo>
+                  <a:lnTo>
+                    <a:pt x="2462057" y="525352"/>
+                  </a:lnTo>
+                  <a:lnTo>
+                    <a:pt x="2532401" y="527447"/>
+                  </a:lnTo>
+                  <a:lnTo>
+                    <a:pt x="2602746" y="529528"/>
+                  </a:lnTo>
+                  <a:lnTo>
+                    <a:pt x="2673090" y="531596"/>
+                  </a:lnTo>
+                  <a:lnTo>
+                    <a:pt x="2743435" y="533650"/>
+                  </a:lnTo>
+                  <a:lnTo>
+                    <a:pt x="2813779" y="535692"/>
+                  </a:lnTo>
+                  <a:lnTo>
+                    <a:pt x="2884124" y="537720"/>
+                  </a:lnTo>
+                  <a:lnTo>
+                    <a:pt x="2954468" y="539735"/>
+                  </a:lnTo>
+                  <a:lnTo>
+                    <a:pt x="3024813" y="541737"/>
+                  </a:lnTo>
+                  <a:lnTo>
+                    <a:pt x="3095157" y="543726"/>
+                  </a:lnTo>
+                  <a:lnTo>
+                    <a:pt x="3165502" y="545702"/>
+                  </a:lnTo>
+                  <a:lnTo>
+                    <a:pt x="3235846" y="547666"/>
+                  </a:lnTo>
+                  <a:lnTo>
+                    <a:pt x="3306191" y="549617"/>
+                  </a:lnTo>
+                  <a:lnTo>
+                    <a:pt x="3376535" y="549109"/>
+                  </a:lnTo>
+                  <a:lnTo>
+                    <a:pt x="3446880" y="542917"/>
+                  </a:lnTo>
+                  <a:lnTo>
+                    <a:pt x="3517224" y="536598"/>
+                  </a:lnTo>
+                  <a:lnTo>
+                    <a:pt x="3587569" y="530149"/>
+                  </a:lnTo>
+                  <a:lnTo>
+                    <a:pt x="3657913" y="523567"/>
+                  </a:lnTo>
+                  <a:lnTo>
+                    <a:pt x="3728257" y="516850"/>
+                  </a:lnTo>
+                  <a:lnTo>
+                    <a:pt x="3798602" y="509994"/>
+                  </a:lnTo>
+                  <a:lnTo>
+                    <a:pt x="3868946" y="502998"/>
+                  </a:lnTo>
+                  <a:lnTo>
+                    <a:pt x="3939291" y="495858"/>
+                  </a:lnTo>
+                  <a:lnTo>
+                    <a:pt x="4009635" y="488572"/>
+                  </a:lnTo>
+                  <a:lnTo>
+                    <a:pt x="4079980" y="481135"/>
+                  </a:lnTo>
+                  <a:lnTo>
+                    <a:pt x="4150324" y="473546"/>
+                  </a:lnTo>
+                  <a:lnTo>
+                    <a:pt x="4220669" y="465800"/>
+                  </a:lnTo>
+                  <a:lnTo>
+                    <a:pt x="4291013" y="457895"/>
+                  </a:lnTo>
+                  <a:lnTo>
+                    <a:pt x="4361358" y="449828"/>
+                  </a:lnTo>
+                  <a:lnTo>
+                    <a:pt x="4431702" y="441595"/>
+                  </a:lnTo>
+                  <a:lnTo>
+                    <a:pt x="4502047" y="433193"/>
+                  </a:lnTo>
+                  <a:lnTo>
+                    <a:pt x="4572391" y="424618"/>
+                  </a:lnTo>
+                  <a:lnTo>
+                    <a:pt x="4642736" y="415866"/>
+                  </a:lnTo>
+                  <a:lnTo>
+                    <a:pt x="4713080" y="406935"/>
+                  </a:lnTo>
+                  <a:lnTo>
+                    <a:pt x="4783425" y="397820"/>
+                  </a:lnTo>
+                  <a:lnTo>
+                    <a:pt x="4853769" y="388518"/>
+                  </a:lnTo>
+                  <a:lnTo>
+                    <a:pt x="4924114" y="379025"/>
+                  </a:lnTo>
+                  <a:lnTo>
+                    <a:pt x="4994458" y="369336"/>
+                  </a:lnTo>
+                  <a:lnTo>
+                    <a:pt x="5064803" y="359448"/>
+                  </a:lnTo>
+                  <a:lnTo>
+                    <a:pt x="5135147" y="349357"/>
+                  </a:lnTo>
+                  <a:lnTo>
+                    <a:pt x="5205492" y="339058"/>
+                  </a:lnTo>
+                  <a:lnTo>
+                    <a:pt x="5275836" y="328548"/>
+                  </a:lnTo>
+                  <a:lnTo>
+                    <a:pt x="5346181" y="317822"/>
+                  </a:lnTo>
+                  <a:lnTo>
+                    <a:pt x="5416525" y="306875"/>
+                  </a:lnTo>
+                  <a:lnTo>
+                    <a:pt x="5486870" y="295703"/>
+                  </a:lnTo>
+                  <a:lnTo>
+                    <a:pt x="5557214" y="284301"/>
+                  </a:lnTo>
+                  <a:lnTo>
+                    <a:pt x="5627559" y="272665"/>
+                  </a:lnTo>
+                  <a:lnTo>
+                    <a:pt x="5697903" y="260790"/>
+                  </a:lnTo>
+                  <a:lnTo>
+                    <a:pt x="5768248" y="248671"/>
+                  </a:lnTo>
+                  <a:lnTo>
+                    <a:pt x="5838592" y="236302"/>
+                  </a:lnTo>
+                  <a:lnTo>
+                    <a:pt x="5908937" y="223679"/>
+                  </a:lnTo>
+                  <a:lnTo>
+                    <a:pt x="5979281" y="210797"/>
+                  </a:lnTo>
+                  <a:lnTo>
+                    <a:pt x="6049626" y="197650"/>
+                  </a:lnTo>
+                  <a:lnTo>
+                    <a:pt x="6119970" y="184232"/>
+                  </a:lnTo>
+                  <a:lnTo>
+                    <a:pt x="6190315" y="170539"/>
+                  </a:lnTo>
+                  <a:lnTo>
+                    <a:pt x="6260659" y="156564"/>
+                  </a:lnTo>
+                  <a:lnTo>
+                    <a:pt x="6331004" y="142302"/>
+                  </a:lnTo>
+                  <a:lnTo>
+                    <a:pt x="6401348" y="127747"/>
+                  </a:lnTo>
+                  <a:lnTo>
+                    <a:pt x="6471693" y="112893"/>
+                  </a:lnTo>
+                  <a:lnTo>
+                    <a:pt x="6542037" y="97733"/>
+                  </a:lnTo>
+                  <a:lnTo>
+                    <a:pt x="6612382" y="82261"/>
+                  </a:lnTo>
+                  <a:lnTo>
+                    <a:pt x="6682726" y="66472"/>
+                  </a:lnTo>
+                  <a:lnTo>
+                    <a:pt x="6753071" y="50357"/>
+                  </a:lnTo>
+                  <a:lnTo>
+                    <a:pt x="6823415" y="33912"/>
+                  </a:lnTo>
+                  <a:lnTo>
+                    <a:pt x="6893760" y="17128"/>
+                  </a:lnTo>
+                  <a:lnTo>
+                    <a:pt x="6964104" y="0"/>
+                  </a:lnTo>
+                  <a:lnTo>
+                    <a:pt x="6964104" y="635490"/>
+                  </a:lnTo>
+                  <a:lnTo>
+                    <a:pt x="6893760" y="634096"/>
+                  </a:lnTo>
+                  <a:lnTo>
+                    <a:pt x="6823415" y="632693"/>
+                  </a:lnTo>
+                  <a:lnTo>
+                    <a:pt x="6753071" y="631281"/>
+                  </a:lnTo>
+                  <a:lnTo>
+                    <a:pt x="6682726" y="629860"/>
+                  </a:lnTo>
+                  <a:lnTo>
+                    <a:pt x="6612382" y="628430"/>
+                  </a:lnTo>
+                  <a:lnTo>
+                    <a:pt x="6542037" y="626991"/>
+                  </a:lnTo>
+                  <a:lnTo>
+                    <a:pt x="6471693" y="625542"/>
+                  </a:lnTo>
+                  <a:lnTo>
+                    <a:pt x="6401348" y="624083"/>
+                  </a:lnTo>
+                  <a:lnTo>
+                    <a:pt x="6331004" y="622616"/>
+                  </a:lnTo>
+                  <a:lnTo>
+                    <a:pt x="6260659" y="621138"/>
+                  </a:lnTo>
+                  <a:lnTo>
+                    <a:pt x="6190315" y="619651"/>
+                  </a:lnTo>
+                  <a:lnTo>
+                    <a:pt x="6119970" y="618155"/>
+                  </a:lnTo>
+                  <a:lnTo>
+                    <a:pt x="6049626" y="616649"/>
+                  </a:lnTo>
+                  <a:lnTo>
+                    <a:pt x="5979281" y="615133"/>
+                  </a:lnTo>
+                  <a:lnTo>
+                    <a:pt x="5908937" y="613607"/>
+                  </a:lnTo>
+                  <a:lnTo>
+                    <a:pt x="5838592" y="612071"/>
+                  </a:lnTo>
+                  <a:lnTo>
+                    <a:pt x="5768248" y="610525"/>
+                  </a:lnTo>
+                  <a:lnTo>
+                    <a:pt x="5697903" y="608970"/>
+                  </a:lnTo>
+                  <a:lnTo>
+                    <a:pt x="5627559" y="607404"/>
+                  </a:lnTo>
+                  <a:lnTo>
+                    <a:pt x="5557214" y="605828"/>
+                  </a:lnTo>
+                  <a:lnTo>
+                    <a:pt x="5486870" y="604242"/>
+                  </a:lnTo>
+                  <a:lnTo>
+                    <a:pt x="5416525" y="602645"/>
+                  </a:lnTo>
+                  <a:lnTo>
+                    <a:pt x="5346181" y="601038"/>
+                  </a:lnTo>
+                  <a:lnTo>
+                    <a:pt x="5275836" y="599421"/>
+                  </a:lnTo>
+                  <a:lnTo>
+                    <a:pt x="5205492" y="597793"/>
+                  </a:lnTo>
+                  <a:lnTo>
+                    <a:pt x="5135147" y="596155"/>
+                  </a:lnTo>
+                  <a:lnTo>
+                    <a:pt x="5064803" y="594506"/>
+                  </a:lnTo>
+                  <a:lnTo>
+                    <a:pt x="4994458" y="592846"/>
+                  </a:lnTo>
+                  <a:lnTo>
+                    <a:pt x="4924114" y="591176"/>
+                  </a:lnTo>
+                  <a:lnTo>
+                    <a:pt x="4853769" y="589494"/>
+                  </a:lnTo>
+                  <a:lnTo>
+                    <a:pt x="4783425" y="587802"/>
+                  </a:lnTo>
+                  <a:lnTo>
+                    <a:pt x="4713080" y="586099"/>
+                  </a:lnTo>
+                  <a:lnTo>
+                    <a:pt x="4642736" y="584385"/>
+                  </a:lnTo>
+                  <a:lnTo>
+                    <a:pt x="4572391" y="582660"/>
+                  </a:lnTo>
+                  <a:lnTo>
+                    <a:pt x="4502047" y="580923"/>
+                  </a:lnTo>
+                  <a:lnTo>
+                    <a:pt x="4431702" y="579175"/>
+                  </a:lnTo>
+                  <a:lnTo>
+                    <a:pt x="4361358" y="577416"/>
+                  </a:lnTo>
+                  <a:lnTo>
+                    <a:pt x="4291013" y="575645"/>
+                  </a:lnTo>
+                  <a:lnTo>
+                    <a:pt x="4220669" y="573863"/>
+                  </a:lnTo>
+                  <a:lnTo>
+                    <a:pt x="4150324" y="572070"/>
+                  </a:lnTo>
+                  <a:lnTo>
+                    <a:pt x="4079980" y="570265"/>
+                  </a:lnTo>
+                  <a:lnTo>
+                    <a:pt x="4009635" y="568448"/>
+                  </a:lnTo>
+                  <a:lnTo>
+                    <a:pt x="3939291" y="566619"/>
+                  </a:lnTo>
+                  <a:lnTo>
+                    <a:pt x="3868946" y="564778"/>
+                  </a:lnTo>
+                  <a:lnTo>
+                    <a:pt x="3798602" y="562926"/>
+                  </a:lnTo>
+                  <a:lnTo>
+                    <a:pt x="3728257" y="561061"/>
+                  </a:lnTo>
+                  <a:lnTo>
+                    <a:pt x="3657913" y="559184"/>
+                  </a:lnTo>
+                  <a:lnTo>
+                    <a:pt x="3587569" y="557296"/>
+                  </a:lnTo>
+                  <a:lnTo>
+                    <a:pt x="3517224" y="555395"/>
+                  </a:lnTo>
+                  <a:lnTo>
+                    <a:pt x="3446880" y="553481"/>
+                  </a:lnTo>
+                  <a:lnTo>
+                    <a:pt x="3376535" y="551555"/>
+                  </a:lnTo>
+                  <a:lnTo>
+                    <a:pt x="3306191" y="555176"/>
+                  </a:lnTo>
+                  <a:lnTo>
+                    <a:pt x="3235846" y="561121"/>
+                  </a:lnTo>
+                  <a:lnTo>
+                    <a:pt x="3165502" y="566947"/>
+                  </a:lnTo>
+                  <a:lnTo>
+                    <a:pt x="3095157" y="572655"/>
+                  </a:lnTo>
+                  <a:lnTo>
+                    <a:pt x="3024813" y="578248"/>
+                  </a:lnTo>
+                  <a:lnTo>
+                    <a:pt x="2954468" y="583728"/>
+                  </a:lnTo>
+                  <a:lnTo>
+                    <a:pt x="2884124" y="589098"/>
+                  </a:lnTo>
+                  <a:lnTo>
+                    <a:pt x="2813779" y="594360"/>
+                  </a:lnTo>
+                  <a:lnTo>
+                    <a:pt x="2743435" y="599515"/>
+                  </a:lnTo>
+                  <a:lnTo>
+                    <a:pt x="2673090" y="604567"/>
+                  </a:lnTo>
+                  <a:lnTo>
+                    <a:pt x="2602746" y="609517"/>
+                  </a:lnTo>
+                  <a:lnTo>
+                    <a:pt x="2532401" y="614368"/>
+                  </a:lnTo>
+                  <a:lnTo>
+                    <a:pt x="2462057" y="619120"/>
+                  </a:lnTo>
+                  <a:lnTo>
+                    <a:pt x="2391712" y="623777"/>
+                  </a:lnTo>
+                  <a:lnTo>
+                    <a:pt x="2321368" y="628341"/>
+                  </a:lnTo>
+                  <a:lnTo>
+                    <a:pt x="2251023" y="632812"/>
+                  </a:lnTo>
+                  <a:lnTo>
+                    <a:pt x="2180679" y="637193"/>
+                  </a:lnTo>
+                  <a:lnTo>
+                    <a:pt x="2110334" y="641486"/>
+                  </a:lnTo>
+                  <a:lnTo>
+                    <a:pt x="2039990" y="645692"/>
+                  </a:lnTo>
+                  <a:lnTo>
+                    <a:pt x="1969645" y="649814"/>
+                  </a:lnTo>
+                  <a:lnTo>
+                    <a:pt x="1899301" y="653853"/>
+                  </a:lnTo>
+                  <a:lnTo>
+                    <a:pt x="1828956" y="657810"/>
+                  </a:lnTo>
+                  <a:lnTo>
+                    <a:pt x="1758612" y="661687"/>
+                  </a:lnTo>
+                  <a:lnTo>
+                    <a:pt x="1688267" y="665487"/>
+                  </a:lnTo>
+                  <a:lnTo>
+                    <a:pt x="1617923" y="669210"/>
+                  </a:lnTo>
+                  <a:lnTo>
+                    <a:pt x="1547578" y="672858"/>
+                  </a:lnTo>
+                  <a:lnTo>
+                    <a:pt x="1477234" y="676432"/>
+                  </a:lnTo>
+                  <a:lnTo>
+                    <a:pt x="1406889" y="679935"/>
+                  </a:lnTo>
+                  <a:lnTo>
+                    <a:pt x="1336545" y="683367"/>
+                  </a:lnTo>
+                  <a:lnTo>
+                    <a:pt x="1266200" y="686729"/>
+                  </a:lnTo>
+                  <a:lnTo>
+                    <a:pt x="1195856" y="690024"/>
+                  </a:lnTo>
+                  <a:lnTo>
+                    <a:pt x="1125511" y="693253"/>
+                  </a:lnTo>
+                  <a:lnTo>
+                    <a:pt x="1055167" y="696417"/>
+                  </a:lnTo>
+                  <a:lnTo>
+                    <a:pt x="984822" y="699516"/>
+                  </a:lnTo>
+                  <a:lnTo>
+                    <a:pt x="914478" y="702554"/>
+                  </a:lnTo>
+                  <a:lnTo>
+                    <a:pt x="844133" y="705530"/>
+                  </a:lnTo>
+                  <a:lnTo>
+                    <a:pt x="773789" y="708446"/>
+                  </a:lnTo>
+                  <a:lnTo>
+                    <a:pt x="703444" y="711304"/>
+                  </a:lnTo>
+                  <a:lnTo>
+                    <a:pt x="633100" y="714104"/>
+                  </a:lnTo>
+                  <a:lnTo>
+                    <a:pt x="562755" y="716848"/>
+                  </a:lnTo>
+                  <a:lnTo>
+                    <a:pt x="492411" y="719536"/>
+                  </a:lnTo>
+                  <a:lnTo>
+                    <a:pt x="422066" y="722170"/>
+                  </a:lnTo>
+                  <a:lnTo>
+                    <a:pt x="351722" y="724751"/>
+                  </a:lnTo>
+                  <a:lnTo>
+                    <a:pt x="281377" y="727280"/>
+                  </a:lnTo>
+                  <a:lnTo>
+                    <a:pt x="211033" y="729758"/>
+                  </a:lnTo>
+                  <a:lnTo>
+                    <a:pt x="140688" y="732187"/>
+                  </a:lnTo>
+                  <a:lnTo>
+                    <a:pt x="70344" y="734566"/>
+                  </a:lnTo>
+                  <a:lnTo>
+                    <a:pt x="0" y="736897"/>
+                  </a:lnTo>
+                  <a:close/>
+                </a:path>
+              </a:pathLst>
+            </a:custGeom>
+            <a:solidFill>
+              <a:srgbClr val="FF8C00">
+                <a:alpha val="20000"/>
+              </a:srgbClr>
+            </a:solidFill>
+          </p:spPr>
+          <p:txBody>
+            <a:bodyPr/>
+            <a:lstStyle/>
+            <a:p/>
+          </p:txBody>
+        </p:sp>
+        <p:sp>
+          <p:nvSpPr>
+            <p:cNvPr id="67" name="pl67"/>
+            <p:cNvSpPr/>
+            <p:nvPr/>
+          </p:nvSpPr>
+          <p:spPr>
+            <a:xfrm>
+              <a:off x="1235312" y="4743385"/>
+              <a:ext cx="6964104" cy="549617"/>
+            </a:xfrm>
+            <a:custGeom>
+              <a:avLst/>
+              <a:pathLst>
+                <a:path w="6964104" h="549617">
+                  <a:moveTo>
+                    <a:pt x="0" y="442808"/>
+                  </a:moveTo>
+                  <a:lnTo>
+                    <a:pt x="70344" y="445434"/>
+                  </a:lnTo>
+                  <a:lnTo>
+                    <a:pt x="140688" y="448044"/>
+                  </a:lnTo>
+                  <a:lnTo>
+                    <a:pt x="211033" y="450638"/>
+                  </a:lnTo>
+                  <a:lnTo>
+                    <a:pt x="281377" y="453214"/>
+                  </a:lnTo>
+                  <a:lnTo>
+                    <a:pt x="351722" y="455774"/>
+                  </a:lnTo>
+                  <a:lnTo>
+                    <a:pt x="422066" y="458317"/>
+                  </a:lnTo>
+                  <a:lnTo>
+                    <a:pt x="492411" y="460844"/>
+                  </a:lnTo>
+                  <a:lnTo>
+                    <a:pt x="562755" y="463355"/>
+                  </a:lnTo>
+                  <a:lnTo>
+                    <a:pt x="633100" y="465849"/>
+                  </a:lnTo>
+                  <a:lnTo>
+                    <a:pt x="703444" y="468327"/>
+                  </a:lnTo>
+                  <a:lnTo>
+                    <a:pt x="773789" y="470790"/>
+                  </a:lnTo>
+                  <a:lnTo>
+                    <a:pt x="844133" y="473236"/>
+                  </a:lnTo>
+                  <a:lnTo>
+                    <a:pt x="914478" y="475667"/>
+                  </a:lnTo>
+                  <a:lnTo>
+                    <a:pt x="984822" y="478082"/>
+                  </a:lnTo>
+                  <a:lnTo>
+                    <a:pt x="1055167" y="480482"/>
+                  </a:lnTo>
+                  <a:lnTo>
+                    <a:pt x="1125511" y="482866"/>
+                  </a:lnTo>
+                  <a:lnTo>
+                    <a:pt x="1195856" y="485234"/>
+                  </a:lnTo>
+                  <a:lnTo>
+                    <a:pt x="1266200" y="487588"/>
+                  </a:lnTo>
+                  <a:lnTo>
+                    <a:pt x="1336545" y="489926"/>
+                  </a:lnTo>
+                  <a:lnTo>
+                    <a:pt x="1406889" y="492249"/>
+                  </a:lnTo>
+                  <a:lnTo>
+                    <a:pt x="1477234" y="494557"/>
+                  </a:lnTo>
+                  <a:lnTo>
+                    <a:pt x="1547578" y="496850"/>
+                  </a:lnTo>
+                  <a:lnTo>
+                    <a:pt x="1617923" y="499129"/>
+                  </a:lnTo>
+                  <a:lnTo>
+                    <a:pt x="1688267" y="501393"/>
+                  </a:lnTo>
+                  <a:lnTo>
+                    <a:pt x="1758612" y="503642"/>
+                  </a:lnTo>
+                  <a:lnTo>
+                    <a:pt x="1828956" y="505877"/>
+                  </a:lnTo>
+                  <a:lnTo>
+                    <a:pt x="1899301" y="508097"/>
+                  </a:lnTo>
+                  <a:lnTo>
+                    <a:pt x="1969645" y="510303"/>
+                  </a:lnTo>
+                  <a:lnTo>
+                    <a:pt x="2039990" y="512495"/>
+                  </a:lnTo>
+                  <a:lnTo>
+                    <a:pt x="2110334" y="514673"/>
+                  </a:lnTo>
+                  <a:lnTo>
+                    <a:pt x="2180679" y="516836"/>
+                  </a:lnTo>
+                  <a:lnTo>
+                    <a:pt x="2251023" y="518986"/>
+                  </a:lnTo>
+                  <a:lnTo>
+                    <a:pt x="2321368" y="521122"/>
+                  </a:lnTo>
+                  <a:lnTo>
+                    <a:pt x="2391712" y="523244"/>
+                  </a:lnTo>
+                  <a:lnTo>
+                    <a:pt x="2462057" y="525352"/>
+                  </a:lnTo>
+                  <a:lnTo>
+                    <a:pt x="2532401" y="527447"/>
+                  </a:lnTo>
+                  <a:lnTo>
+                    <a:pt x="2602746" y="529528"/>
+                  </a:lnTo>
+                  <a:lnTo>
+                    <a:pt x="2673090" y="531596"/>
+                  </a:lnTo>
+                  <a:lnTo>
+                    <a:pt x="2743435" y="533650"/>
+                  </a:lnTo>
+                  <a:lnTo>
+                    <a:pt x="2813779" y="535692"/>
+                  </a:lnTo>
+                  <a:lnTo>
+                    <a:pt x="2884124" y="537720"/>
+                  </a:lnTo>
+                  <a:lnTo>
+                    <a:pt x="2954468" y="539735"/>
+                  </a:lnTo>
+                  <a:lnTo>
+                    <a:pt x="3024813" y="541737"/>
+                  </a:lnTo>
+                  <a:lnTo>
+                    <a:pt x="3095157" y="543726"/>
+                  </a:lnTo>
+                  <a:lnTo>
+                    <a:pt x="3165502" y="545702"/>
+                  </a:lnTo>
+                  <a:lnTo>
+                    <a:pt x="3235846" y="547666"/>
+                  </a:lnTo>
+                  <a:lnTo>
+                    <a:pt x="3306191" y="549617"/>
+                  </a:lnTo>
+                  <a:lnTo>
+                    <a:pt x="3376535" y="549109"/>
+                  </a:lnTo>
+                  <a:lnTo>
+                    <a:pt x="3446880" y="542917"/>
+                  </a:lnTo>
+                  <a:lnTo>
+                    <a:pt x="3517224" y="536598"/>
+                  </a:lnTo>
+                  <a:lnTo>
+                    <a:pt x="3587569" y="530149"/>
+                  </a:lnTo>
+                  <a:lnTo>
+                    <a:pt x="3657913" y="523567"/>
+                  </a:lnTo>
+                  <a:lnTo>
+                    <a:pt x="3728257" y="516850"/>
+                  </a:lnTo>
+                  <a:lnTo>
+                    <a:pt x="3798602" y="509994"/>
+                  </a:lnTo>
+                  <a:lnTo>
+                    <a:pt x="3868946" y="502998"/>
+                  </a:lnTo>
+                  <a:lnTo>
+                    <a:pt x="3939291" y="495858"/>
+                  </a:lnTo>
+                  <a:lnTo>
+                    <a:pt x="4009635" y="488572"/>
+                  </a:lnTo>
+                  <a:lnTo>
+                    <a:pt x="4079980" y="481135"/>
+                  </a:lnTo>
+                  <a:lnTo>
+                    <a:pt x="4150324" y="473546"/>
+                  </a:lnTo>
+                  <a:lnTo>
+                    <a:pt x="4220669" y="465800"/>
+                  </a:lnTo>
+                  <a:lnTo>
+                    <a:pt x="4291013" y="457895"/>
+                  </a:lnTo>
+                  <a:lnTo>
+                    <a:pt x="4361358" y="449828"/>
+                  </a:lnTo>
+                  <a:lnTo>
+                    <a:pt x="4431702" y="441595"/>
+                  </a:lnTo>
+                  <a:lnTo>
+                    <a:pt x="4502047" y="433193"/>
+                  </a:lnTo>
+                  <a:lnTo>
+                    <a:pt x="4572391" y="424618"/>
+                  </a:lnTo>
+                  <a:lnTo>
+                    <a:pt x="4642736" y="415866"/>
+                  </a:lnTo>
+                  <a:lnTo>
+                    <a:pt x="4713080" y="406935"/>
+                  </a:lnTo>
+                  <a:lnTo>
+                    <a:pt x="4783425" y="397820"/>
+                  </a:lnTo>
+                  <a:lnTo>
+                    <a:pt x="4853769" y="388518"/>
+                  </a:lnTo>
+                  <a:lnTo>
+                    <a:pt x="4924114" y="379025"/>
+                  </a:lnTo>
+                  <a:lnTo>
+                    <a:pt x="4994458" y="369336"/>
+                  </a:lnTo>
+                  <a:lnTo>
+                    <a:pt x="5064803" y="359448"/>
+                  </a:lnTo>
+                  <a:lnTo>
+                    <a:pt x="5135147" y="349357"/>
+                  </a:lnTo>
+                  <a:lnTo>
+                    <a:pt x="5205492" y="339058"/>
+                  </a:lnTo>
+                  <a:lnTo>
+                    <a:pt x="5275836" y="328548"/>
+                  </a:lnTo>
+                  <a:lnTo>
+                    <a:pt x="5346181" y="317822"/>
+                  </a:lnTo>
+                  <a:lnTo>
+                    <a:pt x="5416525" y="306875"/>
+                  </a:lnTo>
+                  <a:lnTo>
+                    <a:pt x="5486870" y="295703"/>
+                  </a:lnTo>
+                  <a:lnTo>
+                    <a:pt x="5557214" y="284301"/>
+                  </a:lnTo>
+                  <a:lnTo>
+                    <a:pt x="5627559" y="272665"/>
+                  </a:lnTo>
+                  <a:lnTo>
+                    <a:pt x="5697903" y="260790"/>
+                  </a:lnTo>
+                  <a:lnTo>
+                    <a:pt x="5768248" y="248671"/>
+                  </a:lnTo>
+                  <a:lnTo>
+                    <a:pt x="5838592" y="236302"/>
+                  </a:lnTo>
+                  <a:lnTo>
+                    <a:pt x="5908937" y="223679"/>
+                  </a:lnTo>
+                  <a:lnTo>
+                    <a:pt x="5979281" y="210797"/>
+                  </a:lnTo>
+                  <a:lnTo>
+                    <a:pt x="6049626" y="197650"/>
+                  </a:lnTo>
+                  <a:lnTo>
+                    <a:pt x="6119970" y="184232"/>
+                  </a:lnTo>
+                  <a:lnTo>
+                    <a:pt x="6190315" y="170539"/>
+                  </a:lnTo>
+                  <a:lnTo>
+                    <a:pt x="6260659" y="156564"/>
+                  </a:lnTo>
+                  <a:lnTo>
+                    <a:pt x="6331004" y="142302"/>
+                  </a:lnTo>
+                  <a:lnTo>
+                    <a:pt x="6401348" y="127747"/>
+                  </a:lnTo>
+                  <a:lnTo>
+                    <a:pt x="6471693" y="112893"/>
+                  </a:lnTo>
+                  <a:lnTo>
+                    <a:pt x="6542037" y="97733"/>
+                  </a:lnTo>
+                  <a:lnTo>
+                    <a:pt x="6612382" y="82261"/>
+                  </a:lnTo>
+                  <a:lnTo>
+                    <a:pt x="6682726" y="66472"/>
+                  </a:lnTo>
+                  <a:lnTo>
+                    <a:pt x="6753071" y="50357"/>
+                  </a:lnTo>
+                  <a:lnTo>
+                    <a:pt x="6823415" y="33912"/>
+                  </a:lnTo>
+                  <a:lnTo>
+                    <a:pt x="6893760" y="17128"/>
+                  </a:lnTo>
+                  <a:lnTo>
+                    <a:pt x="6964104" y="0"/>
+                  </a:lnTo>
+                </a:path>
+              </a:pathLst>
+            </a:custGeom>
+          </p:spPr>
+          <p:txBody>
+            <a:bodyPr/>
+            <a:lstStyle/>
+            <a:p/>
+          </p:txBody>
+        </p:sp>
+        <p:sp>
+          <p:nvSpPr>
+            <p:cNvPr id="68" name="pl68"/>
+            <p:cNvSpPr/>
+            <p:nvPr/>
+          </p:nvSpPr>
+          <p:spPr>
+            <a:xfrm>
+              <a:off x="1235312" y="5294941"/>
+              <a:ext cx="6964104" cy="185342"/>
+            </a:xfrm>
+            <a:custGeom>
+              <a:avLst/>
+              <a:pathLst>
+                <a:path w="6964104" h="185342">
+                  <a:moveTo>
+                    <a:pt x="6964104" y="83934"/>
+                  </a:moveTo>
+                  <a:lnTo>
+                    <a:pt x="6893760" y="82540"/>
+                  </a:lnTo>
+                  <a:lnTo>
+                    <a:pt x="6823415" y="81138"/>
+                  </a:lnTo>
+                  <a:lnTo>
+                    <a:pt x="6753071" y="79726"/>
+                  </a:lnTo>
+                  <a:lnTo>
+                    <a:pt x="6682726" y="78305"/>
+                  </a:lnTo>
+                  <a:lnTo>
+                    <a:pt x="6612382" y="76874"/>
+                  </a:lnTo>
+                  <a:lnTo>
+                    <a:pt x="6542037" y="75435"/>
+                  </a:lnTo>
+                  <a:lnTo>
+                    <a:pt x="6471693" y="73986"/>
+                  </a:lnTo>
+                  <a:lnTo>
+                    <a:pt x="6401348" y="72528"/>
+                  </a:lnTo>
+                  <a:lnTo>
+                    <a:pt x="6331004" y="71060"/>
+                  </a:lnTo>
+                  <a:lnTo>
+                    <a:pt x="6260659" y="69583"/>
+                  </a:lnTo>
+                  <a:lnTo>
+                    <a:pt x="6190315" y="68096"/>
+                  </a:lnTo>
+                  <a:lnTo>
+                    <a:pt x="6119970" y="66599"/>
+                  </a:lnTo>
+                  <a:lnTo>
+                    <a:pt x="6049626" y="65093"/>
+                  </a:lnTo>
+                  <a:lnTo>
+                    <a:pt x="5979281" y="63577"/>
+                  </a:lnTo>
+                  <a:lnTo>
+                    <a:pt x="5908937" y="62051"/>
+                  </a:lnTo>
+                  <a:lnTo>
+                    <a:pt x="5838592" y="60515"/>
+                  </a:lnTo>
+                  <a:lnTo>
+                    <a:pt x="5768248" y="58970"/>
+                  </a:lnTo>
+                  <a:lnTo>
+                    <a:pt x="5697903" y="57414"/>
+                  </a:lnTo>
+                  <a:lnTo>
+                    <a:pt x="5627559" y="55848"/>
+                  </a:lnTo>
+                  <a:lnTo>
+                    <a:pt x="5557214" y="54272"/>
+                  </a:lnTo>
+                  <a:lnTo>
+                    <a:pt x="5486870" y="52686"/>
+                  </a:lnTo>
+                  <a:lnTo>
+                    <a:pt x="5416525" y="51089"/>
+                  </a:lnTo>
+                  <a:lnTo>
+                    <a:pt x="5346181" y="49482"/>
+                  </a:lnTo>
+                  <a:lnTo>
+                    <a:pt x="5275836" y="47865"/>
+                  </a:lnTo>
+                  <a:lnTo>
+                    <a:pt x="5205492" y="46237"/>
+                  </a:lnTo>
+                  <a:lnTo>
+                    <a:pt x="5135147" y="44599"/>
+                  </a:lnTo>
+                  <a:lnTo>
+                    <a:pt x="5064803" y="42950"/>
+                  </a:lnTo>
+                  <a:lnTo>
+                    <a:pt x="4994458" y="41290"/>
+                  </a:lnTo>
+                  <a:lnTo>
+                    <a:pt x="4924114" y="39620"/>
+                  </a:lnTo>
+                  <a:lnTo>
+                    <a:pt x="4853769" y="37939"/>
+                  </a:lnTo>
+                  <a:lnTo>
+                    <a:pt x="4783425" y="36247"/>
+                  </a:lnTo>
+                  <a:lnTo>
+                    <a:pt x="4713080" y="34543"/>
+                  </a:lnTo>
+                  <a:lnTo>
+                    <a:pt x="4642736" y="32829"/>
+                  </a:lnTo>
+                  <a:lnTo>
+                    <a:pt x="4572391" y="31104"/>
+                  </a:lnTo>
+                  <a:lnTo>
+                    <a:pt x="4502047" y="29367"/>
+                  </a:lnTo>
+                  <a:lnTo>
+                    <a:pt x="4431702" y="27619"/>
+                  </a:lnTo>
+                  <a:lnTo>
+                    <a:pt x="4361358" y="25860"/>
+                  </a:lnTo>
+                  <a:lnTo>
+                    <a:pt x="4291013" y="24090"/>
+                  </a:lnTo>
+                  <a:lnTo>
+                    <a:pt x="4220669" y="22308"/>
+                  </a:lnTo>
+                  <a:lnTo>
+                    <a:pt x="4150324" y="20514"/>
+                  </a:lnTo>
+                  <a:lnTo>
+                    <a:pt x="4079980" y="18709"/>
+                  </a:lnTo>
+                  <a:lnTo>
+                    <a:pt x="4009635" y="16892"/>
+                  </a:lnTo>
+                  <a:lnTo>
+                    <a:pt x="3939291" y="15063"/>
+                  </a:lnTo>
+                  <a:lnTo>
+                    <a:pt x="3868946" y="13223"/>
+                  </a:lnTo>
+                  <a:lnTo>
+                    <a:pt x="3798602" y="11370"/>
+                  </a:lnTo>
+                  <a:lnTo>
+                    <a:pt x="3728257" y="9505"/>
+                  </a:lnTo>
+                  <a:lnTo>
+                    <a:pt x="3657913" y="7629"/>
+                  </a:lnTo>
+                  <a:lnTo>
+                    <a:pt x="3587569" y="5740"/>
+                  </a:lnTo>
+                  <a:lnTo>
+                    <a:pt x="3517224" y="3839"/>
+                  </a:lnTo>
+                  <a:lnTo>
+                    <a:pt x="3446880" y="1925"/>
+                  </a:lnTo>
+                  <a:lnTo>
+                    <a:pt x="3376535" y="0"/>
+                  </a:lnTo>
+                  <a:lnTo>
+                    <a:pt x="3306191" y="3621"/>
+                  </a:lnTo>
+                  <a:lnTo>
+                    <a:pt x="3235846" y="9566"/>
+                  </a:lnTo>
+                  <a:lnTo>
+                    <a:pt x="3165502" y="15391"/>
+                  </a:lnTo>
+                  <a:lnTo>
+                    <a:pt x="3095157" y="21099"/>
+                  </a:lnTo>
+                  <a:lnTo>
+                    <a:pt x="3024813" y="26692"/>
+                  </a:lnTo>
+                  <a:lnTo>
+                    <a:pt x="2954468" y="32172"/>
+                  </a:lnTo>
+                  <a:lnTo>
+                    <a:pt x="2884124" y="37542"/>
+                  </a:lnTo>
+                  <a:lnTo>
+                    <a:pt x="2813779" y="42804"/>
+                  </a:lnTo>
+                  <a:lnTo>
+                    <a:pt x="2743435" y="47960"/>
+                  </a:lnTo>
+                  <a:lnTo>
+                    <a:pt x="2673090" y="53011"/>
+                  </a:lnTo>
+                  <a:lnTo>
+                    <a:pt x="2602746" y="57962"/>
+                  </a:lnTo>
+                  <a:lnTo>
+                    <a:pt x="2532401" y="62812"/>
+                  </a:lnTo>
+                  <a:lnTo>
+                    <a:pt x="2462057" y="67565"/>
+                  </a:lnTo>
+                  <a:lnTo>
+                    <a:pt x="2391712" y="72222"/>
+                  </a:lnTo>
+                  <a:lnTo>
+                    <a:pt x="2321368" y="76785"/>
+                  </a:lnTo>
+                  <a:lnTo>
+                    <a:pt x="2251023" y="81256"/>
+                  </a:lnTo>
+                  <a:lnTo>
+                    <a:pt x="2180679" y="85637"/>
+                  </a:lnTo>
+                  <a:lnTo>
+                    <a:pt x="2110334" y="89930"/>
+                  </a:lnTo>
+                  <a:lnTo>
+                    <a:pt x="2039990" y="94136"/>
+                  </a:lnTo>
+                  <a:lnTo>
+                    <a:pt x="1969645" y="98258"/>
+                  </a:lnTo>
+                  <a:lnTo>
+                    <a:pt x="1899301" y="102297"/>
+                  </a:lnTo>
+                  <a:lnTo>
+                    <a:pt x="1828956" y="106254"/>
+                  </a:lnTo>
+                  <a:lnTo>
+                    <a:pt x="1758612" y="110132"/>
+                  </a:lnTo>
+                  <a:lnTo>
+                    <a:pt x="1688267" y="113931"/>
+                  </a:lnTo>
+                  <a:lnTo>
+                    <a:pt x="1617923" y="117654"/>
+                  </a:lnTo>
+                  <a:lnTo>
+                    <a:pt x="1547578" y="121302"/>
+                  </a:lnTo>
+                  <a:lnTo>
+                    <a:pt x="1477234" y="124876"/>
+                  </a:lnTo>
+                  <a:lnTo>
+                    <a:pt x="1406889" y="128379"/>
+                  </a:lnTo>
+                  <a:lnTo>
+                    <a:pt x="1336545" y="131811"/>
+                  </a:lnTo>
+                  <a:lnTo>
+                    <a:pt x="1266200" y="135174"/>
+                  </a:lnTo>
+                  <a:lnTo>
+                    <a:pt x="1195856" y="138469"/>
+                  </a:lnTo>
+                  <a:lnTo>
+                    <a:pt x="1125511" y="141697"/>
+                  </a:lnTo>
+                  <a:lnTo>
+                    <a:pt x="1055167" y="144861"/>
+                  </a:lnTo>
+                  <a:lnTo>
+                    <a:pt x="984822" y="147961"/>
+                  </a:lnTo>
+                  <a:lnTo>
+                    <a:pt x="914478" y="150998"/>
+                  </a:lnTo>
+                  <a:lnTo>
+                    <a:pt x="844133" y="153974"/>
+                  </a:lnTo>
+                  <a:lnTo>
+                    <a:pt x="773789" y="156891"/>
+                  </a:lnTo>
+                  <a:lnTo>
+                    <a:pt x="703444" y="159748"/>
+                  </a:lnTo>
+                  <a:lnTo>
+                    <a:pt x="633100" y="162548"/>
+                  </a:lnTo>
+                  <a:lnTo>
+                    <a:pt x="562755" y="165292"/>
+                  </a:lnTo>
+                  <a:lnTo>
+                    <a:pt x="492411" y="167980"/>
+                  </a:lnTo>
+                  <a:lnTo>
+                    <a:pt x="422066" y="170614"/>
+                  </a:lnTo>
+                  <a:lnTo>
+                    <a:pt x="351722" y="173195"/>
+                  </a:lnTo>
+                  <a:lnTo>
+                    <a:pt x="281377" y="175725"/>
+                  </a:lnTo>
+                  <a:lnTo>
+                    <a:pt x="211033" y="178203"/>
+                  </a:lnTo>
+                  <a:lnTo>
+                    <a:pt x="140688" y="180631"/>
+                  </a:lnTo>
+                  <a:lnTo>
+                    <a:pt x="70344" y="183010"/>
+                  </a:lnTo>
+                  <a:lnTo>
+                    <a:pt x="0" y="185342"/>
+                  </a:lnTo>
+                </a:path>
+              </a:pathLst>
+            </a:custGeom>
+          </p:spPr>
+          <p:txBody>
+            <a:bodyPr/>
+            <a:lstStyle/>
+            <a:p/>
+          </p:txBody>
+        </p:sp>
+        <p:sp>
+          <p:nvSpPr>
+            <p:cNvPr id="69" name="pl69"/>
+            <p:cNvSpPr/>
+            <p:nvPr/>
+          </p:nvSpPr>
+          <p:spPr>
+            <a:xfrm>
+              <a:off x="1235312" y="5166306"/>
+              <a:ext cx="6964104" cy="212412"/>
+            </a:xfrm>
+            <a:custGeom>
+              <a:avLst/>
+              <a:pathLst>
+                <a:path w="6964104" h="212412">
+                  <a:moveTo>
+                    <a:pt x="0" y="212412"/>
+                  </a:moveTo>
+                  <a:lnTo>
+                    <a:pt x="70344" y="210915"/>
+                  </a:lnTo>
+                  <a:lnTo>
+                    <a:pt x="140688" y="209407"/>
+                  </a:lnTo>
+                  <a:lnTo>
+                    <a:pt x="211033" y="207889"/>
+                  </a:lnTo>
+                  <a:lnTo>
+                    <a:pt x="281377" y="206360"/>
+                  </a:lnTo>
+                  <a:lnTo>
+                    <a:pt x="351722" y="204820"/>
+                  </a:lnTo>
+                  <a:lnTo>
+                    <a:pt x="422066" y="203270"/>
+                  </a:lnTo>
+                  <a:lnTo>
+                    <a:pt x="492411" y="201709"/>
+                  </a:lnTo>
+                  <a:lnTo>
+                    <a:pt x="562755" y="200137"/>
+                  </a:lnTo>
+                  <a:lnTo>
+                    <a:pt x="633100" y="198554"/>
+                  </a:lnTo>
+                  <a:lnTo>
+                    <a:pt x="703444" y="196961"/>
+                  </a:lnTo>
+                  <a:lnTo>
+                    <a:pt x="773789" y="195356"/>
+                  </a:lnTo>
+                  <a:lnTo>
+                    <a:pt x="844133" y="193739"/>
+                  </a:lnTo>
+                  <a:lnTo>
+                    <a:pt x="914478" y="192112"/>
+                  </a:lnTo>
+                  <a:lnTo>
+                    <a:pt x="984822" y="190473"/>
+                  </a:lnTo>
+                  <a:lnTo>
+                    <a:pt x="1055167" y="188823"/>
+                  </a:lnTo>
+                  <a:lnTo>
+                    <a:pt x="1125511" y="187161"/>
+                  </a:lnTo>
+                  <a:lnTo>
+                    <a:pt x="1195856" y="185488"/>
+                  </a:lnTo>
+                  <a:lnTo>
+                    <a:pt x="1266200" y="183803"/>
+                  </a:lnTo>
+                  <a:lnTo>
+                    <a:pt x="1336545" y="182107"/>
+                  </a:lnTo>
+                  <a:lnTo>
+                    <a:pt x="1406889" y="180398"/>
+                  </a:lnTo>
+                  <a:lnTo>
+                    <a:pt x="1477234" y="178678"/>
+                  </a:lnTo>
+                  <a:lnTo>
+                    <a:pt x="1547578" y="176946"/>
+                  </a:lnTo>
+                  <a:lnTo>
+                    <a:pt x="1617923" y="175201"/>
+                  </a:lnTo>
+                  <a:lnTo>
+                    <a:pt x="1688267" y="173445"/>
+                  </a:lnTo>
+                  <a:lnTo>
+                    <a:pt x="1758612" y="171676"/>
+                  </a:lnTo>
+                  <a:lnTo>
+                    <a:pt x="1828956" y="169895"/>
+                  </a:lnTo>
+                  <a:lnTo>
+                    <a:pt x="1899301" y="168101"/>
+                  </a:lnTo>
+                  <a:lnTo>
+                    <a:pt x="1969645" y="166295"/>
+                  </a:lnTo>
+                  <a:lnTo>
+                    <a:pt x="2039990" y="164477"/>
+                  </a:lnTo>
+                  <a:lnTo>
+                    <a:pt x="2110334" y="162646"/>
+                  </a:lnTo>
+                  <a:lnTo>
+                    <a:pt x="2180679" y="160802"/>
+                  </a:lnTo>
+                  <a:lnTo>
+                    <a:pt x="2251023" y="158945"/>
+                  </a:lnTo>
+                  <a:lnTo>
+                    <a:pt x="2321368" y="157075"/>
+                  </a:lnTo>
+                  <a:lnTo>
+                    <a:pt x="2391712" y="155192"/>
+                  </a:lnTo>
+                  <a:lnTo>
+                    <a:pt x="2462057" y="153296"/>
+                  </a:lnTo>
+                  <a:lnTo>
+                    <a:pt x="2532401" y="151387"/>
+                  </a:lnTo>
+                  <a:lnTo>
+                    <a:pt x="2602746" y="149465"/>
+                  </a:lnTo>
+                  <a:lnTo>
+                    <a:pt x="2673090" y="147529"/>
+                  </a:lnTo>
+                  <a:lnTo>
+                    <a:pt x="2743435" y="145580"/>
+                  </a:lnTo>
+                  <a:lnTo>
+                    <a:pt x="2813779" y="143617"/>
+                  </a:lnTo>
+                  <a:lnTo>
+                    <a:pt x="2884124" y="141640"/>
+                  </a:lnTo>
+                  <a:lnTo>
+                    <a:pt x="2954468" y="139650"/>
+                  </a:lnTo>
+                  <a:lnTo>
+                    <a:pt x="3024813" y="137646"/>
+                  </a:lnTo>
+                  <a:lnTo>
+                    <a:pt x="3095157" y="135628"/>
+                  </a:lnTo>
+                  <a:lnTo>
+                    <a:pt x="3165502" y="133596"/>
+                  </a:lnTo>
+                  <a:lnTo>
+                    <a:pt x="3235846" y="131549"/>
+                  </a:lnTo>
+                  <a:lnTo>
+                    <a:pt x="3306191" y="129489"/>
+                  </a:lnTo>
+                  <a:lnTo>
+                    <a:pt x="3376535" y="127414"/>
+                  </a:lnTo>
+                  <a:lnTo>
+                    <a:pt x="3446880" y="125324"/>
+                  </a:lnTo>
+                  <a:lnTo>
+                    <a:pt x="3517224" y="123220"/>
+                  </a:lnTo>
+                  <a:lnTo>
+                    <a:pt x="3587569" y="121102"/>
+                  </a:lnTo>
+                  <a:lnTo>
+                    <a:pt x="3657913" y="118969"/>
+                  </a:lnTo>
+                  <a:lnTo>
+                    <a:pt x="3728257" y="116820"/>
+                  </a:lnTo>
+                  <a:lnTo>
+                    <a:pt x="3798602" y="114657"/>
+                  </a:lnTo>
+                  <a:lnTo>
+                    <a:pt x="3868946" y="112479"/>
+                  </a:lnTo>
+                  <a:lnTo>
+                    <a:pt x="3939291" y="110285"/>
+                  </a:lnTo>
+                  <a:lnTo>
+                    <a:pt x="4009635" y="108077"/>
+                  </a:lnTo>
+                  <a:lnTo>
+                    <a:pt x="4079980" y="105853"/>
+                  </a:lnTo>
+                  <a:lnTo>
+                    <a:pt x="4150324" y="103613"/>
+                  </a:lnTo>
+                  <a:lnTo>
+                    <a:pt x="4220669" y="101358"/>
+                  </a:lnTo>
+                  <a:lnTo>
+                    <a:pt x="4291013" y="99087"/>
+                  </a:lnTo>
+                  <a:lnTo>
+                    <a:pt x="4361358" y="96800"/>
+                  </a:lnTo>
+                  <a:lnTo>
+                    <a:pt x="4431702" y="94498"/>
+                  </a:lnTo>
+                  <a:lnTo>
+                    <a:pt x="4502047" y="92179"/>
+                  </a:lnTo>
+                  <a:lnTo>
+                    <a:pt x="4572391" y="89844"/>
+                  </a:lnTo>
+                  <a:lnTo>
+                    <a:pt x="4642736" y="87493"/>
+                  </a:lnTo>
+                  <a:lnTo>
+                    <a:pt x="4713080" y="85126"/>
+                  </a:lnTo>
+                  <a:lnTo>
+                    <a:pt x="4783425" y="82742"/>
+                  </a:lnTo>
+                  <a:lnTo>
+                    <a:pt x="4853769" y="80341"/>
+                  </a:lnTo>
+                  <a:lnTo>
+                    <a:pt x="4924114" y="77924"/>
+                  </a:lnTo>
+                  <a:lnTo>
+                    <a:pt x="4994458" y="75490"/>
+                  </a:lnTo>
+                  <a:lnTo>
+                    <a:pt x="5064803" y="73039"/>
+                  </a:lnTo>
+                  <a:lnTo>
+                    <a:pt x="5135147" y="70571"/>
+                  </a:lnTo>
+                  <a:lnTo>
+                    <a:pt x="5205492" y="68085"/>
+                  </a:lnTo>
+                  <a:lnTo>
+                    <a:pt x="5275836" y="65583"/>
+                  </a:lnTo>
+                  <a:lnTo>
+                    <a:pt x="5346181" y="63063"/>
+                  </a:lnTo>
+                  <a:lnTo>
+                    <a:pt x="5416525" y="60525"/>
+                  </a:lnTo>
+                  <a:lnTo>
+                    <a:pt x="5486870" y="57970"/>
+                  </a:lnTo>
+                  <a:lnTo>
+                    <a:pt x="5557214" y="55397"/>
+                  </a:lnTo>
+                  <a:lnTo>
+                    <a:pt x="5627559" y="52806"/>
+                  </a:lnTo>
+                  <a:lnTo>
+                    <a:pt x="5697903" y="50197"/>
+                  </a:lnTo>
+                  <a:lnTo>
+                    <a:pt x="5768248" y="47569"/>
+                  </a:lnTo>
+                  <a:lnTo>
+                    <a:pt x="5838592" y="44924"/>
+                  </a:lnTo>
+                  <a:lnTo>
+                    <a:pt x="5908937" y="42260"/>
+                  </a:lnTo>
+                  <a:lnTo>
+                    <a:pt x="5979281" y="39577"/>
+                  </a:lnTo>
+                  <a:lnTo>
+                    <a:pt x="6049626" y="36876"/>
+                  </a:lnTo>
+                  <a:lnTo>
+                    <a:pt x="6119970" y="34156"/>
+                  </a:lnTo>
+                  <a:lnTo>
+                    <a:pt x="6190315" y="31417"/>
+                  </a:lnTo>
+                  <a:lnTo>
+                    <a:pt x="6260659" y="28659"/>
+                  </a:lnTo>
+                  <a:lnTo>
+                    <a:pt x="6331004" y="25882"/>
+                  </a:lnTo>
+                  <a:lnTo>
+                    <a:pt x="6401348" y="23085"/>
+                  </a:lnTo>
+                  <a:lnTo>
+                    <a:pt x="6471693" y="20269"/>
+                  </a:lnTo>
+                  <a:lnTo>
+                    <a:pt x="6542037" y="17433"/>
+                  </a:lnTo>
+                  <a:lnTo>
+                    <a:pt x="6612382" y="14578"/>
+                  </a:lnTo>
+                  <a:lnTo>
+                    <a:pt x="6682726" y="11703"/>
+                  </a:lnTo>
+                  <a:lnTo>
+                    <a:pt x="6753071" y="8807"/>
+                  </a:lnTo>
+                  <a:lnTo>
+                    <a:pt x="6823415" y="5892"/>
+                  </a:lnTo>
+                  <a:lnTo>
+                    <a:pt x="6893760" y="2956"/>
+                  </a:lnTo>
+                  <a:lnTo>
+                    <a:pt x="6964104" y="0"/>
+                  </a:lnTo>
+                </a:path>
+              </a:pathLst>
+            </a:custGeom>
+            <a:ln w="27101" cap="flat">
+              <a:solidFill>
+                <a:srgbClr val="FF8C00">
+                  <a:alpha val="100000"/>
+                </a:srgbClr>
+              </a:solidFill>
+              <a:prstDash val="solid"/>
+              <a:round/>
+            </a:ln>
+          </p:spPr>
+          <p:txBody>
+            <a:bodyPr/>
+            <a:lstStyle/>
+            <a:p/>
+          </p:txBody>
+        </p:sp>
+        <p:sp>
+          <p:nvSpPr>
+            <p:cNvPr id="70" name="pl70"/>
+            <p:cNvSpPr/>
+            <p:nvPr/>
+          </p:nvSpPr>
+          <p:spPr>
+            <a:xfrm>
+              <a:off x="887106" y="5294352"/>
+              <a:ext cx="7660515" cy="0"/>
+            </a:xfrm>
+            <a:custGeom>
+              <a:avLst/>
+              <a:pathLst>
+                <a:path w="7660515" h="0">
+                  <a:moveTo>
+                    <a:pt x="0" y="0"/>
+                  </a:moveTo>
+                  <a:lnTo>
+                    <a:pt x="7660515" y="0"/>
+                  </a:lnTo>
+                  <a:lnTo>
+                    <a:pt x="7660515" y="0"/>
+                  </a:lnTo>
+                </a:path>
+              </a:pathLst>
+            </a:custGeom>
+            <a:ln w="13550" cap="flat">
+              <a:solidFill>
+                <a:srgbClr val="7F7F7F">
+                  <a:alpha val="100000"/>
+                </a:srgbClr>
+              </a:solidFill>
+              <a:prstDash val="dash"/>
+              <a:round/>
+            </a:ln>
+          </p:spPr>
+          <p:txBody>
+            <a:bodyPr/>
+            <a:lstStyle/>
+            <a:p/>
+          </p:txBody>
+        </p:sp>
+        <p:sp>
+          <p:nvSpPr>
+            <p:cNvPr id="71" name="pl71"/>
+            <p:cNvSpPr/>
+            <p:nvPr/>
+          </p:nvSpPr>
+          <p:spPr>
+            <a:xfrm>
+              <a:off x="4590457" y="4336484"/>
+              <a:ext cx="0" cy="1317069"/>
+            </a:xfrm>
+            <a:custGeom>
+              <a:avLst/>
+              <a:pathLst>
+                <a:path w="0" h="1317069">
+                  <a:moveTo>
+                    <a:pt x="0" y="1317069"/>
+                  </a:moveTo>
+                  <a:lnTo>
+                    <a:pt x="0" y="0"/>
+                  </a:lnTo>
+                  <a:lnTo>
+                    <a:pt x="0" y="0"/>
+                  </a:lnTo>
+                </a:path>
+              </a:pathLst>
+            </a:custGeom>
+            <a:ln w="13550" cap="flat">
+              <a:solidFill>
+                <a:srgbClr val="666666">
+                  <a:alpha val="100000"/>
+                </a:srgbClr>
+              </a:solidFill>
+              <a:prstDash val="dot"/>
+              <a:round/>
+            </a:ln>
+          </p:spPr>
+          <p:txBody>
+            <a:bodyPr/>
+            <a:lstStyle/>
+            <a:p/>
+          </p:txBody>
+        </p:sp>
+        <p:sp>
+          <p:nvSpPr>
+            <p:cNvPr id="72" name="tx72"/>
+            <p:cNvSpPr/>
+            <p:nvPr/>
+          </p:nvSpPr>
+          <p:spPr>
+            <a:xfrm>
+              <a:off x="762297" y="5553636"/>
+              <a:ext cx="62179" cy="80101"/>
+            </a:xfrm>
+            <a:prstGeom prst="rect">
+              <a:avLst/>
+            </a:prstGeom>
+            <a:noFill/>
+          </p:spPr>
+          <p:txBody>
+            <a:bodyPr lIns="0" rIns="0" tIns="0" bIns="0" anchorCtr="1" anchor="ctr" wrap="none"/>
+            <a:lstStyle/>
+            <a:p>
+              <a:pPr algn="l" marL="0" marR="0" indent="0">
+                <a:lnSpc>
+                  <a:spcPts val="880"/>
+                </a:lnSpc>
+                <a:spcBef>
+                  <a:spcPts val="0"/>
+                </a:spcBef>
+                <a:spcAft>
+                  <a:spcPts val="0"/>
+                </a:spcAft>
+              </a:pPr>
+              <a:r>
+                <a:rPr sz="880">
+                  <a:solidFill>
+                    <a:srgbClr val="4D4D4D">
+                      <a:alpha val="100000"/>
+                    </a:srgbClr>
+                  </a:solidFill>
+                  <a:latin typeface="Helvetica"/>
+                  <a:cs typeface="Helvetica"/>
+                </a:rPr>
+                <a:t>0</a:t>
+              </a:r>
+            </a:p>
+          </p:txBody>
+        </p:sp>
+        <p:sp>
+          <p:nvSpPr>
+            <p:cNvPr id="73" name="tx73"/>
+            <p:cNvSpPr/>
+            <p:nvPr/>
+          </p:nvSpPr>
+          <p:spPr>
+            <a:xfrm>
+              <a:off x="762297" y="5254302"/>
+              <a:ext cx="62179" cy="80101"/>
+            </a:xfrm>
+            <a:prstGeom prst="rect">
+              <a:avLst/>
+            </a:prstGeom>
+            <a:noFill/>
+          </p:spPr>
+          <p:txBody>
+            <a:bodyPr lIns="0" rIns="0" tIns="0" bIns="0" anchorCtr="1" anchor="ctr" wrap="none"/>
+            <a:lstStyle/>
+            <a:p>
+              <a:pPr algn="l" marL="0" marR="0" indent="0">
+                <a:lnSpc>
+                  <a:spcPts val="880"/>
+                </a:lnSpc>
+                <a:spcBef>
+                  <a:spcPts val="0"/>
+                </a:spcBef>
+                <a:spcAft>
+                  <a:spcPts val="0"/>
+                </a:spcAft>
+              </a:pPr>
+              <a:r>
+                <a:rPr sz="880">
+                  <a:solidFill>
+                    <a:srgbClr val="4D4D4D">
+                      <a:alpha val="100000"/>
+                    </a:srgbClr>
+                  </a:solidFill>
+                  <a:latin typeface="Helvetica"/>
+                  <a:cs typeface="Helvetica"/>
+                </a:rPr>
+                <a:t>1</a:t>
+              </a:r>
+            </a:p>
+          </p:txBody>
+        </p:sp>
+        <p:sp>
+          <p:nvSpPr>
+            <p:cNvPr id="74" name="tx74"/>
+            <p:cNvSpPr/>
+            <p:nvPr/>
+          </p:nvSpPr>
+          <p:spPr>
+            <a:xfrm>
+              <a:off x="762297" y="4954968"/>
+              <a:ext cx="62179" cy="80101"/>
+            </a:xfrm>
+            <a:prstGeom prst="rect">
+              <a:avLst/>
+            </a:prstGeom>
+            <a:noFill/>
+          </p:spPr>
+          <p:txBody>
+            <a:bodyPr lIns="0" rIns="0" tIns="0" bIns="0" anchorCtr="1" anchor="ctr" wrap="none"/>
+            <a:lstStyle/>
+            <a:p>
+              <a:pPr algn="l" marL="0" marR="0" indent="0">
+                <a:lnSpc>
+                  <a:spcPts val="880"/>
+                </a:lnSpc>
+                <a:spcBef>
+                  <a:spcPts val="0"/>
+                </a:spcBef>
+                <a:spcAft>
+                  <a:spcPts val="0"/>
+                </a:spcAft>
+              </a:pPr>
+              <a:r>
+                <a:rPr sz="880">
+                  <a:solidFill>
+                    <a:srgbClr val="4D4D4D">
+                      <a:alpha val="100000"/>
+                    </a:srgbClr>
+                  </a:solidFill>
+                  <a:latin typeface="Helvetica"/>
+                  <a:cs typeface="Helvetica"/>
+                </a:rPr>
+                <a:t>2</a:t>
+              </a:r>
+            </a:p>
+          </p:txBody>
+        </p:sp>
+        <p:sp>
+          <p:nvSpPr>
+            <p:cNvPr id="75" name="tx75"/>
+            <p:cNvSpPr/>
+            <p:nvPr/>
+          </p:nvSpPr>
+          <p:spPr>
+            <a:xfrm>
+              <a:off x="762297" y="4655634"/>
+              <a:ext cx="62179" cy="80101"/>
+            </a:xfrm>
+            <a:prstGeom prst="rect">
+              <a:avLst/>
+            </a:prstGeom>
+            <a:noFill/>
+          </p:spPr>
+          <p:txBody>
+            <a:bodyPr lIns="0" rIns="0" tIns="0" bIns="0" anchorCtr="1" anchor="ctr" wrap="none"/>
+            <a:lstStyle/>
+            <a:p>
+              <a:pPr algn="l" marL="0" marR="0" indent="0">
+                <a:lnSpc>
+                  <a:spcPts val="880"/>
+                </a:lnSpc>
+                <a:spcBef>
+                  <a:spcPts val="0"/>
+                </a:spcBef>
+                <a:spcAft>
+                  <a:spcPts val="0"/>
+                </a:spcAft>
+              </a:pPr>
+              <a:r>
+                <a:rPr sz="880">
+                  <a:solidFill>
+                    <a:srgbClr val="4D4D4D">
+                      <a:alpha val="100000"/>
+                    </a:srgbClr>
+                  </a:solidFill>
+                  <a:latin typeface="Helvetica"/>
+                  <a:cs typeface="Helvetica"/>
+                </a:rPr>
+                <a:t>3</a:t>
+              </a:r>
+            </a:p>
+          </p:txBody>
+        </p:sp>
+        <p:sp>
+          <p:nvSpPr>
+            <p:cNvPr id="76" name="tx76"/>
+            <p:cNvSpPr/>
+            <p:nvPr/>
+          </p:nvSpPr>
+          <p:spPr>
+            <a:xfrm>
+              <a:off x="762297" y="4356300"/>
+              <a:ext cx="62179" cy="80101"/>
+            </a:xfrm>
+            <a:prstGeom prst="rect">
+              <a:avLst/>
+            </a:prstGeom>
+            <a:noFill/>
+          </p:spPr>
+          <p:txBody>
+            <a:bodyPr lIns="0" rIns="0" tIns="0" bIns="0" anchorCtr="1" anchor="ctr" wrap="none"/>
+            <a:lstStyle/>
+            <a:p>
+              <a:pPr algn="l" marL="0" marR="0" indent="0">
+                <a:lnSpc>
+                  <a:spcPts val="880"/>
+                </a:lnSpc>
+                <a:spcBef>
+                  <a:spcPts val="0"/>
+                </a:spcBef>
+                <a:spcAft>
+                  <a:spcPts val="0"/>
+                </a:spcAft>
+              </a:pPr>
+              <a:r>
+                <a:rPr sz="880">
+                  <a:solidFill>
+                    <a:srgbClr val="4D4D4D">
+                      <a:alpha val="100000"/>
+                    </a:srgbClr>
+                  </a:solidFill>
+                  <a:latin typeface="Helvetica"/>
+                  <a:cs typeface="Helvetica"/>
+                </a:rPr>
+                <a:t>4</a:t>
+              </a:r>
+            </a:p>
+          </p:txBody>
+        </p:sp>
+        <p:sp>
+          <p:nvSpPr>
+            <p:cNvPr id="77" name="tx77"/>
+            <p:cNvSpPr/>
+            <p:nvPr/>
+          </p:nvSpPr>
+          <p:spPr>
+            <a:xfrm>
+              <a:off x="1133333" y="5716183"/>
+              <a:ext cx="161574" cy="80101"/>
+            </a:xfrm>
+            <a:prstGeom prst="rect">
+              <a:avLst/>
+            </a:prstGeom>
+            <a:noFill/>
+          </p:spPr>
+          <p:txBody>
+            <a:bodyPr lIns="0" rIns="0" tIns="0" bIns="0" anchorCtr="1" anchor="ctr" wrap="none"/>
+            <a:lstStyle/>
+            <a:p>
+              <a:pPr algn="l" marL="0" marR="0" indent="0">
+                <a:lnSpc>
+                  <a:spcPts val="880"/>
+                </a:lnSpc>
+                <a:spcBef>
+                  <a:spcPts val="0"/>
+                </a:spcBef>
+                <a:spcAft>
+                  <a:spcPts val="0"/>
+                </a:spcAft>
+              </a:pPr>
+              <a:r>
+                <a:rPr sz="880">
+                  <a:solidFill>
+                    <a:srgbClr val="4D4D4D">
+                      <a:alpha val="100000"/>
+                    </a:srgbClr>
+                  </a:solidFill>
+                  <a:latin typeface="Helvetica"/>
+                  <a:cs typeface="Helvetica"/>
+                </a:rPr>
+                <a:t>-40</a:t>
+              </a:r>
+            </a:p>
+          </p:txBody>
+        </p:sp>
+        <p:sp>
+          <p:nvSpPr>
+            <p:cNvPr id="78" name="tx78"/>
+            <p:cNvSpPr/>
+            <p:nvPr/>
+          </p:nvSpPr>
+          <p:spPr>
+            <a:xfrm>
+              <a:off x="1978619" y="5716183"/>
+              <a:ext cx="161574" cy="80101"/>
+            </a:xfrm>
+            <a:prstGeom prst="rect">
+              <a:avLst/>
+            </a:prstGeom>
+            <a:noFill/>
+          </p:spPr>
+          <p:txBody>
+            <a:bodyPr lIns="0" rIns="0" tIns="0" bIns="0" anchorCtr="1" anchor="ctr" wrap="none"/>
+            <a:lstStyle/>
+            <a:p>
+              <a:pPr algn="l" marL="0" marR="0" indent="0">
+                <a:lnSpc>
+                  <a:spcPts val="880"/>
+                </a:lnSpc>
+                <a:spcBef>
+                  <a:spcPts val="0"/>
+                </a:spcBef>
+                <a:spcAft>
+                  <a:spcPts val="0"/>
+                </a:spcAft>
+              </a:pPr>
+              <a:r>
+                <a:rPr sz="880">
+                  <a:solidFill>
+                    <a:srgbClr val="4D4D4D">
+                      <a:alpha val="100000"/>
+                    </a:srgbClr>
+                  </a:solidFill>
+                  <a:latin typeface="Helvetica"/>
+                  <a:cs typeface="Helvetica"/>
+                </a:rPr>
+                <a:t>-30</a:t>
+              </a:r>
+            </a:p>
+          </p:txBody>
+        </p:sp>
+        <p:sp>
+          <p:nvSpPr>
+            <p:cNvPr id="79" name="tx79"/>
+            <p:cNvSpPr/>
+            <p:nvPr/>
+          </p:nvSpPr>
+          <p:spPr>
+            <a:xfrm>
+              <a:off x="2823906" y="5716183"/>
+              <a:ext cx="161574" cy="80101"/>
+            </a:xfrm>
+            <a:prstGeom prst="rect">
+              <a:avLst/>
+            </a:prstGeom>
+            <a:noFill/>
+          </p:spPr>
+          <p:txBody>
+            <a:bodyPr lIns="0" rIns="0" tIns="0" bIns="0" anchorCtr="1" anchor="ctr" wrap="none"/>
+            <a:lstStyle/>
+            <a:p>
+              <a:pPr algn="l" marL="0" marR="0" indent="0">
+                <a:lnSpc>
+                  <a:spcPts val="880"/>
+                </a:lnSpc>
+                <a:spcBef>
+                  <a:spcPts val="0"/>
+                </a:spcBef>
+                <a:spcAft>
+                  <a:spcPts val="0"/>
+                </a:spcAft>
+              </a:pPr>
+              <a:r>
+                <a:rPr sz="880">
+                  <a:solidFill>
+                    <a:srgbClr val="4D4D4D">
+                      <a:alpha val="100000"/>
+                    </a:srgbClr>
+                  </a:solidFill>
+                  <a:latin typeface="Helvetica"/>
+                  <a:cs typeface="Helvetica"/>
+                </a:rPr>
+                <a:t>-20</a:t>
+              </a:r>
+            </a:p>
+          </p:txBody>
+        </p:sp>
+        <p:sp>
+          <p:nvSpPr>
+            <p:cNvPr id="80" name="tx80"/>
+            <p:cNvSpPr/>
+            <p:nvPr/>
+          </p:nvSpPr>
+          <p:spPr>
+            <a:xfrm>
+              <a:off x="3669192" y="5716183"/>
+              <a:ext cx="161574" cy="80101"/>
+            </a:xfrm>
+            <a:prstGeom prst="rect">
+              <a:avLst/>
+            </a:prstGeom>
+            <a:noFill/>
+          </p:spPr>
+          <p:txBody>
+            <a:bodyPr lIns="0" rIns="0" tIns="0" bIns="0" anchorCtr="1" anchor="ctr" wrap="none"/>
+            <a:lstStyle/>
+            <a:p>
+              <a:pPr algn="l" marL="0" marR="0" indent="0">
+                <a:lnSpc>
+                  <a:spcPts val="880"/>
+                </a:lnSpc>
+                <a:spcBef>
+                  <a:spcPts val="0"/>
+                </a:spcBef>
+                <a:spcAft>
+                  <a:spcPts val="0"/>
+                </a:spcAft>
+              </a:pPr>
+              <a:r>
+                <a:rPr sz="880">
+                  <a:solidFill>
+                    <a:srgbClr val="4D4D4D">
+                      <a:alpha val="100000"/>
+                    </a:srgbClr>
+                  </a:solidFill>
+                  <a:latin typeface="Helvetica"/>
+                  <a:cs typeface="Helvetica"/>
+                </a:rPr>
+                <a:t>-10</a:t>
+              </a:r>
+            </a:p>
+          </p:txBody>
+        </p:sp>
+        <p:sp>
+          <p:nvSpPr>
+            <p:cNvPr id="81" name="tx81"/>
+            <p:cNvSpPr/>
+            <p:nvPr/>
+          </p:nvSpPr>
+          <p:spPr>
+            <a:xfrm>
+              <a:off x="4564176" y="5716183"/>
+              <a:ext cx="62179" cy="80101"/>
+            </a:xfrm>
+            <a:prstGeom prst="rect">
+              <a:avLst/>
+            </a:prstGeom>
+            <a:noFill/>
+          </p:spPr>
+          <p:txBody>
+            <a:bodyPr lIns="0" rIns="0" tIns="0" bIns="0" anchorCtr="1" anchor="ctr" wrap="none"/>
+            <a:lstStyle/>
+            <a:p>
+              <a:pPr algn="l" marL="0" marR="0" indent="0">
+                <a:lnSpc>
+                  <a:spcPts val="880"/>
+                </a:lnSpc>
+                <a:spcBef>
+                  <a:spcPts val="0"/>
+                </a:spcBef>
+                <a:spcAft>
+                  <a:spcPts val="0"/>
+                </a:spcAft>
+              </a:pPr>
+              <a:r>
+                <a:rPr sz="880">
+                  <a:solidFill>
+                    <a:srgbClr val="4D4D4D">
+                      <a:alpha val="100000"/>
+                    </a:srgbClr>
+                  </a:solidFill>
+                  <a:latin typeface="Helvetica"/>
+                  <a:cs typeface="Helvetica"/>
+                </a:rPr>
+                <a:t>0</a:t>
+              </a:r>
+            </a:p>
+          </p:txBody>
+        </p:sp>
+        <p:sp>
+          <p:nvSpPr>
+            <p:cNvPr id="82" name="tx82"/>
+            <p:cNvSpPr/>
+            <p:nvPr/>
+          </p:nvSpPr>
+          <p:spPr>
+            <a:xfrm>
+              <a:off x="5378373" y="5716183"/>
+              <a:ext cx="124358" cy="80101"/>
+            </a:xfrm>
+            <a:prstGeom prst="rect">
+              <a:avLst/>
+            </a:prstGeom>
+            <a:noFill/>
+          </p:spPr>
+          <p:txBody>
+            <a:bodyPr lIns="0" rIns="0" tIns="0" bIns="0" anchorCtr="1" anchor="ctr" wrap="none"/>
+            <a:lstStyle/>
+            <a:p>
+              <a:pPr algn="l" marL="0" marR="0" indent="0">
+                <a:lnSpc>
+                  <a:spcPts val="880"/>
+                </a:lnSpc>
+                <a:spcBef>
+                  <a:spcPts val="0"/>
+                </a:spcBef>
+                <a:spcAft>
+                  <a:spcPts val="0"/>
+                </a:spcAft>
+              </a:pPr>
+              <a:r>
+                <a:rPr sz="880">
+                  <a:solidFill>
+                    <a:srgbClr val="4D4D4D">
+                      <a:alpha val="100000"/>
+                    </a:srgbClr>
+                  </a:solidFill>
+                  <a:latin typeface="Helvetica"/>
+                  <a:cs typeface="Helvetica"/>
+                </a:rPr>
+                <a:t>10</a:t>
+              </a:r>
+            </a:p>
+          </p:txBody>
+        </p:sp>
+        <p:sp>
+          <p:nvSpPr>
+            <p:cNvPr id="83" name="tx83"/>
+            <p:cNvSpPr/>
+            <p:nvPr/>
+          </p:nvSpPr>
+          <p:spPr>
+            <a:xfrm>
+              <a:off x="6223659" y="5716183"/>
+              <a:ext cx="124358" cy="80101"/>
+            </a:xfrm>
+            <a:prstGeom prst="rect">
+              <a:avLst/>
+            </a:prstGeom>
+            <a:noFill/>
+          </p:spPr>
+          <p:txBody>
+            <a:bodyPr lIns="0" rIns="0" tIns="0" bIns="0" anchorCtr="1" anchor="ctr" wrap="none"/>
+            <a:lstStyle/>
+            <a:p>
+              <a:pPr algn="l" marL="0" marR="0" indent="0">
+                <a:lnSpc>
+                  <a:spcPts val="880"/>
+                </a:lnSpc>
+                <a:spcBef>
+                  <a:spcPts val="0"/>
+                </a:spcBef>
+                <a:spcAft>
+                  <a:spcPts val="0"/>
+                </a:spcAft>
+              </a:pPr>
+              <a:r>
+                <a:rPr sz="880">
+                  <a:solidFill>
+                    <a:srgbClr val="4D4D4D">
+                      <a:alpha val="100000"/>
+                    </a:srgbClr>
+                  </a:solidFill>
+                  <a:latin typeface="Helvetica"/>
+                  <a:cs typeface="Helvetica"/>
+                </a:rPr>
+                <a:t>20</a:t>
+              </a:r>
+            </a:p>
+          </p:txBody>
+        </p:sp>
+        <p:sp>
+          <p:nvSpPr>
+            <p:cNvPr id="84" name="tx84"/>
+            <p:cNvSpPr/>
+            <p:nvPr/>
+          </p:nvSpPr>
+          <p:spPr>
+            <a:xfrm>
+              <a:off x="7068946" y="5716183"/>
+              <a:ext cx="124358" cy="80101"/>
+            </a:xfrm>
+            <a:prstGeom prst="rect">
+              <a:avLst/>
+            </a:prstGeom>
+            <a:noFill/>
+          </p:spPr>
+          <p:txBody>
+            <a:bodyPr lIns="0" rIns="0" tIns="0" bIns="0" anchorCtr="1" anchor="ctr" wrap="none"/>
+            <a:lstStyle/>
+            <a:p>
+              <a:pPr algn="l" marL="0" marR="0" indent="0">
+                <a:lnSpc>
+                  <a:spcPts val="880"/>
+                </a:lnSpc>
+                <a:spcBef>
+                  <a:spcPts val="0"/>
+                </a:spcBef>
+                <a:spcAft>
+                  <a:spcPts val="0"/>
+                </a:spcAft>
+              </a:pPr>
+              <a:r>
+                <a:rPr sz="880">
+                  <a:solidFill>
+                    <a:srgbClr val="4D4D4D">
+                      <a:alpha val="100000"/>
+                    </a:srgbClr>
+                  </a:solidFill>
+                  <a:latin typeface="Helvetica"/>
+                  <a:cs typeface="Helvetica"/>
+                </a:rPr>
+                <a:t>30</a:t>
+              </a:r>
+            </a:p>
+          </p:txBody>
+        </p:sp>
+        <p:sp>
+          <p:nvSpPr>
+            <p:cNvPr id="85" name="tx85"/>
+            <p:cNvSpPr/>
+            <p:nvPr/>
+          </p:nvSpPr>
+          <p:spPr>
+            <a:xfrm>
+              <a:off x="7914232" y="5716183"/>
+              <a:ext cx="124358" cy="80101"/>
+            </a:xfrm>
+            <a:prstGeom prst="rect">
+              <a:avLst/>
+            </a:prstGeom>
+            <a:noFill/>
+          </p:spPr>
+          <p:txBody>
+            <a:bodyPr lIns="0" rIns="0" tIns="0" bIns="0" anchorCtr="1" anchor="ctr" wrap="none"/>
+            <a:lstStyle/>
+            <a:p>
+              <a:pPr algn="l" marL="0" marR="0" indent="0">
+                <a:lnSpc>
+                  <a:spcPts val="880"/>
+                </a:lnSpc>
+                <a:spcBef>
+                  <a:spcPts val="0"/>
+                </a:spcBef>
+                <a:spcAft>
+                  <a:spcPts val="0"/>
+                </a:spcAft>
+              </a:pPr>
+              <a:r>
+                <a:rPr sz="880">
+                  <a:solidFill>
+                    <a:srgbClr val="4D4D4D">
+                      <a:alpha val="100000"/>
+                    </a:srgbClr>
+                  </a:solidFill>
+                  <a:latin typeface="Helvetica"/>
+                  <a:cs typeface="Helvetica"/>
+                </a:rPr>
+                <a:t>40</a:t>
+              </a:r>
+            </a:p>
+          </p:txBody>
+        </p:sp>
+        <p:sp>
+          <p:nvSpPr>
+            <p:cNvPr id="86" name="tx86"/>
+            <p:cNvSpPr/>
+            <p:nvPr/>
+          </p:nvSpPr>
+          <p:spPr>
+            <a:xfrm>
+              <a:off x="2928340" y="5855859"/>
+              <a:ext cx="3578047" cy="100218"/>
+            </a:xfrm>
+            <a:prstGeom prst="rect">
+              <a:avLst/>
+            </a:prstGeom>
+            <a:noFill/>
+          </p:spPr>
+          <p:txBody>
+            <a:bodyPr lIns="0" rIns="0" tIns="0" bIns="0" anchorCtr="1" anchor="ctr" wrap="none"/>
+            <a:lstStyle/>
+            <a:p>
+              <a:pPr algn="l" marL="0" marR="0" indent="0">
+                <a:lnSpc>
+                  <a:spcPts val="1100"/>
+                </a:lnSpc>
+                <a:spcBef>
+                  <a:spcPts val="0"/>
+                </a:spcBef>
+                <a:spcAft>
+                  <a:spcPts val="0"/>
+                </a:spcAft>
+              </a:pPr>
+              <a:r>
+                <a:rPr sz="1100">
+                  <a:solidFill>
+                    <a:srgbClr val="000000">
+                      <a:alpha val="100000"/>
+                    </a:srgbClr>
+                  </a:solidFill>
+                  <a:latin typeface="Helvetica"/>
+                  <a:cs typeface="Helvetica"/>
+                </a:rPr>
+                <a:t>eGFR difference (%): 100 × (CKD-EPI Cr-Cys − CG) / CG</a:t>
+              </a:r>
+            </a:p>
+          </p:txBody>
+        </p:sp>
+        <p:sp>
+          <p:nvSpPr>
+            <p:cNvPr id="87" name="tx87"/>
+            <p:cNvSpPr/>
+            <p:nvPr/>
+          </p:nvSpPr>
+          <p:spPr>
+            <a:xfrm rot="-5400000">
+              <a:off x="138035" y="4944909"/>
+              <a:ext cx="1016904" cy="100218"/>
+            </a:xfrm>
+            <a:prstGeom prst="rect">
+              <a:avLst/>
+            </a:prstGeom>
+            <a:noFill/>
+          </p:spPr>
+          <p:txBody>
+            <a:bodyPr lIns="0" rIns="0" tIns="0" bIns="0" anchorCtr="1" anchor="ctr" wrap="none"/>
+            <a:lstStyle/>
+            <a:p>
+              <a:pPr algn="l" marL="0" marR="0" indent="0">
+                <a:lnSpc>
+                  <a:spcPts val="1100"/>
+                </a:lnSpc>
+                <a:spcBef>
+                  <a:spcPts val="0"/>
+                </a:spcBef>
+                <a:spcAft>
+                  <a:spcPts val="0"/>
+                </a:spcAft>
+              </a:pPr>
+              <a:r>
+                <a:rPr sz="1100">
+                  <a:solidFill>
+                    <a:srgbClr val="000000">
+                      <a:alpha val="100000"/>
+                    </a:srgbClr>
+                  </a:solidFill>
+                  <a:latin typeface="Helvetica"/>
+                  <a:cs typeface="Helvetica"/>
+                </a:rPr>
+                <a:t>subHR (95% CI)</a:t>
+              </a:r>
+            </a:p>
+          </p:txBody>
+        </p:sp>
+        <p:sp>
+          <p:nvSpPr>
+            <p:cNvPr id="88" name="tx88"/>
+            <p:cNvSpPr/>
+            <p:nvPr/>
+          </p:nvSpPr>
+          <p:spPr>
+            <a:xfrm>
+              <a:off x="887106" y="4159544"/>
+              <a:ext cx="6321612" cy="82021"/>
+            </a:xfrm>
+            <a:prstGeom prst="rect">
+              <a:avLst/>
+            </a:prstGeom>
+            <a:noFill/>
+          </p:spPr>
+          <p:txBody>
+            <a:bodyPr lIns="0" rIns="0" tIns="0" bIns="0" anchorCtr="1" anchor="ctr" wrap="none"/>
+            <a:lstStyle/>
+            <a:p>
+              <a:pPr algn="l" marL="0" marR="0" indent="0">
+                <a:lnSpc>
+                  <a:spcPts val="900"/>
+                </a:lnSpc>
+                <a:spcBef>
+                  <a:spcPts val="0"/>
+                </a:spcBef>
+                <a:spcAft>
+                  <a:spcPts val="0"/>
+                </a:spcAft>
+              </a:pPr>
+              <a:r>
+                <a:rPr sz="900">
+                  <a:solidFill>
+                    <a:srgbClr val="404040">
+                      <a:alpha val="100000"/>
+                    </a:srgbClr>
+                  </a:solidFill>
+                  <a:latin typeface="Helvetica"/>
+                  <a:cs typeface="Helvetica"/>
+                </a:rPr>
+                <a:t>subHR per 10 % decline: 0.92 (0.78-1.08), p = 0.310  |  per IQR decline (Δ = 29.3 %): 0.78 (0.49-1.26)  |  IQR: [-14.6, 14.7] %</a:t>
+              </a:r>
+            </a:p>
+          </p:txBody>
+        </p:sp>
+        <p:sp>
+          <p:nvSpPr>
+            <p:cNvPr id="89" name="tx89"/>
+            <p:cNvSpPr/>
+            <p:nvPr/>
+          </p:nvSpPr>
+          <p:spPr>
+            <a:xfrm>
+              <a:off x="887106" y="3932770"/>
               <a:ext cx="1601754" cy="120152"/>
             </a:xfrm>
             <a:prstGeom prst="rect">
